--- a/.lessons/7 GraphQL/1.pptx
+++ b/.lessons/7 GraphQL/1.pptx
@@ -41,16 +41,29 @@
     <p:sldId id="277" r:id="rId35"/>
     <p:sldId id="278" r:id="rId36"/>
     <p:sldId id="279" r:id="rId37"/>
-    <p:sldId id="280" r:id="rId38"/>
-    <p:sldId id="281" r:id="rId39"/>
-    <p:sldId id="282" r:id="rId40"/>
-    <p:sldId id="283" r:id="rId41"/>
+    <p:sldId id="283" r:id="rId38"/>
+    <p:sldId id="280" r:id="rId39"/>
+    <p:sldId id="281" r:id="rId40"/>
+    <p:sldId id="282" r:id="rId41"/>
     <p:sldId id="284" r:id="rId42"/>
     <p:sldId id="285" r:id="rId43"/>
     <p:sldId id="286" r:id="rId44"/>
-    <p:sldId id="287" r:id="rId45"/>
-    <p:sldId id="288" r:id="rId46"/>
-    <p:sldId id="289" r:id="rId47"/>
+    <p:sldId id="302" r:id="rId45"/>
+    <p:sldId id="303" r:id="rId46"/>
+    <p:sldId id="304" r:id="rId47"/>
+    <p:sldId id="305" r:id="rId48"/>
+    <p:sldId id="306" r:id="rId49"/>
+    <p:sldId id="307" r:id="rId50"/>
+    <p:sldId id="308" r:id="rId51"/>
+    <p:sldId id="309" r:id="rId52"/>
+    <p:sldId id="310" r:id="rId53"/>
+    <p:sldId id="311" r:id="rId54"/>
+    <p:sldId id="312" r:id="rId55"/>
+    <p:sldId id="313" r:id="rId56"/>
+    <p:sldId id="314" r:id="rId57"/>
+    <p:sldId id="287" r:id="rId58"/>
+    <p:sldId id="288" r:id="rId59"/>
+    <p:sldId id="289" r:id="rId60"/>
   </p:sldIdLst>
   <p:sldSz cx="12192000" cy="6858000"/>
   <p:notesSz cx="6858000" cy="9144000"/>
@@ -304,7 +317,7 @@
           <a:p>
             <a:fld id="{AD6CDC28-10E2-4CDE-A5FF-6E49B37A1343}" type="datetimeFigureOut">
               <a:rPr lang="en-US" smtClean="0"/>
-              <a:t>9/29/2025</a:t>
+              <a:t>9/30/2025</a:t>
             </a:fld>
             <a:endParaRPr lang="en-US"/>
           </a:p>
@@ -502,7 +515,7 @@
           <a:p>
             <a:fld id="{AD6CDC28-10E2-4CDE-A5FF-6E49B37A1343}" type="datetimeFigureOut">
               <a:rPr lang="en-US" smtClean="0"/>
-              <a:t>9/29/2025</a:t>
+              <a:t>9/30/2025</a:t>
             </a:fld>
             <a:endParaRPr lang="en-US"/>
           </a:p>
@@ -710,7 +723,7 @@
           <a:p>
             <a:fld id="{AD6CDC28-10E2-4CDE-A5FF-6E49B37A1343}" type="datetimeFigureOut">
               <a:rPr lang="en-US" smtClean="0"/>
-              <a:t>9/29/2025</a:t>
+              <a:t>9/30/2025</a:t>
             </a:fld>
             <a:endParaRPr lang="en-US"/>
           </a:p>
@@ -908,7 +921,7 @@
           <a:p>
             <a:fld id="{AD6CDC28-10E2-4CDE-A5FF-6E49B37A1343}" type="datetimeFigureOut">
               <a:rPr lang="en-US" smtClean="0"/>
-              <a:t>9/29/2025</a:t>
+              <a:t>9/30/2025</a:t>
             </a:fld>
             <a:endParaRPr lang="en-US"/>
           </a:p>
@@ -1183,7 +1196,7 @@
           <a:p>
             <a:fld id="{AD6CDC28-10E2-4CDE-A5FF-6E49B37A1343}" type="datetimeFigureOut">
               <a:rPr lang="en-US" smtClean="0"/>
-              <a:t>9/29/2025</a:t>
+              <a:t>9/30/2025</a:t>
             </a:fld>
             <a:endParaRPr lang="en-US"/>
           </a:p>
@@ -1448,7 +1461,7 @@
           <a:p>
             <a:fld id="{AD6CDC28-10E2-4CDE-A5FF-6E49B37A1343}" type="datetimeFigureOut">
               <a:rPr lang="en-US" smtClean="0"/>
-              <a:t>9/29/2025</a:t>
+              <a:t>9/30/2025</a:t>
             </a:fld>
             <a:endParaRPr lang="en-US"/>
           </a:p>
@@ -1860,7 +1873,7 @@
           <a:p>
             <a:fld id="{AD6CDC28-10E2-4CDE-A5FF-6E49B37A1343}" type="datetimeFigureOut">
               <a:rPr lang="en-US" smtClean="0"/>
-              <a:t>9/29/2025</a:t>
+              <a:t>9/30/2025</a:t>
             </a:fld>
             <a:endParaRPr lang="en-US"/>
           </a:p>
@@ -2001,7 +2014,7 @@
           <a:p>
             <a:fld id="{AD6CDC28-10E2-4CDE-A5FF-6E49B37A1343}" type="datetimeFigureOut">
               <a:rPr lang="en-US" smtClean="0"/>
-              <a:t>9/29/2025</a:t>
+              <a:t>9/30/2025</a:t>
             </a:fld>
             <a:endParaRPr lang="en-US"/>
           </a:p>
@@ -2114,7 +2127,7 @@
           <a:p>
             <a:fld id="{AD6CDC28-10E2-4CDE-A5FF-6E49B37A1343}" type="datetimeFigureOut">
               <a:rPr lang="en-US" smtClean="0"/>
-              <a:t>9/29/2025</a:t>
+              <a:t>9/30/2025</a:t>
             </a:fld>
             <a:endParaRPr lang="en-US"/>
           </a:p>
@@ -2425,7 +2438,7 @@
           <a:p>
             <a:fld id="{AD6CDC28-10E2-4CDE-A5FF-6E49B37A1343}" type="datetimeFigureOut">
               <a:rPr lang="en-US" smtClean="0"/>
-              <a:t>9/29/2025</a:t>
+              <a:t>9/30/2025</a:t>
             </a:fld>
             <a:endParaRPr lang="en-US"/>
           </a:p>
@@ -2713,7 +2726,7 @@
           <a:p>
             <a:fld id="{AD6CDC28-10E2-4CDE-A5FF-6E49B37A1343}" type="datetimeFigureOut">
               <a:rPr lang="en-US" smtClean="0"/>
-              <a:t>9/29/2025</a:t>
+              <a:t>9/30/2025</a:t>
             </a:fld>
             <a:endParaRPr lang="en-US"/>
           </a:p>
@@ -2954,7 +2967,7 @@
           <a:p>
             <a:fld id="{AD6CDC28-10E2-4CDE-A5FF-6E49B37A1343}" type="datetimeFigureOut">
               <a:rPr lang="en-US" smtClean="0"/>
-              <a:t>9/29/2025</a:t>
+              <a:t>9/30/2025</a:t>
             </a:fld>
             <a:endParaRPr lang="en-US"/>
           </a:p>
@@ -3386,7 +3399,7 @@
         <p:spPr>
           <a:xfrm>
             <a:off x="203200" y="244826"/>
-            <a:ext cx="11822545" cy="5262979"/>
+            <a:ext cx="11822545" cy="6340197"/>
           </a:xfrm>
           <a:prstGeom prst="rect">
             <a:avLst/>
@@ -3591,6 +3604,30 @@
             <a:r>
               <a:rPr lang="en-US" sz="1400"/>
               <a:t>2012-ci ildə Facebook-da (indi Meta) işləyən mühəndislər yaratdı, çünki onların app-i çox məlumatla işləyirdi. 2015-də hamıya açıq etdilər. İndi Netflix, GitHub kimi böyük şirkətlər istifadə edir.</a:t>
+            </a:r>
+          </a:p>
+          <a:p>
+            <a:endParaRPr lang="en-US" sz="1400"/>
+          </a:p>
+          <a:p>
+            <a:endParaRPr lang="en-US" sz="1400"/>
+          </a:p>
+          <a:p>
+            <a:r>
+              <a:rPr lang="en-US" sz="1400"/>
+              <a:t>GraphQL</a:t>
+            </a:r>
+            <a:r>
+              <a:rPr lang="az-Latn-AZ" sz="1400"/>
+              <a:t>, APİ -lər üçün sorğu dilidir. Yəni proqramlaşdırma dili kimi </a:t>
+            </a:r>
+            <a:r>
+              <a:rPr lang="en-US" sz="1400"/>
+              <a:t>GraphQL</a:t>
+            </a:r>
+            <a:r>
+              <a:rPr lang="az-Latn-AZ" sz="1400"/>
+              <a:t> ilə də kod yazırıq. Ancaq bu koda sorğu dili deyilir, proqramlaşdırma dili yox. Həmin sorğu dilini çağırdıqda yəni işə saldıqda isə, serverə həmin sorğu dili ilə yazdığımız sorğu gedir və həmin dili yazaraq məsələn demiş ola bilərik ki, bizə, DB -dən sadəcə `salat` haqqında olan məlumatlar gəlsin.</a:t>
             </a:r>
           </a:p>
         </p:txBody>
@@ -9546,7 +9583,7 @@
         <p:spPr>
           <a:xfrm>
             <a:off x="203200" y="244826"/>
-            <a:ext cx="11822545" cy="369332"/>
+            <a:ext cx="11822545" cy="5355312"/>
           </a:xfrm>
           <a:prstGeom prst="rect">
             <a:avLst/>
@@ -9560,15 +9597,447 @@
           <a:lstStyle/>
           <a:p>
             <a:r>
-              <a:rPr lang="en-US">
+              <a:rPr lang="en-US" sz="1200">
                 <a:latin typeface="-apple-system"/>
               </a:rPr>
-              <a:t>.</a:t>
-            </a:r>
-            <a:endParaRPr lang="en-US"/>
+              <a:t>GraphQL-də </a:t>
+            </a:r>
+            <a:r>
+              <a:rPr lang="en-US" sz="1200" b="1">
+                <a:solidFill>
+                  <a:srgbClr val="00B050"/>
+                </a:solidFill>
+                <a:latin typeface="-apple-system"/>
+              </a:rPr>
+              <a:t>Fields</a:t>
+            </a:r>
+            <a:r>
+              <a:rPr lang="en-US" sz="1200">
+                <a:latin typeface="-apple-system"/>
+              </a:rPr>
+              <a:t>, </a:t>
+            </a:r>
+            <a:r>
+              <a:rPr lang="en-US" sz="1200" b="1">
+                <a:solidFill>
+                  <a:srgbClr val="00B050"/>
+                </a:solidFill>
+                <a:latin typeface="-apple-system"/>
+              </a:rPr>
+              <a:t>Arguments</a:t>
+            </a:r>
+            <a:r>
+              <a:rPr lang="en-US" sz="1200">
+                <a:latin typeface="-apple-system"/>
+              </a:rPr>
+              <a:t>, </a:t>
+            </a:r>
+            <a:r>
+              <a:rPr lang="en-US" sz="1200" b="1">
+                <a:solidFill>
+                  <a:srgbClr val="00B050"/>
+                </a:solidFill>
+                <a:latin typeface="-apple-system"/>
+              </a:rPr>
+              <a:t>Aliases</a:t>
+            </a:r>
+            <a:r>
+              <a:rPr lang="en-US" sz="1200">
+                <a:latin typeface="-apple-system"/>
+              </a:rPr>
+              <a:t>, </a:t>
+            </a:r>
+            <a:r>
+              <a:rPr lang="en-US" sz="1200" b="1">
+                <a:solidFill>
+                  <a:srgbClr val="00B050"/>
+                </a:solidFill>
+                <a:latin typeface="-apple-system"/>
+              </a:rPr>
+              <a:t>Fragments</a:t>
+            </a:r>
+            <a:r>
+              <a:rPr lang="en-US" sz="1200">
+                <a:latin typeface="-apple-system"/>
+              </a:rPr>
+              <a:t>, </a:t>
+            </a:r>
+            <a:r>
+              <a:rPr lang="en-US" sz="1200" b="1">
+                <a:solidFill>
+                  <a:srgbClr val="00B050"/>
+                </a:solidFill>
+                <a:latin typeface="-apple-system"/>
+              </a:rPr>
+              <a:t>Variables</a:t>
+            </a:r>
+            <a:r>
+              <a:rPr lang="en-US" sz="1200">
+                <a:latin typeface="-apple-system"/>
+              </a:rPr>
+              <a:t> və </a:t>
+            </a:r>
+            <a:r>
+              <a:rPr lang="en-US" sz="1200" b="1">
+                <a:solidFill>
+                  <a:srgbClr val="00B050"/>
+                </a:solidFill>
+                <a:latin typeface="-apple-system"/>
+              </a:rPr>
+              <a:t>Directives</a:t>
+            </a:r>
+            <a:r>
+              <a:rPr lang="en-US" sz="1200">
+                <a:latin typeface="-apple-system"/>
+              </a:rPr>
+              <a:t>:</a:t>
+            </a:r>
+            <a:endParaRPr lang="az-Latn-AZ" sz="1200">
+              <a:latin typeface="-apple-system"/>
+            </a:endParaRPr>
+          </a:p>
+          <a:p>
+            <a:endParaRPr lang="az-Latn-AZ" sz="1200">
+              <a:latin typeface="-apple-system"/>
+            </a:endParaRPr>
+          </a:p>
+          <a:p>
+            <a:r>
+              <a:rPr lang="en-US" sz="1200"/>
+              <a:t>1. </a:t>
+            </a:r>
+            <a:r>
+              <a:rPr lang="en-US" sz="1200" b="1">
+                <a:solidFill>
+                  <a:srgbClr val="FF0000"/>
+                </a:solidFill>
+              </a:rPr>
+              <a:t>Fields (Sahələr) Nədir? </a:t>
+            </a:r>
+            <a:endParaRPr lang="az-Latn-AZ" sz="1200" b="1">
+              <a:solidFill>
+                <a:srgbClr val="FF0000"/>
+              </a:solidFill>
+            </a:endParaRPr>
+          </a:p>
+          <a:p>
+            <a:endParaRPr lang="az-Latn-AZ" sz="1200"/>
+          </a:p>
+          <a:p>
+            <a:r>
+              <a:rPr lang="en-US" sz="1200"/>
+              <a:t>Fields (sahələr), GraphQL-də bir obyektin </a:t>
+            </a:r>
+            <a:r>
+              <a:rPr lang="en-US" sz="1200" b="1" i="1"/>
+              <a:t>xüsusiyyətləridir</a:t>
+            </a:r>
+            <a:r>
+              <a:rPr lang="en-US" sz="1200"/>
+              <a:t>. Hər obyektin (məsələn, "Kitab" və ya "Müəllif") müəyyən xüsusiyyətləri olur, və bu xüsusiyyətlər </a:t>
+            </a:r>
+            <a:r>
+              <a:rPr lang="en-US" sz="1200" b="1"/>
+              <a:t>fields</a:t>
+            </a:r>
+            <a:r>
+              <a:rPr lang="en-US" sz="1200"/>
+              <a:t> adlanır. Sorğuda hansı sahələri göstərsəniz, </a:t>
+            </a:r>
+            <a:r>
+              <a:rPr lang="en-US" sz="1200" b="1"/>
+              <a:t>server</a:t>
+            </a:r>
+            <a:r>
+              <a:rPr lang="en-US" sz="1200"/>
+              <a:t> yalnız onları qaytarır.</a:t>
+            </a:r>
+            <a:endParaRPr lang="az-Latn-AZ" sz="1200"/>
+          </a:p>
+          <a:p>
+            <a:endParaRPr lang="az-Latn-AZ" sz="1200"/>
+          </a:p>
+          <a:p>
+            <a:r>
+              <a:rPr lang="en-US" sz="1200" b="1"/>
+              <a:t>GraphQL-də nümunə</a:t>
+            </a:r>
+            <a:r>
+              <a:rPr lang="en-US" sz="1200"/>
+              <a:t>: Bir kitabxana sistemində “Kitab” obyekti ola bilər:</a:t>
+            </a:r>
+            <a:endParaRPr lang="az-Latn-AZ" sz="1200"/>
+          </a:p>
+          <a:p>
+            <a:endParaRPr lang="az-Latn-AZ" sz="1200"/>
+          </a:p>
+          <a:p>
+            <a:endParaRPr lang="az-Latn-AZ" sz="1200"/>
+          </a:p>
+          <a:p>
+            <a:endParaRPr lang="az-Latn-AZ" sz="1200"/>
+          </a:p>
+          <a:p>
+            <a:endParaRPr lang="az-Latn-AZ" sz="1200"/>
+          </a:p>
+          <a:p>
+            <a:endParaRPr lang="az-Latn-AZ" sz="1200"/>
+          </a:p>
+          <a:p>
+            <a:endParaRPr lang="az-Latn-AZ" sz="1200"/>
+          </a:p>
+          <a:p>
+            <a:endParaRPr lang="az-Latn-AZ" sz="1200"/>
+          </a:p>
+          <a:p>
+            <a:endParaRPr lang="az-Latn-AZ" sz="1200"/>
+          </a:p>
+          <a:p>
+            <a:endParaRPr lang="az-Latn-AZ" sz="1200"/>
+          </a:p>
+          <a:p>
+            <a:endParaRPr lang="az-Latn-AZ" sz="1200"/>
+          </a:p>
+          <a:p>
+            <a:r>
+              <a:rPr lang="en-US" sz="1200" b="1"/>
+              <a:t>Sorğu</a:t>
+            </a:r>
+            <a:r>
+              <a:rPr lang="en-US" sz="1200"/>
+              <a:t>:</a:t>
+            </a:r>
+            <a:endParaRPr lang="az-Latn-AZ" sz="1200"/>
+          </a:p>
+          <a:p>
+            <a:endParaRPr lang="az-Latn-AZ" sz="1200"/>
+          </a:p>
+          <a:p>
+            <a:endParaRPr lang="az-Latn-AZ" sz="1200"/>
+          </a:p>
+          <a:p>
+            <a:endParaRPr lang="az-Latn-AZ" sz="1200"/>
+          </a:p>
+          <a:p>
+            <a:endParaRPr lang="az-Latn-AZ" sz="1200"/>
+          </a:p>
+          <a:p>
+            <a:endParaRPr lang="az-Latn-AZ" sz="1200"/>
+          </a:p>
+          <a:p>
+            <a:endParaRPr lang="az-Latn-AZ" sz="1200"/>
+          </a:p>
+          <a:p>
+            <a:endParaRPr lang="az-Latn-AZ" sz="1200"/>
+          </a:p>
+          <a:p>
+            <a:r>
+              <a:rPr lang="en-US" sz="1200" b="1"/>
+              <a:t>Cavab</a:t>
+            </a:r>
+            <a:r>
+              <a:rPr lang="en-US" sz="1200"/>
+              <a:t>:</a:t>
+            </a:r>
+            <a:r>
+              <a:rPr lang="az-Latn-AZ" sz="1200"/>
+              <a:t> Burada </a:t>
+            </a:r>
+            <a:r>
+              <a:rPr lang="az-Latn-AZ" sz="1200" b="1" i="1"/>
+              <a:t>ad</a:t>
+            </a:r>
+            <a:r>
+              <a:rPr lang="az-Latn-AZ" sz="1200"/>
+              <a:t> və </a:t>
+            </a:r>
+            <a:r>
+              <a:rPr lang="az-Latn-AZ" sz="1200" b="1" i="1"/>
+              <a:t>qiymet</a:t>
+            </a:r>
+            <a:r>
+              <a:rPr lang="az-Latn-AZ" sz="1200"/>
+              <a:t> fields -dir. </a:t>
+            </a:r>
+            <a:r>
+              <a:rPr lang="az-Latn-AZ" sz="1200" b="1" i="1"/>
+              <a:t>muellif</a:t>
+            </a:r>
+            <a:r>
+              <a:rPr lang="az-Latn-AZ" sz="1200"/>
+              <a:t> sahəsini istəmədiyimiz üçün server onu qaytarmadı.</a:t>
+            </a:r>
+            <a:endParaRPr lang="en-US" sz="1200"/>
+          </a:p>
+          <a:p>
+            <a:endParaRPr lang="en-US" sz="1200"/>
           </a:p>
         </p:txBody>
       </p:sp>
+      <p:pic>
+        <p:nvPicPr>
+          <p:cNvPr id="3" name="Picture 2">
+            <a:extLst>
+              <a:ext uri="{FF2B5EF4-FFF2-40B4-BE49-F238E27FC236}">
+                <a16:creationId xmlns:a16="http://schemas.microsoft.com/office/drawing/2014/main" id="{9057DACA-7C13-0EA5-3A8D-47735D8C3824}"/>
+              </a:ext>
+            </a:extLst>
+          </p:cNvPr>
+          <p:cNvPicPr>
+            <a:picLocks noChangeAspect="1"/>
+          </p:cNvPicPr>
+          <p:nvPr/>
+        </p:nvPicPr>
+        <p:blipFill>
+          <a:blip r:embed="rId2"/>
+          <a:stretch>
+            <a:fillRect/>
+          </a:stretch>
+        </p:blipFill>
+        <p:spPr>
+          <a:xfrm>
+            <a:off x="203200" y="1897369"/>
+            <a:ext cx="1373661" cy="1531632"/>
+          </a:xfrm>
+          <a:prstGeom prst="rect">
+            <a:avLst/>
+          </a:prstGeom>
+        </p:spPr>
+      </p:pic>
+      <p:pic>
+        <p:nvPicPr>
+          <p:cNvPr id="5" name="Picture 4">
+            <a:extLst>
+              <a:ext uri="{FF2B5EF4-FFF2-40B4-BE49-F238E27FC236}">
+                <a16:creationId xmlns:a16="http://schemas.microsoft.com/office/drawing/2014/main" id="{B92FC532-84AC-8B3F-1AC6-8A7FB63BBA19}"/>
+              </a:ext>
+            </a:extLst>
+          </p:cNvPr>
+          <p:cNvPicPr>
+            <a:picLocks noChangeAspect="1"/>
+          </p:cNvPicPr>
+          <p:nvPr/>
+        </p:nvPicPr>
+        <p:blipFill>
+          <a:blip r:embed="rId3"/>
+          <a:stretch>
+            <a:fillRect/>
+          </a:stretch>
+        </p:blipFill>
+        <p:spPr>
+          <a:xfrm>
+            <a:off x="203200" y="3845812"/>
+            <a:ext cx="860012" cy="920152"/>
+          </a:xfrm>
+          <a:prstGeom prst="rect">
+            <a:avLst/>
+          </a:prstGeom>
+        </p:spPr>
+      </p:pic>
+      <p:pic>
+        <p:nvPicPr>
+          <p:cNvPr id="8" name="Picture 7">
+            <a:extLst>
+              <a:ext uri="{FF2B5EF4-FFF2-40B4-BE49-F238E27FC236}">
+                <a16:creationId xmlns:a16="http://schemas.microsoft.com/office/drawing/2014/main" id="{5B2E6339-E086-8532-4140-0F66C099CE95}"/>
+              </a:ext>
+            </a:extLst>
+          </p:cNvPr>
+          <p:cNvPicPr>
+            <a:picLocks noChangeAspect="1"/>
+          </p:cNvPicPr>
+          <p:nvPr/>
+        </p:nvPicPr>
+        <p:blipFill>
+          <a:blip r:embed="rId4"/>
+          <a:stretch>
+            <a:fillRect/>
+          </a:stretch>
+        </p:blipFill>
+        <p:spPr>
+          <a:xfrm>
+            <a:off x="203201" y="5326368"/>
+            <a:ext cx="3493058" cy="1531632"/>
+          </a:xfrm>
+          <a:prstGeom prst="rect">
+            <a:avLst/>
+          </a:prstGeom>
+        </p:spPr>
+      </p:pic>
+      <p:sp>
+        <p:nvSpPr>
+          <p:cNvPr id="10" name="TextBox 9">
+            <a:extLst>
+              <a:ext uri="{FF2B5EF4-FFF2-40B4-BE49-F238E27FC236}">
+                <a16:creationId xmlns:a16="http://schemas.microsoft.com/office/drawing/2014/main" id="{EF97881A-CED1-A33D-82AE-F3FE14A1DD92}"/>
+              </a:ext>
+            </a:extLst>
+          </p:cNvPr>
+          <p:cNvSpPr txBox="1"/>
+          <p:nvPr/>
+        </p:nvSpPr>
+        <p:spPr>
+          <a:xfrm>
+            <a:off x="9672222" y="5049369"/>
+            <a:ext cx="2436647" cy="276999"/>
+          </a:xfrm>
+          <a:prstGeom prst="rect">
+            <a:avLst/>
+          </a:prstGeom>
+          <a:noFill/>
+        </p:spPr>
+        <p:txBody>
+          <a:bodyPr wrap="square">
+            <a:spAutoFit/>
+          </a:bodyPr>
+          <a:lstStyle/>
+          <a:p>
+            <a:pPr algn="ctr"/>
+            <a:r>
+              <a:rPr lang="en-US" sz="1200"/>
+              <a:t>PHP-də (</a:t>
+            </a:r>
+            <a:r>
+              <a:rPr lang="en-US" sz="1200" b="1"/>
+              <a:t>webonyx/graphql-php </a:t>
+            </a:r>
+            <a:r>
+              <a:rPr lang="en-US" sz="1200"/>
+              <a:t>ilə):</a:t>
+            </a:r>
+          </a:p>
+        </p:txBody>
+      </p:sp>
+      <p:pic>
+        <p:nvPicPr>
+          <p:cNvPr id="12" name="Picture 11">
+            <a:extLst>
+              <a:ext uri="{FF2B5EF4-FFF2-40B4-BE49-F238E27FC236}">
+                <a16:creationId xmlns:a16="http://schemas.microsoft.com/office/drawing/2014/main" id="{F39E94F3-8EB0-7DAA-1DEB-F27B86C11CC8}"/>
+              </a:ext>
+            </a:extLst>
+          </p:cNvPr>
+          <p:cNvPicPr>
+            <a:picLocks noChangeAspect="1"/>
+          </p:cNvPicPr>
+          <p:nvPr/>
+        </p:nvPicPr>
+        <p:blipFill>
+          <a:blip r:embed="rId5"/>
+          <a:stretch>
+            <a:fillRect/>
+          </a:stretch>
+        </p:blipFill>
+        <p:spPr>
+          <a:xfrm>
+            <a:off x="9589098" y="5403272"/>
+            <a:ext cx="2602902" cy="1454727"/>
+          </a:xfrm>
+          <a:prstGeom prst="rect">
+            <a:avLst/>
+          </a:prstGeom>
+        </p:spPr>
+      </p:pic>
     </p:spTree>
     <p:extLst>
       <p:ext uri="{BB962C8B-B14F-4D97-AF65-F5344CB8AC3E}">
@@ -9620,7 +10089,7 @@
         <p:spPr>
           <a:xfrm>
             <a:off x="203200" y="244826"/>
-            <a:ext cx="11822545" cy="369332"/>
+            <a:ext cx="11822545" cy="4524315"/>
           </a:xfrm>
           <a:prstGeom prst="rect">
             <a:avLst/>
@@ -9634,15 +10103,324 @@
           <a:lstStyle/>
           <a:p>
             <a:r>
-              <a:rPr lang="en-US">
+              <a:rPr lang="en-US" sz="1200">
                 <a:latin typeface="-apple-system"/>
               </a:rPr>
-              <a:t>.</a:t>
-            </a:r>
-            <a:endParaRPr lang="en-US"/>
+              <a:t>2. </a:t>
+            </a:r>
+            <a:r>
+              <a:rPr lang="en-US" sz="1200" b="1">
+                <a:solidFill>
+                  <a:srgbClr val="FF0000"/>
+                </a:solidFill>
+                <a:latin typeface="-apple-system"/>
+              </a:rPr>
+              <a:t>Arguments (Arqumentlər) Nədir? </a:t>
+            </a:r>
+            <a:endParaRPr lang="az-Latn-AZ" sz="1200" b="1">
+              <a:solidFill>
+                <a:srgbClr val="FF0000"/>
+              </a:solidFill>
+              <a:latin typeface="-apple-system"/>
+            </a:endParaRPr>
+          </a:p>
+          <a:p>
+            <a:endParaRPr lang="az-Latn-AZ" sz="1200">
+              <a:latin typeface="-apple-system"/>
+            </a:endParaRPr>
+          </a:p>
+          <a:p>
+            <a:r>
+              <a:rPr lang="en-US" sz="1200">
+                <a:latin typeface="-apple-system"/>
+              </a:rPr>
+              <a:t>Arguments, sorğuda hansı məlumatı dəqiqləşdirmək üçün istifadə olunur. Onlar fields</a:t>
+            </a:r>
+            <a:r>
+              <a:rPr lang="az-Latn-AZ" sz="1200">
+                <a:latin typeface="-apple-system"/>
+              </a:rPr>
+              <a:t> </a:t>
+            </a:r>
+            <a:r>
+              <a:rPr lang="en-US" sz="1200">
+                <a:latin typeface="-apple-system"/>
+              </a:rPr>
+              <a:t>-ə əlavə olunur və serverə “tam olaraq nə istədiyini” söyləyir.</a:t>
+            </a:r>
+            <a:endParaRPr lang="az-Latn-AZ" sz="1200">
+              <a:latin typeface="-apple-system"/>
+            </a:endParaRPr>
+          </a:p>
+          <a:p>
+            <a:endParaRPr lang="az-Latn-AZ" sz="1200">
+              <a:latin typeface="-apple-system"/>
+            </a:endParaRPr>
+          </a:p>
+          <a:p>
+            <a:r>
+              <a:rPr lang="en-US" sz="1200" b="1"/>
+              <a:t>GraphQL-də nümunə</a:t>
+            </a:r>
+            <a:r>
+              <a:rPr lang="en-US" sz="1200"/>
+              <a:t>:</a:t>
+            </a:r>
+            <a:endParaRPr lang="az-Latn-AZ" sz="1200"/>
+          </a:p>
+          <a:p>
+            <a:endParaRPr lang="az-Latn-AZ" sz="1200"/>
+          </a:p>
+          <a:p>
+            <a:endParaRPr lang="az-Latn-AZ" sz="1200"/>
+          </a:p>
+          <a:p>
+            <a:endParaRPr lang="az-Latn-AZ" sz="1200"/>
+          </a:p>
+          <a:p>
+            <a:endParaRPr lang="az-Latn-AZ" sz="1200"/>
+          </a:p>
+          <a:p>
+            <a:endParaRPr lang="az-Latn-AZ" sz="1200"/>
+          </a:p>
+          <a:p>
+            <a:endParaRPr lang="az-Latn-AZ" sz="1200"/>
+          </a:p>
+          <a:p>
+            <a:r>
+              <a:rPr lang="en-US" sz="1200" b="1"/>
+              <a:t>Sorğu</a:t>
+            </a:r>
+            <a:r>
+              <a:rPr lang="en-US" sz="1200"/>
+              <a:t>:</a:t>
+            </a:r>
+          </a:p>
+          <a:p>
+            <a:endParaRPr lang="az-Latn-AZ" sz="1200"/>
+          </a:p>
+          <a:p>
+            <a:endParaRPr lang="az-Latn-AZ" sz="1200"/>
+          </a:p>
+          <a:p>
+            <a:endParaRPr lang="az-Latn-AZ" sz="1200"/>
+          </a:p>
+          <a:p>
+            <a:endParaRPr lang="az-Latn-AZ" sz="1200"/>
+          </a:p>
+          <a:p>
+            <a:endParaRPr lang="az-Latn-AZ" sz="1200"/>
+          </a:p>
+          <a:p>
+            <a:endParaRPr lang="az-Latn-AZ" sz="1200"/>
+          </a:p>
+          <a:p>
+            <a:endParaRPr lang="az-Latn-AZ" sz="1200"/>
+          </a:p>
+          <a:p>
+            <a:endParaRPr lang="az-Latn-AZ" sz="1200"/>
+          </a:p>
+          <a:p>
+            <a:endParaRPr lang="az-Latn-AZ" sz="1200"/>
+          </a:p>
+          <a:p>
+            <a:endParaRPr lang="az-Latn-AZ" sz="1200"/>
+          </a:p>
+          <a:p>
+            <a:r>
+              <a:rPr lang="en-US" sz="1200" b="1"/>
+              <a:t>Cavab</a:t>
+            </a:r>
+            <a:r>
+              <a:rPr lang="en-US" sz="1200"/>
+              <a:t>:</a:t>
+            </a:r>
+            <a:r>
+              <a:rPr lang="az-Latn-AZ" sz="1200"/>
+              <a:t> </a:t>
+            </a:r>
+            <a:r>
+              <a:rPr lang="en-US" sz="1200"/>
+              <a:t>Burada </a:t>
+            </a:r>
+            <a:r>
+              <a:rPr lang="en-US" sz="1200" b="1" i="1"/>
+              <a:t>id: "1" </a:t>
+            </a:r>
+            <a:r>
+              <a:rPr lang="en-US" sz="1200"/>
+              <a:t>arqumentdir, serverə hansı kitabı istədiyimizi göstərir.</a:t>
+            </a:r>
+          </a:p>
+          <a:p>
+            <a:endParaRPr lang="en-US" sz="1200"/>
           </a:p>
         </p:txBody>
       </p:sp>
+      <p:pic>
+        <p:nvPicPr>
+          <p:cNvPr id="3" name="Picture 2">
+            <a:extLst>
+              <a:ext uri="{FF2B5EF4-FFF2-40B4-BE49-F238E27FC236}">
+                <a16:creationId xmlns:a16="http://schemas.microsoft.com/office/drawing/2014/main" id="{49C8BD22-A81D-3DEA-C629-DB6BC7F38B9F}"/>
+              </a:ext>
+            </a:extLst>
+          </p:cNvPr>
+          <p:cNvPicPr>
+            <a:picLocks noChangeAspect="1"/>
+          </p:cNvPicPr>
+          <p:nvPr/>
+        </p:nvPicPr>
+        <p:blipFill>
+          <a:blip r:embed="rId2"/>
+          <a:stretch>
+            <a:fillRect/>
+          </a:stretch>
+        </p:blipFill>
+        <p:spPr>
+          <a:xfrm>
+            <a:off x="203200" y="1330854"/>
+            <a:ext cx="2343477" cy="704948"/>
+          </a:xfrm>
+          <a:prstGeom prst="rect">
+            <a:avLst/>
+          </a:prstGeom>
+        </p:spPr>
+      </p:pic>
+      <p:pic>
+        <p:nvPicPr>
+          <p:cNvPr id="5" name="Picture 4">
+            <a:extLst>
+              <a:ext uri="{FF2B5EF4-FFF2-40B4-BE49-F238E27FC236}">
+                <a16:creationId xmlns:a16="http://schemas.microsoft.com/office/drawing/2014/main" id="{7BCA3877-5C8B-7D9C-719E-C3BB890E7A25}"/>
+              </a:ext>
+            </a:extLst>
+          </p:cNvPr>
+          <p:cNvPicPr>
+            <a:picLocks noChangeAspect="1"/>
+          </p:cNvPicPr>
+          <p:nvPr/>
+        </p:nvPicPr>
+        <p:blipFill>
+          <a:blip r:embed="rId3"/>
+          <a:stretch>
+            <a:fillRect/>
+          </a:stretch>
+        </p:blipFill>
+        <p:spPr>
+          <a:xfrm>
+            <a:off x="203200" y="2598903"/>
+            <a:ext cx="1810003" cy="1428949"/>
+          </a:xfrm>
+          <a:prstGeom prst="rect">
+            <a:avLst/>
+          </a:prstGeom>
+        </p:spPr>
+      </p:pic>
+      <p:pic>
+        <p:nvPicPr>
+          <p:cNvPr id="8" name="Picture 7">
+            <a:extLst>
+              <a:ext uri="{FF2B5EF4-FFF2-40B4-BE49-F238E27FC236}">
+                <a16:creationId xmlns:a16="http://schemas.microsoft.com/office/drawing/2014/main" id="{7DB9009A-25A6-8328-13EF-0C522BCF3022}"/>
+              </a:ext>
+            </a:extLst>
+          </p:cNvPr>
+          <p:cNvPicPr>
+            <a:picLocks noChangeAspect="1"/>
+          </p:cNvPicPr>
+          <p:nvPr/>
+        </p:nvPicPr>
+        <p:blipFill>
+          <a:blip r:embed="rId4"/>
+          <a:stretch>
+            <a:fillRect/>
+          </a:stretch>
+        </p:blipFill>
+        <p:spPr>
+          <a:xfrm>
+            <a:off x="203200" y="4563811"/>
+            <a:ext cx="2391109" cy="1428949"/>
+          </a:xfrm>
+          <a:prstGeom prst="rect">
+            <a:avLst/>
+          </a:prstGeom>
+        </p:spPr>
+      </p:pic>
+      <p:sp>
+        <p:nvSpPr>
+          <p:cNvPr id="10" name="TextBox 9">
+            <a:extLst>
+              <a:ext uri="{FF2B5EF4-FFF2-40B4-BE49-F238E27FC236}">
+                <a16:creationId xmlns:a16="http://schemas.microsoft.com/office/drawing/2014/main" id="{C54E47D4-5A84-9197-E36F-CF7BDFC34655}"/>
+              </a:ext>
+            </a:extLst>
+          </p:cNvPr>
+          <p:cNvSpPr txBox="1"/>
+          <p:nvPr/>
+        </p:nvSpPr>
+        <p:spPr>
+          <a:xfrm>
+            <a:off x="9402617" y="4839046"/>
+            <a:ext cx="2253673" cy="369332"/>
+          </a:xfrm>
+          <a:prstGeom prst="rect">
+            <a:avLst/>
+          </a:prstGeom>
+          <a:noFill/>
+        </p:spPr>
+        <p:txBody>
+          <a:bodyPr wrap="square">
+            <a:spAutoFit/>
+          </a:bodyPr>
+          <a:lstStyle/>
+          <a:p>
+            <a:pPr algn="ctr"/>
+            <a:r>
+              <a:rPr lang="en-US"/>
+              <a:t>PHP-də</a:t>
+            </a:r>
+            <a:r>
+              <a:rPr lang="az-Latn-AZ"/>
+              <a:t> ( query.php )</a:t>
+            </a:r>
+            <a:r>
+              <a:rPr lang="en-US"/>
+              <a:t>:</a:t>
+            </a:r>
+          </a:p>
+        </p:txBody>
+      </p:sp>
+      <p:pic>
+        <p:nvPicPr>
+          <p:cNvPr id="12" name="Picture 11">
+            <a:extLst>
+              <a:ext uri="{FF2B5EF4-FFF2-40B4-BE49-F238E27FC236}">
+                <a16:creationId xmlns:a16="http://schemas.microsoft.com/office/drawing/2014/main" id="{853CD444-ACF2-1D95-01A5-6CF8FC3628C1}"/>
+              </a:ext>
+            </a:extLst>
+          </p:cNvPr>
+          <p:cNvPicPr>
+            <a:picLocks noChangeAspect="1"/>
+          </p:cNvPicPr>
+          <p:nvPr/>
+        </p:nvPicPr>
+        <p:blipFill>
+          <a:blip r:embed="rId5"/>
+          <a:stretch>
+            <a:fillRect/>
+          </a:stretch>
+        </p:blipFill>
+        <p:spPr>
+          <a:xfrm>
+            <a:off x="8625868" y="5278284"/>
+            <a:ext cx="3566131" cy="1579715"/>
+          </a:xfrm>
+          <a:prstGeom prst="rect">
+            <a:avLst/>
+          </a:prstGeom>
+        </p:spPr>
+      </p:pic>
     </p:spTree>
     <p:extLst>
       <p:ext uri="{BB962C8B-B14F-4D97-AF65-F5344CB8AC3E}">
@@ -9694,7 +10472,7 @@
         <p:spPr>
           <a:xfrm>
             <a:off x="203200" y="244826"/>
-            <a:ext cx="11822545" cy="369332"/>
+            <a:ext cx="11822545" cy="6186309"/>
           </a:xfrm>
           <a:prstGeom prst="rect">
             <a:avLst/>
@@ -9708,15 +10486,260 @@
           <a:lstStyle/>
           <a:p>
             <a:r>
-              <a:rPr lang="en-US">
+              <a:rPr lang="en-US" sz="1200">
                 <a:latin typeface="-apple-system"/>
               </a:rPr>
-              <a:t>.</a:t>
-            </a:r>
-            <a:endParaRPr lang="en-US"/>
+              <a:t>3. </a:t>
+            </a:r>
+            <a:r>
+              <a:rPr lang="en-US" sz="1200" b="1">
+                <a:solidFill>
+                  <a:srgbClr val="FF0000"/>
+                </a:solidFill>
+                <a:latin typeface="-apple-system"/>
+              </a:rPr>
+              <a:t>Aliases (Ləqəblər) Nədir? </a:t>
+            </a:r>
+            <a:endParaRPr lang="az-Latn-AZ" sz="1200" b="1">
+              <a:solidFill>
+                <a:srgbClr val="FF0000"/>
+              </a:solidFill>
+              <a:latin typeface="-apple-system"/>
+            </a:endParaRPr>
+          </a:p>
+          <a:p>
+            <a:endParaRPr lang="az-Latn-AZ" sz="1200">
+              <a:latin typeface="-apple-system"/>
+            </a:endParaRPr>
+          </a:p>
+          <a:p>
+            <a:r>
+              <a:rPr lang="en-US" sz="1200">
+                <a:latin typeface="-apple-system"/>
+              </a:rPr>
+              <a:t>Aliases, eyni field-i fərqli adlarla sorğulamağa imkan verir. Bu, eyni məlumatı fərqli arqumentlərlə birdən çox dəfə istəyərkən faydalıdır.</a:t>
+            </a:r>
+            <a:endParaRPr lang="az-Latn-AZ" sz="1200">
+              <a:latin typeface="-apple-system"/>
+            </a:endParaRPr>
+          </a:p>
+          <a:p>
+            <a:endParaRPr lang="az-Latn-AZ" sz="1200">
+              <a:latin typeface="-apple-system"/>
+            </a:endParaRPr>
+          </a:p>
+          <a:p>
+            <a:r>
+              <a:rPr lang="en-US" sz="1200"/>
+              <a:t>GraphQL-də nümunə:</a:t>
+            </a:r>
+            <a:endParaRPr lang="az-Latn-AZ" sz="1200"/>
+          </a:p>
+          <a:p>
+            <a:endParaRPr lang="az-Latn-AZ" sz="1200"/>
+          </a:p>
+          <a:p>
+            <a:endParaRPr lang="az-Latn-AZ" sz="1200"/>
+          </a:p>
+          <a:p>
+            <a:endParaRPr lang="az-Latn-AZ" sz="1200"/>
+          </a:p>
+          <a:p>
+            <a:endParaRPr lang="az-Latn-AZ" sz="1200"/>
+          </a:p>
+          <a:p>
+            <a:endParaRPr lang="az-Latn-AZ" sz="1200"/>
+          </a:p>
+          <a:p>
+            <a:endParaRPr lang="az-Latn-AZ" sz="1200"/>
+          </a:p>
+          <a:p>
+            <a:endParaRPr lang="az-Latn-AZ" sz="1200"/>
+          </a:p>
+          <a:p>
+            <a:endParaRPr lang="az-Latn-AZ" sz="1200"/>
+          </a:p>
+          <a:p>
+            <a:endParaRPr lang="az-Latn-AZ" sz="1200"/>
+          </a:p>
+          <a:p>
+            <a:endParaRPr lang="az-Latn-AZ" sz="1200"/>
+          </a:p>
+          <a:p>
+            <a:r>
+              <a:rPr lang="en-US" sz="1200"/>
+              <a:t>Cavab:</a:t>
+            </a:r>
+            <a:r>
+              <a:rPr lang="az-Latn-AZ" sz="1200"/>
+              <a:t> </a:t>
+            </a:r>
+            <a:r>
+              <a:rPr lang="en-US" sz="1200"/>
+              <a:t>Burada </a:t>
+            </a:r>
+            <a:r>
+              <a:rPr lang="en-US" sz="1200" b="1" i="1"/>
+              <a:t>sevgiKitabi</a:t>
+            </a:r>
+            <a:r>
+              <a:rPr lang="en-US" sz="1200"/>
+              <a:t> və </a:t>
+            </a:r>
+            <a:r>
+              <a:rPr lang="en-US" sz="1200" b="1" i="1"/>
+              <a:t>maceraKitabi</a:t>
+            </a:r>
+            <a:r>
+              <a:rPr lang="en-US" sz="1200"/>
+              <a:t> aliases-dir. Eyni kitab field-i fərqli ID-lərlə iki dəfə çağırılır, amma fərqli adlarla.</a:t>
+            </a:r>
+          </a:p>
+          <a:p>
+            <a:endParaRPr lang="az-Latn-AZ" sz="1200"/>
+          </a:p>
+          <a:p>
+            <a:endParaRPr lang="az-Latn-AZ" sz="1200"/>
+          </a:p>
+          <a:p>
+            <a:endParaRPr lang="az-Latn-AZ" sz="1200"/>
+          </a:p>
+          <a:p>
+            <a:endParaRPr lang="az-Latn-AZ" sz="1200"/>
+          </a:p>
+          <a:p>
+            <a:endParaRPr lang="az-Latn-AZ" sz="1200"/>
+          </a:p>
+          <a:p>
+            <a:endParaRPr lang="az-Latn-AZ" sz="1200"/>
+          </a:p>
+          <a:p>
+            <a:endParaRPr lang="az-Latn-AZ" sz="1200"/>
+          </a:p>
+          <a:p>
+            <a:endParaRPr lang="az-Latn-AZ" sz="1200"/>
+          </a:p>
+          <a:p>
+            <a:endParaRPr lang="az-Latn-AZ" sz="1200"/>
+          </a:p>
+          <a:p>
+            <a:endParaRPr lang="az-Latn-AZ" sz="1200"/>
+          </a:p>
+          <a:p>
+            <a:endParaRPr lang="az-Latn-AZ" sz="1200"/>
+          </a:p>
+          <a:p>
+            <a:endParaRPr lang="az-Latn-AZ" sz="1200"/>
+          </a:p>
+          <a:p>
+            <a:endParaRPr lang="az-Latn-AZ" sz="1200"/>
+          </a:p>
+          <a:p>
+            <a:endParaRPr lang="az-Latn-AZ" sz="1200"/>
+          </a:p>
+          <a:p>
+            <a:endParaRPr lang="az-Latn-AZ" sz="1200"/>
+          </a:p>
+          <a:p>
+            <a:endParaRPr lang="az-Latn-AZ" sz="1200"/>
+          </a:p>
+          <a:p>
+            <a:r>
+              <a:rPr lang="en-US" sz="1200" b="1" i="1">
+                <a:solidFill>
+                  <a:srgbClr val="FF0000"/>
+                </a:solidFill>
+                <a:highlight>
+                  <a:srgbClr val="FFFF00"/>
+                </a:highlight>
+              </a:rPr>
+              <a:t>PHP-də: Aliases server tərəfində xüsusi kod tələb etmir, çünki GraphQL avtomatik idarə edir. </a:t>
+            </a:r>
+            <a:r>
+              <a:rPr lang="az-Latn-AZ" sz="1200" b="1" i="1">
+                <a:solidFill>
+                  <a:srgbClr val="FF0000"/>
+                </a:solidFill>
+                <a:highlight>
+                  <a:srgbClr val="FFFF00"/>
+                </a:highlight>
+              </a:rPr>
+              <a:t>35ci slaydda olan</a:t>
+            </a:r>
+            <a:r>
+              <a:rPr lang="en-US" sz="1200" b="1" i="1">
+                <a:solidFill>
+                  <a:srgbClr val="FF0000"/>
+                </a:solidFill>
+                <a:highlight>
+                  <a:srgbClr val="FFFF00"/>
+                </a:highlight>
+              </a:rPr>
+              <a:t> query.php eyni işləyər.</a:t>
+            </a:r>
           </a:p>
         </p:txBody>
       </p:sp>
+      <p:pic>
+        <p:nvPicPr>
+          <p:cNvPr id="3" name="Picture 2">
+            <a:extLst>
+              <a:ext uri="{FF2B5EF4-FFF2-40B4-BE49-F238E27FC236}">
+                <a16:creationId xmlns:a16="http://schemas.microsoft.com/office/drawing/2014/main" id="{AADDDA10-792E-93AB-4F16-C464D50A53D3}"/>
+              </a:ext>
+            </a:extLst>
+          </p:cNvPr>
+          <p:cNvPicPr>
+            <a:picLocks noChangeAspect="1"/>
+          </p:cNvPicPr>
+          <p:nvPr/>
+        </p:nvPicPr>
+        <p:blipFill>
+          <a:blip r:embed="rId2"/>
+          <a:stretch>
+            <a:fillRect/>
+          </a:stretch>
+        </p:blipFill>
+        <p:spPr>
+          <a:xfrm>
+            <a:off x="203200" y="1352097"/>
+            <a:ext cx="1791855" cy="1381807"/>
+          </a:xfrm>
+          <a:prstGeom prst="rect">
+            <a:avLst/>
+          </a:prstGeom>
+        </p:spPr>
+      </p:pic>
+      <p:pic>
+        <p:nvPicPr>
+          <p:cNvPr id="5" name="Picture 4">
+            <a:extLst>
+              <a:ext uri="{FF2B5EF4-FFF2-40B4-BE49-F238E27FC236}">
+                <a16:creationId xmlns:a16="http://schemas.microsoft.com/office/drawing/2014/main" id="{3BA3DD11-0439-F7AE-24B7-75520726D67F}"/>
+              </a:ext>
+            </a:extLst>
+          </p:cNvPr>
+          <p:cNvPicPr>
+            <a:picLocks noChangeAspect="1"/>
+          </p:cNvPicPr>
+          <p:nvPr/>
+        </p:nvPicPr>
+        <p:blipFill>
+          <a:blip r:embed="rId3"/>
+          <a:stretch>
+            <a:fillRect/>
+          </a:stretch>
+        </p:blipFill>
+        <p:spPr>
+          <a:xfrm>
+            <a:off x="203200" y="3314390"/>
+            <a:ext cx="1607127" cy="1600699"/>
+          </a:xfrm>
+          <a:prstGeom prst="rect">
+            <a:avLst/>
+          </a:prstGeom>
+        </p:spPr>
+      </p:pic>
     </p:spTree>
     <p:extLst>
       <p:ext uri="{BB962C8B-B14F-4D97-AF65-F5344CB8AC3E}">
@@ -9731,6 +10754,372 @@
 </file>
 
 <file path=ppt/slides/slide37.xml><?xml version="1.0" encoding="utf-8"?>
+<p:sld xmlns:a="http://schemas.openxmlformats.org/drawingml/2006/main" xmlns:r="http://schemas.openxmlformats.org/officeDocument/2006/relationships" xmlns:p="http://schemas.openxmlformats.org/presentationml/2006/main">
+  <p:cSld>
+    <p:spTree>
+      <p:nvGrpSpPr>
+        <p:cNvPr id="1" name="">
+          <a:extLst>
+            <a:ext uri="{FF2B5EF4-FFF2-40B4-BE49-F238E27FC236}">
+              <a16:creationId xmlns:a16="http://schemas.microsoft.com/office/drawing/2014/main" id="{ACCA30F6-0963-FB90-D714-C1F0B4CC5749}"/>
+            </a:ext>
+          </a:extLst>
+        </p:cNvPr>
+        <p:cNvGrpSpPr/>
+        <p:nvPr/>
+      </p:nvGrpSpPr>
+      <p:grpSpPr>
+        <a:xfrm>
+          <a:off x="0" y="0"/>
+          <a:ext cx="0" cy="0"/>
+          <a:chOff x="0" y="0"/>
+          <a:chExt cx="0" cy="0"/>
+        </a:xfrm>
+      </p:grpSpPr>
+      <p:sp>
+        <p:nvSpPr>
+          <p:cNvPr id="7" name="TextBox 6">
+            <a:extLst>
+              <a:ext uri="{FF2B5EF4-FFF2-40B4-BE49-F238E27FC236}">
+                <a16:creationId xmlns:a16="http://schemas.microsoft.com/office/drawing/2014/main" id="{42EE8E0D-1665-D615-06E6-B3DDC8DB077E}"/>
+              </a:ext>
+            </a:extLst>
+          </p:cNvPr>
+          <p:cNvSpPr txBox="1"/>
+          <p:nvPr/>
+        </p:nvSpPr>
+        <p:spPr>
+          <a:xfrm>
+            <a:off x="203200" y="244826"/>
+            <a:ext cx="11822545" cy="5355312"/>
+          </a:xfrm>
+          <a:prstGeom prst="rect">
+            <a:avLst/>
+          </a:prstGeom>
+          <a:noFill/>
+        </p:spPr>
+        <p:txBody>
+          <a:bodyPr wrap="square">
+            <a:spAutoFit/>
+          </a:bodyPr>
+          <a:lstStyle/>
+          <a:p>
+            <a:r>
+              <a:rPr lang="az-Latn-AZ">
+                <a:latin typeface="-apple-system"/>
+              </a:rPr>
+              <a:t>Alias başqa nümunə: </a:t>
+            </a:r>
+          </a:p>
+          <a:p>
+            <a:endParaRPr lang="az-Latn-AZ">
+              <a:latin typeface="-apple-system"/>
+            </a:endParaRPr>
+          </a:p>
+          <a:p>
+            <a:endParaRPr lang="az-Latn-AZ">
+              <a:latin typeface="-apple-system"/>
+            </a:endParaRPr>
+          </a:p>
+          <a:p>
+            <a:endParaRPr lang="az-Latn-AZ">
+              <a:latin typeface="-apple-system"/>
+            </a:endParaRPr>
+          </a:p>
+          <a:p>
+            <a:endParaRPr lang="az-Latn-AZ">
+              <a:latin typeface="-apple-system"/>
+            </a:endParaRPr>
+          </a:p>
+          <a:p>
+            <a:endParaRPr lang="az-Latn-AZ">
+              <a:latin typeface="-apple-system"/>
+            </a:endParaRPr>
+          </a:p>
+          <a:p>
+            <a:endParaRPr lang="az-Latn-AZ">
+              <a:latin typeface="-apple-system"/>
+            </a:endParaRPr>
+          </a:p>
+          <a:p>
+            <a:endParaRPr lang="az-Latn-AZ">
+              <a:latin typeface="-apple-system"/>
+            </a:endParaRPr>
+          </a:p>
+          <a:p>
+            <a:endParaRPr lang="az-Latn-AZ">
+              <a:latin typeface="-apple-system"/>
+            </a:endParaRPr>
+          </a:p>
+          <a:p>
+            <a:endParaRPr lang="az-Latn-AZ">
+              <a:latin typeface="-apple-system"/>
+            </a:endParaRPr>
+          </a:p>
+          <a:p>
+            <a:endParaRPr lang="az-Latn-AZ">
+              <a:latin typeface="-apple-system"/>
+            </a:endParaRPr>
+          </a:p>
+          <a:p>
+            <a:endParaRPr lang="az-Latn-AZ">
+              <a:latin typeface="-apple-system"/>
+            </a:endParaRPr>
+          </a:p>
+          <a:p>
+            <a:endParaRPr lang="az-Latn-AZ">
+              <a:latin typeface="-apple-system"/>
+            </a:endParaRPr>
+          </a:p>
+          <a:p>
+            <a:endParaRPr lang="az-Latn-AZ">
+              <a:latin typeface="-apple-system"/>
+            </a:endParaRPr>
+          </a:p>
+          <a:p>
+            <a:endParaRPr lang="az-Latn-AZ">
+              <a:latin typeface="-apple-system"/>
+            </a:endParaRPr>
+          </a:p>
+          <a:p>
+            <a:endParaRPr lang="az-Latn-AZ">
+              <a:latin typeface="-apple-system"/>
+            </a:endParaRPr>
+          </a:p>
+          <a:p>
+            <a:endParaRPr lang="az-Latn-AZ">
+              <a:latin typeface="-apple-system"/>
+            </a:endParaRPr>
+          </a:p>
+          <a:p>
+            <a:endParaRPr lang="az-Latn-AZ">
+              <a:latin typeface="-apple-system"/>
+            </a:endParaRPr>
+          </a:p>
+          <a:p>
+            <a:r>
+              <a:rPr lang="az-Latn-AZ" b="1">
+                <a:latin typeface="-apple-system"/>
+              </a:rPr>
+              <a:t>Users</a:t>
+            </a:r>
+            <a:r>
+              <a:rPr lang="az-Latn-AZ">
+                <a:latin typeface="-apple-system"/>
+              </a:rPr>
+              <a:t> cədvəlinin </a:t>
+            </a:r>
+            <a:r>
+              <a:rPr lang="az-Latn-AZ" b="1">
+                <a:latin typeface="-apple-system"/>
+              </a:rPr>
+              <a:t>name</a:t>
+            </a:r>
+            <a:r>
+              <a:rPr lang="az-Latn-AZ">
+                <a:latin typeface="-apple-system"/>
+              </a:rPr>
+              <a:t> və </a:t>
+            </a:r>
+            <a:r>
+              <a:rPr lang="az-Latn-AZ" b="1">
+                <a:latin typeface="-apple-system"/>
+              </a:rPr>
+              <a:t>descriptin</a:t>
+            </a:r>
+            <a:r>
+              <a:rPr lang="az-Latn-AZ">
+                <a:latin typeface="-apple-system"/>
+              </a:rPr>
+              <a:t> sahələri üçün </a:t>
+            </a:r>
+            <a:r>
+              <a:rPr lang="az-Latn-AZ" b="1">
+                <a:latin typeface="-apple-system"/>
+              </a:rPr>
+              <a:t>userName</a:t>
+            </a:r>
+            <a:r>
+              <a:rPr lang="az-Latn-AZ">
+                <a:latin typeface="-apple-system"/>
+              </a:rPr>
+              <a:t> və </a:t>
+            </a:r>
+            <a:r>
+              <a:rPr lang="az-Latn-AZ" b="1">
+                <a:latin typeface="-apple-system"/>
+              </a:rPr>
+              <a:t>userDescription</a:t>
+            </a:r>
+            <a:r>
+              <a:rPr lang="az-Latn-AZ">
+                <a:latin typeface="-apple-system"/>
+              </a:rPr>
+              <a:t> adlı </a:t>
+            </a:r>
+            <a:r>
+              <a:rPr lang="az-Latn-AZ" b="1">
+                <a:latin typeface="-apple-system"/>
+              </a:rPr>
+              <a:t>ALİAS</a:t>
+            </a:r>
+            <a:r>
+              <a:rPr lang="az-Latn-AZ">
+                <a:latin typeface="-apple-system"/>
+              </a:rPr>
+              <a:t> -lar təyin edilib.</a:t>
+            </a:r>
+          </a:p>
+        </p:txBody>
+      </p:sp>
+      <p:pic>
+        <p:nvPicPr>
+          <p:cNvPr id="3" name="Picture 2">
+            <a:extLst>
+              <a:ext uri="{FF2B5EF4-FFF2-40B4-BE49-F238E27FC236}">
+                <a16:creationId xmlns:a16="http://schemas.microsoft.com/office/drawing/2014/main" id="{2F3F449D-4BDB-FAB7-86C3-B59B575A7FA5}"/>
+              </a:ext>
+            </a:extLst>
+          </p:cNvPr>
+          <p:cNvPicPr>
+            <a:picLocks noChangeAspect="1"/>
+          </p:cNvPicPr>
+          <p:nvPr/>
+        </p:nvPicPr>
+        <p:blipFill>
+          <a:blip r:embed="rId2"/>
+          <a:stretch>
+            <a:fillRect/>
+          </a:stretch>
+        </p:blipFill>
+        <p:spPr>
+          <a:xfrm>
+            <a:off x="136717" y="719220"/>
+            <a:ext cx="3458058" cy="2962688"/>
+          </a:xfrm>
+          <a:prstGeom prst="rect">
+            <a:avLst/>
+          </a:prstGeom>
+          <a:ln w="38100" cap="sq">
+            <a:solidFill>
+              <a:srgbClr val="000000"/>
+            </a:solidFill>
+            <a:prstDash val="solid"/>
+            <a:miter lim="800000"/>
+          </a:ln>
+          <a:effectLst>
+            <a:outerShdw blurRad="50800" dist="38100" dir="2700000" algn="tl" rotWithShape="0">
+              <a:srgbClr val="000000">
+                <a:alpha val="43000"/>
+              </a:srgbClr>
+            </a:outerShdw>
+          </a:effectLst>
+        </p:spPr>
+      </p:pic>
+      <p:pic>
+        <p:nvPicPr>
+          <p:cNvPr id="5" name="Picture 4">
+            <a:extLst>
+              <a:ext uri="{FF2B5EF4-FFF2-40B4-BE49-F238E27FC236}">
+                <a16:creationId xmlns:a16="http://schemas.microsoft.com/office/drawing/2014/main" id="{DD7E0868-843F-F1E5-F1C0-55AB16750CC9}"/>
+              </a:ext>
+            </a:extLst>
+          </p:cNvPr>
+          <p:cNvPicPr>
+            <a:picLocks noChangeAspect="1"/>
+          </p:cNvPicPr>
+          <p:nvPr/>
+        </p:nvPicPr>
+        <p:blipFill>
+          <a:blip r:embed="rId3"/>
+          <a:stretch>
+            <a:fillRect/>
+          </a:stretch>
+        </p:blipFill>
+        <p:spPr>
+          <a:xfrm>
+            <a:off x="5753171" y="84837"/>
+            <a:ext cx="3105583" cy="4439270"/>
+          </a:xfrm>
+          <a:prstGeom prst="rect">
+            <a:avLst/>
+          </a:prstGeom>
+          <a:ln w="38100" cap="sq">
+            <a:solidFill>
+              <a:srgbClr val="000000"/>
+            </a:solidFill>
+            <a:prstDash val="solid"/>
+            <a:miter lim="800000"/>
+          </a:ln>
+          <a:effectLst>
+            <a:outerShdw blurRad="50800" dist="38100" dir="2700000" algn="tl" rotWithShape="0">
+              <a:srgbClr val="000000">
+                <a:alpha val="43000"/>
+              </a:srgbClr>
+            </a:outerShdw>
+          </a:effectLst>
+        </p:spPr>
+      </p:pic>
+      <p:sp>
+        <p:nvSpPr>
+          <p:cNvPr id="6" name="Arrow: Right 5">
+            <a:extLst>
+              <a:ext uri="{FF2B5EF4-FFF2-40B4-BE49-F238E27FC236}">
+                <a16:creationId xmlns:a16="http://schemas.microsoft.com/office/drawing/2014/main" id="{F5778505-0441-82BB-4353-948B26C14FB1}"/>
+              </a:ext>
+            </a:extLst>
+          </p:cNvPr>
+          <p:cNvSpPr/>
+          <p:nvPr/>
+        </p:nvSpPr>
+        <p:spPr>
+          <a:xfrm>
+            <a:off x="4410737" y="1881909"/>
+            <a:ext cx="748145" cy="637309"/>
+          </a:xfrm>
+          <a:prstGeom prst="rightArrow">
+            <a:avLst/>
+          </a:prstGeom>
+        </p:spPr>
+        <p:style>
+          <a:lnRef idx="2">
+            <a:schemeClr val="dk1">
+              <a:shade val="15000"/>
+            </a:schemeClr>
+          </a:lnRef>
+          <a:fillRef idx="1">
+            <a:schemeClr val="dk1"/>
+          </a:fillRef>
+          <a:effectRef idx="0">
+            <a:schemeClr val="dk1"/>
+          </a:effectRef>
+          <a:fontRef idx="minor">
+            <a:schemeClr val="lt1"/>
+          </a:fontRef>
+        </p:style>
+        <p:txBody>
+          <a:bodyPr rtlCol="0" anchor="ctr"/>
+          <a:lstStyle/>
+          <a:p>
+            <a:pPr algn="ctr"/>
+            <a:endParaRPr lang="en-US"/>
+          </a:p>
+        </p:txBody>
+      </p:sp>
+    </p:spTree>
+    <p:extLst>
+      <p:ext uri="{BB962C8B-B14F-4D97-AF65-F5344CB8AC3E}">
+        <p14:creationId xmlns:p14="http://schemas.microsoft.com/office/powerpoint/2010/main" val="3320984800"/>
+      </p:ext>
+    </p:extLst>
+  </p:cSld>
+  <p:clrMapOvr>
+    <a:masterClrMapping/>
+  </p:clrMapOvr>
+</p:sld>
+</file>
+
+<file path=ppt/slides/slide38.xml><?xml version="1.0" encoding="utf-8"?>
 <p:sld xmlns:a="http://schemas.openxmlformats.org/drawingml/2006/main" xmlns:r="http://schemas.openxmlformats.org/officeDocument/2006/relationships" xmlns:p="http://schemas.openxmlformats.org/presentationml/2006/main">
   <p:cSld>
     <p:spTree>
@@ -9768,7 +11157,7 @@
         <p:spPr>
           <a:xfrm>
             <a:off x="203200" y="244826"/>
-            <a:ext cx="11822545" cy="369332"/>
+            <a:ext cx="11822545" cy="6555641"/>
           </a:xfrm>
           <a:prstGeom prst="rect">
             <a:avLst/>
@@ -9782,15 +11171,428 @@
           <a:lstStyle/>
           <a:p>
             <a:r>
-              <a:rPr lang="en-US">
-                <a:latin typeface="-apple-system"/>
-              </a:rPr>
-              <a:t>.</a:t>
-            </a:r>
-            <a:endParaRPr lang="en-US"/>
+              <a:rPr lang="en-US" sz="1200" b="1"/>
+              <a:t>4. </a:t>
+            </a:r>
+            <a:r>
+              <a:rPr lang="en-US" sz="1200" b="1">
+                <a:solidFill>
+                  <a:srgbClr val="FF0000"/>
+                </a:solidFill>
+              </a:rPr>
+              <a:t>Fragments (Fraqmentlər)</a:t>
+            </a:r>
+            <a:r>
+              <a:rPr lang="az-Latn-AZ" sz="1200" b="1">
+                <a:solidFill>
+                  <a:srgbClr val="FF0000"/>
+                </a:solidFill>
+              </a:rPr>
+              <a:t> </a:t>
+            </a:r>
+            <a:r>
+              <a:rPr lang="en-US" sz="1200" b="1">
+                <a:solidFill>
+                  <a:srgbClr val="FF0000"/>
+                </a:solidFill>
+              </a:rPr>
+              <a:t>Nədir?</a:t>
+            </a:r>
+            <a:r>
+              <a:rPr lang="en-US" sz="1200">
+                <a:solidFill>
+                  <a:srgbClr val="FF0000"/>
+                </a:solidFill>
+              </a:rPr>
+              <a:t> </a:t>
+            </a:r>
+            <a:endParaRPr lang="az-Latn-AZ" sz="1200">
+              <a:solidFill>
+                <a:srgbClr val="FF0000"/>
+              </a:solidFill>
+            </a:endParaRPr>
+          </a:p>
+          <a:p>
+            <a:endParaRPr lang="az-Latn-AZ" sz="1200">
+              <a:solidFill>
+                <a:srgbClr val="FF0000"/>
+              </a:solidFill>
+            </a:endParaRPr>
+          </a:p>
+          <a:p>
+            <a:r>
+              <a:rPr lang="en-US" sz="1200"/>
+              <a:t>Fragments, sorğuda təkrarlanan field-ləri bir dəfə yazmağa imkan verir. Bu, uzun sorğuları sadələşdirir və təkrar yazmağın qarşısını alır.</a:t>
+            </a:r>
+            <a:endParaRPr lang="az-Latn-AZ" sz="1200"/>
+          </a:p>
+          <a:p>
+            <a:endParaRPr lang="az-Latn-AZ" sz="1200">
+              <a:effectLst/>
+            </a:endParaRPr>
+          </a:p>
+          <a:p>
+            <a:r>
+              <a:rPr lang="en-US" sz="1200"/>
+              <a:t>GraphQL-də nümunə:</a:t>
+            </a:r>
+            <a:endParaRPr lang="az-Latn-AZ" sz="1200"/>
+          </a:p>
+          <a:p>
+            <a:endParaRPr lang="az-Latn-AZ" sz="1200">
+              <a:effectLst/>
+            </a:endParaRPr>
+          </a:p>
+          <a:p>
+            <a:endParaRPr lang="az-Latn-AZ" sz="1200"/>
+          </a:p>
+          <a:p>
+            <a:endParaRPr lang="az-Latn-AZ" sz="1200">
+              <a:effectLst/>
+            </a:endParaRPr>
+          </a:p>
+          <a:p>
+            <a:endParaRPr lang="az-Latn-AZ" sz="1200"/>
+          </a:p>
+          <a:p>
+            <a:endParaRPr lang="az-Latn-AZ" sz="1200">
+              <a:effectLst/>
+            </a:endParaRPr>
+          </a:p>
+          <a:p>
+            <a:endParaRPr lang="az-Latn-AZ" sz="1200"/>
+          </a:p>
+          <a:p>
+            <a:endParaRPr lang="az-Latn-AZ" sz="1200">
+              <a:effectLst/>
+            </a:endParaRPr>
+          </a:p>
+          <a:p>
+            <a:endParaRPr lang="az-Latn-AZ" sz="1200"/>
+          </a:p>
+          <a:p>
+            <a:endParaRPr lang="az-Latn-AZ" sz="1200">
+              <a:effectLst/>
+            </a:endParaRPr>
+          </a:p>
+          <a:p>
+            <a:endParaRPr lang="az-Latn-AZ" sz="1200"/>
+          </a:p>
+          <a:p>
+            <a:endParaRPr lang="az-Latn-AZ" sz="1200">
+              <a:effectLst/>
+            </a:endParaRPr>
+          </a:p>
+          <a:p>
+            <a:r>
+              <a:rPr lang="en-US" sz="1200"/>
+              <a:t>Cavab:</a:t>
+            </a:r>
+            <a:r>
+              <a:rPr lang="az-Latn-AZ" sz="1200"/>
+              <a:t> </a:t>
+            </a:r>
+            <a:r>
+              <a:rPr lang="az-Latn-AZ" sz="1200" b="1" i="1"/>
+              <a:t>KitabDetallari</a:t>
+            </a:r>
+            <a:r>
+              <a:rPr lang="az-Latn-AZ" sz="1200"/>
+              <a:t> fraqmentdir və təkrarlanan </a:t>
+            </a:r>
+          </a:p>
+          <a:p>
+            <a:r>
+              <a:rPr lang="az-Latn-AZ" sz="1200"/>
+              <a:t>sahələri (ad, qiymet, muellif) bir yerdə saxlayır.</a:t>
+            </a:r>
+            <a:endParaRPr lang="en-US" sz="1200"/>
+          </a:p>
+          <a:p>
+            <a:endParaRPr lang="az-Latn-AZ" sz="1200">
+              <a:effectLst/>
+            </a:endParaRPr>
+          </a:p>
+          <a:p>
+            <a:endParaRPr lang="az-Latn-AZ" sz="1200"/>
+          </a:p>
+          <a:p>
+            <a:endParaRPr lang="az-Latn-AZ" sz="1200">
+              <a:effectLst/>
+            </a:endParaRPr>
+          </a:p>
+          <a:p>
+            <a:endParaRPr lang="az-Latn-AZ" sz="1200"/>
+          </a:p>
+          <a:p>
+            <a:endParaRPr lang="az-Latn-AZ" sz="1200">
+              <a:effectLst/>
+            </a:endParaRPr>
+          </a:p>
+          <a:p>
+            <a:endParaRPr lang="az-Latn-AZ" sz="1200"/>
+          </a:p>
+          <a:p>
+            <a:endParaRPr lang="az-Latn-AZ" sz="1200">
+              <a:effectLst/>
+            </a:endParaRPr>
+          </a:p>
+          <a:p>
+            <a:endParaRPr lang="az-Latn-AZ" sz="1200"/>
+          </a:p>
+          <a:p>
+            <a:endParaRPr lang="az-Latn-AZ" sz="1200">
+              <a:effectLst/>
+            </a:endParaRPr>
+          </a:p>
+          <a:p>
+            <a:endParaRPr lang="az-Latn-AZ" sz="1200"/>
+          </a:p>
+          <a:p>
+            <a:endParaRPr lang="az-Latn-AZ" sz="1200">
+              <a:effectLst/>
+            </a:endParaRPr>
+          </a:p>
+          <a:p>
+            <a:endParaRPr lang="az-Latn-AZ" sz="1200">
+              <a:effectLst/>
+            </a:endParaRPr>
+          </a:p>
+          <a:p>
+            <a:endParaRPr lang="az-Latn-AZ" sz="1200"/>
+          </a:p>
+          <a:p>
+            <a:endParaRPr lang="az-Latn-AZ" sz="1200">
+              <a:effectLst/>
+            </a:endParaRPr>
+          </a:p>
+          <a:p>
+            <a:r>
+              <a:rPr lang="en-US" sz="1200" b="1">
+                <a:solidFill>
+                  <a:srgbClr val="FF0000"/>
+                </a:solidFill>
+                <a:highlight>
+                  <a:srgbClr val="FFFF00"/>
+                </a:highlight>
+              </a:rPr>
+              <a:t>PHP-də: Fraqmentlər server tərəfində xüsusi kod tələb etmir, çünki sorğu tərəfində (client) işləyir.</a:t>
+            </a:r>
+            <a:endParaRPr lang="az-Latn-AZ" sz="1200" b="1">
+              <a:solidFill>
+                <a:srgbClr val="FF0000"/>
+              </a:solidFill>
+              <a:highlight>
+                <a:srgbClr val="FFFF00"/>
+              </a:highlight>
+            </a:endParaRPr>
+          </a:p>
+          <a:p>
+            <a:endParaRPr lang="en-US" sz="1200">
+              <a:effectLst/>
+            </a:endParaRPr>
           </a:p>
         </p:txBody>
       </p:sp>
+      <p:pic>
+        <p:nvPicPr>
+          <p:cNvPr id="3" name="Picture 2">
+            <a:extLst>
+              <a:ext uri="{FF2B5EF4-FFF2-40B4-BE49-F238E27FC236}">
+                <a16:creationId xmlns:a16="http://schemas.microsoft.com/office/drawing/2014/main" id="{363156BA-98DD-433D-6256-DE0CBD2A1090}"/>
+              </a:ext>
+            </a:extLst>
+          </p:cNvPr>
+          <p:cNvPicPr>
+            <a:picLocks noChangeAspect="1"/>
+          </p:cNvPicPr>
+          <p:nvPr/>
+        </p:nvPicPr>
+        <p:blipFill>
+          <a:blip r:embed="rId2"/>
+          <a:stretch>
+            <a:fillRect/>
+          </a:stretch>
+        </p:blipFill>
+        <p:spPr>
+          <a:xfrm>
+            <a:off x="203200" y="1331386"/>
+            <a:ext cx="1581977" cy="1716614"/>
+          </a:xfrm>
+          <a:prstGeom prst="rect">
+            <a:avLst/>
+          </a:prstGeom>
+        </p:spPr>
+      </p:pic>
+      <p:pic>
+        <p:nvPicPr>
+          <p:cNvPr id="5" name="Picture 4">
+            <a:extLst>
+              <a:ext uri="{FF2B5EF4-FFF2-40B4-BE49-F238E27FC236}">
+                <a16:creationId xmlns:a16="http://schemas.microsoft.com/office/drawing/2014/main" id="{22E491C1-F5B9-ACC1-5E63-41E5AF5D0567}"/>
+              </a:ext>
+            </a:extLst>
+          </p:cNvPr>
+          <p:cNvPicPr>
+            <a:picLocks noChangeAspect="1"/>
+          </p:cNvPicPr>
+          <p:nvPr/>
+        </p:nvPicPr>
+        <p:blipFill>
+          <a:blip r:embed="rId3"/>
+          <a:stretch>
+            <a:fillRect/>
+          </a:stretch>
+        </p:blipFill>
+        <p:spPr>
+          <a:xfrm>
+            <a:off x="203200" y="3655970"/>
+            <a:ext cx="1581977" cy="1528891"/>
+          </a:xfrm>
+          <a:prstGeom prst="rect">
+            <a:avLst/>
+          </a:prstGeom>
+        </p:spPr>
+      </p:pic>
+      <p:sp>
+        <p:nvSpPr>
+          <p:cNvPr id="8" name="TextBox 7">
+            <a:extLst>
+              <a:ext uri="{FF2B5EF4-FFF2-40B4-BE49-F238E27FC236}">
+                <a16:creationId xmlns:a16="http://schemas.microsoft.com/office/drawing/2014/main" id="{2B92A895-F245-BBA3-4E2F-5DAF9BE8450A}"/>
+              </a:ext>
+            </a:extLst>
+          </p:cNvPr>
+          <p:cNvSpPr txBox="1"/>
+          <p:nvPr/>
+        </p:nvSpPr>
+        <p:spPr>
+          <a:xfrm>
+            <a:off x="9688945" y="1242061"/>
+            <a:ext cx="2216727" cy="4801314"/>
+          </a:xfrm>
+          <a:prstGeom prst="rect">
+            <a:avLst/>
+          </a:prstGeom>
+          <a:noFill/>
+        </p:spPr>
+        <p:txBody>
+          <a:bodyPr wrap="square">
+            <a:spAutoFit/>
+          </a:bodyPr>
+          <a:lstStyle/>
+          <a:p>
+            <a:pPr algn="ctr"/>
+            <a:r>
+              <a:rPr lang="en-US" b="1"/>
+              <a:t>Fraqmentsiz yazılış</a:t>
+            </a:r>
+            <a:r>
+              <a:rPr lang="en-US"/>
+              <a:t>:</a:t>
+            </a:r>
+            <a:endParaRPr lang="az-Latn-AZ"/>
+          </a:p>
+          <a:p>
+            <a:pPr algn="ctr"/>
+            <a:endParaRPr lang="az-Latn-AZ"/>
+          </a:p>
+          <a:p>
+            <a:pPr algn="ctr"/>
+            <a:endParaRPr lang="az-Latn-AZ"/>
+          </a:p>
+          <a:p>
+            <a:pPr algn="ctr"/>
+            <a:endParaRPr lang="az-Latn-AZ"/>
+          </a:p>
+          <a:p>
+            <a:pPr algn="ctr"/>
+            <a:endParaRPr lang="az-Latn-AZ"/>
+          </a:p>
+          <a:p>
+            <a:pPr algn="ctr"/>
+            <a:endParaRPr lang="az-Latn-AZ"/>
+          </a:p>
+          <a:p>
+            <a:pPr algn="ctr"/>
+            <a:endParaRPr lang="az-Latn-AZ"/>
+          </a:p>
+          <a:p>
+            <a:pPr algn="ctr"/>
+            <a:endParaRPr lang="az-Latn-AZ"/>
+          </a:p>
+          <a:p>
+            <a:pPr algn="ctr"/>
+            <a:endParaRPr lang="az-Latn-AZ"/>
+          </a:p>
+          <a:p>
+            <a:pPr algn="ctr"/>
+            <a:endParaRPr lang="az-Latn-AZ"/>
+          </a:p>
+          <a:p>
+            <a:pPr algn="ctr"/>
+            <a:endParaRPr lang="az-Latn-AZ"/>
+          </a:p>
+          <a:p>
+            <a:pPr algn="ctr"/>
+            <a:endParaRPr lang="az-Latn-AZ"/>
+          </a:p>
+          <a:p>
+            <a:pPr algn="ctr"/>
+            <a:endParaRPr lang="az-Latn-AZ"/>
+          </a:p>
+          <a:p>
+            <a:pPr algn="ctr"/>
+            <a:endParaRPr lang="az-Latn-AZ"/>
+          </a:p>
+          <a:p>
+            <a:pPr algn="ctr"/>
+            <a:endParaRPr lang="az-Latn-AZ"/>
+          </a:p>
+          <a:p>
+            <a:pPr algn="ctr"/>
+            <a:endParaRPr lang="az-Latn-AZ"/>
+          </a:p>
+          <a:p>
+            <a:pPr algn="ctr"/>
+            <a:r>
+              <a:rPr lang="en-US" b="1"/>
+              <a:t>Cavab (eyni qalır)</a:t>
+            </a:r>
+            <a:endParaRPr lang="en-US"/>
+          </a:p>
+        </p:txBody>
+      </p:sp>
+      <p:pic>
+        <p:nvPicPr>
+          <p:cNvPr id="10" name="Picture 9">
+            <a:extLst>
+              <a:ext uri="{FF2B5EF4-FFF2-40B4-BE49-F238E27FC236}">
+                <a16:creationId xmlns:a16="http://schemas.microsoft.com/office/drawing/2014/main" id="{D875801C-C20F-02ED-4BA3-25B175121E14}"/>
+              </a:ext>
+            </a:extLst>
+          </p:cNvPr>
+          <p:cNvPicPr>
+            <a:picLocks noChangeAspect="1"/>
+          </p:cNvPicPr>
+          <p:nvPr/>
+        </p:nvPicPr>
+        <p:blipFill>
+          <a:blip r:embed="rId4"/>
+          <a:stretch>
+            <a:fillRect/>
+          </a:stretch>
+        </p:blipFill>
+        <p:spPr>
+          <a:xfrm>
+            <a:off x="9577938" y="1780320"/>
+            <a:ext cx="2438740" cy="3724795"/>
+          </a:xfrm>
+          <a:prstGeom prst="rect">
+            <a:avLst/>
+          </a:prstGeom>
+        </p:spPr>
+      </p:pic>
     </p:spTree>
     <p:extLst>
       <p:ext uri="{BB962C8B-B14F-4D97-AF65-F5344CB8AC3E}">
@@ -9804,7 +11606,7 @@
 </p:sld>
 </file>
 
-<file path=ppt/slides/slide38.xml><?xml version="1.0" encoding="utf-8"?>
+<file path=ppt/slides/slide39.xml><?xml version="1.0" encoding="utf-8"?>
 <p:sld xmlns:a="http://schemas.openxmlformats.org/drawingml/2006/main" xmlns:r="http://schemas.openxmlformats.org/officeDocument/2006/relationships" xmlns:p="http://schemas.openxmlformats.org/presentationml/2006/main">
   <p:cSld>
     <p:spTree>
@@ -9842,7 +11644,7 @@
         <p:spPr>
           <a:xfrm>
             <a:off x="203200" y="244826"/>
-            <a:ext cx="11822545" cy="369332"/>
+            <a:ext cx="11822545" cy="4431983"/>
           </a:xfrm>
           <a:prstGeom prst="rect">
             <a:avLst/>
@@ -9856,57 +11658,244 @@
           <a:lstStyle/>
           <a:p>
             <a:r>
-              <a:rPr lang="en-US">
-                <a:latin typeface="-apple-system"/>
-              </a:rPr>
-              <a:t>.</a:t>
-            </a:r>
-            <a:endParaRPr lang="en-US"/>
+              <a:rPr lang="en-US" sz="1200" b="1"/>
+              <a:t>5. </a:t>
+            </a:r>
+            <a:r>
+              <a:rPr lang="en-US" sz="1200" b="1">
+                <a:solidFill>
+                  <a:srgbClr val="FF0000"/>
+                </a:solidFill>
+              </a:rPr>
+              <a:t>Variables (Dəyişənlər)</a:t>
+            </a:r>
+            <a:r>
+              <a:rPr lang="az-Latn-AZ" sz="1200" b="1">
+                <a:solidFill>
+                  <a:srgbClr val="FF0000"/>
+                </a:solidFill>
+              </a:rPr>
+              <a:t> </a:t>
+            </a:r>
+            <a:r>
+              <a:rPr lang="en-US" sz="1200" b="1">
+                <a:solidFill>
+                  <a:srgbClr val="FF0000"/>
+                </a:solidFill>
+              </a:rPr>
+              <a:t>Nədir? </a:t>
+            </a:r>
+            <a:endParaRPr lang="az-Latn-AZ" sz="1200" b="1">
+              <a:solidFill>
+                <a:srgbClr val="FF0000"/>
+              </a:solidFill>
+            </a:endParaRPr>
+          </a:p>
+          <a:p>
+            <a:endParaRPr lang="az-Latn-AZ" sz="1200"/>
+          </a:p>
+          <a:p>
+            <a:r>
+              <a:rPr lang="en-US" sz="1200"/>
+              <a:t>Variables, sorğularda arqumentləri dinamik şəkildə göndərməyə imkan verir. Arqumentləri birbaşa sorğuya yazmaq əvəzinə, dəyişənlərə qoyursunuz və sonra dəyərləri JSON formatında göndərirsiniz.</a:t>
+            </a:r>
+            <a:endParaRPr lang="az-Latn-AZ" sz="1200"/>
+          </a:p>
+          <a:p>
+            <a:endParaRPr lang="az-Latn-AZ" sz="1200">
+              <a:effectLst/>
+            </a:endParaRPr>
+          </a:p>
+          <a:p>
+            <a:r>
+              <a:rPr lang="en-US" sz="1200"/>
+              <a:t>GraphQL-də nümunə:</a:t>
+            </a:r>
+          </a:p>
+          <a:p>
+            <a:endParaRPr lang="az-Latn-AZ" sz="1200">
+              <a:effectLst/>
+            </a:endParaRPr>
+          </a:p>
+          <a:p>
+            <a:endParaRPr lang="az-Latn-AZ" sz="1200"/>
+          </a:p>
+          <a:p>
+            <a:endParaRPr lang="az-Latn-AZ" sz="1200">
+              <a:effectLst/>
+            </a:endParaRPr>
+          </a:p>
+          <a:p>
+            <a:endParaRPr lang="az-Latn-AZ" sz="1200"/>
+          </a:p>
+          <a:p>
+            <a:endParaRPr lang="az-Latn-AZ" sz="1200">
+              <a:effectLst/>
+            </a:endParaRPr>
+          </a:p>
+          <a:p>
+            <a:endParaRPr lang="az-Latn-AZ" sz="1200"/>
+          </a:p>
+          <a:p>
+            <a:endParaRPr lang="az-Latn-AZ" sz="1200">
+              <a:effectLst/>
+            </a:endParaRPr>
+          </a:p>
+          <a:p>
+            <a:endParaRPr lang="az-Latn-AZ" sz="1200"/>
+          </a:p>
+          <a:p>
+            <a:r>
+              <a:rPr lang="en-US" sz="1200"/>
+              <a:t>Dəyişənlər (JSON):</a:t>
+            </a:r>
+          </a:p>
+          <a:p>
+            <a:endParaRPr lang="az-Latn-AZ" sz="1200">
+              <a:effectLst/>
+            </a:endParaRPr>
+          </a:p>
+          <a:p>
+            <a:endParaRPr lang="az-Latn-AZ" sz="1200"/>
+          </a:p>
+          <a:p>
+            <a:endParaRPr lang="az-Latn-AZ" sz="1200">
+              <a:effectLst/>
+            </a:endParaRPr>
+          </a:p>
+          <a:p>
+            <a:endParaRPr lang="az-Latn-AZ" sz="1200"/>
+          </a:p>
+          <a:p>
+            <a:endParaRPr lang="az-Latn-AZ" sz="1200">
+              <a:effectLst/>
+            </a:endParaRPr>
+          </a:p>
+          <a:p>
+            <a:endParaRPr lang="az-Latn-AZ" sz="1200"/>
+          </a:p>
+          <a:p>
+            <a:r>
+              <a:rPr lang="en-US" sz="1200"/>
+              <a:t>Cavab:</a:t>
+            </a:r>
+            <a:r>
+              <a:rPr lang="az-Latn-AZ" sz="1200"/>
+              <a:t> Burada </a:t>
+            </a:r>
+            <a:r>
+              <a:rPr lang="az-Latn-AZ" sz="1200" b="1" i="1"/>
+              <a:t>$kitabId </a:t>
+            </a:r>
+            <a:r>
+              <a:rPr lang="az-Latn-AZ" sz="1200"/>
+              <a:t>dəyişəndir. Sorğunun strukturu dəyişmir, yalnız dəyişənin dəyəri dəyişir.</a:t>
+            </a:r>
+            <a:endParaRPr lang="en-US" sz="1200"/>
+          </a:p>
+          <a:p>
+            <a:endParaRPr lang="en-US" sz="1200">
+              <a:effectLst/>
+            </a:endParaRPr>
           </a:p>
         </p:txBody>
       </p:sp>
-    </p:spTree>
-    <p:extLst>
-      <p:ext uri="{BB962C8B-B14F-4D97-AF65-F5344CB8AC3E}">
-        <p14:creationId xmlns:p14="http://schemas.microsoft.com/office/powerpoint/2010/main" val="339750020"/>
-      </p:ext>
-    </p:extLst>
-  </p:cSld>
-  <p:clrMapOvr>
-    <a:masterClrMapping/>
-  </p:clrMapOvr>
-</p:sld>
-</file>
-
-<file path=ppt/slides/slide39.xml><?xml version="1.0" encoding="utf-8"?>
-<p:sld xmlns:a="http://schemas.openxmlformats.org/drawingml/2006/main" xmlns:r="http://schemas.openxmlformats.org/officeDocument/2006/relationships" xmlns:p="http://schemas.openxmlformats.org/presentationml/2006/main">
-  <p:cSld>
-    <p:spTree>
-      <p:nvGrpSpPr>
-        <p:cNvPr id="1" name="">
-          <a:extLst>
-            <a:ext uri="{FF2B5EF4-FFF2-40B4-BE49-F238E27FC236}">
-              <a16:creationId xmlns:a16="http://schemas.microsoft.com/office/drawing/2014/main" id="{41683601-35EE-A41E-3101-DF21E97ACF5C}"/>
-            </a:ext>
-          </a:extLst>
-        </p:cNvPr>
-        <p:cNvGrpSpPr/>
-        <p:nvPr/>
-      </p:nvGrpSpPr>
-      <p:grpSpPr>
-        <a:xfrm>
-          <a:off x="0" y="0"/>
-          <a:ext cx="0" cy="0"/>
-          <a:chOff x="0" y="0"/>
-          <a:chExt cx="0" cy="0"/>
-        </a:xfrm>
-      </p:grpSpPr>
+      <p:pic>
+        <p:nvPicPr>
+          <p:cNvPr id="3" name="Picture 2">
+            <a:extLst>
+              <a:ext uri="{FF2B5EF4-FFF2-40B4-BE49-F238E27FC236}">
+                <a16:creationId xmlns:a16="http://schemas.microsoft.com/office/drawing/2014/main" id="{B0D96D52-35F5-CB1F-4A41-9116A648DCB3}"/>
+              </a:ext>
+            </a:extLst>
+          </p:cNvPr>
+          <p:cNvPicPr>
+            <a:picLocks noChangeAspect="1"/>
+          </p:cNvPicPr>
+          <p:nvPr/>
+        </p:nvPicPr>
+        <p:blipFill>
+          <a:blip r:embed="rId2"/>
+          <a:stretch>
+            <a:fillRect/>
+          </a:stretch>
+        </p:blipFill>
+        <p:spPr>
+          <a:xfrm>
+            <a:off x="203201" y="1454487"/>
+            <a:ext cx="2179782" cy="1029539"/>
+          </a:xfrm>
+          <a:prstGeom prst="rect">
+            <a:avLst/>
+          </a:prstGeom>
+        </p:spPr>
+      </p:pic>
+      <p:pic>
+        <p:nvPicPr>
+          <p:cNvPr id="5" name="Picture 4">
+            <a:extLst>
+              <a:ext uri="{FF2B5EF4-FFF2-40B4-BE49-F238E27FC236}">
+                <a16:creationId xmlns:a16="http://schemas.microsoft.com/office/drawing/2014/main" id="{D294546E-450D-3D34-5E52-9E8078933994}"/>
+              </a:ext>
+            </a:extLst>
+          </p:cNvPr>
+          <p:cNvPicPr>
+            <a:picLocks noChangeAspect="1"/>
+          </p:cNvPicPr>
+          <p:nvPr/>
+        </p:nvPicPr>
+        <p:blipFill>
+          <a:blip r:embed="rId3"/>
+          <a:stretch>
+            <a:fillRect/>
+          </a:stretch>
+        </p:blipFill>
+        <p:spPr>
+          <a:xfrm>
+            <a:off x="203199" y="3104763"/>
+            <a:ext cx="1533739" cy="800212"/>
+          </a:xfrm>
+          <a:prstGeom prst="rect">
+            <a:avLst/>
+          </a:prstGeom>
+        </p:spPr>
+      </p:pic>
+      <p:pic>
+        <p:nvPicPr>
+          <p:cNvPr id="8" name="Picture 7">
+            <a:extLst>
+              <a:ext uri="{FF2B5EF4-FFF2-40B4-BE49-F238E27FC236}">
+                <a16:creationId xmlns:a16="http://schemas.microsoft.com/office/drawing/2014/main" id="{ADBF9B4E-F3DC-FCD7-CDFC-F3C68C0C3C3B}"/>
+              </a:ext>
+            </a:extLst>
+          </p:cNvPr>
+          <p:cNvPicPr>
+            <a:picLocks noChangeAspect="1"/>
+          </p:cNvPicPr>
+          <p:nvPr/>
+        </p:nvPicPr>
+        <p:blipFill>
+          <a:blip r:embed="rId4"/>
+          <a:stretch>
+            <a:fillRect/>
+          </a:stretch>
+        </p:blipFill>
+        <p:spPr>
+          <a:xfrm>
+            <a:off x="203199" y="4373975"/>
+            <a:ext cx="2324424" cy="1409897"/>
+          </a:xfrm>
+          <a:prstGeom prst="rect">
+            <a:avLst/>
+          </a:prstGeom>
+        </p:spPr>
+      </p:pic>
       <p:sp>
         <p:nvSpPr>
-          <p:cNvPr id="7" name="TextBox 6">
-            <a:extLst>
-              <a:ext uri="{FF2B5EF4-FFF2-40B4-BE49-F238E27FC236}">
-                <a16:creationId xmlns:a16="http://schemas.microsoft.com/office/drawing/2014/main" id="{5113D575-82AB-BCA6-A78F-4034562B4EB4}"/>
+          <p:cNvPr id="10" name="TextBox 9">
+            <a:extLst>
+              <a:ext uri="{FF2B5EF4-FFF2-40B4-BE49-F238E27FC236}">
+                <a16:creationId xmlns:a16="http://schemas.microsoft.com/office/drawing/2014/main" id="{10F57BB6-366F-6EE8-ED34-A436DD103AFE}"/>
               </a:ext>
             </a:extLst>
           </p:cNvPr>
@@ -9915,8 +11904,8 @@
         </p:nvSpPr>
         <p:spPr>
           <a:xfrm>
-            <a:off x="203200" y="244826"/>
-            <a:ext cx="11822545" cy="369332"/>
+            <a:off x="8418946" y="5526087"/>
+            <a:ext cx="3066471" cy="369332"/>
           </a:xfrm>
           <a:prstGeom prst="rect">
             <a:avLst/>
@@ -9929,20 +11918,76 @@
           </a:bodyPr>
           <a:lstStyle/>
           <a:p>
+            <a:pPr algn="ctr"/>
             <a:r>
               <a:rPr lang="en-US">
-                <a:latin typeface="-apple-system"/>
-              </a:rPr>
-              <a:t>.</a:t>
-            </a:r>
-            <a:endParaRPr lang="en-US"/>
+                <a:effectLst/>
+              </a:rPr>
+              <a:t>PHP-də</a:t>
+            </a:r>
+            <a:r>
+              <a:rPr lang="az-Latn-AZ">
+                <a:effectLst/>
+              </a:rPr>
+              <a:t> ( </a:t>
+            </a:r>
+            <a:r>
+              <a:rPr lang="en-US"/>
+              <a:t>execute_query.php</a:t>
+            </a:r>
+            <a:r>
+              <a:rPr lang="az-Latn-AZ"/>
+              <a:t> </a:t>
+            </a:r>
+            <a:r>
+              <a:rPr lang="az-Latn-AZ">
+                <a:effectLst/>
+              </a:rPr>
+              <a:t>)</a:t>
+            </a:r>
+            <a:r>
+              <a:rPr lang="en-US">
+                <a:effectLst/>
+              </a:rPr>
+              <a:t>:</a:t>
+            </a:r>
           </a:p>
         </p:txBody>
       </p:sp>
+      <p:pic>
+        <p:nvPicPr>
+          <p:cNvPr id="12" name="Picture 11">
+            <a:extLst>
+              <a:ext uri="{FF2B5EF4-FFF2-40B4-BE49-F238E27FC236}">
+                <a16:creationId xmlns:a16="http://schemas.microsoft.com/office/drawing/2014/main" id="{52EB2FEA-71C6-9417-1F18-353D9F13684C}"/>
+              </a:ext>
+            </a:extLst>
+          </p:cNvPr>
+          <p:cNvPicPr>
+            <a:picLocks noChangeAspect="1"/>
+          </p:cNvPicPr>
+          <p:nvPr/>
+        </p:nvPicPr>
+        <p:blipFill>
+          <a:blip r:embed="rId5"/>
+          <a:stretch>
+            <a:fillRect/>
+          </a:stretch>
+        </p:blipFill>
+        <p:spPr>
+          <a:xfrm>
+            <a:off x="7712364" y="6088596"/>
+            <a:ext cx="4479636" cy="769403"/>
+          </a:xfrm>
+          <a:prstGeom prst="rect">
+            <a:avLst/>
+          </a:prstGeom>
+        </p:spPr>
+      </p:pic>
     </p:spTree>
     <p:extLst>
       <p:ext uri="{BB962C8B-B14F-4D97-AF65-F5344CB8AC3E}">
-        <p14:creationId xmlns:p14="http://schemas.microsoft.com/office/powerpoint/2010/main" val="3995330397"/>
+        <p14:creationId xmlns:p14="http://schemas.microsoft.com/office/powerpoint/2010/main" val="339750020"/>
       </p:ext>
     </p:extLst>
   </p:cSld>
@@ -10285,7 +12330,7 @@
         <p:cNvPr id="1" name="">
           <a:extLst>
             <a:ext uri="{FF2B5EF4-FFF2-40B4-BE49-F238E27FC236}">
-              <a16:creationId xmlns:a16="http://schemas.microsoft.com/office/drawing/2014/main" id="{ACCA30F6-0963-FB90-D714-C1F0B4CC5749}"/>
+              <a16:creationId xmlns:a16="http://schemas.microsoft.com/office/drawing/2014/main" id="{41683601-35EE-A41E-3101-DF21E97ACF5C}"/>
             </a:ext>
           </a:extLst>
         </p:cNvPr>
@@ -10305,7 +12350,7 @@
           <p:cNvPr id="7" name="TextBox 6">
             <a:extLst>
               <a:ext uri="{FF2B5EF4-FFF2-40B4-BE49-F238E27FC236}">
-                <a16:creationId xmlns:a16="http://schemas.microsoft.com/office/drawing/2014/main" id="{42EE8E0D-1665-D615-06E6-B3DDC8DB077E}"/>
+                <a16:creationId xmlns:a16="http://schemas.microsoft.com/office/drawing/2014/main" id="{5113D575-82AB-BCA6-A78F-4034562B4EB4}"/>
               </a:ext>
             </a:extLst>
           </p:cNvPr>
@@ -10315,7 +12360,7 @@
         <p:spPr>
           <a:xfrm>
             <a:off x="203200" y="244826"/>
-            <a:ext cx="11822545" cy="369332"/>
+            <a:ext cx="11822545" cy="6370975"/>
           </a:xfrm>
           <a:prstGeom prst="rect">
             <a:avLst/>
@@ -10329,19 +12374,397 @@
           <a:lstStyle/>
           <a:p>
             <a:r>
-              <a:rPr lang="en-US">
+              <a:rPr lang="en-US" sz="1200">
                 <a:latin typeface="-apple-system"/>
               </a:rPr>
-              <a:t>.</a:t>
-            </a:r>
-            <a:endParaRPr lang="en-US"/>
+              <a:t>6. </a:t>
+            </a:r>
+            <a:r>
+              <a:rPr lang="en-US" sz="1200" b="1">
+                <a:solidFill>
+                  <a:srgbClr val="FF0000"/>
+                </a:solidFill>
+                <a:latin typeface="-apple-system"/>
+              </a:rPr>
+              <a:t>Directives (Direktivlər) Nədir? </a:t>
+            </a:r>
+            <a:endParaRPr lang="az-Latn-AZ" sz="1200" b="1">
+              <a:solidFill>
+                <a:srgbClr val="FF0000"/>
+              </a:solidFill>
+              <a:latin typeface="-apple-system"/>
+            </a:endParaRPr>
+          </a:p>
+          <a:p>
+            <a:endParaRPr lang="az-Latn-AZ" sz="1200">
+              <a:latin typeface="-apple-system"/>
+            </a:endParaRPr>
+          </a:p>
+          <a:p>
+            <a:r>
+              <a:rPr lang="en-US" sz="1200" b="1">
+                <a:latin typeface="-apple-system"/>
+              </a:rPr>
+              <a:t>Directives</a:t>
+            </a:r>
+            <a:r>
+              <a:rPr lang="en-US" sz="1200">
+                <a:latin typeface="-apple-system"/>
+              </a:rPr>
+              <a:t>, sorğuların və ya schemanın davranışını dəyişdirmək üçün istifadə olunan xüsusi təlimatlardır. Ən çox istifadə olunan direktivlər: </a:t>
+            </a:r>
+            <a:r>
+              <a:rPr lang="en-US" sz="1200" b="1" i="1">
+                <a:solidFill>
+                  <a:srgbClr val="00B050"/>
+                </a:solidFill>
+                <a:latin typeface="-apple-system"/>
+              </a:rPr>
+              <a:t>@include </a:t>
+            </a:r>
+            <a:r>
+              <a:rPr lang="en-US" sz="1200">
+                <a:latin typeface="-apple-system"/>
+              </a:rPr>
+              <a:t>və </a:t>
+            </a:r>
+            <a:r>
+              <a:rPr lang="en-US" sz="1200" b="1" i="1">
+                <a:solidFill>
+                  <a:srgbClr val="00B050"/>
+                </a:solidFill>
+                <a:latin typeface="-apple-system"/>
+              </a:rPr>
+              <a:t>@skip</a:t>
+            </a:r>
+            <a:r>
+              <a:rPr lang="en-US" sz="1200">
+                <a:latin typeface="-apple-system"/>
+              </a:rPr>
+              <a:t>. Bunlar müəyyən sahələri şərtə bağlı olaraq sorğuya daxil etməyə və ya çıxarmağa imkan verir.</a:t>
+            </a:r>
+            <a:endParaRPr lang="az-Latn-AZ" sz="1200">
+              <a:latin typeface="-apple-system"/>
+            </a:endParaRPr>
+          </a:p>
+          <a:p>
+            <a:endParaRPr lang="az-Latn-AZ" sz="1200">
+              <a:latin typeface="-apple-system"/>
+            </a:endParaRPr>
+          </a:p>
+          <a:p>
+            <a:r>
+              <a:rPr lang="en-US" sz="1200"/>
+              <a:t>GraphQL-də nümunə:</a:t>
+            </a:r>
+            <a:endParaRPr lang="az-Latn-AZ" sz="1200"/>
+          </a:p>
+          <a:p>
+            <a:endParaRPr lang="az-Latn-AZ" sz="1200"/>
+          </a:p>
+          <a:p>
+            <a:endParaRPr lang="az-Latn-AZ" sz="1200"/>
+          </a:p>
+          <a:p>
+            <a:endParaRPr lang="az-Latn-AZ" sz="1200"/>
+          </a:p>
+          <a:p>
+            <a:endParaRPr lang="az-Latn-AZ" sz="1200"/>
+          </a:p>
+          <a:p>
+            <a:endParaRPr lang="az-Latn-AZ" sz="1200"/>
+          </a:p>
+          <a:p>
+            <a:endParaRPr lang="az-Latn-AZ" sz="1200"/>
+          </a:p>
+          <a:p>
+            <a:endParaRPr lang="az-Latn-AZ" sz="1200"/>
+          </a:p>
+          <a:p>
+            <a:endParaRPr lang="az-Latn-AZ" sz="1200"/>
+          </a:p>
+          <a:p>
+            <a:endParaRPr lang="az-Latn-AZ" sz="1200"/>
+          </a:p>
+          <a:p>
+            <a:endParaRPr lang="az-Latn-AZ" sz="1200"/>
+          </a:p>
+          <a:p>
+            <a:r>
+              <a:rPr lang="en-US" sz="1200"/>
+              <a:t>Dəyişənlər:</a:t>
+            </a:r>
+            <a:endParaRPr lang="az-Latn-AZ" sz="1200"/>
+          </a:p>
+          <a:p>
+            <a:endParaRPr lang="az-Latn-AZ" sz="1200"/>
+          </a:p>
+          <a:p>
+            <a:endParaRPr lang="az-Latn-AZ" sz="1200"/>
+          </a:p>
+          <a:p>
+            <a:endParaRPr lang="az-Latn-AZ" sz="1200"/>
+          </a:p>
+          <a:p>
+            <a:endParaRPr lang="az-Latn-AZ" sz="1200"/>
+          </a:p>
+          <a:p>
+            <a:endParaRPr lang="az-Latn-AZ" sz="1200"/>
+          </a:p>
+          <a:p>
+            <a:r>
+              <a:rPr lang="en-US" sz="1200"/>
+              <a:t>Cavab:</a:t>
+            </a:r>
+            <a:r>
+              <a:rPr lang="az-Latn-AZ" sz="1200"/>
+              <a:t> Əgər </a:t>
+            </a:r>
+            <a:r>
+              <a:rPr lang="az-Latn-AZ" sz="1200" b="1" i="1"/>
+              <a:t>gosterMuellif</a:t>
+            </a:r>
+            <a:r>
+              <a:rPr lang="az-Latn-AZ" sz="1200"/>
+              <a:t>: </a:t>
+            </a:r>
+            <a:r>
+              <a:rPr lang="az-Latn-AZ" sz="1200" b="1" i="1"/>
+              <a:t>false</a:t>
+            </a:r>
+            <a:r>
+              <a:rPr lang="az-Latn-AZ" sz="1200"/>
+              <a:t> olarsa, </a:t>
+            </a:r>
+            <a:r>
+              <a:rPr lang="az-Latn-AZ" sz="1200" b="1"/>
+              <a:t>muellif</a:t>
+            </a:r>
+            <a:r>
+              <a:rPr lang="az-Latn-AZ" sz="1200"/>
+              <a:t> sahəsi gəlməz.</a:t>
+            </a:r>
+            <a:endParaRPr lang="en-US" sz="1200"/>
+          </a:p>
+          <a:p>
+            <a:endParaRPr lang="az-Latn-AZ" sz="1200"/>
+          </a:p>
+          <a:p>
+            <a:endParaRPr lang="az-Latn-AZ" sz="1200"/>
+          </a:p>
+          <a:p>
+            <a:endParaRPr lang="az-Latn-AZ" sz="1200"/>
+          </a:p>
+          <a:p>
+            <a:endParaRPr lang="az-Latn-AZ" sz="1200"/>
+          </a:p>
+          <a:p>
+            <a:endParaRPr lang="az-Latn-AZ" sz="1200"/>
+          </a:p>
+          <a:p>
+            <a:endParaRPr lang="az-Latn-AZ" sz="1200"/>
+          </a:p>
+          <a:p>
+            <a:endParaRPr lang="az-Latn-AZ" sz="1200"/>
+          </a:p>
+          <a:p>
+            <a:endParaRPr lang="az-Latn-AZ" sz="1200"/>
+          </a:p>
+          <a:p>
+            <a:r>
+              <a:rPr lang="en-US" sz="1200">
+                <a:highlight>
+                  <a:srgbClr val="FFFF00"/>
+                </a:highlight>
+              </a:rPr>
+              <a:t>PHP-də: Standart direktivlər (@include, @skip) GraphQL tərəfindən </a:t>
+            </a:r>
+            <a:r>
+              <a:rPr lang="en-US" sz="1200" b="1">
+                <a:highlight>
+                  <a:srgbClr val="FFFF00"/>
+                </a:highlight>
+              </a:rPr>
+              <a:t>avtomatik</a:t>
+            </a:r>
+            <a:r>
+              <a:rPr lang="en-US" sz="1200">
+                <a:highlight>
+                  <a:srgbClr val="FFFF00"/>
+                </a:highlight>
+              </a:rPr>
+              <a:t> dəstəklənir. Xüsusi direktivlər üçün (məsələn, </a:t>
+            </a:r>
+            <a:r>
+              <a:rPr lang="en-US" sz="1200" b="1" i="1">
+                <a:highlight>
+                  <a:srgbClr val="FFFF00"/>
+                </a:highlight>
+              </a:rPr>
+              <a:t>@auth</a:t>
+            </a:r>
+            <a:r>
+              <a:rPr lang="en-US" sz="1200">
+                <a:highlight>
+                  <a:srgbClr val="FFFF00"/>
+                </a:highlight>
+              </a:rPr>
+              <a:t>) </a:t>
+            </a:r>
+            <a:r>
+              <a:rPr lang="en-US" sz="1200" b="1">
+                <a:solidFill>
+                  <a:srgbClr val="C00000"/>
+                </a:solidFill>
+                <a:highlight>
+                  <a:srgbClr val="FFFF00"/>
+                </a:highlight>
+              </a:rPr>
+              <a:t>Lighthouse</a:t>
+            </a:r>
+            <a:r>
+              <a:rPr lang="en-US" sz="1200">
+                <a:highlight>
+                  <a:srgbClr val="FFFF00"/>
+                </a:highlight>
+              </a:rPr>
+              <a:t> kimi alətlərdən istifadə olunur:</a:t>
+            </a:r>
+            <a:endParaRPr lang="az-Latn-AZ" sz="1200">
+              <a:highlight>
+                <a:srgbClr val="FFFF00"/>
+              </a:highlight>
+            </a:endParaRPr>
+          </a:p>
+          <a:p>
+            <a:endParaRPr lang="en-US" sz="1200"/>
           </a:p>
         </p:txBody>
       </p:sp>
+      <p:pic>
+        <p:nvPicPr>
+          <p:cNvPr id="3" name="Picture 2">
+            <a:extLst>
+              <a:ext uri="{FF2B5EF4-FFF2-40B4-BE49-F238E27FC236}">
+                <a16:creationId xmlns:a16="http://schemas.microsoft.com/office/drawing/2014/main" id="{915165A1-D5F2-6CBF-4CEE-618D0DB228AE}"/>
+              </a:ext>
+            </a:extLst>
+          </p:cNvPr>
+          <p:cNvPicPr>
+            <a:picLocks noChangeAspect="1"/>
+          </p:cNvPicPr>
+          <p:nvPr/>
+        </p:nvPicPr>
+        <p:blipFill>
+          <a:blip r:embed="rId2"/>
+          <a:stretch>
+            <a:fillRect/>
+          </a:stretch>
+        </p:blipFill>
+        <p:spPr>
+          <a:xfrm>
+            <a:off x="203200" y="1528282"/>
+            <a:ext cx="3713018" cy="1437951"/>
+          </a:xfrm>
+          <a:prstGeom prst="rect">
+            <a:avLst/>
+          </a:prstGeom>
+        </p:spPr>
+      </p:pic>
+      <p:pic>
+        <p:nvPicPr>
+          <p:cNvPr id="5" name="Picture 4">
+            <a:extLst>
+              <a:ext uri="{FF2B5EF4-FFF2-40B4-BE49-F238E27FC236}">
+                <a16:creationId xmlns:a16="http://schemas.microsoft.com/office/drawing/2014/main" id="{212E5BD6-98F1-D8A0-1D8E-A00EF304DA8A}"/>
+              </a:ext>
+            </a:extLst>
+          </p:cNvPr>
+          <p:cNvPicPr>
+            <a:picLocks noChangeAspect="1"/>
+          </p:cNvPicPr>
+          <p:nvPr/>
+        </p:nvPicPr>
+        <p:blipFill>
+          <a:blip r:embed="rId3"/>
+          <a:stretch>
+            <a:fillRect/>
+          </a:stretch>
+        </p:blipFill>
+        <p:spPr>
+          <a:xfrm>
+            <a:off x="203200" y="3476480"/>
+            <a:ext cx="1487055" cy="602514"/>
+          </a:xfrm>
+          <a:prstGeom prst="rect">
+            <a:avLst/>
+          </a:prstGeom>
+        </p:spPr>
+      </p:pic>
+      <p:pic>
+        <p:nvPicPr>
+          <p:cNvPr id="8" name="Picture 7">
+            <a:extLst>
+              <a:ext uri="{FF2B5EF4-FFF2-40B4-BE49-F238E27FC236}">
+                <a16:creationId xmlns:a16="http://schemas.microsoft.com/office/drawing/2014/main" id="{1492CA40-7BF9-B919-B0EA-37367FA93144}"/>
+              </a:ext>
+            </a:extLst>
+          </p:cNvPr>
+          <p:cNvPicPr>
+            <a:picLocks noChangeAspect="1"/>
+          </p:cNvPicPr>
+          <p:nvPr/>
+        </p:nvPicPr>
+        <p:blipFill>
+          <a:blip r:embed="rId4"/>
+          <a:stretch>
+            <a:fillRect/>
+          </a:stretch>
+        </p:blipFill>
+        <p:spPr>
+          <a:xfrm>
+            <a:off x="203201" y="4572570"/>
+            <a:ext cx="1838036" cy="1026595"/>
+          </a:xfrm>
+          <a:prstGeom prst="rect">
+            <a:avLst/>
+          </a:prstGeom>
+        </p:spPr>
+      </p:pic>
+      <p:pic>
+        <p:nvPicPr>
+          <p:cNvPr id="10" name="Picture 9">
+            <a:extLst>
+              <a:ext uri="{FF2B5EF4-FFF2-40B4-BE49-F238E27FC236}">
+                <a16:creationId xmlns:a16="http://schemas.microsoft.com/office/drawing/2014/main" id="{8E05E3C8-7814-0C80-A825-FAC9277A33B6}"/>
+              </a:ext>
+            </a:extLst>
+          </p:cNvPr>
+          <p:cNvPicPr>
+            <a:picLocks noChangeAspect="1"/>
+          </p:cNvPicPr>
+          <p:nvPr/>
+        </p:nvPicPr>
+        <p:blipFill>
+          <a:blip r:embed="rId5"/>
+          <a:stretch>
+            <a:fillRect/>
+          </a:stretch>
+        </p:blipFill>
+        <p:spPr>
+          <a:xfrm>
+            <a:off x="9938327" y="6192442"/>
+            <a:ext cx="2253673" cy="665558"/>
+          </a:xfrm>
+          <a:prstGeom prst="rect">
+            <a:avLst/>
+          </a:prstGeom>
+        </p:spPr>
+      </p:pic>
     </p:spTree>
     <p:extLst>
       <p:ext uri="{BB962C8B-B14F-4D97-AF65-F5344CB8AC3E}">
-        <p14:creationId xmlns:p14="http://schemas.microsoft.com/office/powerpoint/2010/main" val="3320984800"/>
+        <p14:creationId xmlns:p14="http://schemas.microsoft.com/office/powerpoint/2010/main" val="3995330397"/>
       </p:ext>
     </p:extLst>
   </p:cSld>
@@ -10463,7 +12886,7 @@
         <p:spPr>
           <a:xfrm>
             <a:off x="203200" y="244826"/>
-            <a:ext cx="11822545" cy="369332"/>
+            <a:ext cx="11822545" cy="923330"/>
           </a:xfrm>
           <a:prstGeom prst="rect">
             <a:avLst/>
@@ -10477,15 +12900,82 @@
           <a:lstStyle/>
           <a:p>
             <a:r>
-              <a:rPr lang="en-US">
+              <a:rPr lang="az-Latn-AZ">
                 <a:latin typeface="-apple-system"/>
               </a:rPr>
-              <a:t>.</a:t>
+              <a:t>Teoriyadan sonra Praktikaya keçək ancaq ola bilərki biraz uzun çəksin.</a:t>
+            </a:r>
+          </a:p>
+          <a:p>
+            <a:endParaRPr lang="az-Latn-AZ">
+              <a:latin typeface="-apple-system"/>
+            </a:endParaRPr>
+          </a:p>
+          <a:p>
+            <a:r>
+              <a:rPr lang="az-Latn-AZ">
+                <a:latin typeface="-apple-system"/>
+              </a:rPr>
+              <a:t>Əgər </a:t>
+            </a:r>
+            <a:r>
+              <a:rPr lang="az-Latn-AZ" b="1">
+                <a:latin typeface="-apple-system"/>
+              </a:rPr>
+              <a:t>Vscode</a:t>
+            </a:r>
+            <a:r>
+              <a:rPr lang="az-Latn-AZ">
+                <a:latin typeface="-apple-system"/>
+              </a:rPr>
+              <a:t> -da işləyəcəyiksə onda bizə belə bir </a:t>
+            </a:r>
+            <a:r>
+              <a:rPr lang="az-Latn-AZ" b="1">
+                <a:latin typeface="-apple-system"/>
+              </a:rPr>
+              <a:t>Extension</a:t>
+            </a:r>
+            <a:r>
+              <a:rPr lang="az-Latn-AZ">
+                <a:latin typeface="-apple-system"/>
+              </a:rPr>
+              <a:t> lazımdır.</a:t>
             </a:r>
             <a:endParaRPr lang="en-US"/>
           </a:p>
         </p:txBody>
       </p:sp>
+      <p:pic>
+        <p:nvPicPr>
+          <p:cNvPr id="3" name="Picture 2">
+            <a:extLst>
+              <a:ext uri="{FF2B5EF4-FFF2-40B4-BE49-F238E27FC236}">
+                <a16:creationId xmlns:a16="http://schemas.microsoft.com/office/drawing/2014/main" id="{2D0EC875-A4E1-112E-648D-E54969B01868}"/>
+              </a:ext>
+            </a:extLst>
+          </p:cNvPr>
+          <p:cNvPicPr>
+            <a:picLocks noChangeAspect="1"/>
+          </p:cNvPicPr>
+          <p:nvPr/>
+        </p:nvPicPr>
+        <p:blipFill>
+          <a:blip r:embed="rId2"/>
+          <a:stretch>
+            <a:fillRect/>
+          </a:stretch>
+        </p:blipFill>
+        <p:spPr>
+          <a:xfrm>
+            <a:off x="2960448" y="1893455"/>
+            <a:ext cx="9231552" cy="4964545"/>
+          </a:xfrm>
+          <a:prstGeom prst="rect">
+            <a:avLst/>
+          </a:prstGeom>
+        </p:spPr>
+      </p:pic>
     </p:spTree>
     <p:extLst>
       <p:ext uri="{BB962C8B-B14F-4D97-AF65-F5344CB8AC3E}">
@@ -10537,7 +13027,7 @@
         <p:spPr>
           <a:xfrm>
             <a:off x="203200" y="244826"/>
-            <a:ext cx="11822545" cy="369332"/>
+            <a:ext cx="11822545" cy="338554"/>
           </a:xfrm>
           <a:prstGeom prst="rect">
             <a:avLst/>
@@ -10551,15 +13041,75 @@
           <a:lstStyle/>
           <a:p>
             <a:r>
-              <a:rPr lang="en-US">
+              <a:rPr lang="az-Latn-AZ" sz="1600">
                 <a:latin typeface="-apple-system"/>
               </a:rPr>
-              <a:t>.</a:t>
-            </a:r>
-            <a:endParaRPr lang="en-US"/>
+              <a:t>Extension ilə və olmadan kod nümunəsi aşağıdakı kimi görsənəcək. Hələki bu kodlarını hansı faylda yaratdığımıza fikir verməyin.</a:t>
+            </a:r>
+            <a:endParaRPr lang="en-US" sz="1600"/>
           </a:p>
         </p:txBody>
       </p:sp>
+      <p:pic>
+        <p:nvPicPr>
+          <p:cNvPr id="3" name="Picture 2">
+            <a:extLst>
+              <a:ext uri="{FF2B5EF4-FFF2-40B4-BE49-F238E27FC236}">
+                <a16:creationId xmlns:a16="http://schemas.microsoft.com/office/drawing/2014/main" id="{D856944A-9A80-A6C5-A0C1-33CBCADAE831}"/>
+              </a:ext>
+            </a:extLst>
+          </p:cNvPr>
+          <p:cNvPicPr>
+            <a:picLocks noChangeAspect="1"/>
+          </p:cNvPicPr>
+          <p:nvPr/>
+        </p:nvPicPr>
+        <p:blipFill>
+          <a:blip r:embed="rId2"/>
+          <a:stretch>
+            <a:fillRect/>
+          </a:stretch>
+        </p:blipFill>
+        <p:spPr>
+          <a:xfrm>
+            <a:off x="769428" y="2595446"/>
+            <a:ext cx="3153215" cy="1648055"/>
+          </a:xfrm>
+          <a:prstGeom prst="rect">
+            <a:avLst/>
+          </a:prstGeom>
+        </p:spPr>
+      </p:pic>
+      <p:pic>
+        <p:nvPicPr>
+          <p:cNvPr id="5" name="Picture 4">
+            <a:extLst>
+              <a:ext uri="{FF2B5EF4-FFF2-40B4-BE49-F238E27FC236}">
+                <a16:creationId xmlns:a16="http://schemas.microsoft.com/office/drawing/2014/main" id="{84625BB2-C725-771F-07A1-FADEF1FF7391}"/>
+              </a:ext>
+            </a:extLst>
+          </p:cNvPr>
+          <p:cNvPicPr>
+            <a:picLocks noChangeAspect="1"/>
+          </p:cNvPicPr>
+          <p:nvPr/>
+        </p:nvPicPr>
+        <p:blipFill>
+          <a:blip r:embed="rId3"/>
+          <a:stretch>
+            <a:fillRect/>
+          </a:stretch>
+        </p:blipFill>
+        <p:spPr>
+          <a:xfrm>
+            <a:off x="7439533" y="2604972"/>
+            <a:ext cx="3057952" cy="1638529"/>
+          </a:xfrm>
+          <a:prstGeom prst="rect">
+            <a:avLst/>
+          </a:prstGeom>
+        </p:spPr>
+      </p:pic>
     </p:spTree>
     <p:extLst>
       <p:ext uri="{BB962C8B-B14F-4D97-AF65-F5344CB8AC3E}">
@@ -10581,7 +13131,7 @@
         <p:cNvPr id="1" name="">
           <a:extLst>
             <a:ext uri="{FF2B5EF4-FFF2-40B4-BE49-F238E27FC236}">
-              <a16:creationId xmlns:a16="http://schemas.microsoft.com/office/drawing/2014/main" id="{A60984CA-B6DB-CEC2-8919-295542B87476}"/>
+              <a16:creationId xmlns:a16="http://schemas.microsoft.com/office/drawing/2014/main" id="{7F65968C-D118-B296-5DD8-6A35F462FCB3}"/>
             </a:ext>
           </a:extLst>
         </p:cNvPr>
@@ -10601,7 +13151,7 @@
           <p:cNvPr id="7" name="TextBox 6">
             <a:extLst>
               <a:ext uri="{FF2B5EF4-FFF2-40B4-BE49-F238E27FC236}">
-                <a16:creationId xmlns:a16="http://schemas.microsoft.com/office/drawing/2014/main" id="{599287B6-599A-4818-CE12-FF7790445F2D}"/>
+                <a16:creationId xmlns:a16="http://schemas.microsoft.com/office/drawing/2014/main" id="{A6A9CE8D-80FD-E575-299D-D5F8A1C1BEB1}"/>
               </a:ext>
             </a:extLst>
           </p:cNvPr>
@@ -10625,19 +13175,63 @@
           <a:lstStyle/>
           <a:p>
             <a:r>
-              <a:rPr lang="en-US">
+              <a:rPr lang="az-Latn-AZ">
                 <a:latin typeface="-apple-system"/>
               </a:rPr>
-              <a:t>.</a:t>
+              <a:t>GraphQL ilə REST arasındakı fərq.</a:t>
             </a:r>
             <a:endParaRPr lang="en-US"/>
           </a:p>
         </p:txBody>
       </p:sp>
+      <p:pic>
+        <p:nvPicPr>
+          <p:cNvPr id="3" name="Picture 2">
+            <a:extLst>
+              <a:ext uri="{FF2B5EF4-FFF2-40B4-BE49-F238E27FC236}">
+                <a16:creationId xmlns:a16="http://schemas.microsoft.com/office/drawing/2014/main" id="{259A4D11-C0D7-3AAF-B237-48ECC0F21217}"/>
+              </a:ext>
+            </a:extLst>
+          </p:cNvPr>
+          <p:cNvPicPr>
+            <a:picLocks noChangeAspect="1"/>
+          </p:cNvPicPr>
+          <p:nvPr/>
+        </p:nvPicPr>
+        <p:blipFill>
+          <a:blip r:embed="rId2"/>
+          <a:stretch>
+            <a:fillRect/>
+          </a:stretch>
+        </p:blipFill>
+        <p:spPr>
+          <a:xfrm>
+            <a:off x="1113439" y="1257824"/>
+            <a:ext cx="9983593" cy="4896533"/>
+          </a:xfrm>
+          <a:prstGeom prst="rect">
+            <a:avLst/>
+          </a:prstGeom>
+          <a:ln w="38100" cap="sq">
+            <a:solidFill>
+              <a:srgbClr val="000000"/>
+            </a:solidFill>
+            <a:prstDash val="solid"/>
+            <a:miter lim="800000"/>
+          </a:ln>
+          <a:effectLst>
+            <a:outerShdw blurRad="50800" dist="38100" dir="2700000" algn="tl" rotWithShape="0">
+              <a:srgbClr val="000000">
+                <a:alpha val="43000"/>
+              </a:srgbClr>
+            </a:outerShdw>
+          </a:effectLst>
+        </p:spPr>
+      </p:pic>
     </p:spTree>
     <p:extLst>
       <p:ext uri="{BB962C8B-B14F-4D97-AF65-F5344CB8AC3E}">
-        <p14:creationId xmlns:p14="http://schemas.microsoft.com/office/powerpoint/2010/main" val="2189422531"/>
+        <p14:creationId xmlns:p14="http://schemas.microsoft.com/office/powerpoint/2010/main" val="2747823522"/>
       </p:ext>
     </p:extLst>
   </p:cSld>
@@ -10655,7 +13249,7 @@
         <p:cNvPr id="1" name="">
           <a:extLst>
             <a:ext uri="{FF2B5EF4-FFF2-40B4-BE49-F238E27FC236}">
-              <a16:creationId xmlns:a16="http://schemas.microsoft.com/office/drawing/2014/main" id="{DB5E0A76-F990-583B-6C0C-5B5B487F045B}"/>
+              <a16:creationId xmlns:a16="http://schemas.microsoft.com/office/drawing/2014/main" id="{2B0E2919-C4CF-EF47-5241-85FEDF7DC751}"/>
             </a:ext>
           </a:extLst>
         </p:cNvPr>
@@ -10675,7 +13269,324 @@
           <p:cNvPr id="7" name="TextBox 6">
             <a:extLst>
               <a:ext uri="{FF2B5EF4-FFF2-40B4-BE49-F238E27FC236}">
-                <a16:creationId xmlns:a16="http://schemas.microsoft.com/office/drawing/2014/main" id="{01603ED3-7FA6-7B0D-9DAE-145D2D56BCB8}"/>
+                <a16:creationId xmlns:a16="http://schemas.microsoft.com/office/drawing/2014/main" id="{89CE49FA-55C0-CE3D-302A-8E6419D87624}"/>
+              </a:ext>
+            </a:extLst>
+          </p:cNvPr>
+          <p:cNvSpPr txBox="1"/>
+          <p:nvPr/>
+        </p:nvSpPr>
+        <p:spPr>
+          <a:xfrm>
+            <a:off x="203200" y="244826"/>
+            <a:ext cx="11822545" cy="646331"/>
+          </a:xfrm>
+          <a:prstGeom prst="rect">
+            <a:avLst/>
+          </a:prstGeom>
+          <a:noFill/>
+        </p:spPr>
+        <p:txBody>
+          <a:bodyPr wrap="square">
+            <a:spAutoFit/>
+          </a:bodyPr>
+          <a:lstStyle/>
+          <a:p>
+            <a:r>
+              <a:rPr lang="az-Latn-AZ">
+                <a:latin typeface="-apple-system"/>
+              </a:rPr>
+              <a:t>Tətbiqi yaratmağa başlamadan əvvəl onun Sxemasını qurmaq lazımdır. Bu sxemaya əsasən həm </a:t>
+            </a:r>
+            <a:r>
+              <a:rPr lang="az-Latn-AZ" b="1">
+                <a:latin typeface="-apple-system"/>
+              </a:rPr>
+              <a:t>FrontEnd</a:t>
+            </a:r>
+            <a:r>
+              <a:rPr lang="az-Latn-AZ">
+                <a:latin typeface="-apple-system"/>
+              </a:rPr>
+              <a:t> həm </a:t>
+            </a:r>
+            <a:r>
+              <a:rPr lang="az-Latn-AZ" b="1">
+                <a:latin typeface="-apple-system"/>
+              </a:rPr>
+              <a:t>BackEnd</a:t>
+            </a:r>
+            <a:r>
+              <a:rPr lang="az-Latn-AZ">
+                <a:latin typeface="-apple-system"/>
+              </a:rPr>
+              <a:t> proqramistləri, görəcəkləri işlər haqqında əvvəlcədən məlumatlı olurlar.</a:t>
+            </a:r>
+            <a:endParaRPr lang="en-US"/>
+          </a:p>
+        </p:txBody>
+      </p:sp>
+      <p:pic>
+        <p:nvPicPr>
+          <p:cNvPr id="3" name="Picture 2">
+            <a:extLst>
+              <a:ext uri="{FF2B5EF4-FFF2-40B4-BE49-F238E27FC236}">
+                <a16:creationId xmlns:a16="http://schemas.microsoft.com/office/drawing/2014/main" id="{392D6A38-D0BF-7341-1EB9-1713F5E51F6F}"/>
+              </a:ext>
+            </a:extLst>
+          </p:cNvPr>
+          <p:cNvPicPr>
+            <a:picLocks noChangeAspect="1"/>
+          </p:cNvPicPr>
+          <p:nvPr/>
+        </p:nvPicPr>
+        <p:blipFill>
+          <a:blip r:embed="rId2"/>
+          <a:stretch>
+            <a:fillRect/>
+          </a:stretch>
+        </p:blipFill>
+        <p:spPr>
+          <a:xfrm>
+            <a:off x="299228" y="1621377"/>
+            <a:ext cx="11593543" cy="4991797"/>
+          </a:xfrm>
+          <a:prstGeom prst="rect">
+            <a:avLst/>
+          </a:prstGeom>
+        </p:spPr>
+      </p:pic>
+    </p:spTree>
+    <p:extLst>
+      <p:ext uri="{BB962C8B-B14F-4D97-AF65-F5344CB8AC3E}">
+        <p14:creationId xmlns:p14="http://schemas.microsoft.com/office/powerpoint/2010/main" val="3673694777"/>
+      </p:ext>
+    </p:extLst>
+  </p:cSld>
+  <p:clrMapOvr>
+    <a:masterClrMapping/>
+  </p:clrMapOvr>
+</p:sld>
+</file>
+
+<file path=ppt/slides/slide46.xml><?xml version="1.0" encoding="utf-8"?>
+<p:sld xmlns:a="http://schemas.openxmlformats.org/drawingml/2006/main" xmlns:r="http://schemas.openxmlformats.org/officeDocument/2006/relationships" xmlns:p="http://schemas.openxmlformats.org/presentationml/2006/main">
+  <p:cSld>
+    <p:spTree>
+      <p:nvGrpSpPr>
+        <p:cNvPr id="1" name="">
+          <a:extLst>
+            <a:ext uri="{FF2B5EF4-FFF2-40B4-BE49-F238E27FC236}">
+              <a16:creationId xmlns:a16="http://schemas.microsoft.com/office/drawing/2014/main" id="{17FCC70D-DB98-E4A5-0986-A2ECC15EEA6B}"/>
+            </a:ext>
+          </a:extLst>
+        </p:cNvPr>
+        <p:cNvGrpSpPr/>
+        <p:nvPr/>
+      </p:nvGrpSpPr>
+      <p:grpSpPr>
+        <a:xfrm>
+          <a:off x="0" y="0"/>
+          <a:ext cx="0" cy="0"/>
+          <a:chOff x="0" y="0"/>
+          <a:chExt cx="0" cy="0"/>
+        </a:xfrm>
+      </p:grpSpPr>
+      <p:sp>
+        <p:nvSpPr>
+          <p:cNvPr id="7" name="TextBox 6">
+            <a:extLst>
+              <a:ext uri="{FF2B5EF4-FFF2-40B4-BE49-F238E27FC236}">
+                <a16:creationId xmlns:a16="http://schemas.microsoft.com/office/drawing/2014/main" id="{B7677386-1F20-6409-3663-861A98599028}"/>
+              </a:ext>
+            </a:extLst>
+          </p:cNvPr>
+          <p:cNvSpPr txBox="1"/>
+          <p:nvPr/>
+        </p:nvSpPr>
+        <p:spPr>
+          <a:xfrm>
+            <a:off x="203200" y="244826"/>
+            <a:ext cx="11822545" cy="923330"/>
+          </a:xfrm>
+          <a:prstGeom prst="rect">
+            <a:avLst/>
+          </a:prstGeom>
+          <a:noFill/>
+        </p:spPr>
+        <p:txBody>
+          <a:bodyPr wrap="square">
+            <a:spAutoFit/>
+          </a:bodyPr>
+          <a:lstStyle/>
+          <a:p>
+            <a:r>
+              <a:rPr lang="az-Latn-AZ">
+                <a:latin typeface="-apple-system"/>
+              </a:rPr>
+              <a:t>Quracağımız tətbiqin adı NotesApp olacaq. Şəkildəndə görüldüyü kimi 2 cədvəl var. </a:t>
+            </a:r>
+            <a:r>
+              <a:rPr lang="az-Latn-AZ" b="1">
+                <a:latin typeface="-apple-system"/>
+              </a:rPr>
+              <a:t>Note</a:t>
+            </a:r>
+            <a:r>
+              <a:rPr lang="az-Latn-AZ">
+                <a:latin typeface="-apple-system"/>
+              </a:rPr>
+              <a:t> və </a:t>
+            </a:r>
+            <a:r>
+              <a:rPr lang="az-Latn-AZ" b="1">
+                <a:latin typeface="-apple-system"/>
+              </a:rPr>
+              <a:t>Author</a:t>
+            </a:r>
+            <a:r>
+              <a:rPr lang="az-Latn-AZ">
+                <a:latin typeface="-apple-system"/>
+              </a:rPr>
+              <a:t>. </a:t>
+            </a:r>
+          </a:p>
+          <a:p>
+            <a:endParaRPr lang="az-Latn-AZ">
+              <a:latin typeface="-apple-system"/>
+            </a:endParaRPr>
+          </a:p>
+          <a:p>
+            <a:r>
+              <a:rPr lang="az-Latn-AZ">
+                <a:latin typeface="-apple-system"/>
+              </a:rPr>
+              <a:t>Hər </a:t>
+            </a:r>
+            <a:r>
+              <a:rPr lang="az-Latn-AZ" b="1">
+                <a:latin typeface="-apple-system"/>
+              </a:rPr>
+              <a:t>Auhtor</a:t>
+            </a:r>
+            <a:r>
+              <a:rPr lang="az-Latn-AZ">
+                <a:latin typeface="-apple-system"/>
+              </a:rPr>
+              <a:t> isə </a:t>
+            </a:r>
+            <a:r>
+              <a:rPr lang="az-Latn-AZ" b="1">
+                <a:latin typeface="-apple-system"/>
+              </a:rPr>
+              <a:t>Note</a:t>
+            </a:r>
+            <a:r>
+              <a:rPr lang="az-Latn-AZ">
+                <a:latin typeface="-apple-system"/>
+              </a:rPr>
+              <a:t> -a bağlıdır. Bunun üçündə </a:t>
+            </a:r>
+            <a:r>
+              <a:rPr lang="az-Latn-AZ" b="1">
+                <a:latin typeface="-apple-system"/>
+              </a:rPr>
+              <a:t>Note</a:t>
+            </a:r>
+            <a:r>
+              <a:rPr lang="az-Latn-AZ">
+                <a:latin typeface="-apple-system"/>
+              </a:rPr>
+              <a:t> cədvəlində `</a:t>
+            </a:r>
+            <a:r>
+              <a:rPr lang="az-Latn-AZ" b="1">
+                <a:latin typeface="-apple-system"/>
+              </a:rPr>
+              <a:t>authorİd</a:t>
+            </a:r>
+            <a:r>
+              <a:rPr lang="az-Latn-AZ">
+                <a:latin typeface="-apple-system"/>
+              </a:rPr>
+              <a:t>` adında bir sütunumuz olacaq.</a:t>
+            </a:r>
+            <a:endParaRPr lang="en-US"/>
+          </a:p>
+        </p:txBody>
+      </p:sp>
+      <p:pic>
+        <p:nvPicPr>
+          <p:cNvPr id="3" name="Picture 2">
+            <a:extLst>
+              <a:ext uri="{FF2B5EF4-FFF2-40B4-BE49-F238E27FC236}">
+                <a16:creationId xmlns:a16="http://schemas.microsoft.com/office/drawing/2014/main" id="{21408253-B249-F5AB-30FC-38D173A84663}"/>
+              </a:ext>
+            </a:extLst>
+          </p:cNvPr>
+          <p:cNvPicPr>
+            <a:picLocks noChangeAspect="1"/>
+          </p:cNvPicPr>
+          <p:nvPr/>
+        </p:nvPicPr>
+        <p:blipFill>
+          <a:blip r:embed="rId2"/>
+          <a:stretch>
+            <a:fillRect/>
+          </a:stretch>
+        </p:blipFill>
+        <p:spPr>
+          <a:xfrm>
+            <a:off x="1016313" y="1577950"/>
+            <a:ext cx="9993120" cy="4496427"/>
+          </a:xfrm>
+          <a:prstGeom prst="rect">
+            <a:avLst/>
+          </a:prstGeom>
+        </p:spPr>
+      </p:pic>
+    </p:spTree>
+    <p:extLst>
+      <p:ext uri="{BB962C8B-B14F-4D97-AF65-F5344CB8AC3E}">
+        <p14:creationId xmlns:p14="http://schemas.microsoft.com/office/powerpoint/2010/main" val="3121503004"/>
+      </p:ext>
+    </p:extLst>
+  </p:cSld>
+  <p:clrMapOvr>
+    <a:masterClrMapping/>
+  </p:clrMapOvr>
+</p:sld>
+</file>
+
+<file path=ppt/slides/slide47.xml><?xml version="1.0" encoding="utf-8"?>
+<p:sld xmlns:a="http://schemas.openxmlformats.org/drawingml/2006/main" xmlns:r="http://schemas.openxmlformats.org/officeDocument/2006/relationships" xmlns:p="http://schemas.openxmlformats.org/presentationml/2006/main">
+  <p:cSld>
+    <p:spTree>
+      <p:nvGrpSpPr>
+        <p:cNvPr id="1" name="">
+          <a:extLst>
+            <a:ext uri="{FF2B5EF4-FFF2-40B4-BE49-F238E27FC236}">
+              <a16:creationId xmlns:a16="http://schemas.microsoft.com/office/drawing/2014/main" id="{D602DB91-8217-92A1-CB1F-236F1E4188E2}"/>
+            </a:ext>
+          </a:extLst>
+        </p:cNvPr>
+        <p:cNvGrpSpPr/>
+        <p:nvPr/>
+      </p:nvGrpSpPr>
+      <p:grpSpPr>
+        <a:xfrm>
+          <a:off x="0" y="0"/>
+          <a:ext cx="0" cy="0"/>
+          <a:chOff x="0" y="0"/>
+          <a:chExt cx="0" cy="0"/>
+        </a:xfrm>
+      </p:grpSpPr>
+      <p:sp>
+        <p:nvSpPr>
+          <p:cNvPr id="7" name="TextBox 6">
+            <a:extLst>
+              <a:ext uri="{FF2B5EF4-FFF2-40B4-BE49-F238E27FC236}">
+                <a16:creationId xmlns:a16="http://schemas.microsoft.com/office/drawing/2014/main" id="{F89B0AEB-00B1-65DD-BCA0-402A012CCBBE}"/>
               </a:ext>
             </a:extLst>
           </p:cNvPr>
@@ -10711,7 +13622,7 @@
     </p:spTree>
     <p:extLst>
       <p:ext uri="{BB962C8B-B14F-4D97-AF65-F5344CB8AC3E}">
-        <p14:creationId xmlns:p14="http://schemas.microsoft.com/office/powerpoint/2010/main" val="571673239"/>
+        <p14:creationId xmlns:p14="http://schemas.microsoft.com/office/powerpoint/2010/main" val="1376956715"/>
       </p:ext>
     </p:extLst>
   </p:cSld>
@@ -10721,7 +13632,7 @@
 </p:sld>
 </file>
 
-<file path=ppt/slides/slide46.xml><?xml version="1.0" encoding="utf-8"?>
+<file path=ppt/slides/slide48.xml><?xml version="1.0" encoding="utf-8"?>
 <p:sld xmlns:a="http://schemas.openxmlformats.org/drawingml/2006/main" xmlns:r="http://schemas.openxmlformats.org/officeDocument/2006/relationships" xmlns:p="http://schemas.openxmlformats.org/presentationml/2006/main">
   <p:cSld>
     <p:spTree>
@@ -10729,7 +13640,7 @@
         <p:cNvPr id="1" name="">
           <a:extLst>
             <a:ext uri="{FF2B5EF4-FFF2-40B4-BE49-F238E27FC236}">
-              <a16:creationId xmlns:a16="http://schemas.microsoft.com/office/drawing/2014/main" id="{D1F05FAD-154F-7394-1819-F09B8141466E}"/>
+              <a16:creationId xmlns:a16="http://schemas.microsoft.com/office/drawing/2014/main" id="{E94BDA04-3012-A75C-F562-46875C70C615}"/>
             </a:ext>
           </a:extLst>
         </p:cNvPr>
@@ -10749,7 +13660,7 @@
           <p:cNvPr id="7" name="TextBox 6">
             <a:extLst>
               <a:ext uri="{FF2B5EF4-FFF2-40B4-BE49-F238E27FC236}">
-                <a16:creationId xmlns:a16="http://schemas.microsoft.com/office/drawing/2014/main" id="{A431E858-D76B-AD72-9AD4-E9890C9FA522}"/>
+                <a16:creationId xmlns:a16="http://schemas.microsoft.com/office/drawing/2014/main" id="{5C5AB81D-F502-01C2-655B-8DF9008917F4}"/>
               </a:ext>
             </a:extLst>
           </p:cNvPr>
@@ -10785,7 +13696,81 @@
     </p:spTree>
     <p:extLst>
       <p:ext uri="{BB962C8B-B14F-4D97-AF65-F5344CB8AC3E}">
-        <p14:creationId xmlns:p14="http://schemas.microsoft.com/office/powerpoint/2010/main" val="656003231"/>
+        <p14:creationId xmlns:p14="http://schemas.microsoft.com/office/powerpoint/2010/main" val="511988989"/>
+      </p:ext>
+    </p:extLst>
+  </p:cSld>
+  <p:clrMapOvr>
+    <a:masterClrMapping/>
+  </p:clrMapOvr>
+</p:sld>
+</file>
+
+<file path=ppt/slides/slide49.xml><?xml version="1.0" encoding="utf-8"?>
+<p:sld xmlns:a="http://schemas.openxmlformats.org/drawingml/2006/main" xmlns:r="http://schemas.openxmlformats.org/officeDocument/2006/relationships" xmlns:p="http://schemas.openxmlformats.org/presentationml/2006/main">
+  <p:cSld>
+    <p:spTree>
+      <p:nvGrpSpPr>
+        <p:cNvPr id="1" name="">
+          <a:extLst>
+            <a:ext uri="{FF2B5EF4-FFF2-40B4-BE49-F238E27FC236}">
+              <a16:creationId xmlns:a16="http://schemas.microsoft.com/office/drawing/2014/main" id="{E8F92B11-0A5B-E0B2-C868-70501656E906}"/>
+            </a:ext>
+          </a:extLst>
+        </p:cNvPr>
+        <p:cNvGrpSpPr/>
+        <p:nvPr/>
+      </p:nvGrpSpPr>
+      <p:grpSpPr>
+        <a:xfrm>
+          <a:off x="0" y="0"/>
+          <a:ext cx="0" cy="0"/>
+          <a:chOff x="0" y="0"/>
+          <a:chExt cx="0" cy="0"/>
+        </a:xfrm>
+      </p:grpSpPr>
+      <p:sp>
+        <p:nvSpPr>
+          <p:cNvPr id="7" name="TextBox 6">
+            <a:extLst>
+              <a:ext uri="{FF2B5EF4-FFF2-40B4-BE49-F238E27FC236}">
+                <a16:creationId xmlns:a16="http://schemas.microsoft.com/office/drawing/2014/main" id="{7664477A-D040-6469-95FE-70ABDDE57CEB}"/>
+              </a:ext>
+            </a:extLst>
+          </p:cNvPr>
+          <p:cNvSpPr txBox="1"/>
+          <p:nvPr/>
+        </p:nvSpPr>
+        <p:spPr>
+          <a:xfrm>
+            <a:off x="203200" y="244826"/>
+            <a:ext cx="11822545" cy="369332"/>
+          </a:xfrm>
+          <a:prstGeom prst="rect">
+            <a:avLst/>
+          </a:prstGeom>
+          <a:noFill/>
+        </p:spPr>
+        <p:txBody>
+          <a:bodyPr wrap="square">
+            <a:spAutoFit/>
+          </a:bodyPr>
+          <a:lstStyle/>
+          <a:p>
+            <a:r>
+              <a:rPr lang="en-US">
+                <a:latin typeface="-apple-system"/>
+              </a:rPr>
+              <a:t>.</a:t>
+            </a:r>
+            <a:endParaRPr lang="en-US"/>
+          </a:p>
+        </p:txBody>
+      </p:sp>
+    </p:spTree>
+    <p:extLst>
+      <p:ext uri="{BB962C8B-B14F-4D97-AF65-F5344CB8AC3E}">
+        <p14:creationId xmlns:p14="http://schemas.microsoft.com/office/powerpoint/2010/main" val="2357361739"/>
       </p:ext>
     </p:extLst>
   </p:cSld>
@@ -11154,6 +14139,746 @@
     <p:extLst>
       <p:ext uri="{BB962C8B-B14F-4D97-AF65-F5344CB8AC3E}">
         <p14:creationId xmlns:p14="http://schemas.microsoft.com/office/powerpoint/2010/main" val="1537972331"/>
+      </p:ext>
+    </p:extLst>
+  </p:cSld>
+  <p:clrMapOvr>
+    <a:masterClrMapping/>
+  </p:clrMapOvr>
+</p:sld>
+</file>
+
+<file path=ppt/slides/slide50.xml><?xml version="1.0" encoding="utf-8"?>
+<p:sld xmlns:a="http://schemas.openxmlformats.org/drawingml/2006/main" xmlns:r="http://schemas.openxmlformats.org/officeDocument/2006/relationships" xmlns:p="http://schemas.openxmlformats.org/presentationml/2006/main">
+  <p:cSld>
+    <p:spTree>
+      <p:nvGrpSpPr>
+        <p:cNvPr id="1" name="">
+          <a:extLst>
+            <a:ext uri="{FF2B5EF4-FFF2-40B4-BE49-F238E27FC236}">
+              <a16:creationId xmlns:a16="http://schemas.microsoft.com/office/drawing/2014/main" id="{92EAB921-F113-27A4-9931-EC01805AB1B6}"/>
+            </a:ext>
+          </a:extLst>
+        </p:cNvPr>
+        <p:cNvGrpSpPr/>
+        <p:nvPr/>
+      </p:nvGrpSpPr>
+      <p:grpSpPr>
+        <a:xfrm>
+          <a:off x="0" y="0"/>
+          <a:ext cx="0" cy="0"/>
+          <a:chOff x="0" y="0"/>
+          <a:chExt cx="0" cy="0"/>
+        </a:xfrm>
+      </p:grpSpPr>
+      <p:sp>
+        <p:nvSpPr>
+          <p:cNvPr id="7" name="TextBox 6">
+            <a:extLst>
+              <a:ext uri="{FF2B5EF4-FFF2-40B4-BE49-F238E27FC236}">
+                <a16:creationId xmlns:a16="http://schemas.microsoft.com/office/drawing/2014/main" id="{89FE18AD-D81D-CF69-D716-E8EFFF0A1AA9}"/>
+              </a:ext>
+            </a:extLst>
+          </p:cNvPr>
+          <p:cNvSpPr txBox="1"/>
+          <p:nvPr/>
+        </p:nvSpPr>
+        <p:spPr>
+          <a:xfrm>
+            <a:off x="203200" y="244826"/>
+            <a:ext cx="11822545" cy="369332"/>
+          </a:xfrm>
+          <a:prstGeom prst="rect">
+            <a:avLst/>
+          </a:prstGeom>
+          <a:noFill/>
+        </p:spPr>
+        <p:txBody>
+          <a:bodyPr wrap="square">
+            <a:spAutoFit/>
+          </a:bodyPr>
+          <a:lstStyle/>
+          <a:p>
+            <a:r>
+              <a:rPr lang="en-US">
+                <a:latin typeface="-apple-system"/>
+              </a:rPr>
+              <a:t>.</a:t>
+            </a:r>
+            <a:endParaRPr lang="en-US"/>
+          </a:p>
+        </p:txBody>
+      </p:sp>
+    </p:spTree>
+    <p:extLst>
+      <p:ext uri="{BB962C8B-B14F-4D97-AF65-F5344CB8AC3E}">
+        <p14:creationId xmlns:p14="http://schemas.microsoft.com/office/powerpoint/2010/main" val="801058551"/>
+      </p:ext>
+    </p:extLst>
+  </p:cSld>
+  <p:clrMapOvr>
+    <a:masterClrMapping/>
+  </p:clrMapOvr>
+</p:sld>
+</file>
+
+<file path=ppt/slides/slide51.xml><?xml version="1.0" encoding="utf-8"?>
+<p:sld xmlns:a="http://schemas.openxmlformats.org/drawingml/2006/main" xmlns:r="http://schemas.openxmlformats.org/officeDocument/2006/relationships" xmlns:p="http://schemas.openxmlformats.org/presentationml/2006/main">
+  <p:cSld>
+    <p:spTree>
+      <p:nvGrpSpPr>
+        <p:cNvPr id="1" name="">
+          <a:extLst>
+            <a:ext uri="{FF2B5EF4-FFF2-40B4-BE49-F238E27FC236}">
+              <a16:creationId xmlns:a16="http://schemas.microsoft.com/office/drawing/2014/main" id="{1D5BF5EB-B3B4-953C-C22B-85A7D755FCEB}"/>
+            </a:ext>
+          </a:extLst>
+        </p:cNvPr>
+        <p:cNvGrpSpPr/>
+        <p:nvPr/>
+      </p:nvGrpSpPr>
+      <p:grpSpPr>
+        <a:xfrm>
+          <a:off x="0" y="0"/>
+          <a:ext cx="0" cy="0"/>
+          <a:chOff x="0" y="0"/>
+          <a:chExt cx="0" cy="0"/>
+        </a:xfrm>
+      </p:grpSpPr>
+      <p:sp>
+        <p:nvSpPr>
+          <p:cNvPr id="7" name="TextBox 6">
+            <a:extLst>
+              <a:ext uri="{FF2B5EF4-FFF2-40B4-BE49-F238E27FC236}">
+                <a16:creationId xmlns:a16="http://schemas.microsoft.com/office/drawing/2014/main" id="{664F08FE-4CB8-9EE7-B91F-564F45F9D7C7}"/>
+              </a:ext>
+            </a:extLst>
+          </p:cNvPr>
+          <p:cNvSpPr txBox="1"/>
+          <p:nvPr/>
+        </p:nvSpPr>
+        <p:spPr>
+          <a:xfrm>
+            <a:off x="203200" y="244826"/>
+            <a:ext cx="11822545" cy="369332"/>
+          </a:xfrm>
+          <a:prstGeom prst="rect">
+            <a:avLst/>
+          </a:prstGeom>
+          <a:noFill/>
+        </p:spPr>
+        <p:txBody>
+          <a:bodyPr wrap="square">
+            <a:spAutoFit/>
+          </a:bodyPr>
+          <a:lstStyle/>
+          <a:p>
+            <a:r>
+              <a:rPr lang="en-US">
+                <a:latin typeface="-apple-system"/>
+              </a:rPr>
+              <a:t>.</a:t>
+            </a:r>
+            <a:endParaRPr lang="en-US"/>
+          </a:p>
+        </p:txBody>
+      </p:sp>
+    </p:spTree>
+    <p:extLst>
+      <p:ext uri="{BB962C8B-B14F-4D97-AF65-F5344CB8AC3E}">
+        <p14:creationId xmlns:p14="http://schemas.microsoft.com/office/powerpoint/2010/main" val="4070763766"/>
+      </p:ext>
+    </p:extLst>
+  </p:cSld>
+  <p:clrMapOvr>
+    <a:masterClrMapping/>
+  </p:clrMapOvr>
+</p:sld>
+</file>
+
+<file path=ppt/slides/slide52.xml><?xml version="1.0" encoding="utf-8"?>
+<p:sld xmlns:a="http://schemas.openxmlformats.org/drawingml/2006/main" xmlns:r="http://schemas.openxmlformats.org/officeDocument/2006/relationships" xmlns:p="http://schemas.openxmlformats.org/presentationml/2006/main">
+  <p:cSld>
+    <p:spTree>
+      <p:nvGrpSpPr>
+        <p:cNvPr id="1" name="">
+          <a:extLst>
+            <a:ext uri="{FF2B5EF4-FFF2-40B4-BE49-F238E27FC236}">
+              <a16:creationId xmlns:a16="http://schemas.microsoft.com/office/drawing/2014/main" id="{5B26470C-D446-7F24-4643-138CE1BD8286}"/>
+            </a:ext>
+          </a:extLst>
+        </p:cNvPr>
+        <p:cNvGrpSpPr/>
+        <p:nvPr/>
+      </p:nvGrpSpPr>
+      <p:grpSpPr>
+        <a:xfrm>
+          <a:off x="0" y="0"/>
+          <a:ext cx="0" cy="0"/>
+          <a:chOff x="0" y="0"/>
+          <a:chExt cx="0" cy="0"/>
+        </a:xfrm>
+      </p:grpSpPr>
+      <p:sp>
+        <p:nvSpPr>
+          <p:cNvPr id="7" name="TextBox 6">
+            <a:extLst>
+              <a:ext uri="{FF2B5EF4-FFF2-40B4-BE49-F238E27FC236}">
+                <a16:creationId xmlns:a16="http://schemas.microsoft.com/office/drawing/2014/main" id="{CBFE2AEC-B489-B71F-62D4-A85BF4ADCE2F}"/>
+              </a:ext>
+            </a:extLst>
+          </p:cNvPr>
+          <p:cNvSpPr txBox="1"/>
+          <p:nvPr/>
+        </p:nvSpPr>
+        <p:spPr>
+          <a:xfrm>
+            <a:off x="203200" y="244826"/>
+            <a:ext cx="11822545" cy="369332"/>
+          </a:xfrm>
+          <a:prstGeom prst="rect">
+            <a:avLst/>
+          </a:prstGeom>
+          <a:noFill/>
+        </p:spPr>
+        <p:txBody>
+          <a:bodyPr wrap="square">
+            <a:spAutoFit/>
+          </a:bodyPr>
+          <a:lstStyle/>
+          <a:p>
+            <a:r>
+              <a:rPr lang="en-US">
+                <a:latin typeface="-apple-system"/>
+              </a:rPr>
+              <a:t>.</a:t>
+            </a:r>
+            <a:endParaRPr lang="en-US"/>
+          </a:p>
+        </p:txBody>
+      </p:sp>
+    </p:spTree>
+    <p:extLst>
+      <p:ext uri="{BB962C8B-B14F-4D97-AF65-F5344CB8AC3E}">
+        <p14:creationId xmlns:p14="http://schemas.microsoft.com/office/powerpoint/2010/main" val="1910870662"/>
+      </p:ext>
+    </p:extLst>
+  </p:cSld>
+  <p:clrMapOvr>
+    <a:masterClrMapping/>
+  </p:clrMapOvr>
+</p:sld>
+</file>
+
+<file path=ppt/slides/slide53.xml><?xml version="1.0" encoding="utf-8"?>
+<p:sld xmlns:a="http://schemas.openxmlformats.org/drawingml/2006/main" xmlns:r="http://schemas.openxmlformats.org/officeDocument/2006/relationships" xmlns:p="http://schemas.openxmlformats.org/presentationml/2006/main">
+  <p:cSld>
+    <p:spTree>
+      <p:nvGrpSpPr>
+        <p:cNvPr id="1" name="">
+          <a:extLst>
+            <a:ext uri="{FF2B5EF4-FFF2-40B4-BE49-F238E27FC236}">
+              <a16:creationId xmlns:a16="http://schemas.microsoft.com/office/drawing/2014/main" id="{734815F9-989B-CE85-697C-2322E3021600}"/>
+            </a:ext>
+          </a:extLst>
+        </p:cNvPr>
+        <p:cNvGrpSpPr/>
+        <p:nvPr/>
+      </p:nvGrpSpPr>
+      <p:grpSpPr>
+        <a:xfrm>
+          <a:off x="0" y="0"/>
+          <a:ext cx="0" cy="0"/>
+          <a:chOff x="0" y="0"/>
+          <a:chExt cx="0" cy="0"/>
+        </a:xfrm>
+      </p:grpSpPr>
+      <p:sp>
+        <p:nvSpPr>
+          <p:cNvPr id="7" name="TextBox 6">
+            <a:extLst>
+              <a:ext uri="{FF2B5EF4-FFF2-40B4-BE49-F238E27FC236}">
+                <a16:creationId xmlns:a16="http://schemas.microsoft.com/office/drawing/2014/main" id="{4F4C3C0B-B075-FC96-E0BF-EF050BD7DC5C}"/>
+              </a:ext>
+            </a:extLst>
+          </p:cNvPr>
+          <p:cNvSpPr txBox="1"/>
+          <p:nvPr/>
+        </p:nvSpPr>
+        <p:spPr>
+          <a:xfrm>
+            <a:off x="203200" y="244826"/>
+            <a:ext cx="11822545" cy="369332"/>
+          </a:xfrm>
+          <a:prstGeom prst="rect">
+            <a:avLst/>
+          </a:prstGeom>
+          <a:noFill/>
+        </p:spPr>
+        <p:txBody>
+          <a:bodyPr wrap="square">
+            <a:spAutoFit/>
+          </a:bodyPr>
+          <a:lstStyle/>
+          <a:p>
+            <a:r>
+              <a:rPr lang="en-US">
+                <a:latin typeface="-apple-system"/>
+              </a:rPr>
+              <a:t>.</a:t>
+            </a:r>
+            <a:endParaRPr lang="en-US"/>
+          </a:p>
+        </p:txBody>
+      </p:sp>
+    </p:spTree>
+    <p:extLst>
+      <p:ext uri="{BB962C8B-B14F-4D97-AF65-F5344CB8AC3E}">
+        <p14:creationId xmlns:p14="http://schemas.microsoft.com/office/powerpoint/2010/main" val="2977386086"/>
+      </p:ext>
+    </p:extLst>
+  </p:cSld>
+  <p:clrMapOvr>
+    <a:masterClrMapping/>
+  </p:clrMapOvr>
+</p:sld>
+</file>
+
+<file path=ppt/slides/slide54.xml><?xml version="1.0" encoding="utf-8"?>
+<p:sld xmlns:a="http://schemas.openxmlformats.org/drawingml/2006/main" xmlns:r="http://schemas.openxmlformats.org/officeDocument/2006/relationships" xmlns:p="http://schemas.openxmlformats.org/presentationml/2006/main">
+  <p:cSld>
+    <p:spTree>
+      <p:nvGrpSpPr>
+        <p:cNvPr id="1" name="">
+          <a:extLst>
+            <a:ext uri="{FF2B5EF4-FFF2-40B4-BE49-F238E27FC236}">
+              <a16:creationId xmlns:a16="http://schemas.microsoft.com/office/drawing/2014/main" id="{B77C8101-BEA7-9683-1938-6E55D0928095}"/>
+            </a:ext>
+          </a:extLst>
+        </p:cNvPr>
+        <p:cNvGrpSpPr/>
+        <p:nvPr/>
+      </p:nvGrpSpPr>
+      <p:grpSpPr>
+        <a:xfrm>
+          <a:off x="0" y="0"/>
+          <a:ext cx="0" cy="0"/>
+          <a:chOff x="0" y="0"/>
+          <a:chExt cx="0" cy="0"/>
+        </a:xfrm>
+      </p:grpSpPr>
+      <p:sp>
+        <p:nvSpPr>
+          <p:cNvPr id="7" name="TextBox 6">
+            <a:extLst>
+              <a:ext uri="{FF2B5EF4-FFF2-40B4-BE49-F238E27FC236}">
+                <a16:creationId xmlns:a16="http://schemas.microsoft.com/office/drawing/2014/main" id="{C3C46AAC-0322-57D6-AA2A-CCA5BFD5E853}"/>
+              </a:ext>
+            </a:extLst>
+          </p:cNvPr>
+          <p:cNvSpPr txBox="1"/>
+          <p:nvPr/>
+        </p:nvSpPr>
+        <p:spPr>
+          <a:xfrm>
+            <a:off x="203200" y="244826"/>
+            <a:ext cx="11822545" cy="369332"/>
+          </a:xfrm>
+          <a:prstGeom prst="rect">
+            <a:avLst/>
+          </a:prstGeom>
+          <a:noFill/>
+        </p:spPr>
+        <p:txBody>
+          <a:bodyPr wrap="square">
+            <a:spAutoFit/>
+          </a:bodyPr>
+          <a:lstStyle/>
+          <a:p>
+            <a:r>
+              <a:rPr lang="en-US">
+                <a:latin typeface="-apple-system"/>
+              </a:rPr>
+              <a:t>.</a:t>
+            </a:r>
+            <a:endParaRPr lang="en-US"/>
+          </a:p>
+        </p:txBody>
+      </p:sp>
+    </p:spTree>
+    <p:extLst>
+      <p:ext uri="{BB962C8B-B14F-4D97-AF65-F5344CB8AC3E}">
+        <p14:creationId xmlns:p14="http://schemas.microsoft.com/office/powerpoint/2010/main" val="45438506"/>
+      </p:ext>
+    </p:extLst>
+  </p:cSld>
+  <p:clrMapOvr>
+    <a:masterClrMapping/>
+  </p:clrMapOvr>
+</p:sld>
+</file>
+
+<file path=ppt/slides/slide55.xml><?xml version="1.0" encoding="utf-8"?>
+<p:sld xmlns:a="http://schemas.openxmlformats.org/drawingml/2006/main" xmlns:r="http://schemas.openxmlformats.org/officeDocument/2006/relationships" xmlns:p="http://schemas.openxmlformats.org/presentationml/2006/main">
+  <p:cSld>
+    <p:spTree>
+      <p:nvGrpSpPr>
+        <p:cNvPr id="1" name="">
+          <a:extLst>
+            <a:ext uri="{FF2B5EF4-FFF2-40B4-BE49-F238E27FC236}">
+              <a16:creationId xmlns:a16="http://schemas.microsoft.com/office/drawing/2014/main" id="{B9A9E804-0BA1-DEDC-BC29-101D83E7E7A5}"/>
+            </a:ext>
+          </a:extLst>
+        </p:cNvPr>
+        <p:cNvGrpSpPr/>
+        <p:nvPr/>
+      </p:nvGrpSpPr>
+      <p:grpSpPr>
+        <a:xfrm>
+          <a:off x="0" y="0"/>
+          <a:ext cx="0" cy="0"/>
+          <a:chOff x="0" y="0"/>
+          <a:chExt cx="0" cy="0"/>
+        </a:xfrm>
+      </p:grpSpPr>
+      <p:sp>
+        <p:nvSpPr>
+          <p:cNvPr id="7" name="TextBox 6">
+            <a:extLst>
+              <a:ext uri="{FF2B5EF4-FFF2-40B4-BE49-F238E27FC236}">
+                <a16:creationId xmlns:a16="http://schemas.microsoft.com/office/drawing/2014/main" id="{A3C6F4B1-F2E1-2450-2ECD-4BCC04F70373}"/>
+              </a:ext>
+            </a:extLst>
+          </p:cNvPr>
+          <p:cNvSpPr txBox="1"/>
+          <p:nvPr/>
+        </p:nvSpPr>
+        <p:spPr>
+          <a:xfrm>
+            <a:off x="203200" y="244826"/>
+            <a:ext cx="11822545" cy="369332"/>
+          </a:xfrm>
+          <a:prstGeom prst="rect">
+            <a:avLst/>
+          </a:prstGeom>
+          <a:noFill/>
+        </p:spPr>
+        <p:txBody>
+          <a:bodyPr wrap="square">
+            <a:spAutoFit/>
+          </a:bodyPr>
+          <a:lstStyle/>
+          <a:p>
+            <a:r>
+              <a:rPr lang="en-US">
+                <a:latin typeface="-apple-system"/>
+              </a:rPr>
+              <a:t>.</a:t>
+            </a:r>
+            <a:endParaRPr lang="en-US"/>
+          </a:p>
+        </p:txBody>
+      </p:sp>
+    </p:spTree>
+    <p:extLst>
+      <p:ext uri="{BB962C8B-B14F-4D97-AF65-F5344CB8AC3E}">
+        <p14:creationId xmlns:p14="http://schemas.microsoft.com/office/powerpoint/2010/main" val="1733827952"/>
+      </p:ext>
+    </p:extLst>
+  </p:cSld>
+  <p:clrMapOvr>
+    <a:masterClrMapping/>
+  </p:clrMapOvr>
+</p:sld>
+</file>
+
+<file path=ppt/slides/slide56.xml><?xml version="1.0" encoding="utf-8"?>
+<p:sld xmlns:a="http://schemas.openxmlformats.org/drawingml/2006/main" xmlns:r="http://schemas.openxmlformats.org/officeDocument/2006/relationships" xmlns:p="http://schemas.openxmlformats.org/presentationml/2006/main">
+  <p:cSld>
+    <p:spTree>
+      <p:nvGrpSpPr>
+        <p:cNvPr id="1" name="">
+          <a:extLst>
+            <a:ext uri="{FF2B5EF4-FFF2-40B4-BE49-F238E27FC236}">
+              <a16:creationId xmlns:a16="http://schemas.microsoft.com/office/drawing/2014/main" id="{34361EFC-EBF7-D5E4-912E-0108DC68B06F}"/>
+            </a:ext>
+          </a:extLst>
+        </p:cNvPr>
+        <p:cNvGrpSpPr/>
+        <p:nvPr/>
+      </p:nvGrpSpPr>
+      <p:grpSpPr>
+        <a:xfrm>
+          <a:off x="0" y="0"/>
+          <a:ext cx="0" cy="0"/>
+          <a:chOff x="0" y="0"/>
+          <a:chExt cx="0" cy="0"/>
+        </a:xfrm>
+      </p:grpSpPr>
+      <p:sp>
+        <p:nvSpPr>
+          <p:cNvPr id="7" name="TextBox 6">
+            <a:extLst>
+              <a:ext uri="{FF2B5EF4-FFF2-40B4-BE49-F238E27FC236}">
+                <a16:creationId xmlns:a16="http://schemas.microsoft.com/office/drawing/2014/main" id="{6069B59B-D469-6588-7D69-27E35E79B1AD}"/>
+              </a:ext>
+            </a:extLst>
+          </p:cNvPr>
+          <p:cNvSpPr txBox="1"/>
+          <p:nvPr/>
+        </p:nvSpPr>
+        <p:spPr>
+          <a:xfrm>
+            <a:off x="203200" y="244826"/>
+            <a:ext cx="11822545" cy="369332"/>
+          </a:xfrm>
+          <a:prstGeom prst="rect">
+            <a:avLst/>
+          </a:prstGeom>
+          <a:noFill/>
+        </p:spPr>
+        <p:txBody>
+          <a:bodyPr wrap="square">
+            <a:spAutoFit/>
+          </a:bodyPr>
+          <a:lstStyle/>
+          <a:p>
+            <a:r>
+              <a:rPr lang="en-US">
+                <a:latin typeface="-apple-system"/>
+              </a:rPr>
+              <a:t>.</a:t>
+            </a:r>
+            <a:endParaRPr lang="en-US"/>
+          </a:p>
+        </p:txBody>
+      </p:sp>
+    </p:spTree>
+    <p:extLst>
+      <p:ext uri="{BB962C8B-B14F-4D97-AF65-F5344CB8AC3E}">
+        <p14:creationId xmlns:p14="http://schemas.microsoft.com/office/powerpoint/2010/main" val="2711429735"/>
+      </p:ext>
+    </p:extLst>
+  </p:cSld>
+  <p:clrMapOvr>
+    <a:masterClrMapping/>
+  </p:clrMapOvr>
+</p:sld>
+</file>
+
+<file path=ppt/slides/slide57.xml><?xml version="1.0" encoding="utf-8"?>
+<p:sld xmlns:a="http://schemas.openxmlformats.org/drawingml/2006/main" xmlns:r="http://schemas.openxmlformats.org/officeDocument/2006/relationships" xmlns:p="http://schemas.openxmlformats.org/presentationml/2006/main">
+  <p:cSld>
+    <p:spTree>
+      <p:nvGrpSpPr>
+        <p:cNvPr id="1" name="">
+          <a:extLst>
+            <a:ext uri="{FF2B5EF4-FFF2-40B4-BE49-F238E27FC236}">
+              <a16:creationId xmlns:a16="http://schemas.microsoft.com/office/drawing/2014/main" id="{A60984CA-B6DB-CEC2-8919-295542B87476}"/>
+            </a:ext>
+          </a:extLst>
+        </p:cNvPr>
+        <p:cNvGrpSpPr/>
+        <p:nvPr/>
+      </p:nvGrpSpPr>
+      <p:grpSpPr>
+        <a:xfrm>
+          <a:off x="0" y="0"/>
+          <a:ext cx="0" cy="0"/>
+          <a:chOff x="0" y="0"/>
+          <a:chExt cx="0" cy="0"/>
+        </a:xfrm>
+      </p:grpSpPr>
+      <p:sp>
+        <p:nvSpPr>
+          <p:cNvPr id="7" name="TextBox 6">
+            <a:extLst>
+              <a:ext uri="{FF2B5EF4-FFF2-40B4-BE49-F238E27FC236}">
+                <a16:creationId xmlns:a16="http://schemas.microsoft.com/office/drawing/2014/main" id="{599287B6-599A-4818-CE12-FF7790445F2D}"/>
+              </a:ext>
+            </a:extLst>
+          </p:cNvPr>
+          <p:cNvSpPr txBox="1"/>
+          <p:nvPr/>
+        </p:nvSpPr>
+        <p:spPr>
+          <a:xfrm>
+            <a:off x="203200" y="244826"/>
+            <a:ext cx="11822545" cy="369332"/>
+          </a:xfrm>
+          <a:prstGeom prst="rect">
+            <a:avLst/>
+          </a:prstGeom>
+          <a:noFill/>
+        </p:spPr>
+        <p:txBody>
+          <a:bodyPr wrap="square">
+            <a:spAutoFit/>
+          </a:bodyPr>
+          <a:lstStyle/>
+          <a:p>
+            <a:r>
+              <a:rPr lang="en-US">
+                <a:latin typeface="-apple-system"/>
+              </a:rPr>
+              <a:t>.</a:t>
+            </a:r>
+            <a:endParaRPr lang="en-US"/>
+          </a:p>
+        </p:txBody>
+      </p:sp>
+    </p:spTree>
+    <p:extLst>
+      <p:ext uri="{BB962C8B-B14F-4D97-AF65-F5344CB8AC3E}">
+        <p14:creationId xmlns:p14="http://schemas.microsoft.com/office/powerpoint/2010/main" val="2189422531"/>
+      </p:ext>
+    </p:extLst>
+  </p:cSld>
+  <p:clrMapOvr>
+    <a:masterClrMapping/>
+  </p:clrMapOvr>
+</p:sld>
+</file>
+
+<file path=ppt/slides/slide58.xml><?xml version="1.0" encoding="utf-8"?>
+<p:sld xmlns:a="http://schemas.openxmlformats.org/drawingml/2006/main" xmlns:r="http://schemas.openxmlformats.org/officeDocument/2006/relationships" xmlns:p="http://schemas.openxmlformats.org/presentationml/2006/main">
+  <p:cSld>
+    <p:spTree>
+      <p:nvGrpSpPr>
+        <p:cNvPr id="1" name="">
+          <a:extLst>
+            <a:ext uri="{FF2B5EF4-FFF2-40B4-BE49-F238E27FC236}">
+              <a16:creationId xmlns:a16="http://schemas.microsoft.com/office/drawing/2014/main" id="{DB5E0A76-F990-583B-6C0C-5B5B487F045B}"/>
+            </a:ext>
+          </a:extLst>
+        </p:cNvPr>
+        <p:cNvGrpSpPr/>
+        <p:nvPr/>
+      </p:nvGrpSpPr>
+      <p:grpSpPr>
+        <a:xfrm>
+          <a:off x="0" y="0"/>
+          <a:ext cx="0" cy="0"/>
+          <a:chOff x="0" y="0"/>
+          <a:chExt cx="0" cy="0"/>
+        </a:xfrm>
+      </p:grpSpPr>
+      <p:sp>
+        <p:nvSpPr>
+          <p:cNvPr id="7" name="TextBox 6">
+            <a:extLst>
+              <a:ext uri="{FF2B5EF4-FFF2-40B4-BE49-F238E27FC236}">
+                <a16:creationId xmlns:a16="http://schemas.microsoft.com/office/drawing/2014/main" id="{01603ED3-7FA6-7B0D-9DAE-145D2D56BCB8}"/>
+              </a:ext>
+            </a:extLst>
+          </p:cNvPr>
+          <p:cNvSpPr txBox="1"/>
+          <p:nvPr/>
+        </p:nvSpPr>
+        <p:spPr>
+          <a:xfrm>
+            <a:off x="203200" y="244826"/>
+            <a:ext cx="11822545" cy="369332"/>
+          </a:xfrm>
+          <a:prstGeom prst="rect">
+            <a:avLst/>
+          </a:prstGeom>
+          <a:noFill/>
+        </p:spPr>
+        <p:txBody>
+          <a:bodyPr wrap="square">
+            <a:spAutoFit/>
+          </a:bodyPr>
+          <a:lstStyle/>
+          <a:p>
+            <a:r>
+              <a:rPr lang="en-US">
+                <a:latin typeface="-apple-system"/>
+              </a:rPr>
+              <a:t>.</a:t>
+            </a:r>
+            <a:endParaRPr lang="en-US"/>
+          </a:p>
+        </p:txBody>
+      </p:sp>
+    </p:spTree>
+    <p:extLst>
+      <p:ext uri="{BB962C8B-B14F-4D97-AF65-F5344CB8AC3E}">
+        <p14:creationId xmlns:p14="http://schemas.microsoft.com/office/powerpoint/2010/main" val="571673239"/>
+      </p:ext>
+    </p:extLst>
+  </p:cSld>
+  <p:clrMapOvr>
+    <a:masterClrMapping/>
+  </p:clrMapOvr>
+</p:sld>
+</file>
+
+<file path=ppt/slides/slide59.xml><?xml version="1.0" encoding="utf-8"?>
+<p:sld xmlns:a="http://schemas.openxmlformats.org/drawingml/2006/main" xmlns:r="http://schemas.openxmlformats.org/officeDocument/2006/relationships" xmlns:p="http://schemas.openxmlformats.org/presentationml/2006/main">
+  <p:cSld>
+    <p:spTree>
+      <p:nvGrpSpPr>
+        <p:cNvPr id="1" name="">
+          <a:extLst>
+            <a:ext uri="{FF2B5EF4-FFF2-40B4-BE49-F238E27FC236}">
+              <a16:creationId xmlns:a16="http://schemas.microsoft.com/office/drawing/2014/main" id="{D1F05FAD-154F-7394-1819-F09B8141466E}"/>
+            </a:ext>
+          </a:extLst>
+        </p:cNvPr>
+        <p:cNvGrpSpPr/>
+        <p:nvPr/>
+      </p:nvGrpSpPr>
+      <p:grpSpPr>
+        <a:xfrm>
+          <a:off x="0" y="0"/>
+          <a:ext cx="0" cy="0"/>
+          <a:chOff x="0" y="0"/>
+          <a:chExt cx="0" cy="0"/>
+        </a:xfrm>
+      </p:grpSpPr>
+      <p:sp>
+        <p:nvSpPr>
+          <p:cNvPr id="7" name="TextBox 6">
+            <a:extLst>
+              <a:ext uri="{FF2B5EF4-FFF2-40B4-BE49-F238E27FC236}">
+                <a16:creationId xmlns:a16="http://schemas.microsoft.com/office/drawing/2014/main" id="{A431E858-D76B-AD72-9AD4-E9890C9FA522}"/>
+              </a:ext>
+            </a:extLst>
+          </p:cNvPr>
+          <p:cNvSpPr txBox="1"/>
+          <p:nvPr/>
+        </p:nvSpPr>
+        <p:spPr>
+          <a:xfrm>
+            <a:off x="203200" y="244826"/>
+            <a:ext cx="11822545" cy="369332"/>
+          </a:xfrm>
+          <a:prstGeom prst="rect">
+            <a:avLst/>
+          </a:prstGeom>
+          <a:noFill/>
+        </p:spPr>
+        <p:txBody>
+          <a:bodyPr wrap="square">
+            <a:spAutoFit/>
+          </a:bodyPr>
+          <a:lstStyle/>
+          <a:p>
+            <a:r>
+              <a:rPr lang="en-US">
+                <a:latin typeface="-apple-system"/>
+              </a:rPr>
+              <a:t>.</a:t>
+            </a:r>
+            <a:endParaRPr lang="en-US"/>
+          </a:p>
+        </p:txBody>
+      </p:sp>
+    </p:spTree>
+    <p:extLst>
+      <p:ext uri="{BB962C8B-B14F-4D97-AF65-F5344CB8AC3E}">
+        <p14:creationId xmlns:p14="http://schemas.microsoft.com/office/powerpoint/2010/main" val="656003231"/>
       </p:ext>
     </p:extLst>
   </p:cSld>

--- a/.lessons/7 GraphQL/1.pptx
+++ b/.lessons/7 GraphQL/1.pptx
@@ -51,19 +51,33 @@
     <p:sldId id="302" r:id="rId45"/>
     <p:sldId id="303" r:id="rId46"/>
     <p:sldId id="304" r:id="rId47"/>
-    <p:sldId id="305" r:id="rId48"/>
-    <p:sldId id="306" r:id="rId49"/>
-    <p:sldId id="307" r:id="rId50"/>
-    <p:sldId id="308" r:id="rId51"/>
-    <p:sldId id="309" r:id="rId52"/>
-    <p:sldId id="310" r:id="rId53"/>
-    <p:sldId id="311" r:id="rId54"/>
-    <p:sldId id="312" r:id="rId55"/>
-    <p:sldId id="313" r:id="rId56"/>
-    <p:sldId id="314" r:id="rId57"/>
-    <p:sldId id="287" r:id="rId58"/>
-    <p:sldId id="288" r:id="rId59"/>
-    <p:sldId id="289" r:id="rId60"/>
+    <p:sldId id="306" r:id="rId48"/>
+    <p:sldId id="315" r:id="rId49"/>
+    <p:sldId id="308" r:id="rId50"/>
+    <p:sldId id="307" r:id="rId51"/>
+    <p:sldId id="310" r:id="rId52"/>
+    <p:sldId id="311" r:id="rId53"/>
+    <p:sldId id="312" r:id="rId54"/>
+    <p:sldId id="313" r:id="rId55"/>
+    <p:sldId id="314" r:id="rId56"/>
+    <p:sldId id="287" r:id="rId57"/>
+    <p:sldId id="316" r:id="rId58"/>
+    <p:sldId id="317" r:id="rId59"/>
+    <p:sldId id="318" r:id="rId60"/>
+    <p:sldId id="319" r:id="rId61"/>
+    <p:sldId id="320" r:id="rId62"/>
+    <p:sldId id="321" r:id="rId63"/>
+    <p:sldId id="322" r:id="rId64"/>
+    <p:sldId id="323" r:id="rId65"/>
+    <p:sldId id="324" r:id="rId66"/>
+    <p:sldId id="325" r:id="rId67"/>
+    <p:sldId id="326" r:id="rId68"/>
+    <p:sldId id="327" r:id="rId69"/>
+    <p:sldId id="328" r:id="rId70"/>
+    <p:sldId id="329" r:id="rId71"/>
+    <p:sldId id="330" r:id="rId72"/>
+    <p:sldId id="288" r:id="rId73"/>
+    <p:sldId id="289" r:id="rId74"/>
   </p:sldIdLst>
   <p:sldSz cx="12192000" cy="6858000"/>
   <p:notesSz cx="6858000" cy="9144000"/>
@@ -12940,7 +12954,7 @@
               <a:rPr lang="az-Latn-AZ">
                 <a:latin typeface="-apple-system"/>
               </a:rPr>
-              <a:t> lazımdır.</a:t>
+              <a:t> lazımdır. Bu sadəcə görüntü üçündür.</a:t>
             </a:r>
             <a:endParaRPr lang="en-US"/>
           </a:p>
@@ -13279,7 +13293,7 @@
         <p:spPr>
           <a:xfrm>
             <a:off x="203200" y="244826"/>
-            <a:ext cx="11822545" cy="646331"/>
+            <a:ext cx="11822545" cy="2308324"/>
           </a:xfrm>
           <a:prstGeom prst="rect">
             <a:avLst/>
@@ -13296,7 +13310,22 @@
               <a:rPr lang="az-Latn-AZ">
                 <a:latin typeface="-apple-system"/>
               </a:rPr>
-              <a:t>Tətbiqi yaratmağa başlamadan əvvəl onun Sxemasını qurmaq lazımdır. Bu sxemaya əsasən həm </a:t>
+              <a:t>Tətbiqi yaratmağa başlamadan əvvəl onun </a:t>
+            </a:r>
+            <a:r>
+              <a:rPr lang="az-Latn-AZ" b="1">
+                <a:solidFill>
+                  <a:srgbClr val="FF0000"/>
+                </a:solidFill>
+                <a:latin typeface="-apple-system"/>
+              </a:rPr>
+              <a:t>Sxemasını</a:t>
+            </a:r>
+            <a:r>
+              <a:rPr lang="az-Latn-AZ">
+                <a:latin typeface="-apple-system"/>
+              </a:rPr>
+              <a:t> qurmaq lazımdır. Bu sxemaya əsasən həm </a:t>
             </a:r>
             <a:r>
               <a:rPr lang="az-Latn-AZ" b="1">
@@ -13322,7 +13351,98 @@
               </a:rPr>
               <a:t> proqramistləri, görəcəkləri işlər haqqında əvvəlcədən məlumatlı olurlar.</a:t>
             </a:r>
-            <a:endParaRPr lang="en-US"/>
+          </a:p>
+          <a:p>
+            <a:endParaRPr lang="az-Latn-AZ">
+              <a:latin typeface="-apple-system"/>
+            </a:endParaRPr>
+          </a:p>
+          <a:p>
+            <a:r>
+              <a:rPr lang="az-Latn-AZ" b="1">
+                <a:latin typeface="-apple-system"/>
+              </a:rPr>
+              <a:t>Front</a:t>
+            </a:r>
+            <a:r>
+              <a:rPr lang="az-Latn-AZ">
+                <a:latin typeface="-apple-system"/>
+              </a:rPr>
+              <a:t> ( client ) və </a:t>
+            </a:r>
+            <a:r>
+              <a:rPr lang="az-Latn-AZ" b="1">
+                <a:latin typeface="-apple-system"/>
+              </a:rPr>
+              <a:t>Back</a:t>
+            </a:r>
+            <a:r>
+              <a:rPr lang="az-Latn-AZ">
+                <a:latin typeface="-apple-system"/>
+              </a:rPr>
+              <a:t> ( server ) bu sxema əsasında bir-biri ilə əlaqə quracaq. </a:t>
+            </a:r>
+            <a:r>
+              <a:rPr lang="az-Latn-AZ" b="1">
+                <a:latin typeface="-apple-system"/>
+              </a:rPr>
+              <a:t>Front</a:t>
+            </a:r>
+            <a:r>
+              <a:rPr lang="az-Latn-AZ">
+                <a:latin typeface="-apple-system"/>
+              </a:rPr>
+              <a:t> sxemada olmuyan heç birşeyi </a:t>
+            </a:r>
+            <a:r>
+              <a:rPr lang="az-Latn-AZ" b="1">
+                <a:latin typeface="-apple-system"/>
+              </a:rPr>
+              <a:t>Back</a:t>
+            </a:r>
+            <a:r>
+              <a:rPr lang="az-Latn-AZ">
+                <a:latin typeface="-apple-system"/>
+              </a:rPr>
+              <a:t> -dan istəməz. </a:t>
+            </a:r>
+            <a:r>
+              <a:rPr lang="az-Latn-AZ" b="1">
+                <a:latin typeface="-apple-system"/>
+              </a:rPr>
+              <a:t>Back</a:t>
+            </a:r>
+            <a:r>
+              <a:rPr lang="az-Latn-AZ">
+                <a:latin typeface="-apple-system"/>
+              </a:rPr>
+              <a:t> -də sxemada olmayan heçnəyi </a:t>
+            </a:r>
+            <a:r>
+              <a:rPr lang="az-Latn-AZ" b="1">
+                <a:latin typeface="-apple-system"/>
+              </a:rPr>
+              <a:t>Front</a:t>
+            </a:r>
+            <a:r>
+              <a:rPr lang="az-Latn-AZ">
+                <a:latin typeface="-apple-system"/>
+              </a:rPr>
+              <a:t> -a verməz. </a:t>
+            </a:r>
+          </a:p>
+          <a:p>
+            <a:endParaRPr lang="az-Latn-AZ">
+              <a:latin typeface="-apple-system"/>
+            </a:endParaRPr>
+          </a:p>
+          <a:p>
+            <a:r>
+              <a:rPr lang="az-Latn-AZ">
+                <a:latin typeface="-apple-system"/>
+              </a:rPr>
+              <a:t>Sxema bir kontrakt kimidir. Yəni fərqli sistemlər arasında əlaqənin hansı qaydalara əsasən gərçəkləşəcəyini təyin edən bir kontrak ( sənəd ) kimi qəbul etmək olar sxemanı.</a:t>
+            </a:r>
           </a:p>
         </p:txBody>
       </p:sp>
@@ -13348,8 +13468,8 @@
         </p:blipFill>
         <p:spPr>
           <a:xfrm>
-            <a:off x="299228" y="1621377"/>
-            <a:ext cx="11593543" cy="4991797"/>
+            <a:off x="2105890" y="2952052"/>
+            <a:ext cx="8503026" cy="3661122"/>
           </a:xfrm>
           <a:prstGeom prst="rect">
             <a:avLst/>
@@ -13566,80 +13686,6 @@
         <p:cNvPr id="1" name="">
           <a:extLst>
             <a:ext uri="{FF2B5EF4-FFF2-40B4-BE49-F238E27FC236}">
-              <a16:creationId xmlns:a16="http://schemas.microsoft.com/office/drawing/2014/main" id="{D602DB91-8217-92A1-CB1F-236F1E4188E2}"/>
-            </a:ext>
-          </a:extLst>
-        </p:cNvPr>
-        <p:cNvGrpSpPr/>
-        <p:nvPr/>
-      </p:nvGrpSpPr>
-      <p:grpSpPr>
-        <a:xfrm>
-          <a:off x="0" y="0"/>
-          <a:ext cx="0" cy="0"/>
-          <a:chOff x="0" y="0"/>
-          <a:chExt cx="0" cy="0"/>
-        </a:xfrm>
-      </p:grpSpPr>
-      <p:sp>
-        <p:nvSpPr>
-          <p:cNvPr id="7" name="TextBox 6">
-            <a:extLst>
-              <a:ext uri="{FF2B5EF4-FFF2-40B4-BE49-F238E27FC236}">
-                <a16:creationId xmlns:a16="http://schemas.microsoft.com/office/drawing/2014/main" id="{F89B0AEB-00B1-65DD-BCA0-402A012CCBBE}"/>
-              </a:ext>
-            </a:extLst>
-          </p:cNvPr>
-          <p:cNvSpPr txBox="1"/>
-          <p:nvPr/>
-        </p:nvSpPr>
-        <p:spPr>
-          <a:xfrm>
-            <a:off x="203200" y="244826"/>
-            <a:ext cx="11822545" cy="369332"/>
-          </a:xfrm>
-          <a:prstGeom prst="rect">
-            <a:avLst/>
-          </a:prstGeom>
-          <a:noFill/>
-        </p:spPr>
-        <p:txBody>
-          <a:bodyPr wrap="square">
-            <a:spAutoFit/>
-          </a:bodyPr>
-          <a:lstStyle/>
-          <a:p>
-            <a:r>
-              <a:rPr lang="en-US">
-                <a:latin typeface="-apple-system"/>
-              </a:rPr>
-              <a:t>.</a:t>
-            </a:r>
-            <a:endParaRPr lang="en-US"/>
-          </a:p>
-        </p:txBody>
-      </p:sp>
-    </p:spTree>
-    <p:extLst>
-      <p:ext uri="{BB962C8B-B14F-4D97-AF65-F5344CB8AC3E}">
-        <p14:creationId xmlns:p14="http://schemas.microsoft.com/office/powerpoint/2010/main" val="1376956715"/>
-      </p:ext>
-    </p:extLst>
-  </p:cSld>
-  <p:clrMapOvr>
-    <a:masterClrMapping/>
-  </p:clrMapOvr>
-</p:sld>
-</file>
-
-<file path=ppt/slides/slide48.xml><?xml version="1.0" encoding="utf-8"?>
-<p:sld xmlns:a="http://schemas.openxmlformats.org/drawingml/2006/main" xmlns:r="http://schemas.openxmlformats.org/officeDocument/2006/relationships" xmlns:p="http://schemas.openxmlformats.org/presentationml/2006/main">
-  <p:cSld>
-    <p:spTree>
-      <p:nvGrpSpPr>
-        <p:cNvPr id="1" name="">
-          <a:extLst>
-            <a:ext uri="{FF2B5EF4-FFF2-40B4-BE49-F238E27FC236}">
               <a16:creationId xmlns:a16="http://schemas.microsoft.com/office/drawing/2014/main" id="{E94BDA04-3012-A75C-F562-46875C70C615}"/>
             </a:ext>
           </a:extLst>
@@ -13670,7 +13716,7 @@
         <p:spPr>
           <a:xfrm>
             <a:off x="203200" y="244826"/>
-            <a:ext cx="11822545" cy="369332"/>
+            <a:ext cx="11822545" cy="2270109"/>
           </a:xfrm>
           <a:prstGeom prst="rect">
             <a:avLst/>
@@ -13683,20 +13729,658 @@
           </a:bodyPr>
           <a:lstStyle/>
           <a:p>
-            <a:r>
-              <a:rPr lang="en-US">
+            <a:pPr>
+              <a:lnSpc>
+                <a:spcPct val="150000"/>
+              </a:lnSpc>
+            </a:pPr>
+            <a:r>
+              <a:rPr lang="en-US" sz="1600" b="1">
+                <a:solidFill>
+                  <a:srgbClr val="FF0000"/>
+                </a:solidFill>
+              </a:rPr>
+              <a:t>1. GraphQL Schema Faylının Adı Necə Olmalıdır?</a:t>
+            </a:r>
+          </a:p>
+          <a:p>
+            <a:pPr>
+              <a:lnSpc>
+                <a:spcPct val="150000"/>
+              </a:lnSpc>
+            </a:pPr>
+            <a:endParaRPr lang="az-Latn-AZ" sz="1600"/>
+          </a:p>
+          <a:p>
+            <a:pPr>
+              <a:lnSpc>
+                <a:spcPct val="150000"/>
+              </a:lnSpc>
+            </a:pPr>
+            <a:r>
+              <a:rPr lang="en-US" sz="1600"/>
+              <a:t>GraphQL schema faylının adı üçün </a:t>
+            </a:r>
+            <a:r>
+              <a:rPr lang="en-US" sz="1600" b="1"/>
+              <a:t>sabit bir qayda yoxdur</a:t>
+            </a:r>
+            <a:r>
+              <a:rPr lang="en-US" sz="1600"/>
+              <a:t> – faylın adı layihənizin strukturundan və istifadə etdiyi</a:t>
+            </a:r>
+            <a:r>
+              <a:rPr lang="az-Latn-AZ" sz="1600"/>
+              <a:t>m</a:t>
+            </a:r>
+            <a:r>
+              <a:rPr lang="en-US" sz="1600"/>
+              <a:t>iz texnologiyadan</a:t>
+            </a:r>
+            <a:r>
+              <a:rPr lang="az-Latn-AZ" sz="1600"/>
+              <a:t>, frameworkdan</a:t>
+            </a:r>
+            <a:r>
+              <a:rPr lang="en-US" sz="1600"/>
+              <a:t> asılıdır. </a:t>
+            </a:r>
+            <a:r>
+              <a:rPr lang="az-Latn-AZ" sz="1600"/>
+              <a:t> </a:t>
+            </a:r>
+            <a:r>
+              <a:rPr lang="en-US" sz="1600" b="1">
                 <a:latin typeface="-apple-system"/>
               </a:rPr>
+              <a:t>GraphQL</a:t>
+            </a:r>
+            <a:r>
+              <a:rPr lang="az-Latn-AZ" sz="1600">
+                <a:latin typeface="-apple-system"/>
+              </a:rPr>
+              <a:t> </a:t>
+            </a:r>
+            <a:r>
+              <a:rPr lang="en-US" sz="1600">
+                <a:latin typeface="-apple-system"/>
+              </a:rPr>
+              <a:t>-in öz dili var — </a:t>
+            </a:r>
+            <a:r>
+              <a:rPr lang="az-Latn-AZ" sz="1600">
+                <a:latin typeface="-apple-system"/>
+              </a:rPr>
+              <a:t>Buna </a:t>
+            </a:r>
+            <a:r>
+              <a:rPr lang="en-US" sz="1600" b="1">
+                <a:latin typeface="-apple-system"/>
+              </a:rPr>
+              <a:t>SDL</a:t>
+            </a:r>
+            <a:r>
+              <a:rPr lang="az-Latn-AZ" sz="1600">
+                <a:latin typeface="-apple-system"/>
+              </a:rPr>
+              <a:t> ( Schema Definition Language ) deyilir</a:t>
+            </a:r>
+            <a:r>
+              <a:rPr lang="en-US" sz="1600">
+                <a:latin typeface="-apple-system"/>
+              </a:rPr>
               <a:t>.</a:t>
             </a:r>
-            <a:endParaRPr lang="en-US"/>
+            <a:r>
+              <a:rPr lang="az-Latn-AZ" sz="1600">
+                <a:latin typeface="-apple-system"/>
+              </a:rPr>
+              <a:t> Bu cür “</a:t>
+            </a:r>
+            <a:r>
+              <a:rPr lang="az-Latn-AZ" sz="1600" b="1">
+                <a:latin typeface="-apple-system"/>
+              </a:rPr>
+              <a:t>xalis schema</a:t>
+            </a:r>
+            <a:r>
+              <a:rPr lang="az-Latn-AZ" sz="1600">
+                <a:latin typeface="-apple-system"/>
+              </a:rPr>
+              <a:t>” adətən </a:t>
+            </a:r>
+            <a:r>
+              <a:rPr lang="en-US" sz="1600" b="1">
+                <a:solidFill>
+                  <a:srgbClr val="00B0F0"/>
+                </a:solidFill>
+              </a:rPr>
+              <a:t>.graphql </a:t>
+            </a:r>
+            <a:r>
+              <a:rPr lang="en-US" sz="1600"/>
+              <a:t>və ya </a:t>
+            </a:r>
+            <a:r>
+              <a:rPr lang="en-US" sz="1600" b="1">
+                <a:solidFill>
+                  <a:srgbClr val="00B0F0"/>
+                </a:solidFill>
+              </a:rPr>
+              <a:t>.graphqls </a:t>
+            </a:r>
+            <a:r>
+              <a:rPr lang="az-Latn-AZ" sz="1600">
+                <a:latin typeface="-apple-system"/>
+              </a:rPr>
+              <a:t>faylında saxlanılır. Bunu oxumaq çox rahatdır, amma təkbaşına işləməz. Framework onu yükləyib server koduna bağlamalıdır.</a:t>
+            </a:r>
+            <a:endParaRPr lang="en-US" sz="1600"/>
+          </a:p>
+          <a:p>
+            <a:pPr>
+              <a:lnSpc>
+                <a:spcPct val="150000"/>
+              </a:lnSpc>
+            </a:pPr>
+            <a:endParaRPr lang="az-Latn-AZ" sz="1600">
+              <a:effectLst/>
+            </a:endParaRPr>
           </a:p>
         </p:txBody>
       </p:sp>
+      <p:pic>
+        <p:nvPicPr>
+          <p:cNvPr id="9" name="Picture 8">
+            <a:extLst>
+              <a:ext uri="{FF2B5EF4-FFF2-40B4-BE49-F238E27FC236}">
+                <a16:creationId xmlns:a16="http://schemas.microsoft.com/office/drawing/2014/main" id="{CE00C95A-E8F6-CE0B-5308-DB75D5A802AB}"/>
+              </a:ext>
+            </a:extLst>
+          </p:cNvPr>
+          <p:cNvPicPr>
+            <a:picLocks noChangeAspect="1"/>
+          </p:cNvPicPr>
+          <p:nvPr/>
+        </p:nvPicPr>
+        <p:blipFill>
+          <a:blip r:embed="rId2"/>
+          <a:stretch>
+            <a:fillRect/>
+          </a:stretch>
+        </p:blipFill>
+        <p:spPr>
+          <a:xfrm>
+            <a:off x="203200" y="2294762"/>
+            <a:ext cx="1790950" cy="3553321"/>
+          </a:xfrm>
+          <a:prstGeom prst="rect">
+            <a:avLst/>
+          </a:prstGeom>
+        </p:spPr>
+      </p:pic>
     </p:spTree>
     <p:extLst>
       <p:ext uri="{BB962C8B-B14F-4D97-AF65-F5344CB8AC3E}">
         <p14:creationId xmlns:p14="http://schemas.microsoft.com/office/powerpoint/2010/main" val="511988989"/>
+      </p:ext>
+    </p:extLst>
+  </p:cSld>
+  <p:clrMapOvr>
+    <a:masterClrMapping/>
+  </p:clrMapOvr>
+</p:sld>
+</file>
+
+<file path=ppt/slides/slide48.xml><?xml version="1.0" encoding="utf-8"?>
+<p:sld xmlns:a="http://schemas.openxmlformats.org/drawingml/2006/main" xmlns:r="http://schemas.openxmlformats.org/officeDocument/2006/relationships" xmlns:p="http://schemas.openxmlformats.org/presentationml/2006/main">
+  <p:cSld>
+    <p:spTree>
+      <p:nvGrpSpPr>
+        <p:cNvPr id="1" name="">
+          <a:extLst>
+            <a:ext uri="{FF2B5EF4-FFF2-40B4-BE49-F238E27FC236}">
+              <a16:creationId xmlns:a16="http://schemas.microsoft.com/office/drawing/2014/main" id="{984723C1-05C3-DD78-55D2-258A35A05656}"/>
+            </a:ext>
+          </a:extLst>
+        </p:cNvPr>
+        <p:cNvGrpSpPr/>
+        <p:nvPr/>
+      </p:nvGrpSpPr>
+      <p:grpSpPr>
+        <a:xfrm>
+          <a:off x="0" y="0"/>
+          <a:ext cx="0" cy="0"/>
+          <a:chOff x="0" y="0"/>
+          <a:chExt cx="0" cy="0"/>
+        </a:xfrm>
+      </p:grpSpPr>
+      <p:sp>
+        <p:nvSpPr>
+          <p:cNvPr id="7" name="TextBox 6">
+            <a:extLst>
+              <a:ext uri="{FF2B5EF4-FFF2-40B4-BE49-F238E27FC236}">
+                <a16:creationId xmlns:a16="http://schemas.microsoft.com/office/drawing/2014/main" id="{FCB1296C-7096-017D-6038-B03663914530}"/>
+              </a:ext>
+            </a:extLst>
+          </p:cNvPr>
+          <p:cNvSpPr txBox="1"/>
+          <p:nvPr/>
+        </p:nvSpPr>
+        <p:spPr>
+          <a:xfrm>
+            <a:off x="203200" y="244826"/>
+            <a:ext cx="11822545" cy="6001643"/>
+          </a:xfrm>
+          <a:prstGeom prst="rect">
+            <a:avLst/>
+          </a:prstGeom>
+          <a:noFill/>
+        </p:spPr>
+        <p:txBody>
+          <a:bodyPr wrap="square">
+            <a:spAutoFit/>
+          </a:bodyPr>
+          <a:lstStyle/>
+          <a:p>
+            <a:r>
+              <a:rPr lang="az-Latn-AZ" sz="1200"/>
+              <a:t>Ancaq</a:t>
+            </a:r>
+            <a:r>
+              <a:rPr lang="en-US" sz="1200"/>
+              <a:t> bu</a:t>
+            </a:r>
+            <a:r>
+              <a:rPr lang="az-Latn-AZ" sz="1200"/>
+              <a:t> uzantının necə yazılacağı</a:t>
+            </a:r>
+            <a:r>
+              <a:rPr lang="en-US" sz="1200"/>
+              <a:t>, istifadə etdiyi</a:t>
+            </a:r>
+            <a:r>
+              <a:rPr lang="az-Latn-AZ" sz="1200"/>
+              <a:t>m</a:t>
+            </a:r>
+            <a:r>
+              <a:rPr lang="en-US" sz="1200"/>
+              <a:t>iz framework-ə görə dəyişə bilər. Məsələn, </a:t>
+            </a:r>
+            <a:r>
+              <a:rPr lang="en-US" sz="1200" b="1" i="1"/>
+              <a:t>PHP-də</a:t>
+            </a:r>
+            <a:r>
+              <a:rPr lang="en-US" sz="1200"/>
+              <a:t> schema ya </a:t>
+            </a:r>
+            <a:r>
+              <a:rPr lang="en-US" sz="1200" b="1"/>
+              <a:t>faylda</a:t>
+            </a:r>
+            <a:r>
+              <a:rPr lang="en-US" sz="1200"/>
+              <a:t>, ya da </a:t>
+            </a:r>
+            <a:r>
+              <a:rPr lang="en-US" sz="1200" b="1"/>
+              <a:t>kod daxilində </a:t>
+            </a:r>
+            <a:r>
+              <a:rPr lang="en-US" sz="1200"/>
+              <a:t>təyin oluna bilər.</a:t>
+            </a:r>
+            <a:endParaRPr lang="az-Latn-AZ" sz="1200"/>
+          </a:p>
+          <a:p>
+            <a:endParaRPr lang="az-Latn-AZ" sz="1200"/>
+          </a:p>
+          <a:p>
+            <a:r>
+              <a:rPr lang="az-Latn-AZ" sz="1200"/>
+              <a:t>Tutaq ki, sən restoran üçün menyu hazırlayırsan. Menyunu kağıza yazırsan və adına “Menyu” deyirsən. Amma kağızın adı “</a:t>
+            </a:r>
+            <a:r>
+              <a:rPr lang="az-Latn-AZ" sz="1200" b="1"/>
+              <a:t>menu.pdf</a:t>
+            </a:r>
+            <a:r>
+              <a:rPr lang="az-Latn-AZ" sz="1200"/>
+              <a:t>” də ola bilər, “</a:t>
+            </a:r>
+            <a:r>
+              <a:rPr lang="az-Latn-AZ" sz="1200" b="1"/>
+              <a:t>yemekler.txt</a:t>
+            </a:r>
+            <a:r>
+              <a:rPr lang="az-Latn-AZ" sz="1200"/>
+              <a:t>” də. Əsas odur ki, restoran işçiləri (server) bu menyunu oxuya bilsin. GraphQL-də də eynilə – schema-nı harada və necə saxlamağın layihənin quruluşundan asılıdır.</a:t>
+            </a:r>
+          </a:p>
+          <a:p>
+            <a:endParaRPr lang="az-Latn-AZ" sz="1200">
+              <a:effectLst/>
+            </a:endParaRPr>
+          </a:p>
+          <a:p>
+            <a:endParaRPr lang="az-Latn-AZ" sz="1200"/>
+          </a:p>
+          <a:p>
+            <a:pPr>
+              <a:lnSpc>
+                <a:spcPct val="150000"/>
+              </a:lnSpc>
+            </a:pPr>
+            <a:r>
+              <a:rPr lang="az-Latn-AZ" sz="1200"/>
+              <a:t>PHP-də nümunələr: Faylda təyin: Əgər </a:t>
+            </a:r>
+            <a:r>
+              <a:rPr lang="az-Latn-AZ" sz="1200" b="1"/>
+              <a:t>webonyx/graphql-php </a:t>
+            </a:r>
+            <a:r>
+              <a:rPr lang="az-Latn-AZ" sz="1200"/>
+              <a:t>və ya </a:t>
+            </a:r>
+            <a:r>
+              <a:rPr lang="az-Latn-AZ" sz="1200" b="1"/>
+              <a:t>Lighthouse</a:t>
+            </a:r>
+            <a:r>
+              <a:rPr lang="az-Latn-AZ" sz="1200"/>
+              <a:t> istifadə edirsinizsə, schema adətən </a:t>
+            </a:r>
+            <a:r>
+              <a:rPr lang="az-Latn-AZ" sz="1200" b="1"/>
+              <a:t>schema.graphql </a:t>
+            </a:r>
+            <a:r>
+              <a:rPr lang="az-Latn-AZ" sz="1200"/>
+              <a:t>və ya </a:t>
+            </a:r>
+            <a:r>
+              <a:rPr lang="az-Latn-AZ" sz="1200" b="1"/>
+              <a:t>schema.graphqls </a:t>
+            </a:r>
+            <a:r>
+              <a:rPr lang="az-Latn-AZ" sz="1200"/>
+              <a:t>adlı faylda saxlanılır. </a:t>
+            </a:r>
+          </a:p>
+          <a:p>
+            <a:pPr>
+              <a:lnSpc>
+                <a:spcPct val="150000"/>
+              </a:lnSpc>
+            </a:pPr>
+            <a:r>
+              <a:rPr lang="az-Latn-AZ" sz="1200" b="1"/>
+              <a:t>Məsələn</a:t>
+            </a:r>
+            <a:r>
+              <a:rPr lang="az-Latn-AZ" sz="1200"/>
+              <a:t>: Bu faylı </a:t>
+            </a:r>
+            <a:r>
+              <a:rPr lang="az-Latn-AZ" sz="1200" b="1" i="1"/>
+              <a:t>graphql/</a:t>
+            </a:r>
+            <a:r>
+              <a:rPr lang="en-US" sz="1200" b="1" i="1"/>
+              <a:t>schema.graphql</a:t>
+            </a:r>
+            <a:r>
+              <a:rPr lang="az-Latn-AZ" sz="1200" b="1" i="1"/>
+              <a:t> </a:t>
+            </a:r>
+            <a:r>
+              <a:rPr lang="az-Latn-AZ" sz="1200"/>
+              <a:t>qovluğunda saxlaya bilərsiniz. </a:t>
+            </a:r>
+            <a:endParaRPr lang="az-Latn-AZ" sz="1200">
+              <a:effectLst/>
+            </a:endParaRPr>
+          </a:p>
+          <a:p>
+            <a:endParaRPr lang="az-Latn-AZ" sz="1200"/>
+          </a:p>
+          <a:p>
+            <a:endParaRPr lang="az-Latn-AZ" sz="1200">
+              <a:effectLst/>
+            </a:endParaRPr>
+          </a:p>
+          <a:p>
+            <a:endParaRPr lang="az-Latn-AZ" sz="1200"/>
+          </a:p>
+          <a:p>
+            <a:endParaRPr lang="az-Latn-AZ" sz="1200">
+              <a:effectLst/>
+            </a:endParaRPr>
+          </a:p>
+          <a:p>
+            <a:endParaRPr lang="az-Latn-AZ" sz="1200"/>
+          </a:p>
+          <a:p>
+            <a:endParaRPr lang="az-Latn-AZ" sz="1200"/>
+          </a:p>
+          <a:p>
+            <a:endParaRPr lang="az-Latn-AZ" sz="1200">
+              <a:effectLst/>
+            </a:endParaRPr>
+          </a:p>
+          <a:p>
+            <a:endParaRPr lang="az-Latn-AZ" sz="1200"/>
+          </a:p>
+          <a:p>
+            <a:r>
+              <a:rPr lang="az-Latn-AZ" sz="1200"/>
+              <a:t>Kod daxilində təyin: </a:t>
+            </a:r>
+            <a:r>
+              <a:rPr lang="az-Latn-AZ" sz="1200" b="1"/>
+              <a:t>webonyx/graphql-php </a:t>
+            </a:r>
+            <a:r>
+              <a:rPr lang="az-Latn-AZ" sz="1200"/>
+              <a:t>ilə schema birbaşa PHP kodunda yazılır, fayl istifadə olunmur: </a:t>
+            </a:r>
+            <a:r>
+              <a:rPr lang="en-US" sz="1200" b="1"/>
+              <a:t>schema.php</a:t>
+            </a:r>
+            <a:endParaRPr lang="az-Latn-AZ" sz="1200" b="1"/>
+          </a:p>
+          <a:p>
+            <a:endParaRPr lang="az-Latn-AZ" sz="1200">
+              <a:effectLst/>
+            </a:endParaRPr>
+          </a:p>
+          <a:p>
+            <a:endParaRPr lang="az-Latn-AZ" sz="1200"/>
+          </a:p>
+          <a:p>
+            <a:endParaRPr lang="az-Latn-AZ" sz="1200">
+              <a:effectLst/>
+            </a:endParaRPr>
+          </a:p>
+          <a:p>
+            <a:endParaRPr lang="az-Latn-AZ" sz="1200"/>
+          </a:p>
+          <a:p>
+            <a:endParaRPr lang="az-Latn-AZ" sz="1200">
+              <a:effectLst/>
+            </a:endParaRPr>
+          </a:p>
+          <a:p>
+            <a:endParaRPr lang="az-Latn-AZ" sz="1200"/>
+          </a:p>
+          <a:p>
+            <a:endParaRPr lang="az-Latn-AZ" sz="1200">
+              <a:effectLst/>
+            </a:endParaRPr>
+          </a:p>
+          <a:p>
+            <a:endParaRPr lang="az-Latn-AZ" sz="1200"/>
+          </a:p>
+          <a:p>
+            <a:endParaRPr lang="az-Latn-AZ" sz="1200">
+              <a:effectLst/>
+            </a:endParaRPr>
+          </a:p>
+          <a:p>
+            <a:endParaRPr lang="az-Latn-AZ" sz="1200"/>
+          </a:p>
+          <a:p>
+            <a:endParaRPr lang="az-Latn-AZ" sz="1200">
+              <a:effectLst/>
+            </a:endParaRPr>
+          </a:p>
+          <a:p>
+            <a:endParaRPr lang="az-Latn-AZ" sz="1200"/>
+          </a:p>
+          <a:p>
+            <a:r>
+              <a:rPr lang="az-Latn-AZ" sz="1200" b="1" i="1"/>
+              <a:t>Lighthouse</a:t>
+            </a:r>
+            <a:r>
+              <a:rPr lang="az-Latn-AZ" sz="1200"/>
+              <a:t> (Laravel) ilə: Laravel-də </a:t>
+            </a:r>
+            <a:r>
+              <a:rPr lang="az-Latn-AZ" sz="1200" b="1"/>
+              <a:t>Lighthouse</a:t>
+            </a:r>
+            <a:r>
+              <a:rPr lang="az-Latn-AZ" sz="1200"/>
+              <a:t> istifadə edirsinizsə, schema adətən </a:t>
+            </a:r>
+            <a:r>
+              <a:rPr lang="az-Latn-AZ" sz="1200" b="1"/>
+              <a:t>graphql/schema.graphql </a:t>
+            </a:r>
+            <a:r>
+              <a:rPr lang="az-Latn-AZ" sz="1200"/>
+              <a:t>faylında saxlanılır: Bu əmr, avtomatik </a:t>
+            </a:r>
+            <a:r>
+              <a:rPr lang="az-Latn-AZ" sz="1200" b="1"/>
+              <a:t>graphql/</a:t>
+            </a:r>
+            <a:r>
+              <a:rPr lang="az-Latn-AZ" sz="1200"/>
+              <a:t> qovluğunda </a:t>
+            </a:r>
+            <a:r>
+              <a:rPr lang="az-Latn-AZ" sz="1200" b="1"/>
+              <a:t>schema.graphql </a:t>
+            </a:r>
+            <a:r>
+              <a:rPr lang="az-Latn-AZ" sz="1200"/>
+              <a:t>faylı yaradır.</a:t>
+            </a:r>
+            <a:endParaRPr lang="az-Latn-AZ" sz="1200">
+              <a:effectLst/>
+            </a:endParaRPr>
+          </a:p>
+        </p:txBody>
+      </p:sp>
+      <p:pic>
+        <p:nvPicPr>
+          <p:cNvPr id="3" name="Picture 2">
+            <a:extLst>
+              <a:ext uri="{FF2B5EF4-FFF2-40B4-BE49-F238E27FC236}">
+                <a16:creationId xmlns:a16="http://schemas.microsoft.com/office/drawing/2014/main" id="{9E728683-1048-9BBE-9511-CC81BB3FF16B}"/>
+              </a:ext>
+            </a:extLst>
+          </p:cNvPr>
+          <p:cNvPicPr>
+            <a:picLocks noChangeAspect="1"/>
+          </p:cNvPicPr>
+          <p:nvPr/>
+        </p:nvPicPr>
+        <p:blipFill>
+          <a:blip r:embed="rId2"/>
+          <a:stretch>
+            <a:fillRect/>
+          </a:stretch>
+        </p:blipFill>
+        <p:spPr>
+          <a:xfrm>
+            <a:off x="203200" y="1994088"/>
+            <a:ext cx="1320800" cy="1050008"/>
+          </a:xfrm>
+          <a:prstGeom prst="rect">
+            <a:avLst/>
+          </a:prstGeom>
+        </p:spPr>
+      </p:pic>
+      <p:pic>
+        <p:nvPicPr>
+          <p:cNvPr id="5" name="Picture 4">
+            <a:extLst>
+              <a:ext uri="{FF2B5EF4-FFF2-40B4-BE49-F238E27FC236}">
+                <a16:creationId xmlns:a16="http://schemas.microsoft.com/office/drawing/2014/main" id="{4990A4B0-76B6-BDE1-3E9A-D3BB83BFE949}"/>
+              </a:ext>
+            </a:extLst>
+          </p:cNvPr>
+          <p:cNvPicPr>
+            <a:picLocks noChangeAspect="1"/>
+          </p:cNvPicPr>
+          <p:nvPr/>
+        </p:nvPicPr>
+        <p:blipFill>
+          <a:blip r:embed="rId3"/>
+          <a:stretch>
+            <a:fillRect/>
+          </a:stretch>
+        </p:blipFill>
+        <p:spPr>
+          <a:xfrm>
+            <a:off x="203200" y="3661165"/>
+            <a:ext cx="2429163" cy="1623807"/>
+          </a:xfrm>
+          <a:prstGeom prst="rect">
+            <a:avLst/>
+          </a:prstGeom>
+        </p:spPr>
+      </p:pic>
+      <p:pic>
+        <p:nvPicPr>
+          <p:cNvPr id="8" name="Picture 7">
+            <a:extLst>
+              <a:ext uri="{FF2B5EF4-FFF2-40B4-BE49-F238E27FC236}">
+                <a16:creationId xmlns:a16="http://schemas.microsoft.com/office/drawing/2014/main" id="{642A4513-58C4-7B46-13E8-55B117DF6E91}"/>
+              </a:ext>
+            </a:extLst>
+          </p:cNvPr>
+          <p:cNvPicPr>
+            <a:picLocks noChangeAspect="1"/>
+          </p:cNvPicPr>
+          <p:nvPr/>
+        </p:nvPicPr>
+        <p:blipFill>
+          <a:blip r:embed="rId4"/>
+          <a:stretch>
+            <a:fillRect/>
+          </a:stretch>
+        </p:blipFill>
+        <p:spPr>
+          <a:xfrm>
+            <a:off x="203200" y="6160053"/>
+            <a:ext cx="7250545" cy="462136"/>
+          </a:xfrm>
+          <a:prstGeom prst="rect">
+            <a:avLst/>
+          </a:prstGeom>
+        </p:spPr>
+      </p:pic>
+    </p:spTree>
+    <p:extLst>
+      <p:ext uri="{BB962C8B-B14F-4D97-AF65-F5344CB8AC3E}">
+        <p14:creationId xmlns:p14="http://schemas.microsoft.com/office/powerpoint/2010/main" val="359154103"/>
       </p:ext>
     </p:extLst>
   </p:cSld>
@@ -13714,7 +14398,7 @@
         <p:cNvPr id="1" name="">
           <a:extLst>
             <a:ext uri="{FF2B5EF4-FFF2-40B4-BE49-F238E27FC236}">
-              <a16:creationId xmlns:a16="http://schemas.microsoft.com/office/drawing/2014/main" id="{E8F92B11-0A5B-E0B2-C868-70501656E906}"/>
+              <a16:creationId xmlns:a16="http://schemas.microsoft.com/office/drawing/2014/main" id="{92EAB921-F113-27A4-9931-EC01805AB1B6}"/>
             </a:ext>
           </a:extLst>
         </p:cNvPr>
@@ -13734,7 +14418,7 @@
           <p:cNvPr id="7" name="TextBox 6">
             <a:extLst>
               <a:ext uri="{FF2B5EF4-FFF2-40B4-BE49-F238E27FC236}">
-                <a16:creationId xmlns:a16="http://schemas.microsoft.com/office/drawing/2014/main" id="{7664477A-D040-6469-95FE-70ABDDE57CEB}"/>
+                <a16:creationId xmlns:a16="http://schemas.microsoft.com/office/drawing/2014/main" id="{89FE18AD-D81D-CF69-D716-E8EFFF0A1AA9}"/>
               </a:ext>
             </a:extLst>
           </p:cNvPr>
@@ -13743,8 +14427,8 @@
         </p:nvSpPr>
         <p:spPr>
           <a:xfrm>
-            <a:off x="203200" y="244826"/>
-            <a:ext cx="11822545" cy="369332"/>
+            <a:off x="0" y="244826"/>
+            <a:ext cx="12192000" cy="646331"/>
           </a:xfrm>
           <a:prstGeom prst="rect">
             <a:avLst/>
@@ -13758,19 +14442,156 @@
           <a:lstStyle/>
           <a:p>
             <a:r>
-              <a:rPr lang="en-US">
+              <a:rPr lang="az-Latn-AZ" sz="1200" b="1">
                 <a:latin typeface="-apple-system"/>
               </a:rPr>
-              <a:t>.</a:t>
-            </a:r>
-            <a:endParaRPr lang="en-US"/>
+              <a:t>PHP</a:t>
+            </a:r>
+            <a:r>
+              <a:rPr lang="az-Latn-AZ" sz="1200">
+                <a:latin typeface="-apple-system"/>
+              </a:rPr>
+              <a:t> -də </a:t>
+            </a:r>
+            <a:r>
+              <a:rPr lang="en-US" sz="1200" b="1" i="1">
+                <a:latin typeface="-apple-system"/>
+              </a:rPr>
+              <a:t>.graphql </a:t>
+            </a:r>
+            <a:r>
+              <a:rPr lang="en-US" sz="1200">
+                <a:latin typeface="-apple-system"/>
+              </a:rPr>
+              <a:t>faylından istifadə </a:t>
+            </a:r>
+            <a:r>
+              <a:rPr lang="az-Latn-AZ" sz="1200">
+                <a:latin typeface="-apple-system"/>
+              </a:rPr>
+              <a:t>etdikdə </a:t>
+            </a:r>
+            <a:r>
+              <a:rPr lang="en-US" sz="1200">
+                <a:latin typeface="-apple-system"/>
+              </a:rPr>
+              <a:t>— sadəcə əlavə </a:t>
+            </a:r>
+            <a:r>
+              <a:rPr lang="en-US" sz="1200" b="1" i="1">
+                <a:solidFill>
+                  <a:srgbClr val="00B050"/>
+                </a:solidFill>
+                <a:latin typeface="-apple-system"/>
+              </a:rPr>
+              <a:t>parser</a:t>
+            </a:r>
+            <a:r>
+              <a:rPr lang="en-US" sz="1200">
+                <a:latin typeface="-apple-system"/>
+              </a:rPr>
+              <a:t> lazımdır. Bunun üçün hazır parserlər var, məsələn: </a:t>
+            </a:r>
+            <a:r>
+              <a:rPr lang="en-US" sz="1200" b="1">
+                <a:solidFill>
+                  <a:srgbClr val="00B050"/>
+                </a:solidFill>
+                <a:latin typeface="-apple-system"/>
+              </a:rPr>
+              <a:t>digiaonline/graphql-php </a:t>
+            </a:r>
+            <a:r>
+              <a:rPr lang="az-Latn-AZ" sz="1200" b="1">
+                <a:solidFill>
+                  <a:srgbClr val="00B050"/>
+                </a:solidFill>
+                <a:latin typeface="-apple-system"/>
+              </a:rPr>
+              <a:t> </a:t>
+            </a:r>
+            <a:r>
+              <a:rPr lang="az-Latn-AZ" sz="1200">
+                <a:latin typeface="-apple-system"/>
+              </a:rPr>
+              <a:t>( </a:t>
+            </a:r>
+            <a:r>
+              <a:rPr lang="az-Latn-AZ" sz="1200" u="sng">
+                <a:solidFill>
+                  <a:srgbClr val="00B0F0"/>
+                </a:solidFill>
+                <a:latin typeface="-apple-system"/>
+              </a:rPr>
+              <a:t>https://github.com/digiaonline/graphql-php</a:t>
+            </a:r>
+            <a:r>
+              <a:rPr lang="az-Latn-AZ" sz="1200">
+                <a:latin typeface="-apple-system"/>
+              </a:rPr>
+              <a:t> ).</a:t>
+            </a:r>
+          </a:p>
+          <a:p>
+            <a:endParaRPr lang="az-Latn-AZ" sz="1200">
+              <a:latin typeface="-apple-system"/>
+            </a:endParaRPr>
+          </a:p>
+          <a:p>
+            <a:r>
+              <a:rPr lang="en-US" sz="1200"/>
+              <a:t>Məsələn:</a:t>
+            </a:r>
+            <a:r>
+              <a:rPr lang="az-Latn-AZ" sz="1200"/>
+              <a:t> Yəni PHP-də .graphql faylı istifadə etmək mümkündür, amma standart deyil və əlavə parserlərdən istifadə etməlisən. Əksər PHP nümunələri </a:t>
+            </a:r>
+            <a:r>
+              <a:rPr lang="az-Latn-AZ" sz="1200" b="1" i="1"/>
+              <a:t>kod ilə</a:t>
+            </a:r>
+            <a:r>
+              <a:rPr lang="az-Latn-AZ" sz="1200"/>
+              <a:t> schema qurur.</a:t>
+            </a:r>
+            <a:endParaRPr lang="en-US" sz="1200"/>
           </a:p>
         </p:txBody>
       </p:sp>
+      <p:pic>
+        <p:nvPicPr>
+          <p:cNvPr id="3" name="Picture 2">
+            <a:extLst>
+              <a:ext uri="{FF2B5EF4-FFF2-40B4-BE49-F238E27FC236}">
+                <a16:creationId xmlns:a16="http://schemas.microsoft.com/office/drawing/2014/main" id="{9E2F244D-DE46-4E5B-A750-A3BDE1C0DEC3}"/>
+              </a:ext>
+            </a:extLst>
+          </p:cNvPr>
+          <p:cNvPicPr>
+            <a:picLocks noChangeAspect="1"/>
+          </p:cNvPicPr>
+          <p:nvPr/>
+        </p:nvPicPr>
+        <p:blipFill>
+          <a:blip r:embed="rId2"/>
+          <a:stretch>
+            <a:fillRect/>
+          </a:stretch>
+        </p:blipFill>
+        <p:spPr>
+          <a:xfrm>
+            <a:off x="0" y="967941"/>
+            <a:ext cx="4572638" cy="2095792"/>
+          </a:xfrm>
+          <a:prstGeom prst="rect">
+            <a:avLst/>
+          </a:prstGeom>
+        </p:spPr>
+      </p:pic>
     </p:spTree>
     <p:extLst>
       <p:ext uri="{BB962C8B-B14F-4D97-AF65-F5344CB8AC3E}">
-        <p14:creationId xmlns:p14="http://schemas.microsoft.com/office/powerpoint/2010/main" val="2357361739"/>
+        <p14:creationId xmlns:p14="http://schemas.microsoft.com/office/powerpoint/2010/main" val="801058551"/>
       </p:ext>
     </p:extLst>
   </p:cSld>
@@ -14156,7 +14977,7 @@
         <p:cNvPr id="1" name="">
           <a:extLst>
             <a:ext uri="{FF2B5EF4-FFF2-40B4-BE49-F238E27FC236}">
-              <a16:creationId xmlns:a16="http://schemas.microsoft.com/office/drawing/2014/main" id="{92EAB921-F113-27A4-9931-EC01805AB1B6}"/>
+              <a16:creationId xmlns:a16="http://schemas.microsoft.com/office/drawing/2014/main" id="{E8F92B11-0A5B-E0B2-C868-70501656E906}"/>
             </a:ext>
           </a:extLst>
         </p:cNvPr>
@@ -14176,7 +14997,7 @@
           <p:cNvPr id="7" name="TextBox 6">
             <a:extLst>
               <a:ext uri="{FF2B5EF4-FFF2-40B4-BE49-F238E27FC236}">
-                <a16:creationId xmlns:a16="http://schemas.microsoft.com/office/drawing/2014/main" id="{89FE18AD-D81D-CF69-D716-E8EFFF0A1AA9}"/>
+                <a16:creationId xmlns:a16="http://schemas.microsoft.com/office/drawing/2014/main" id="{7664477A-D040-6469-95FE-70ABDDE57CEB}"/>
               </a:ext>
             </a:extLst>
           </p:cNvPr>
@@ -14186,7 +15007,7 @@
         <p:spPr>
           <a:xfrm>
             <a:off x="203200" y="244826"/>
-            <a:ext cx="11822545" cy="369332"/>
+            <a:ext cx="11822545" cy="6522235"/>
           </a:xfrm>
           <a:prstGeom prst="rect">
             <a:avLst/>
@@ -14199,20 +15020,317 @@
           </a:bodyPr>
           <a:lstStyle/>
           <a:p>
-            <a:r>
-              <a:rPr lang="en-US">
-                <a:latin typeface="-apple-system"/>
-              </a:rPr>
-              <a:t>.</a:t>
-            </a:r>
-            <a:endParaRPr lang="en-US"/>
+            <a:pPr>
+              <a:lnSpc>
+                <a:spcPct val="150000"/>
+              </a:lnSpc>
+            </a:pPr>
+            <a:r>
+              <a:rPr lang="az-Latn-AZ" sz="1400"/>
+              <a:t>Çox vaxt isə nümunələrdə </a:t>
+            </a:r>
+            <a:r>
+              <a:rPr lang="az-Latn-AZ" sz="1400" b="1"/>
+              <a:t>graphql</a:t>
+            </a:r>
+            <a:r>
+              <a:rPr lang="az-Latn-AZ" sz="1400"/>
+              <a:t> kodlarını, </a:t>
+            </a:r>
+            <a:r>
+              <a:rPr lang="az-Latn-AZ" sz="1400" b="1">
+                <a:solidFill>
+                  <a:srgbClr val="00B050"/>
+                </a:solidFill>
+              </a:rPr>
+              <a:t>.js </a:t>
+            </a:r>
+            <a:r>
+              <a:rPr lang="az-Latn-AZ" sz="1400"/>
+              <a:t>içində görərik. Çünki bir çox </a:t>
+            </a:r>
+            <a:r>
+              <a:rPr lang="az-Latn-AZ" sz="1400" b="1"/>
+              <a:t>Node.js </a:t>
+            </a:r>
+            <a:r>
+              <a:rPr lang="az-Latn-AZ" sz="1400"/>
+              <a:t>kitabxanaları (məsələn, </a:t>
+            </a:r>
+            <a:r>
+              <a:rPr lang="az-Latn-AZ" sz="1400" b="1">
+                <a:solidFill>
+                  <a:srgbClr val="00B050"/>
+                </a:solidFill>
+              </a:rPr>
+              <a:t>apollo-server</a:t>
+            </a:r>
+            <a:r>
+              <a:rPr lang="az-Latn-AZ" sz="1400"/>
+              <a:t>, </a:t>
+            </a:r>
+            <a:r>
+              <a:rPr lang="az-Latn-AZ" sz="1400" b="1">
+                <a:solidFill>
+                  <a:srgbClr val="00B050"/>
+                </a:solidFill>
+              </a:rPr>
+              <a:t>graphql-yoga</a:t>
+            </a:r>
+            <a:r>
+              <a:rPr lang="az-Latn-AZ" sz="1400"/>
+              <a:t>) schema -nı </a:t>
+            </a:r>
+            <a:r>
+              <a:rPr lang="az-Latn-AZ" sz="1400" b="1"/>
+              <a:t>JavaScript string </a:t>
+            </a:r>
+            <a:r>
+              <a:rPr lang="az-Latn-AZ" sz="1400"/>
+              <a:t>kimi qəbul edir. Yəni, SDL kodunu string olaraq yazıb </a:t>
+            </a:r>
+            <a:r>
+              <a:rPr lang="az-Latn-AZ" sz="1400" b="1"/>
+              <a:t>.js </a:t>
+            </a:r>
+            <a:r>
+              <a:rPr lang="az-Latn-AZ" sz="1400"/>
+              <a:t>faylının içində saxlayırlar: </a:t>
+            </a:r>
+          </a:p>
+          <a:p>
+            <a:pPr>
+              <a:lnSpc>
+                <a:spcPct val="150000"/>
+              </a:lnSpc>
+            </a:pPr>
+            <a:endParaRPr lang="az-Latn-AZ" sz="1400"/>
+          </a:p>
+          <a:p>
+            <a:pPr>
+              <a:lnSpc>
+                <a:spcPct val="150000"/>
+              </a:lnSpc>
+            </a:pPr>
+            <a:endParaRPr lang="az-Latn-AZ" sz="1400"/>
+          </a:p>
+          <a:p>
+            <a:pPr>
+              <a:lnSpc>
+                <a:spcPct val="150000"/>
+              </a:lnSpc>
+            </a:pPr>
+            <a:endParaRPr lang="az-Latn-AZ" sz="1400"/>
+          </a:p>
+          <a:p>
+            <a:pPr>
+              <a:lnSpc>
+                <a:spcPct val="150000"/>
+              </a:lnSpc>
+            </a:pPr>
+            <a:endParaRPr lang="az-Latn-AZ" sz="1400"/>
+          </a:p>
+          <a:p>
+            <a:pPr>
+              <a:lnSpc>
+                <a:spcPct val="150000"/>
+              </a:lnSpc>
+            </a:pPr>
+            <a:endParaRPr lang="az-Latn-AZ" sz="1400"/>
+          </a:p>
+          <a:p>
+            <a:pPr>
+              <a:lnSpc>
+                <a:spcPct val="150000"/>
+              </a:lnSpc>
+            </a:pPr>
+            <a:endParaRPr lang="az-Latn-AZ" sz="1400"/>
+          </a:p>
+          <a:p>
+            <a:pPr>
+              <a:lnSpc>
+                <a:spcPct val="150000"/>
+              </a:lnSpc>
+            </a:pPr>
+            <a:endParaRPr lang="az-Latn-AZ" sz="1400"/>
+          </a:p>
+          <a:p>
+            <a:pPr>
+              <a:lnSpc>
+                <a:spcPct val="150000"/>
+              </a:lnSpc>
+            </a:pPr>
+            <a:endParaRPr lang="az-Latn-AZ" sz="1400"/>
+          </a:p>
+          <a:p>
+            <a:pPr>
+              <a:lnSpc>
+                <a:spcPct val="150000"/>
+              </a:lnSpc>
+            </a:pPr>
+            <a:endParaRPr lang="az-Latn-AZ" sz="1400"/>
+          </a:p>
+          <a:p>
+            <a:pPr>
+              <a:lnSpc>
+                <a:spcPct val="150000"/>
+              </a:lnSpc>
+            </a:pPr>
+            <a:endParaRPr lang="az-Latn-AZ" sz="1400"/>
+          </a:p>
+          <a:p>
+            <a:pPr>
+              <a:lnSpc>
+                <a:spcPct val="150000"/>
+              </a:lnSpc>
+            </a:pPr>
+            <a:endParaRPr lang="az-Latn-AZ" sz="1400"/>
+          </a:p>
+          <a:p>
+            <a:pPr>
+              <a:lnSpc>
+                <a:spcPct val="150000"/>
+              </a:lnSpc>
+            </a:pPr>
+            <a:endParaRPr lang="az-Latn-AZ" sz="1400"/>
+          </a:p>
+          <a:p>
+            <a:pPr>
+              <a:lnSpc>
+                <a:spcPct val="150000"/>
+              </a:lnSpc>
+            </a:pPr>
+            <a:r>
+              <a:rPr lang="az-Latn-AZ" sz="1400"/>
+              <a:t>Burada schema faktiki olaraq </a:t>
+            </a:r>
+            <a:r>
+              <a:rPr lang="az-Latn-AZ" sz="1400" b="1"/>
+              <a:t>.js</a:t>
+            </a:r>
+            <a:r>
+              <a:rPr lang="az-Latn-AZ" sz="1400"/>
+              <a:t> faylındadır, amma içindəki məzmun yenə də </a:t>
+            </a:r>
+            <a:r>
+              <a:rPr lang="az-Latn-AZ" sz="1400" b="1"/>
+              <a:t>SDL</a:t>
+            </a:r>
+            <a:r>
+              <a:rPr lang="az-Latn-AZ" sz="1400"/>
+              <a:t> dilindədir (sadəcə string formatında).</a:t>
+            </a:r>
+          </a:p>
+          <a:p>
+            <a:pPr>
+              <a:lnSpc>
+                <a:spcPct val="150000"/>
+              </a:lnSpc>
+            </a:pPr>
+            <a:endParaRPr lang="az-Latn-AZ" sz="1400"/>
+          </a:p>
+          <a:p>
+            <a:pPr>
+              <a:lnSpc>
+                <a:spcPct val="150000"/>
+              </a:lnSpc>
+            </a:pPr>
+            <a:endParaRPr lang="az-Latn-AZ" sz="1400"/>
+          </a:p>
+          <a:p>
+            <a:pPr marL="342900" indent="-342900">
+              <a:lnSpc>
+                <a:spcPct val="150000"/>
+              </a:lnSpc>
+              <a:buFont typeface="Wingdings" panose="05000000000000000000" pitchFamily="2" charset="2"/>
+              <a:buChar char="q"/>
+            </a:pPr>
+            <a:r>
+              <a:rPr lang="az-Latn-AZ" sz="1400" b="1"/>
+              <a:t>Böyük layihələrdə               </a:t>
+            </a:r>
+            <a:r>
+              <a:rPr lang="az-Latn-AZ" sz="1400"/>
+              <a:t>→ </a:t>
+            </a:r>
+            <a:r>
+              <a:rPr lang="az-Latn-AZ" sz="1400" b="1"/>
+              <a:t>.graphql </a:t>
+            </a:r>
+            <a:r>
+              <a:rPr lang="az-Latn-AZ" sz="1400"/>
+              <a:t>faylları saxlanır, çünki oxumaq, bölmək, paylaşmaq daha rahat olur. </a:t>
+            </a:r>
+          </a:p>
+          <a:p>
+            <a:pPr marL="342900" indent="-342900">
+              <a:lnSpc>
+                <a:spcPct val="150000"/>
+              </a:lnSpc>
+              <a:buFont typeface="Wingdings" panose="05000000000000000000" pitchFamily="2" charset="2"/>
+              <a:buChar char="q"/>
+            </a:pPr>
+            <a:r>
+              <a:rPr lang="az-Latn-AZ" sz="1400" b="1"/>
+              <a:t>Kiçik/prototip layihələrdə </a:t>
+            </a:r>
+            <a:r>
+              <a:rPr lang="az-Latn-AZ" sz="1400"/>
+              <a:t>→ hər şeyi </a:t>
+            </a:r>
+            <a:r>
+              <a:rPr lang="az-Latn-AZ" sz="1400" b="1"/>
+              <a:t>.js </a:t>
+            </a:r>
+            <a:r>
+              <a:rPr lang="az-Latn-AZ" sz="1400"/>
+              <a:t>içində yazırlar, çünki daha sadədir və əlavə konfiqurasiyaya ehtiyac yoxdur.</a:t>
+            </a:r>
+          </a:p>
+          <a:p>
+            <a:pPr>
+              <a:lnSpc>
+                <a:spcPct val="150000"/>
+              </a:lnSpc>
+            </a:pPr>
+            <a:endParaRPr lang="az-Latn-AZ" sz="1400"/>
           </a:p>
         </p:txBody>
       </p:sp>
+      <p:pic>
+        <p:nvPicPr>
+          <p:cNvPr id="3" name="Picture 2">
+            <a:extLst>
+              <a:ext uri="{FF2B5EF4-FFF2-40B4-BE49-F238E27FC236}">
+                <a16:creationId xmlns:a16="http://schemas.microsoft.com/office/drawing/2014/main" id="{54E5A6AE-E338-1B8D-E9C8-995F66C42436}"/>
+              </a:ext>
+            </a:extLst>
+          </p:cNvPr>
+          <p:cNvPicPr>
+            <a:picLocks noChangeAspect="1"/>
+          </p:cNvPicPr>
+          <p:nvPr/>
+        </p:nvPicPr>
+        <p:blipFill>
+          <a:blip r:embed="rId2"/>
+          <a:stretch>
+            <a:fillRect/>
+          </a:stretch>
+        </p:blipFill>
+        <p:spPr>
+          <a:xfrm>
+            <a:off x="203200" y="1068334"/>
+            <a:ext cx="2650836" cy="3545924"/>
+          </a:xfrm>
+          <a:prstGeom prst="rect">
+            <a:avLst/>
+          </a:prstGeom>
+        </p:spPr>
+      </p:pic>
     </p:spTree>
     <p:extLst>
       <p:ext uri="{BB962C8B-B14F-4D97-AF65-F5344CB8AC3E}">
-        <p14:creationId xmlns:p14="http://schemas.microsoft.com/office/powerpoint/2010/main" val="801058551"/>
+        <p14:creationId xmlns:p14="http://schemas.microsoft.com/office/powerpoint/2010/main" val="2357361739"/>
       </p:ext>
     </p:extLst>
   </p:cSld>
@@ -14223,80 +15341,6 @@
 </file>
 
 <file path=ppt/slides/slide51.xml><?xml version="1.0" encoding="utf-8"?>
-<p:sld xmlns:a="http://schemas.openxmlformats.org/drawingml/2006/main" xmlns:r="http://schemas.openxmlformats.org/officeDocument/2006/relationships" xmlns:p="http://schemas.openxmlformats.org/presentationml/2006/main">
-  <p:cSld>
-    <p:spTree>
-      <p:nvGrpSpPr>
-        <p:cNvPr id="1" name="">
-          <a:extLst>
-            <a:ext uri="{FF2B5EF4-FFF2-40B4-BE49-F238E27FC236}">
-              <a16:creationId xmlns:a16="http://schemas.microsoft.com/office/drawing/2014/main" id="{1D5BF5EB-B3B4-953C-C22B-85A7D755FCEB}"/>
-            </a:ext>
-          </a:extLst>
-        </p:cNvPr>
-        <p:cNvGrpSpPr/>
-        <p:nvPr/>
-      </p:nvGrpSpPr>
-      <p:grpSpPr>
-        <a:xfrm>
-          <a:off x="0" y="0"/>
-          <a:ext cx="0" cy="0"/>
-          <a:chOff x="0" y="0"/>
-          <a:chExt cx="0" cy="0"/>
-        </a:xfrm>
-      </p:grpSpPr>
-      <p:sp>
-        <p:nvSpPr>
-          <p:cNvPr id="7" name="TextBox 6">
-            <a:extLst>
-              <a:ext uri="{FF2B5EF4-FFF2-40B4-BE49-F238E27FC236}">
-                <a16:creationId xmlns:a16="http://schemas.microsoft.com/office/drawing/2014/main" id="{664F08FE-4CB8-9EE7-B91F-564F45F9D7C7}"/>
-              </a:ext>
-            </a:extLst>
-          </p:cNvPr>
-          <p:cNvSpPr txBox="1"/>
-          <p:nvPr/>
-        </p:nvSpPr>
-        <p:spPr>
-          <a:xfrm>
-            <a:off x="203200" y="244826"/>
-            <a:ext cx="11822545" cy="369332"/>
-          </a:xfrm>
-          <a:prstGeom prst="rect">
-            <a:avLst/>
-          </a:prstGeom>
-          <a:noFill/>
-        </p:spPr>
-        <p:txBody>
-          <a:bodyPr wrap="square">
-            <a:spAutoFit/>
-          </a:bodyPr>
-          <a:lstStyle/>
-          <a:p>
-            <a:r>
-              <a:rPr lang="en-US">
-                <a:latin typeface="-apple-system"/>
-              </a:rPr>
-              <a:t>.</a:t>
-            </a:r>
-            <a:endParaRPr lang="en-US"/>
-          </a:p>
-        </p:txBody>
-      </p:sp>
-    </p:spTree>
-    <p:extLst>
-      <p:ext uri="{BB962C8B-B14F-4D97-AF65-F5344CB8AC3E}">
-        <p14:creationId xmlns:p14="http://schemas.microsoft.com/office/powerpoint/2010/main" val="4070763766"/>
-      </p:ext>
-    </p:extLst>
-  </p:cSld>
-  <p:clrMapOvr>
-    <a:masterClrMapping/>
-  </p:clrMapOvr>
-</p:sld>
-</file>
-
-<file path=ppt/slides/slide52.xml><?xml version="1.0" encoding="utf-8"?>
 <p:sld xmlns:a="http://schemas.openxmlformats.org/drawingml/2006/main" xmlns:r="http://schemas.openxmlformats.org/officeDocument/2006/relationships" xmlns:p="http://schemas.openxmlformats.org/presentationml/2006/main">
   <p:cSld>
     <p:spTree>
@@ -14334,7 +15378,7 @@
         <p:spPr>
           <a:xfrm>
             <a:off x="203200" y="244826"/>
-            <a:ext cx="11822545" cy="369332"/>
+            <a:ext cx="11822545" cy="5539978"/>
           </a:xfrm>
           <a:prstGeom prst="rect">
             <a:avLst/>
@@ -14348,15 +15392,358 @@
           <a:lstStyle/>
           <a:p>
             <a:r>
-              <a:rPr lang="en-US">
-                <a:latin typeface="-apple-system"/>
-              </a:rPr>
-              <a:t>.</a:t>
-            </a:r>
-            <a:endParaRPr lang="en-US"/>
+              <a:rPr lang="az-Latn-AZ" sz="1200" b="1">
+                <a:solidFill>
+                  <a:srgbClr val="FF0000"/>
+                </a:solidFill>
+              </a:rPr>
+              <a:t>GraphQL SDL -də </a:t>
+            </a:r>
+            <a:r>
+              <a:rPr lang="en-US" sz="1200" b="1">
+                <a:solidFill>
+                  <a:srgbClr val="FF0000"/>
+                </a:solidFill>
+              </a:rPr>
+              <a:t>Hansı Tiplər Mövcuddur?</a:t>
+            </a:r>
+            <a:endParaRPr lang="az-Latn-AZ" sz="1200" b="1">
+              <a:solidFill>
+                <a:srgbClr val="FF0000"/>
+              </a:solidFill>
+            </a:endParaRPr>
+          </a:p>
+          <a:p>
+            <a:endParaRPr lang="en-US" sz="1200" b="1"/>
+          </a:p>
+          <a:p>
+            <a:r>
+              <a:rPr lang="en-US" sz="1200"/>
+              <a:t>GraphQL-də </a:t>
+            </a:r>
+            <a:r>
+              <a:rPr lang="en-US" sz="1200" b="1"/>
+              <a:t>tiplər</a:t>
+            </a:r>
+            <a:r>
+              <a:rPr lang="en-US" sz="1200"/>
+              <a:t> schema-nın əsasını təşkil edir. Tiplər məlumatların necə qurulduğunu və hansı formada sorğulana biləcəyini təyin edir. Əsas tiplər aşağıdakılardır:</a:t>
+            </a:r>
+            <a:endParaRPr lang="az-Latn-AZ" sz="1200"/>
+          </a:p>
+          <a:p>
+            <a:endParaRPr lang="en-US" sz="1200"/>
+          </a:p>
+          <a:p>
+            <a:r>
+              <a:rPr lang="az-Latn-AZ" sz="1200" b="1">
+                <a:solidFill>
+                  <a:srgbClr val="00B050"/>
+                </a:solidFill>
+              </a:rPr>
+              <a:t>1) </a:t>
+            </a:r>
+            <a:r>
+              <a:rPr lang="en-US" sz="1200" b="1">
+                <a:solidFill>
+                  <a:srgbClr val="00B050"/>
+                </a:solidFill>
+              </a:rPr>
+              <a:t>Scalar Tiplər</a:t>
+            </a:r>
+            <a:r>
+              <a:rPr lang="en-US" sz="1200"/>
+              <a:t>: Ən sadə tiplər, daha kiçik parçalara bölünmür. </a:t>
+            </a:r>
+          </a:p>
+          <a:p>
+            <a:pPr marL="742950" lvl="1" indent="-285750">
+              <a:lnSpc>
+                <a:spcPct val="150000"/>
+              </a:lnSpc>
+              <a:buFont typeface="Arial" panose="020B0604020202020204" pitchFamily="34" charset="0"/>
+              <a:buChar char="•"/>
+            </a:pPr>
+            <a:r>
+              <a:rPr lang="en-US" sz="1200" b="1"/>
+              <a:t>Int</a:t>
+            </a:r>
+            <a:r>
+              <a:rPr lang="en-US" sz="1200"/>
+              <a:t>: Tam ədəd (məsələn, 5, 42).</a:t>
+            </a:r>
+          </a:p>
+          <a:p>
+            <a:pPr marL="742950" lvl="1" indent="-285750">
+              <a:lnSpc>
+                <a:spcPct val="150000"/>
+              </a:lnSpc>
+              <a:buFont typeface="Arial" panose="020B0604020202020204" pitchFamily="34" charset="0"/>
+              <a:buChar char="•"/>
+            </a:pPr>
+            <a:r>
+              <a:rPr lang="en-US" sz="1200" b="1"/>
+              <a:t>Float</a:t>
+            </a:r>
+            <a:r>
+              <a:rPr lang="en-US" sz="1200"/>
+              <a:t>: Kəsrli ədəd (məsələn, 12.99).</a:t>
+            </a:r>
+          </a:p>
+          <a:p>
+            <a:pPr marL="742950" lvl="1" indent="-285750">
+              <a:lnSpc>
+                <a:spcPct val="150000"/>
+              </a:lnSpc>
+              <a:buFont typeface="Arial" panose="020B0604020202020204" pitchFamily="34" charset="0"/>
+              <a:buChar char="•"/>
+            </a:pPr>
+            <a:r>
+              <a:rPr lang="en-US" sz="1200" b="1"/>
+              <a:t>String</a:t>
+            </a:r>
+            <a:r>
+              <a:rPr lang="en-US" sz="1200"/>
+              <a:t>: Mətn (məsələn, “Sərgüzəştlər”).</a:t>
+            </a:r>
+          </a:p>
+          <a:p>
+            <a:pPr marL="742950" lvl="1" indent="-285750">
+              <a:lnSpc>
+                <a:spcPct val="150000"/>
+              </a:lnSpc>
+              <a:buFont typeface="Arial" panose="020B0604020202020204" pitchFamily="34" charset="0"/>
+              <a:buChar char="•"/>
+            </a:pPr>
+            <a:r>
+              <a:rPr lang="en-US" sz="1200" b="1"/>
+              <a:t>Boolean</a:t>
+            </a:r>
+            <a:r>
+              <a:rPr lang="en-US" sz="1200"/>
+              <a:t>: Doğru və ya yalan (true/false).</a:t>
+            </a:r>
+          </a:p>
+          <a:p>
+            <a:pPr marL="742950" lvl="1" indent="-285750">
+              <a:lnSpc>
+                <a:spcPct val="150000"/>
+              </a:lnSpc>
+              <a:buFont typeface="Arial" panose="020B0604020202020204" pitchFamily="34" charset="0"/>
+              <a:buChar char="•"/>
+            </a:pPr>
+            <a:r>
+              <a:rPr lang="en-US" sz="1200" b="1"/>
+              <a:t>ID</a:t>
+            </a:r>
+            <a:r>
+              <a:rPr lang="en-US" sz="1200"/>
+              <a:t>: Unikal identifikator (məsələn, “book_001”). </a:t>
+            </a:r>
+            <a:r>
+              <a:rPr lang="en-US" sz="1200" b="1"/>
+              <a:t>Nümunə</a:t>
+            </a:r>
+            <a:r>
+              <a:rPr lang="en-US" sz="1200"/>
+              <a:t>: Kitabın adı (String) və ya qiyməti (Float).</a:t>
+            </a:r>
+            <a:endParaRPr lang="az-Latn-AZ" sz="1200"/>
+          </a:p>
+          <a:p>
+            <a:pPr lvl="1"/>
+            <a:endParaRPr lang="az-Latn-AZ" sz="1200"/>
+          </a:p>
+          <a:p>
+            <a:pPr marL="0" lvl="1"/>
+            <a:endParaRPr lang="az-Latn-AZ" sz="1200"/>
+          </a:p>
+          <a:p>
+            <a:pPr marL="0" lvl="1"/>
+            <a:r>
+              <a:rPr lang="az-Latn-AZ" sz="1200" b="1">
+                <a:solidFill>
+                  <a:srgbClr val="00B050"/>
+                </a:solidFill>
+              </a:rPr>
+              <a:t>2) Object Tiplər</a:t>
+            </a:r>
+            <a:r>
+              <a:rPr lang="az-Latn-AZ" sz="1200"/>
+              <a:t>: Bir neçə sahədən (fields) ibarət məlumat qrupları. Məsələn, Kitab obyekti: id, ad, qiymet. Nümunə:</a:t>
+            </a:r>
+          </a:p>
+          <a:p>
+            <a:pPr marL="0" lvl="1"/>
+            <a:endParaRPr lang="az-Latn-AZ" sz="1200"/>
+          </a:p>
+          <a:p>
+            <a:pPr marL="0" lvl="1"/>
+            <a:endParaRPr lang="az-Latn-AZ" sz="1200"/>
+          </a:p>
+          <a:p>
+            <a:pPr marL="0" lvl="1"/>
+            <a:endParaRPr lang="az-Latn-AZ" sz="1200"/>
+          </a:p>
+          <a:p>
+            <a:pPr marL="0" lvl="1"/>
+            <a:endParaRPr lang="az-Latn-AZ" sz="1200"/>
+          </a:p>
+          <a:p>
+            <a:pPr marL="0" lvl="1"/>
+            <a:endParaRPr lang="az-Latn-AZ" sz="1200"/>
+          </a:p>
+          <a:p>
+            <a:pPr marL="0" lvl="1"/>
+            <a:endParaRPr lang="az-Latn-AZ" sz="1200"/>
+          </a:p>
+          <a:p>
+            <a:pPr marL="0" lvl="1"/>
+            <a:endParaRPr lang="az-Latn-AZ" sz="1200"/>
+          </a:p>
+          <a:p>
+            <a:pPr marL="0" lvl="1"/>
+            <a:r>
+              <a:rPr lang="az-Latn-AZ" sz="1200" b="1">
+                <a:solidFill>
+                  <a:srgbClr val="00B050"/>
+                </a:solidFill>
+              </a:rPr>
+              <a:t>3) List Tiplər</a:t>
+            </a:r>
+            <a:r>
+              <a:rPr lang="az-Latn-AZ" sz="1200"/>
+              <a:t>: Eyni tipdən olan çoxlu elementləri saxlayır. Məsələn, [Kitab] – kitabların siyahısı. Nümunə:</a:t>
+            </a:r>
+          </a:p>
+          <a:p>
+            <a:pPr marL="0" lvl="1"/>
+            <a:endParaRPr lang="az-Latn-AZ" sz="1200"/>
+          </a:p>
+          <a:p>
+            <a:pPr marL="0" lvl="1"/>
+            <a:endParaRPr lang="az-Latn-AZ" sz="1200"/>
+          </a:p>
+          <a:p>
+            <a:pPr marL="0" lvl="1"/>
+            <a:endParaRPr lang="az-Latn-AZ" sz="1200"/>
+          </a:p>
+          <a:p>
+            <a:pPr marL="0" lvl="1"/>
+            <a:endParaRPr lang="az-Latn-AZ" sz="1200"/>
+          </a:p>
+          <a:p>
+            <a:pPr marL="0" lvl="1"/>
+            <a:endParaRPr lang="az-Latn-AZ" sz="1200"/>
+          </a:p>
+          <a:p>
+            <a:pPr marL="0" lvl="1"/>
+            <a:r>
+              <a:rPr lang="az-Latn-AZ" sz="1200" b="1">
+                <a:solidFill>
+                  <a:srgbClr val="00B050"/>
+                </a:solidFill>
+              </a:rPr>
+              <a:t>4) Enum Tiplər</a:t>
+            </a:r>
+            <a:r>
+              <a:rPr lang="az-Latn-AZ" sz="1200"/>
+              <a:t>: Məhdud sayda seçimlərdən ibarətdir. Məsələn, kitabın kateqoriyası: Roman, Elm, Tarix. Nümunə:</a:t>
+            </a:r>
+            <a:endParaRPr lang="en-US" sz="1200"/>
           </a:p>
         </p:txBody>
       </p:sp>
+      <p:pic>
+        <p:nvPicPr>
+          <p:cNvPr id="3" name="Picture 2">
+            <a:extLst>
+              <a:ext uri="{FF2B5EF4-FFF2-40B4-BE49-F238E27FC236}">
+                <a16:creationId xmlns:a16="http://schemas.microsoft.com/office/drawing/2014/main" id="{BF50D7B0-16E5-89D8-56DE-F371FB6C1DD9}"/>
+              </a:ext>
+            </a:extLst>
+          </p:cNvPr>
+          <p:cNvPicPr>
+            <a:picLocks noChangeAspect="1"/>
+          </p:cNvPicPr>
+          <p:nvPr/>
+        </p:nvPicPr>
+        <p:blipFill>
+          <a:blip r:embed="rId2"/>
+          <a:stretch>
+            <a:fillRect/>
+          </a:stretch>
+        </p:blipFill>
+        <p:spPr>
+          <a:xfrm>
+            <a:off x="203200" y="3199481"/>
+            <a:ext cx="978063" cy="772155"/>
+          </a:xfrm>
+          <a:prstGeom prst="rect">
+            <a:avLst/>
+          </a:prstGeom>
+        </p:spPr>
+      </p:pic>
+      <p:pic>
+        <p:nvPicPr>
+          <p:cNvPr id="5" name="Picture 4">
+            <a:extLst>
+              <a:ext uri="{FF2B5EF4-FFF2-40B4-BE49-F238E27FC236}">
+                <a16:creationId xmlns:a16="http://schemas.microsoft.com/office/drawing/2014/main" id="{3BFF810C-6073-450B-EFD5-AB66C65D61CE}"/>
+              </a:ext>
+            </a:extLst>
+          </p:cNvPr>
+          <p:cNvPicPr>
+            <a:picLocks noChangeAspect="1"/>
+          </p:cNvPicPr>
+          <p:nvPr/>
+        </p:nvPicPr>
+        <p:blipFill>
+          <a:blip r:embed="rId3"/>
+          <a:stretch>
+            <a:fillRect/>
+          </a:stretch>
+        </p:blipFill>
+        <p:spPr>
+          <a:xfrm>
+            <a:off x="203200" y="4649037"/>
+            <a:ext cx="1339273" cy="476912"/>
+          </a:xfrm>
+          <a:prstGeom prst="rect">
+            <a:avLst/>
+          </a:prstGeom>
+        </p:spPr>
+      </p:pic>
+      <p:pic>
+        <p:nvPicPr>
+          <p:cNvPr id="8" name="Picture 7">
+            <a:extLst>
+              <a:ext uri="{FF2B5EF4-FFF2-40B4-BE49-F238E27FC236}">
+                <a16:creationId xmlns:a16="http://schemas.microsoft.com/office/drawing/2014/main" id="{BACD3E56-B4B2-1065-5BB1-135E043A9B91}"/>
+              </a:ext>
+            </a:extLst>
+          </p:cNvPr>
+          <p:cNvPicPr>
+            <a:picLocks noChangeAspect="1"/>
+          </p:cNvPicPr>
+          <p:nvPr/>
+        </p:nvPicPr>
+        <p:blipFill>
+          <a:blip r:embed="rId4"/>
+          <a:stretch>
+            <a:fillRect/>
+          </a:stretch>
+        </p:blipFill>
+        <p:spPr>
+          <a:xfrm>
+            <a:off x="203200" y="5792568"/>
+            <a:ext cx="1339273" cy="669637"/>
+          </a:xfrm>
+          <a:prstGeom prst="rect">
+            <a:avLst/>
+          </a:prstGeom>
+        </p:spPr>
+      </p:pic>
     </p:spTree>
     <p:extLst>
       <p:ext uri="{BB962C8B-B14F-4D97-AF65-F5344CB8AC3E}">
@@ -14370,7 +15757,7 @@
 </p:sld>
 </file>
 
-<file path=ppt/slides/slide53.xml><?xml version="1.0" encoding="utf-8"?>
+<file path=ppt/slides/slide52.xml><?xml version="1.0" encoding="utf-8"?>
 <p:sld xmlns:a="http://schemas.openxmlformats.org/drawingml/2006/main" xmlns:r="http://schemas.openxmlformats.org/officeDocument/2006/relationships" xmlns:p="http://schemas.openxmlformats.org/presentationml/2006/main">
   <p:cSld>
     <p:spTree>
@@ -14408,7 +15795,7 @@
         <p:spPr>
           <a:xfrm>
             <a:off x="203200" y="244826"/>
-            <a:ext cx="11822545" cy="369332"/>
+            <a:ext cx="11822545" cy="6740307"/>
           </a:xfrm>
           <a:prstGeom prst="rect">
             <a:avLst/>
@@ -14422,15 +15809,259 @@
           <a:lstStyle/>
           <a:p>
             <a:r>
+              <a:rPr lang="az-Latn-AZ" b="1">
+                <a:solidFill>
+                  <a:srgbClr val="00B050"/>
+                </a:solidFill>
+                <a:latin typeface="-apple-system"/>
+              </a:rPr>
+              <a:t>5) </a:t>
+            </a:r>
+            <a:r>
+              <a:rPr lang="en-US" b="1">
+                <a:solidFill>
+                  <a:srgbClr val="00B050"/>
+                </a:solidFill>
+                <a:latin typeface="-apple-system"/>
+              </a:rPr>
+              <a:t>Interface Tiplər</a:t>
+            </a:r>
+            <a:r>
               <a:rPr lang="en-US">
                 <a:latin typeface="-apple-system"/>
               </a:rPr>
-              <a:t>.</a:t>
-            </a:r>
-            <a:endParaRPr lang="en-US"/>
+              <a:t>: Bir neçə obyekt tipinin paylaşdığı ümumi sahələri təyin edir. Məsələn, Kitab və Jurnal hər ikisi ad və nesrIli sahələrinə malikdir. Nümunə:</a:t>
+            </a:r>
+            <a:endParaRPr lang="az-Latn-AZ">
+              <a:latin typeface="-apple-system"/>
+            </a:endParaRPr>
+          </a:p>
+          <a:p>
+            <a:endParaRPr lang="az-Latn-AZ">
+              <a:latin typeface="-apple-system"/>
+            </a:endParaRPr>
+          </a:p>
+          <a:p>
+            <a:endParaRPr lang="az-Latn-AZ">
+              <a:latin typeface="-apple-system"/>
+            </a:endParaRPr>
+          </a:p>
+          <a:p>
+            <a:endParaRPr lang="az-Latn-AZ">
+              <a:latin typeface="-apple-system"/>
+            </a:endParaRPr>
+          </a:p>
+          <a:p>
+            <a:endParaRPr lang="az-Latn-AZ">
+              <a:latin typeface="-apple-system"/>
+            </a:endParaRPr>
+          </a:p>
+          <a:p>
+            <a:endParaRPr lang="az-Latn-AZ">
+              <a:latin typeface="-apple-system"/>
+            </a:endParaRPr>
+          </a:p>
+          <a:p>
+            <a:endParaRPr lang="az-Latn-AZ">
+              <a:latin typeface="-apple-system"/>
+            </a:endParaRPr>
+          </a:p>
+          <a:p>
+            <a:endParaRPr lang="az-Latn-AZ">
+              <a:latin typeface="-apple-system"/>
+            </a:endParaRPr>
+          </a:p>
+          <a:p>
+            <a:endParaRPr lang="az-Latn-AZ">
+              <a:latin typeface="-apple-system"/>
+            </a:endParaRPr>
+          </a:p>
+          <a:p>
+            <a:endParaRPr lang="az-Latn-AZ">
+              <a:latin typeface="-apple-system"/>
+            </a:endParaRPr>
+          </a:p>
+          <a:p>
+            <a:r>
+              <a:rPr lang="az-Latn-AZ" b="1">
+                <a:solidFill>
+                  <a:srgbClr val="00B050"/>
+                </a:solidFill>
+                <a:latin typeface="-apple-system"/>
+              </a:rPr>
+              <a:t>6) Union Tiplər</a:t>
+            </a:r>
+            <a:r>
+              <a:rPr lang="az-Latn-AZ">
+                <a:latin typeface="-apple-system"/>
+              </a:rPr>
+              <a:t>: Fərqli obyekt tiplərini birləşdirir. Məsələn, axtarış nəticəsi Kitab və ya Muellif ola bilər. Nümunə:</a:t>
+            </a:r>
+          </a:p>
+          <a:p>
+            <a:endParaRPr lang="az-Latn-AZ">
+              <a:latin typeface="-apple-system"/>
+            </a:endParaRPr>
+          </a:p>
+          <a:p>
+            <a:endParaRPr lang="az-Latn-AZ">
+              <a:latin typeface="-apple-system"/>
+            </a:endParaRPr>
+          </a:p>
+          <a:p>
+            <a:endParaRPr lang="az-Latn-AZ">
+              <a:latin typeface="-apple-system"/>
+            </a:endParaRPr>
+          </a:p>
+          <a:p>
+            <a:endParaRPr lang="az-Latn-AZ">
+              <a:latin typeface="-apple-system"/>
+            </a:endParaRPr>
+          </a:p>
+          <a:p>
+            <a:r>
+              <a:rPr lang="az-Latn-AZ" b="1">
+                <a:solidFill>
+                  <a:srgbClr val="00B050"/>
+                </a:solidFill>
+                <a:latin typeface="-apple-system"/>
+              </a:rPr>
+              <a:t>7) Input Tiplər</a:t>
+            </a:r>
+            <a:r>
+              <a:rPr lang="az-Latn-AZ">
+                <a:latin typeface="-apple-system"/>
+              </a:rPr>
+              <a:t>: Mutasiyalarda (məlumat dəyişmək üçün) istifadə olunur. Məsələn, yeni kitab yaratmaq üçün. Nümunə:</a:t>
+            </a:r>
+          </a:p>
+          <a:p>
+            <a:endParaRPr lang="az-Latn-AZ">
+              <a:latin typeface="-apple-system"/>
+            </a:endParaRPr>
+          </a:p>
+          <a:p>
+            <a:endParaRPr lang="az-Latn-AZ">
+              <a:latin typeface="-apple-system"/>
+            </a:endParaRPr>
+          </a:p>
+          <a:p>
+            <a:endParaRPr lang="az-Latn-AZ">
+              <a:latin typeface="-apple-system"/>
+            </a:endParaRPr>
+          </a:p>
+          <a:p>
+            <a:endParaRPr lang="az-Latn-AZ">
+              <a:latin typeface="-apple-system"/>
+            </a:endParaRPr>
+          </a:p>
+          <a:p>
+            <a:endParaRPr lang="az-Latn-AZ">
+              <a:latin typeface="-apple-system"/>
+            </a:endParaRPr>
+          </a:p>
+          <a:p>
+            <a:endParaRPr lang="az-Latn-AZ">
+              <a:latin typeface="-apple-system"/>
+            </a:endParaRPr>
+          </a:p>
+          <a:p>
+            <a:endParaRPr lang="az-Latn-AZ">
+              <a:latin typeface="-apple-system"/>
+            </a:endParaRPr>
           </a:p>
         </p:txBody>
       </p:sp>
+      <p:pic>
+        <p:nvPicPr>
+          <p:cNvPr id="3" name="Picture 2">
+            <a:extLst>
+              <a:ext uri="{FF2B5EF4-FFF2-40B4-BE49-F238E27FC236}">
+                <a16:creationId xmlns:a16="http://schemas.microsoft.com/office/drawing/2014/main" id="{86242F4D-86FC-B14C-F1DD-9F1409130083}"/>
+              </a:ext>
+            </a:extLst>
+          </p:cNvPr>
+          <p:cNvPicPr>
+            <a:picLocks noChangeAspect="1"/>
+          </p:cNvPicPr>
+          <p:nvPr/>
+        </p:nvPicPr>
+        <p:blipFill>
+          <a:blip r:embed="rId2"/>
+          <a:stretch>
+            <a:fillRect/>
+          </a:stretch>
+        </p:blipFill>
+        <p:spPr>
+          <a:xfrm>
+            <a:off x="203200" y="882043"/>
+            <a:ext cx="2540000" cy="2008159"/>
+          </a:xfrm>
+          <a:prstGeom prst="rect">
+            <a:avLst/>
+          </a:prstGeom>
+        </p:spPr>
+      </p:pic>
+      <p:pic>
+        <p:nvPicPr>
+          <p:cNvPr id="5" name="Picture 4">
+            <a:extLst>
+              <a:ext uri="{FF2B5EF4-FFF2-40B4-BE49-F238E27FC236}">
+                <a16:creationId xmlns:a16="http://schemas.microsoft.com/office/drawing/2014/main" id="{E21DB1B1-B69C-553D-D72D-B3E189328FE4}"/>
+              </a:ext>
+            </a:extLst>
+          </p:cNvPr>
+          <p:cNvPicPr>
+            <a:picLocks noChangeAspect="1"/>
+          </p:cNvPicPr>
+          <p:nvPr/>
+        </p:nvPicPr>
+        <p:blipFill>
+          <a:blip r:embed="rId3"/>
+          <a:stretch>
+            <a:fillRect/>
+          </a:stretch>
+        </p:blipFill>
+        <p:spPr>
+          <a:xfrm>
+            <a:off x="166255" y="3626303"/>
+            <a:ext cx="5006109" cy="409708"/>
+          </a:xfrm>
+          <a:prstGeom prst="rect">
+            <a:avLst/>
+          </a:prstGeom>
+        </p:spPr>
+      </p:pic>
+      <p:pic>
+        <p:nvPicPr>
+          <p:cNvPr id="8" name="Picture 7">
+            <a:extLst>
+              <a:ext uri="{FF2B5EF4-FFF2-40B4-BE49-F238E27FC236}">
+                <a16:creationId xmlns:a16="http://schemas.microsoft.com/office/drawing/2014/main" id="{A72F9FD2-B82E-9482-03D8-23C463FF9776}"/>
+              </a:ext>
+            </a:extLst>
+          </p:cNvPr>
+          <p:cNvPicPr>
+            <a:picLocks noChangeAspect="1"/>
+          </p:cNvPicPr>
+          <p:nvPr/>
+        </p:nvPicPr>
+        <p:blipFill>
+          <a:blip r:embed="rId4"/>
+          <a:stretch>
+            <a:fillRect/>
+          </a:stretch>
+        </p:blipFill>
+        <p:spPr>
+          <a:xfrm>
+            <a:off x="203200" y="5109288"/>
+            <a:ext cx="2280074" cy="1162391"/>
+          </a:xfrm>
+          <a:prstGeom prst="rect">
+            <a:avLst/>
+          </a:prstGeom>
+        </p:spPr>
+      </p:pic>
     </p:spTree>
     <p:extLst>
       <p:ext uri="{BB962C8B-B14F-4D97-AF65-F5344CB8AC3E}">
@@ -14444,7 +16075,7 @@
 </p:sld>
 </file>
 
-<file path=ppt/slides/slide54.xml><?xml version="1.0" encoding="utf-8"?>
+<file path=ppt/slides/slide53.xml><?xml version="1.0" encoding="utf-8"?>
 <p:sld xmlns:a="http://schemas.openxmlformats.org/drawingml/2006/main" xmlns:r="http://schemas.openxmlformats.org/officeDocument/2006/relationships" xmlns:p="http://schemas.openxmlformats.org/presentationml/2006/main">
   <p:cSld>
     <p:spTree>
@@ -14482,7 +16113,7 @@
         <p:spPr>
           <a:xfrm>
             <a:off x="203200" y="244826"/>
-            <a:ext cx="11822545" cy="369332"/>
+            <a:ext cx="11822545" cy="5539978"/>
           </a:xfrm>
           <a:prstGeom prst="rect">
             <a:avLst/>
@@ -14496,15 +16127,400 @@
           <a:lstStyle/>
           <a:p>
             <a:r>
-              <a:rPr lang="en-US">
+              <a:rPr lang="az-Latn-AZ" sz="1200" b="1">
+                <a:solidFill>
+                  <a:srgbClr val="00B050"/>
+                </a:solidFill>
                 <a:latin typeface="-apple-system"/>
               </a:rPr>
-              <a:t>.</a:t>
-            </a:r>
-            <a:endParaRPr lang="en-US"/>
+              <a:t>8) Custom Tiplər </a:t>
+            </a:r>
+            <a:r>
+              <a:rPr lang="az-Latn-AZ" sz="1200">
+                <a:latin typeface="-apple-system"/>
+              </a:rPr>
+              <a:t>Nədir? Məsələn, </a:t>
+            </a:r>
+            <a:r>
+              <a:rPr lang="az-Latn-AZ" sz="1200" b="1">
+                <a:latin typeface="-apple-system"/>
+              </a:rPr>
+              <a:t>cat</a:t>
+            </a:r>
+            <a:r>
+              <a:rPr lang="az-Latn-AZ" sz="1200">
+                <a:latin typeface="-apple-system"/>
+              </a:rPr>
+              <a:t> və ya </a:t>
+            </a:r>
+            <a:r>
+              <a:rPr lang="az-Latn-AZ" sz="1200" b="1">
+                <a:latin typeface="-apple-system"/>
+              </a:rPr>
+              <a:t>[cat]</a:t>
+            </a:r>
+            <a:r>
+              <a:rPr lang="az-Latn-AZ" sz="1200">
+                <a:latin typeface="-apple-system"/>
+              </a:rPr>
+              <a:t>?</a:t>
+            </a:r>
+          </a:p>
+          <a:p>
+            <a:endParaRPr lang="az-Latn-AZ" sz="1200">
+              <a:latin typeface="-apple-system"/>
+            </a:endParaRPr>
+          </a:p>
+          <a:p>
+            <a:r>
+              <a:rPr lang="en-US" sz="1200"/>
+              <a:t>Custom tiplər, sizin özünüz tərəfindən yaradılan tiplərdir. GraphQL-də scalar tiplər (Int, String və s.) əvvəlcədən təyin olunub, amma layihənizə uyğun olaraq öz tiplərinizi yarada bilərsiniz. Məsələn, Cat (pişik) adlı bir obyekt tipi yarada bilərsiniz.</a:t>
+            </a:r>
+          </a:p>
+          <a:p>
+            <a:endParaRPr lang="az-Latn-AZ" sz="1200"/>
+          </a:p>
+          <a:p>
+            <a:endParaRPr lang="az-Latn-AZ" sz="1200"/>
+          </a:p>
+          <a:p>
+            <a:endParaRPr lang="az-Latn-AZ" sz="1200"/>
+          </a:p>
+          <a:p>
+            <a:endParaRPr lang="az-Latn-AZ" sz="1200"/>
+          </a:p>
+          <a:p>
+            <a:endParaRPr lang="az-Latn-AZ" sz="1200"/>
+          </a:p>
+          <a:p>
+            <a:endParaRPr lang="az-Latn-AZ" sz="1200"/>
+          </a:p>
+          <a:p>
+            <a:endParaRPr lang="az-Latn-AZ" sz="1200"/>
+          </a:p>
+          <a:p>
+            <a:endParaRPr lang="az-Latn-AZ" sz="1200"/>
+          </a:p>
+          <a:p>
+            <a:endParaRPr lang="az-Latn-AZ" sz="1200"/>
+          </a:p>
+          <a:p>
+            <a:endParaRPr lang="az-Latn-AZ" sz="1200"/>
+          </a:p>
+          <a:p>
+            <a:endParaRPr lang="az-Latn-AZ" sz="1200"/>
+          </a:p>
+          <a:p>
+            <a:r>
+              <a:rPr lang="en-US" sz="1200"/>
+              <a:t>Burada </a:t>
+            </a:r>
+            <a:r>
+              <a:rPr lang="en-US" sz="1200" b="1"/>
+              <a:t>Cat</a:t>
+            </a:r>
+            <a:r>
+              <a:rPr lang="en-US" sz="1200"/>
+              <a:t> sizin yaratdığınız custom obyekt tipidir. Onun sahələri: </a:t>
+            </a:r>
+            <a:r>
+              <a:rPr lang="en-US" sz="1200" b="1"/>
+              <a:t>id</a:t>
+            </a:r>
+            <a:r>
+              <a:rPr lang="en-US" sz="1200"/>
+              <a:t>, </a:t>
+            </a:r>
+            <a:r>
+              <a:rPr lang="en-US" sz="1200" b="1"/>
+              <a:t>name</a:t>
+            </a:r>
+            <a:r>
+              <a:rPr lang="en-US" sz="1200"/>
+              <a:t>, </a:t>
+            </a:r>
+            <a:r>
+              <a:rPr lang="en-US" sz="1200" b="1"/>
+              <a:t>color</a:t>
+            </a:r>
+            <a:r>
+              <a:rPr lang="en-US" sz="1200"/>
+              <a:t>, </a:t>
+            </a:r>
+            <a:r>
+              <a:rPr lang="en-US" sz="1200" b="1"/>
+              <a:t>weight</a:t>
+            </a:r>
+            <a:r>
+              <a:rPr lang="az-Latn-AZ" sz="1200"/>
+              <a:t> belədir.</a:t>
+            </a:r>
+          </a:p>
+          <a:p>
+            <a:endParaRPr lang="en-US" sz="1200"/>
+          </a:p>
+          <a:p>
+            <a:r>
+              <a:rPr lang="en-US" sz="1200" b="1">
+                <a:solidFill>
+                  <a:srgbClr val="00B050"/>
+                </a:solidFill>
+              </a:rPr>
+              <a:t>[Cat] nədir?</a:t>
+            </a:r>
+            <a:r>
+              <a:rPr lang="en-US" sz="1200">
+                <a:solidFill>
+                  <a:srgbClr val="00B050"/>
+                </a:solidFill>
+              </a:rPr>
+              <a:t> </a:t>
+            </a:r>
+            <a:endParaRPr lang="az-Latn-AZ" sz="1200">
+              <a:solidFill>
+                <a:srgbClr val="00B050"/>
+              </a:solidFill>
+            </a:endParaRPr>
+          </a:p>
+          <a:p>
+            <a:pPr marL="742950" lvl="1" indent="-285750">
+              <a:lnSpc>
+                <a:spcPct val="150000"/>
+              </a:lnSpc>
+              <a:buFont typeface="Arial" panose="020B0604020202020204" pitchFamily="34" charset="0"/>
+              <a:buChar char="•"/>
+            </a:pPr>
+            <a:r>
+              <a:rPr lang="en-US" sz="1200"/>
+              <a:t>[Cat] bir </a:t>
+            </a:r>
+            <a:r>
+              <a:rPr lang="en-US" sz="1200" b="1"/>
+              <a:t>list tipidir</a:t>
+            </a:r>
+            <a:r>
+              <a:rPr lang="en-US" sz="1200"/>
+              <a:t>, yəni çoxlu Cat obyektlərinin siyahısı. Məsələn, mağazada bir neçə pişik oyuncağı varsa, hamısını [Cat] siyahısında göstərə bilərsən.</a:t>
+            </a:r>
+            <a:endParaRPr lang="az-Latn-AZ" sz="1200"/>
+          </a:p>
+          <a:p>
+            <a:endParaRPr lang="az-Latn-AZ" sz="1200">
+              <a:effectLst/>
+            </a:endParaRPr>
+          </a:p>
+          <a:p>
+            <a:r>
+              <a:rPr lang="az-Latn-AZ" sz="1200">
+                <a:effectLst/>
+              </a:rPr>
+              <a:t>Sorğu nümunəsi:</a:t>
+            </a:r>
+          </a:p>
+          <a:p>
+            <a:endParaRPr lang="az-Latn-AZ" sz="1200"/>
+          </a:p>
+          <a:p>
+            <a:endParaRPr lang="az-Latn-AZ" sz="1200">
+              <a:effectLst/>
+            </a:endParaRPr>
+          </a:p>
+          <a:p>
+            <a:endParaRPr lang="az-Latn-AZ" sz="1200"/>
+          </a:p>
+          <a:p>
+            <a:endParaRPr lang="az-Latn-AZ" sz="1200">
+              <a:effectLst/>
+            </a:endParaRPr>
+          </a:p>
+          <a:p>
+            <a:endParaRPr lang="az-Latn-AZ" sz="1200"/>
+          </a:p>
+          <a:p>
+            <a:endParaRPr lang="az-Latn-AZ" sz="1200">
+              <a:effectLst/>
+            </a:endParaRPr>
+          </a:p>
+          <a:p>
+            <a:endParaRPr lang="az-Latn-AZ" sz="1200"/>
+          </a:p>
+          <a:p>
+            <a:r>
+              <a:rPr lang="az-Latn-AZ" sz="1200">
+                <a:effectLst/>
+              </a:rPr>
+              <a:t>Cavab: </a:t>
+            </a:r>
+            <a:endParaRPr lang="en-US" sz="1200">
+              <a:effectLst/>
+            </a:endParaRPr>
           </a:p>
         </p:txBody>
       </p:sp>
+      <p:pic>
+        <p:nvPicPr>
+          <p:cNvPr id="10" name="Picture 9">
+            <a:extLst>
+              <a:ext uri="{FF2B5EF4-FFF2-40B4-BE49-F238E27FC236}">
+                <a16:creationId xmlns:a16="http://schemas.microsoft.com/office/drawing/2014/main" id="{85932FDD-767D-53CC-98BB-6CFE0F184F80}"/>
+              </a:ext>
+            </a:extLst>
+          </p:cNvPr>
+          <p:cNvPicPr>
+            <a:picLocks noChangeAspect="1"/>
+          </p:cNvPicPr>
+          <p:nvPr/>
+        </p:nvPicPr>
+        <p:blipFill>
+          <a:blip r:embed="rId2"/>
+          <a:stretch>
+            <a:fillRect/>
+          </a:stretch>
+        </p:blipFill>
+        <p:spPr>
+          <a:xfrm>
+            <a:off x="203199" y="1098190"/>
+            <a:ext cx="1119359" cy="1452333"/>
+          </a:xfrm>
+          <a:prstGeom prst="rect">
+            <a:avLst/>
+          </a:prstGeom>
+        </p:spPr>
+      </p:pic>
+      <p:pic>
+        <p:nvPicPr>
+          <p:cNvPr id="3" name="Picture 2">
+            <a:extLst>
+              <a:ext uri="{FF2B5EF4-FFF2-40B4-BE49-F238E27FC236}">
+                <a16:creationId xmlns:a16="http://schemas.microsoft.com/office/drawing/2014/main" id="{E2AD83E2-612E-E641-735D-4CDDCE775907}"/>
+              </a:ext>
+            </a:extLst>
+          </p:cNvPr>
+          <p:cNvPicPr>
+            <a:picLocks noChangeAspect="1"/>
+          </p:cNvPicPr>
+          <p:nvPr/>
+        </p:nvPicPr>
+        <p:blipFill>
+          <a:blip r:embed="rId3"/>
+          <a:stretch>
+            <a:fillRect/>
+          </a:stretch>
+        </p:blipFill>
+        <p:spPr>
+          <a:xfrm>
+            <a:off x="203199" y="4307478"/>
+            <a:ext cx="766619" cy="1030970"/>
+          </a:xfrm>
+          <a:prstGeom prst="rect">
+            <a:avLst/>
+          </a:prstGeom>
+        </p:spPr>
+      </p:pic>
+      <p:pic>
+        <p:nvPicPr>
+          <p:cNvPr id="5" name="Picture 4">
+            <a:extLst>
+              <a:ext uri="{FF2B5EF4-FFF2-40B4-BE49-F238E27FC236}">
+                <a16:creationId xmlns:a16="http://schemas.microsoft.com/office/drawing/2014/main" id="{02F0199E-11A3-2113-D8D0-3EAB69F80210}"/>
+              </a:ext>
+            </a:extLst>
+          </p:cNvPr>
+          <p:cNvPicPr>
+            <a:picLocks noChangeAspect="1"/>
+          </p:cNvPicPr>
+          <p:nvPr/>
+        </p:nvPicPr>
+        <p:blipFill>
+          <a:blip r:embed="rId4"/>
+          <a:stretch>
+            <a:fillRect/>
+          </a:stretch>
+        </p:blipFill>
+        <p:spPr>
+          <a:xfrm>
+            <a:off x="203199" y="5759810"/>
+            <a:ext cx="2064148" cy="812656"/>
+          </a:xfrm>
+          <a:prstGeom prst="rect">
+            <a:avLst/>
+          </a:prstGeom>
+        </p:spPr>
+      </p:pic>
+      <p:sp>
+        <p:nvSpPr>
+          <p:cNvPr id="8" name="TextBox 7">
+            <a:extLst>
+              <a:ext uri="{FF2B5EF4-FFF2-40B4-BE49-F238E27FC236}">
+                <a16:creationId xmlns:a16="http://schemas.microsoft.com/office/drawing/2014/main" id="{E7A0EBCA-1DFD-B53C-7D12-F37C0203DBD0}"/>
+              </a:ext>
+            </a:extLst>
+          </p:cNvPr>
+          <p:cNvSpPr txBox="1"/>
+          <p:nvPr/>
+        </p:nvSpPr>
+        <p:spPr>
+          <a:xfrm>
+            <a:off x="9601200" y="4822962"/>
+            <a:ext cx="2697018" cy="369332"/>
+          </a:xfrm>
+          <a:prstGeom prst="rect">
+            <a:avLst/>
+          </a:prstGeom>
+          <a:noFill/>
+        </p:spPr>
+        <p:txBody>
+          <a:bodyPr wrap="square">
+            <a:spAutoFit/>
+          </a:bodyPr>
+          <a:lstStyle/>
+          <a:p>
+            <a:pPr algn="ctr"/>
+            <a:r>
+              <a:rPr lang="en-US"/>
+              <a:t>PHP-də</a:t>
+            </a:r>
+            <a:r>
+              <a:rPr lang="az-Latn-AZ"/>
+              <a:t> (cat_schema.php)</a:t>
+            </a:r>
+            <a:r>
+              <a:rPr lang="en-US"/>
+              <a:t>:</a:t>
+            </a:r>
+          </a:p>
+        </p:txBody>
+      </p:sp>
+      <p:pic>
+        <p:nvPicPr>
+          <p:cNvPr id="11" name="Picture 10">
+            <a:extLst>
+              <a:ext uri="{FF2B5EF4-FFF2-40B4-BE49-F238E27FC236}">
+                <a16:creationId xmlns:a16="http://schemas.microsoft.com/office/drawing/2014/main" id="{B3046579-F861-DF36-6B1F-E559611E34A3}"/>
+              </a:ext>
+            </a:extLst>
+          </p:cNvPr>
+          <p:cNvPicPr>
+            <a:picLocks noChangeAspect="1"/>
+          </p:cNvPicPr>
+          <p:nvPr/>
+        </p:nvPicPr>
+        <p:blipFill>
+          <a:blip r:embed="rId5"/>
+          <a:stretch>
+            <a:fillRect/>
+          </a:stretch>
+        </p:blipFill>
+        <p:spPr>
+          <a:xfrm>
+            <a:off x="9707418" y="5309760"/>
+            <a:ext cx="2484582" cy="1544876"/>
+          </a:xfrm>
+          <a:prstGeom prst="rect">
+            <a:avLst/>
+          </a:prstGeom>
+        </p:spPr>
+      </p:pic>
     </p:spTree>
     <p:extLst>
       <p:ext uri="{BB962C8B-B14F-4D97-AF65-F5344CB8AC3E}">
@@ -14518,7 +16534,7 @@
 </p:sld>
 </file>
 
-<file path=ppt/slides/slide55.xml><?xml version="1.0" encoding="utf-8"?>
+<file path=ppt/slides/slide54.xml><?xml version="1.0" encoding="utf-8"?>
 <p:sld xmlns:a="http://schemas.openxmlformats.org/drawingml/2006/main" xmlns:r="http://schemas.openxmlformats.org/officeDocument/2006/relationships" xmlns:p="http://schemas.openxmlformats.org/presentationml/2006/main">
   <p:cSld>
     <p:spTree>
@@ -14555,8 +16571,8 @@
         </p:nvSpPr>
         <p:spPr>
           <a:xfrm>
-            <a:off x="203200" y="244826"/>
-            <a:ext cx="11822545" cy="369332"/>
+            <a:off x="0" y="244826"/>
+            <a:ext cx="12192000" cy="6463308"/>
           </a:xfrm>
           <a:prstGeom prst="rect">
             <a:avLst/>
@@ -14569,13 +16585,437 @@
           </a:bodyPr>
           <a:lstStyle/>
           <a:p>
-            <a:r>
-              <a:rPr lang="en-US">
-                <a:latin typeface="-apple-system"/>
-              </a:rPr>
-              <a:t>.</a:t>
-            </a:r>
-            <a:endParaRPr lang="en-US"/>
+            <a:pPr marL="342900" indent="-342900">
+              <a:buAutoNum type="arabicPeriod"/>
+            </a:pPr>
+            <a:r>
+              <a:rPr lang="en-US" sz="1200" b="1"/>
+              <a:t>Apollo Server Nədir? Sadə Nəzəri İzahat</a:t>
+            </a:r>
+            <a:endParaRPr lang="az-Latn-AZ" sz="1200" b="1"/>
+          </a:p>
+          <a:p>
+            <a:pPr marL="342900" indent="-342900">
+              <a:buAutoNum type="arabicPeriod"/>
+            </a:pPr>
+            <a:endParaRPr lang="en-US" sz="1200" b="1"/>
+          </a:p>
+          <a:p>
+            <a:r>
+              <a:rPr lang="en-US" sz="1200"/>
+              <a:t>Apollo Server, </a:t>
+            </a:r>
+            <a:r>
+              <a:rPr lang="en-US" sz="1200" b="1"/>
+              <a:t>açıq mənbəli (open-source) bir GraphQL server kitabxanasıdır</a:t>
+            </a:r>
+            <a:r>
+              <a:rPr lang="en-US" sz="1200"/>
+              <a:t> ki, </a:t>
+            </a:r>
+            <a:r>
+              <a:rPr lang="en-US" sz="1200" b="1"/>
+              <a:t>Node.js </a:t>
+            </a:r>
+            <a:r>
+              <a:rPr lang="en-US" sz="1200"/>
+              <a:t>ilə işləyir. Bu, server tərəfində </a:t>
+            </a:r>
+            <a:r>
+              <a:rPr lang="en-US" sz="1200" b="1"/>
+              <a:t>GraphQL API</a:t>
+            </a:r>
+            <a:r>
+              <a:rPr lang="az-Latn-AZ" sz="1200" b="1"/>
+              <a:t> </a:t>
+            </a:r>
+            <a:r>
+              <a:rPr lang="en-US" sz="1200"/>
+              <a:t>-ləri qurmaq üçün ən populyar alətlərdən biridir. </a:t>
+            </a:r>
+            <a:endParaRPr lang="az-Latn-AZ" sz="1200"/>
+          </a:p>
+          <a:p>
+            <a:endParaRPr lang="az-Latn-AZ" sz="1200">
+              <a:effectLst/>
+            </a:endParaRPr>
+          </a:p>
+          <a:p>
+            <a:r>
+              <a:rPr lang="en-US" sz="1200" b="1"/>
+              <a:t>Əsas xüsusiyyətləri</a:t>
+            </a:r>
+            <a:r>
+              <a:rPr lang="en-US" sz="1200"/>
+              <a:t>:</a:t>
+            </a:r>
+          </a:p>
+          <a:p>
+            <a:pPr marL="742950" lvl="1" indent="-285750">
+              <a:lnSpc>
+                <a:spcPct val="150000"/>
+              </a:lnSpc>
+              <a:buFont typeface="Wingdings" panose="05000000000000000000" pitchFamily="2" charset="2"/>
+              <a:buChar char="q"/>
+            </a:pPr>
+            <a:r>
+              <a:rPr lang="en-US" sz="1200"/>
+              <a:t>GraphQL standartlarına tam uyğundur, yəni hər GraphQL client ( Apollo Client</a:t>
+            </a:r>
+            <a:r>
+              <a:rPr lang="az-Latn-AZ" sz="1200"/>
+              <a:t> </a:t>
+            </a:r>
+            <a:r>
+              <a:rPr lang="en-US" sz="1200"/>
+              <a:t>) ilə işləyir.</a:t>
+            </a:r>
+          </a:p>
+          <a:p>
+            <a:pPr marL="742950" lvl="1" indent="-285750">
+              <a:lnSpc>
+                <a:spcPct val="150000"/>
+              </a:lnSpc>
+              <a:buFont typeface="Wingdings" panose="05000000000000000000" pitchFamily="2" charset="2"/>
+              <a:buChar char="q"/>
+            </a:pPr>
+            <a:r>
+              <a:rPr lang="en-US" sz="1200"/>
+              <a:t>Böyük layihələr üçün uyğundur – caching, autentikasiya, monitoring dəstəyi var.</a:t>
+            </a:r>
+          </a:p>
+          <a:p>
+            <a:pPr marL="742950" lvl="1" indent="-285750">
+              <a:lnSpc>
+                <a:spcPct val="150000"/>
+              </a:lnSpc>
+              <a:buFont typeface="Wingdings" panose="05000000000000000000" pitchFamily="2" charset="2"/>
+              <a:buChar char="q"/>
+            </a:pPr>
+            <a:r>
+              <a:rPr lang="en-US" sz="1200"/>
+              <a:t>Məlumatı hər hansı mənbədən çəkə bilər (MySQL, MongoDB, REST API, hətta digər GraphQL serverlər).</a:t>
+            </a:r>
+          </a:p>
+          <a:p>
+            <a:pPr marL="742950" lvl="1" indent="-285750">
+              <a:lnSpc>
+                <a:spcPct val="150000"/>
+              </a:lnSpc>
+              <a:buFont typeface="Wingdings" panose="05000000000000000000" pitchFamily="2" charset="2"/>
+              <a:buChar char="q"/>
+            </a:pPr>
+            <a:r>
+              <a:rPr lang="en-US" sz="1200"/>
+              <a:t>Apollo Sandbox adlı alətlə sorğuları test edə bilərsiniz, schema avtomatik sənədləşdirilir.</a:t>
+            </a:r>
+          </a:p>
+          <a:p>
+            <a:pPr marL="742950" lvl="1" indent="-285750">
+              <a:lnSpc>
+                <a:spcPct val="150000"/>
+              </a:lnSpc>
+              <a:buFont typeface="Wingdings" panose="05000000000000000000" pitchFamily="2" charset="2"/>
+              <a:buChar char="q"/>
+            </a:pPr>
+            <a:r>
+              <a:rPr lang="en-US" sz="1200"/>
+              <a:t>Federation dəstəyi</a:t>
+            </a:r>
+            <a:r>
+              <a:rPr lang="az-Latn-AZ" sz="1200"/>
+              <a:t> ilə</a:t>
+            </a:r>
+            <a:r>
+              <a:rPr lang="en-US" sz="1200"/>
+              <a:t> </a:t>
+            </a:r>
+            <a:r>
+              <a:rPr lang="az-Latn-AZ" sz="1200"/>
+              <a:t>b</a:t>
+            </a:r>
+            <a:r>
+              <a:rPr lang="en-US" sz="1200"/>
+              <a:t>öyük layihələrdə bir neçə serveri birləşdirərək "supergraph" yaradır.</a:t>
+            </a:r>
+          </a:p>
+          <a:p>
+            <a:endParaRPr lang="az-Latn-AZ" sz="1200">
+              <a:effectLst/>
+            </a:endParaRPr>
+          </a:p>
+          <a:p>
+            <a:endParaRPr lang="az-Latn-AZ" sz="1200"/>
+          </a:p>
+          <a:p>
+            <a:endParaRPr lang="az-Latn-AZ" sz="1200"/>
+          </a:p>
+          <a:p>
+            <a:endParaRPr lang="az-Latn-AZ" sz="1200"/>
+          </a:p>
+          <a:p>
+            <a:r>
+              <a:rPr lang="en-US" sz="1200" b="1"/>
+              <a:t>2. Apollo Server-in GraphQL ilə Əlaqəsi</a:t>
+            </a:r>
+            <a:endParaRPr lang="az-Latn-AZ" sz="1200" b="1"/>
+          </a:p>
+          <a:p>
+            <a:endParaRPr lang="en-US" sz="1200" b="1"/>
+          </a:p>
+          <a:p>
+            <a:r>
+              <a:rPr lang="en-US" sz="1200"/>
+              <a:t>Apollo Server </a:t>
+            </a:r>
+            <a:r>
+              <a:rPr lang="en-US" sz="1200" b="1"/>
+              <a:t>GraphQL-in server tərəfi implementasiyasıdır</a:t>
+            </a:r>
+            <a:r>
+              <a:rPr lang="en-US" sz="1200"/>
+              <a:t>. GraphQL özü bir "sorğu dili" və spec</a:t>
+            </a:r>
+            <a:r>
+              <a:rPr lang="az-Latn-AZ" sz="1200"/>
+              <a:t> </a:t>
+            </a:r>
+            <a:r>
+              <a:rPr lang="en-US" sz="1200"/>
+              <a:t>-dir (standart), amma onu icra etmək üçün server lazımdır. </a:t>
+            </a:r>
+            <a:r>
+              <a:rPr lang="en-US" sz="1200" b="1"/>
+              <a:t>Apollo Server </a:t>
+            </a:r>
+            <a:r>
+              <a:rPr lang="en-US" sz="1200"/>
+              <a:t>bu spesifikasiyanı </a:t>
+            </a:r>
+            <a:r>
+              <a:rPr lang="en-US" sz="1200" b="1"/>
+              <a:t>Node.js</a:t>
+            </a:r>
+            <a:r>
+              <a:rPr lang="az-Latn-AZ" sz="1200" b="1"/>
+              <a:t> </a:t>
+            </a:r>
+            <a:r>
+              <a:rPr lang="en-US" sz="1200" b="1"/>
+              <a:t>-</a:t>
+            </a:r>
+            <a:r>
+              <a:rPr lang="en-US" sz="1200"/>
+              <a:t>də həyata keçirir – sorğuları qəbul edir, schema</a:t>
+            </a:r>
+            <a:r>
+              <a:rPr lang="az-Latn-AZ" sz="1200"/>
+              <a:t> </a:t>
+            </a:r>
+            <a:r>
+              <a:rPr lang="en-US" sz="1200"/>
+              <a:t>-ya görə yoxlayır və cavab verir.</a:t>
+            </a:r>
+          </a:p>
+          <a:p>
+            <a:endParaRPr lang="az-Latn-AZ" sz="1200">
+              <a:effectLst/>
+            </a:endParaRPr>
+          </a:p>
+          <a:p>
+            <a:endParaRPr lang="az-Latn-AZ" sz="1200">
+              <a:effectLst/>
+            </a:endParaRPr>
+          </a:p>
+          <a:p>
+            <a:endParaRPr lang="az-Latn-AZ" sz="1200">
+              <a:effectLst/>
+            </a:endParaRPr>
+          </a:p>
+          <a:p>
+            <a:r>
+              <a:rPr lang="az-Latn-AZ" sz="1200"/>
+              <a:t>Biz isə, Backend -i </a:t>
+            </a:r>
+            <a:r>
+              <a:rPr lang="az-Latn-AZ" sz="1200" b="1">
+                <a:solidFill>
+                  <a:srgbClr val="FF0000"/>
+                </a:solidFill>
+              </a:rPr>
+              <a:t>PHP</a:t>
+            </a:r>
+            <a:r>
+              <a:rPr lang="az-Latn-AZ" sz="1200"/>
+              <a:t> ilə yığdığımızdan, </a:t>
+            </a:r>
+            <a:r>
+              <a:rPr lang="az-Latn-AZ" sz="1200" b="1"/>
+              <a:t>GraphQL</a:t>
+            </a:r>
+            <a:r>
+              <a:rPr lang="az-Latn-AZ" sz="1200"/>
+              <a:t> -i PHP-də qurmaq üçün </a:t>
+            </a:r>
+            <a:r>
+              <a:rPr lang="az-Latn-AZ" sz="1200" b="1"/>
+              <a:t>Apollo Server </a:t>
+            </a:r>
+            <a:r>
+              <a:rPr lang="az-Latn-AZ" sz="1200"/>
+              <a:t>-dən yoxsa PHP -nin bu </a:t>
+            </a:r>
+            <a:r>
+              <a:rPr lang="az-Latn-AZ" sz="1200" b="1"/>
+              <a:t>kitabxanalarından</a:t>
+            </a:r>
+            <a:r>
+              <a:rPr lang="az-Latn-AZ" sz="1200"/>
+              <a:t> istifadə etməliyik:</a:t>
+            </a:r>
+          </a:p>
+          <a:p>
+            <a:pPr marL="628650" lvl="1" indent="-171450">
+              <a:lnSpc>
+                <a:spcPct val="150000"/>
+              </a:lnSpc>
+              <a:buFont typeface="Arial" panose="020B0604020202020204" pitchFamily="34" charset="0"/>
+              <a:buChar char="•"/>
+            </a:pPr>
+            <a:r>
+              <a:rPr lang="en-US" sz="1200" b="1"/>
+              <a:t>webonyx/graphql-php</a:t>
+            </a:r>
+            <a:r>
+              <a:rPr lang="en-US" sz="1200"/>
+              <a:t>: Saf PHP üçün əsas kitabxana. Schema və resolver-ləri əl ilə yazırsınız. Kiçik layihələrə uyğundur.</a:t>
+            </a:r>
+          </a:p>
+          <a:p>
+            <a:pPr marL="628650" lvl="1" indent="-171450">
+              <a:lnSpc>
+                <a:spcPct val="150000"/>
+              </a:lnSpc>
+              <a:buFont typeface="Arial" panose="020B0604020202020204" pitchFamily="34" charset="0"/>
+              <a:buChar char="•"/>
+            </a:pPr>
+            <a:r>
+              <a:rPr lang="en-US" sz="1200" b="1"/>
+              <a:t>Lighthouse (Laravel üçün)</a:t>
+            </a:r>
+            <a:r>
+              <a:rPr lang="en-US" sz="1200"/>
+              <a:t>: Əgər Laravel istifadə edirsinizsə, bu ən yaxşı seçimdir. Avtomatik schema yaradır, direktivlər (məsələn, @auth, @paginate) ilə asanlaşdırır.</a:t>
+            </a:r>
+          </a:p>
+          <a:p>
+            <a:pPr marL="628650" lvl="1" indent="-171450">
+              <a:lnSpc>
+                <a:spcPct val="150000"/>
+              </a:lnSpc>
+              <a:buFont typeface="Arial" panose="020B0604020202020204" pitchFamily="34" charset="0"/>
+              <a:buChar char="•"/>
+            </a:pPr>
+            <a:r>
+              <a:rPr lang="en-US" sz="1200" b="1"/>
+              <a:t>API Platform (Symfony/Laravel üçün)</a:t>
+            </a:r>
+            <a:r>
+              <a:rPr lang="en-US" sz="1200"/>
+              <a:t>: Böyük layihələr üçün avtomatik GraphQL dəstəyi verir, Doctrine ORM ilə inteqrasiya olunur.</a:t>
+            </a:r>
+          </a:p>
+          <a:p>
+            <a:pPr marL="628650" lvl="1" indent="-171450">
+              <a:lnSpc>
+                <a:spcPct val="150000"/>
+              </a:lnSpc>
+              <a:buFont typeface="Arial" panose="020B0604020202020204" pitchFamily="34" charset="0"/>
+              <a:buChar char="•"/>
+            </a:pPr>
+            <a:r>
+              <a:rPr lang="en-US" sz="1200" b="1"/>
+              <a:t>Digərləri</a:t>
+            </a:r>
+            <a:r>
+              <a:rPr lang="en-US" sz="1200"/>
+              <a:t>: GraphQLite (annotasiyalarla), Siler (minimalist).</a:t>
+            </a:r>
+          </a:p>
+          <a:p>
+            <a:endParaRPr lang="az-Latn-AZ" sz="1200">
+              <a:effectLst/>
+            </a:endParaRPr>
+          </a:p>
+          <a:p>
+            <a:endParaRPr lang="az-Latn-AZ" sz="1200">
+              <a:effectLst/>
+            </a:endParaRPr>
+          </a:p>
+          <a:p>
+            <a:r>
+              <a:rPr lang="en-US" sz="1200" b="1">
+                <a:solidFill>
+                  <a:srgbClr val="00B050"/>
+                </a:solidFill>
+              </a:rPr>
+              <a:t>Apollo Server</a:t>
+            </a:r>
+            <a:r>
+              <a:rPr lang="az-Latn-AZ" sz="1200" b="1">
+                <a:solidFill>
+                  <a:srgbClr val="00B050"/>
+                </a:solidFill>
+              </a:rPr>
+              <a:t> </a:t>
+            </a:r>
+            <a:r>
+              <a:rPr lang="en-US" sz="1200"/>
+              <a:t>-i istifadə etmək istəsəniz, backend-i Node.js-ə köçürməlisiniz</a:t>
+            </a:r>
+            <a:r>
+              <a:rPr lang="az-Latn-AZ" sz="1200"/>
+              <a:t>. Amma </a:t>
+            </a:r>
+            <a:r>
+              <a:rPr lang="az-Latn-AZ" sz="1200" b="1"/>
+              <a:t>GraphQL</a:t>
+            </a:r>
+            <a:r>
+              <a:rPr lang="az-Latn-AZ" sz="1200"/>
+              <a:t> universal olduğundan, PHP ilə backend qurmağa davam edə və Apollo alətlərindən (</a:t>
+            </a:r>
+            <a:r>
+              <a:rPr lang="az-Latn-AZ" sz="1200" b="1" i="1">
+                <a:solidFill>
+                  <a:srgbClr val="0070C0"/>
+                </a:solidFill>
+              </a:rPr>
+              <a:t>Apollo Client</a:t>
+            </a:r>
+            <a:r>
+              <a:rPr lang="az-Latn-AZ" sz="1200"/>
+              <a:t>) istifadə edə bilərsiniz</a:t>
+            </a:r>
+            <a:r>
+              <a:rPr lang="en-US" sz="1200"/>
+              <a:t>: </a:t>
+            </a:r>
+            <a:r>
+              <a:rPr lang="en-US" sz="1200" u="sng">
+                <a:solidFill>
+                  <a:srgbClr val="00B0F0"/>
+                </a:solidFill>
+              </a:rPr>
+              <a:t>https://graphql.org/community/tools-and-libraries</a:t>
+            </a:r>
+            <a:r>
+              <a:rPr lang="en-US" sz="1200"/>
+              <a:t>  </a:t>
+            </a:r>
+            <a:endParaRPr lang="en-US" sz="1200">
+              <a:effectLst/>
+            </a:endParaRPr>
           </a:p>
         </p:txBody>
       </p:sp>
@@ -14592,7 +17032,7 @@
 </p:sld>
 </file>
 
-<file path=ppt/slides/slide56.xml><?xml version="1.0" encoding="utf-8"?>
+<file path=ppt/slides/slide55.xml><?xml version="1.0" encoding="utf-8"?>
 <p:sld xmlns:a="http://schemas.openxmlformats.org/drawingml/2006/main" xmlns:r="http://schemas.openxmlformats.org/officeDocument/2006/relationships" xmlns:p="http://schemas.openxmlformats.org/presentationml/2006/main">
   <p:cSld>
     <p:spTree>
@@ -14666,7 +17106,7 @@
 </p:sld>
 </file>
 
-<file path=ppt/slides/slide57.xml><?xml version="1.0" encoding="utf-8"?>
+<file path=ppt/slides/slide56.xml><?xml version="1.0" encoding="utf-8"?>
 <p:sld xmlns:a="http://schemas.openxmlformats.org/drawingml/2006/main" xmlns:r="http://schemas.openxmlformats.org/officeDocument/2006/relationships" xmlns:p="http://schemas.openxmlformats.org/presentationml/2006/main">
   <p:cSld>
     <p:spTree>
@@ -14704,7 +17144,7 @@
         <p:spPr>
           <a:xfrm>
             <a:off x="203200" y="244826"/>
-            <a:ext cx="11822545" cy="369332"/>
+            <a:ext cx="11822545" cy="6281848"/>
           </a:xfrm>
           <a:prstGeom prst="rect">
             <a:avLst/>
@@ -14717,20 +17157,572 @@
           </a:bodyPr>
           <a:lstStyle/>
           <a:p>
-            <a:r>
-              <a:rPr lang="en-US">
+            <a:pPr>
+              <a:lnSpc>
+                <a:spcPct val="150000"/>
+              </a:lnSpc>
+            </a:pPr>
+            <a:r>
+              <a:rPr lang="az-Latn-AZ">
                 <a:latin typeface="-apple-system"/>
               </a:rPr>
+              <a:t>Komputerimizdə bu cür qovluq strukturu qururuq. </a:t>
+            </a:r>
+            <a:r>
+              <a:rPr lang="az-Latn-AZ" b="1">
+                <a:latin typeface="-apple-system"/>
+              </a:rPr>
+              <a:t>Client</a:t>
+            </a:r>
+            <a:r>
+              <a:rPr lang="az-Latn-AZ">
+                <a:latin typeface="-apple-system"/>
+              </a:rPr>
+              <a:t> qovluğu hələki boşdur.</a:t>
+            </a:r>
+          </a:p>
+          <a:p>
+            <a:pPr>
+              <a:lnSpc>
+                <a:spcPct val="150000"/>
+              </a:lnSpc>
+            </a:pPr>
+            <a:endParaRPr lang="az-Latn-AZ">
+              <a:latin typeface="-apple-system"/>
+            </a:endParaRPr>
+          </a:p>
+          <a:p>
+            <a:pPr>
+              <a:lnSpc>
+                <a:spcPct val="150000"/>
+              </a:lnSpc>
+            </a:pPr>
+            <a:endParaRPr lang="az-Latn-AZ">
+              <a:latin typeface="-apple-system"/>
+            </a:endParaRPr>
+          </a:p>
+          <a:p>
+            <a:pPr>
+              <a:lnSpc>
+                <a:spcPct val="150000"/>
+              </a:lnSpc>
+            </a:pPr>
+            <a:endParaRPr lang="az-Latn-AZ">
+              <a:latin typeface="-apple-system"/>
+            </a:endParaRPr>
+          </a:p>
+          <a:p>
+            <a:pPr>
+              <a:lnSpc>
+                <a:spcPct val="150000"/>
+              </a:lnSpc>
+            </a:pPr>
+            <a:endParaRPr lang="az-Latn-AZ">
+              <a:latin typeface="-apple-system"/>
+            </a:endParaRPr>
+          </a:p>
+          <a:p>
+            <a:pPr>
+              <a:lnSpc>
+                <a:spcPct val="150000"/>
+              </a:lnSpc>
+            </a:pPr>
+            <a:endParaRPr lang="az-Latn-AZ">
+              <a:latin typeface="-apple-system"/>
+            </a:endParaRPr>
+          </a:p>
+          <a:p>
+            <a:pPr>
+              <a:lnSpc>
+                <a:spcPct val="150000"/>
+              </a:lnSpc>
+            </a:pPr>
+            <a:endParaRPr lang="az-Latn-AZ">
+              <a:latin typeface="-apple-system"/>
+            </a:endParaRPr>
+          </a:p>
+          <a:p>
+            <a:pPr>
+              <a:lnSpc>
+                <a:spcPct val="150000"/>
+              </a:lnSpc>
+            </a:pPr>
+            <a:endParaRPr lang="az-Latn-AZ">
+              <a:latin typeface="-apple-system"/>
+            </a:endParaRPr>
+          </a:p>
+          <a:p>
+            <a:pPr>
+              <a:lnSpc>
+                <a:spcPct val="150000"/>
+              </a:lnSpc>
+            </a:pPr>
+            <a:r>
+              <a:rPr lang="az-Latn-AZ"/>
+              <a:t>İndi isə, </a:t>
+            </a:r>
+            <a:r>
+              <a:rPr lang="en-US" b="1"/>
+              <a:t>notesapp\server </a:t>
+            </a:r>
+            <a:r>
+              <a:rPr lang="en-US"/>
+              <a:t>qovluğunda </a:t>
+            </a:r>
+            <a:r>
+              <a:rPr lang="en-US" b="1" i="1"/>
+              <a:t>webonyx/graphql-php </a:t>
+            </a:r>
+            <a:r>
+              <a:rPr lang="en-US"/>
+              <a:t>kitabxanası ilə tam işləyən bir </a:t>
+            </a:r>
+            <a:r>
+              <a:rPr lang="en-US" b="1"/>
+              <a:t>GraphQL server </a:t>
+            </a:r>
+            <a:r>
+              <a:rPr lang="en-US"/>
+              <a:t>qurmağ</a:t>
+            </a:r>
+            <a:r>
+              <a:rPr lang="az-Latn-AZ"/>
+              <a:t>a çalışacağıq</a:t>
+            </a:r>
+            <a:r>
+              <a:rPr lang="en-US"/>
               <a:t>.</a:t>
             </a:r>
-            <a:endParaRPr lang="en-US"/>
+            <a:endParaRPr lang="az-Latn-AZ"/>
+          </a:p>
+          <a:p>
+            <a:pPr>
+              <a:lnSpc>
+                <a:spcPct val="150000"/>
+              </a:lnSpc>
+            </a:pPr>
+            <a:endParaRPr lang="az-Latn-AZ"/>
+          </a:p>
+          <a:p>
+            <a:pPr>
+              <a:lnSpc>
+                <a:spcPct val="150000"/>
+              </a:lnSpc>
+            </a:pPr>
+            <a:endParaRPr lang="az-Latn-AZ"/>
+          </a:p>
+          <a:p>
+            <a:pPr>
+              <a:lnSpc>
+                <a:spcPct val="150000"/>
+              </a:lnSpc>
+            </a:pPr>
+            <a:r>
+              <a:rPr lang="en-US"/>
+              <a:t>Tutaq ki, sən restoran açırsan. </a:t>
+            </a:r>
+            <a:r>
+              <a:rPr lang="en-US" b="1"/>
+              <a:t>schema.graphql </a:t>
+            </a:r>
+            <a:r>
+              <a:rPr lang="en-US"/>
+              <a:t>menyudur – müştərilərə nə təklif etdiyini göstərir. PHP kodları isə aşpaz və garsonlardır – menyudan sifarişləri qəbul edib yeməyi hazırlar. </a:t>
+            </a:r>
+            <a:r>
+              <a:rPr lang="en-US" b="1"/>
+              <a:t>webonyx/graphql-php </a:t>
+            </a:r>
+            <a:r>
+              <a:rPr lang="en-US"/>
+              <a:t>bu restoranı idarə etmək üçün alətlər verir.</a:t>
+            </a:r>
           </a:p>
         </p:txBody>
       </p:sp>
+      <p:pic>
+        <p:nvPicPr>
+          <p:cNvPr id="5" name="Picture 4">
+            <a:extLst>
+              <a:ext uri="{FF2B5EF4-FFF2-40B4-BE49-F238E27FC236}">
+                <a16:creationId xmlns:a16="http://schemas.microsoft.com/office/drawing/2014/main" id="{E7944411-1405-0609-0244-F82E608A717E}"/>
+              </a:ext>
+            </a:extLst>
+          </p:cNvPr>
+          <p:cNvPicPr>
+            <a:picLocks noChangeAspect="1"/>
+          </p:cNvPicPr>
+          <p:nvPr/>
+        </p:nvPicPr>
+        <p:blipFill>
+          <a:blip r:embed="rId2"/>
+          <a:stretch>
+            <a:fillRect/>
+          </a:stretch>
+        </p:blipFill>
+        <p:spPr>
+          <a:xfrm>
+            <a:off x="0" y="875577"/>
+            <a:ext cx="3162741" cy="2095792"/>
+          </a:xfrm>
+          <a:prstGeom prst="rect">
+            <a:avLst/>
+          </a:prstGeom>
+        </p:spPr>
+      </p:pic>
+      <p:pic>
+        <p:nvPicPr>
+          <p:cNvPr id="8" name="Picture 7">
+            <a:extLst>
+              <a:ext uri="{FF2B5EF4-FFF2-40B4-BE49-F238E27FC236}">
+                <a16:creationId xmlns:a16="http://schemas.microsoft.com/office/drawing/2014/main" id="{7963CEE3-EC3E-AAFC-B55F-D81847FD8BBA}"/>
+              </a:ext>
+            </a:extLst>
+          </p:cNvPr>
+          <p:cNvPicPr>
+            <a:picLocks noChangeAspect="1"/>
+          </p:cNvPicPr>
+          <p:nvPr/>
+        </p:nvPicPr>
+        <p:blipFill>
+          <a:blip r:embed="rId3"/>
+          <a:stretch>
+            <a:fillRect/>
+          </a:stretch>
+        </p:blipFill>
+        <p:spPr>
+          <a:xfrm>
+            <a:off x="9267417" y="0"/>
+            <a:ext cx="2924583" cy="1838582"/>
+          </a:xfrm>
+          <a:prstGeom prst="rect">
+            <a:avLst/>
+          </a:prstGeom>
+        </p:spPr>
+      </p:pic>
     </p:spTree>
     <p:extLst>
       <p:ext uri="{BB962C8B-B14F-4D97-AF65-F5344CB8AC3E}">
         <p14:creationId xmlns:p14="http://schemas.microsoft.com/office/powerpoint/2010/main" val="2189422531"/>
+      </p:ext>
+    </p:extLst>
+  </p:cSld>
+  <p:clrMapOvr>
+    <a:masterClrMapping/>
+  </p:clrMapOvr>
+</p:sld>
+</file>
+
+<file path=ppt/slides/slide57.xml><?xml version="1.0" encoding="utf-8"?>
+<p:sld xmlns:a="http://schemas.openxmlformats.org/drawingml/2006/main" xmlns:r="http://schemas.openxmlformats.org/officeDocument/2006/relationships" xmlns:p="http://schemas.openxmlformats.org/presentationml/2006/main">
+  <p:cSld>
+    <p:spTree>
+      <p:nvGrpSpPr>
+        <p:cNvPr id="1" name="">
+          <a:extLst>
+            <a:ext uri="{FF2B5EF4-FFF2-40B4-BE49-F238E27FC236}">
+              <a16:creationId xmlns:a16="http://schemas.microsoft.com/office/drawing/2014/main" id="{5C7B7923-A203-A9F5-F90C-23A1D4637F29}"/>
+            </a:ext>
+          </a:extLst>
+        </p:cNvPr>
+        <p:cNvGrpSpPr/>
+        <p:nvPr/>
+      </p:nvGrpSpPr>
+      <p:grpSpPr>
+        <a:xfrm>
+          <a:off x="0" y="0"/>
+          <a:ext cx="0" cy="0"/>
+          <a:chOff x="0" y="0"/>
+          <a:chExt cx="0" cy="0"/>
+        </a:xfrm>
+      </p:grpSpPr>
+      <p:sp>
+        <p:nvSpPr>
+          <p:cNvPr id="7" name="TextBox 6">
+            <a:extLst>
+              <a:ext uri="{FF2B5EF4-FFF2-40B4-BE49-F238E27FC236}">
+                <a16:creationId xmlns:a16="http://schemas.microsoft.com/office/drawing/2014/main" id="{229F9163-AB03-69BD-13D4-E8E7503B25B6}"/>
+              </a:ext>
+            </a:extLst>
+          </p:cNvPr>
+          <p:cNvSpPr txBox="1"/>
+          <p:nvPr/>
+        </p:nvSpPr>
+        <p:spPr>
+          <a:xfrm>
+            <a:off x="203200" y="244826"/>
+            <a:ext cx="11822545" cy="2492990"/>
+          </a:xfrm>
+          <a:prstGeom prst="rect">
+            <a:avLst/>
+          </a:prstGeom>
+          <a:noFill/>
+        </p:spPr>
+        <p:txBody>
+          <a:bodyPr wrap="square">
+            <a:spAutoFit/>
+          </a:bodyPr>
+          <a:lstStyle/>
+          <a:p>
+            <a:r>
+              <a:rPr lang="en-US" sz="1200" b="1">
+                <a:latin typeface="-apple-system"/>
+              </a:rPr>
+              <a:t>Schema Faylının Yazılması</a:t>
+            </a:r>
+            <a:r>
+              <a:rPr lang="en-US" sz="1200">
+                <a:latin typeface="-apple-system"/>
+              </a:rPr>
+              <a:t>: </a:t>
+            </a:r>
+            <a:r>
+              <a:rPr lang="en-US" sz="1200" u="sng">
+                <a:solidFill>
+                  <a:srgbClr val="00B0F0"/>
+                </a:solidFill>
+                <a:latin typeface="-apple-system"/>
+              </a:rPr>
+              <a:t>notesapp\server\graphql\schema.graphql</a:t>
+            </a:r>
+            <a:endParaRPr lang="az-Latn-AZ" sz="1200" u="sng">
+              <a:solidFill>
+                <a:srgbClr val="00B0F0"/>
+              </a:solidFill>
+              <a:latin typeface="-apple-system"/>
+            </a:endParaRPr>
+          </a:p>
+          <a:p>
+            <a:endParaRPr lang="az-Latn-AZ" sz="1200">
+              <a:latin typeface="-apple-system"/>
+            </a:endParaRPr>
+          </a:p>
+          <a:p>
+            <a:endParaRPr lang="az-Latn-AZ" sz="1200">
+              <a:latin typeface="-apple-system"/>
+            </a:endParaRPr>
+          </a:p>
+          <a:p>
+            <a:pPr marL="171450" indent="-171450">
+              <a:lnSpc>
+                <a:spcPct val="150000"/>
+              </a:lnSpc>
+              <a:buFont typeface="Arial" panose="020B0604020202020204" pitchFamily="34" charset="0"/>
+              <a:buChar char="•"/>
+            </a:pPr>
+            <a:r>
+              <a:rPr lang="en-US" sz="1200" b="1"/>
+              <a:t>schema direktivi</a:t>
+            </a:r>
+            <a:r>
+              <a:rPr lang="en-US" sz="1200"/>
+              <a:t>: GraphQL serverinə "Bu API-nin giriş nöqtəsi Query tipidir" deyir. Gələcəkdə mutation və subscription əlavə edə bilərsiniz.</a:t>
+            </a:r>
+          </a:p>
+          <a:p>
+            <a:pPr marL="171450" indent="-171450">
+              <a:lnSpc>
+                <a:spcPct val="150000"/>
+              </a:lnSpc>
+              <a:buFont typeface="Arial" panose="020B0604020202020204" pitchFamily="34" charset="0"/>
+              <a:buChar char="•"/>
+            </a:pPr>
+            <a:r>
+              <a:rPr lang="en-US" sz="1200" b="1"/>
+              <a:t>Query tipi</a:t>
+            </a:r>
+            <a:r>
+              <a:rPr lang="en-US" sz="1200"/>
+              <a:t>: </a:t>
+            </a:r>
+            <a:r>
+              <a:rPr lang="az-Latn-AZ" sz="1200"/>
+              <a:t>           </a:t>
+            </a:r>
+            <a:r>
+              <a:rPr lang="en-US" sz="1200"/>
+              <a:t>Müştərilərə "</a:t>
+            </a:r>
+            <a:r>
+              <a:rPr lang="en-US" sz="1200" b="1"/>
+              <a:t>notes</a:t>
+            </a:r>
+            <a:r>
+              <a:rPr lang="en-US" sz="1200"/>
+              <a:t>" sorğusu</a:t>
+            </a:r>
+            <a:r>
+              <a:rPr lang="az-Latn-AZ" sz="1200"/>
+              <a:t> göndərərək</a:t>
+            </a:r>
+            <a:r>
+              <a:rPr lang="en-US" sz="1200"/>
+              <a:t> bütün qeydləri almağa imkan verir.</a:t>
+            </a:r>
+          </a:p>
+          <a:p>
+            <a:pPr marL="171450" indent="-171450">
+              <a:lnSpc>
+                <a:spcPct val="150000"/>
+              </a:lnSpc>
+              <a:buFont typeface="Arial" panose="020B0604020202020204" pitchFamily="34" charset="0"/>
+              <a:buChar char="•"/>
+            </a:pPr>
+            <a:r>
+              <a:rPr lang="en-US" sz="1200" b="1"/>
+              <a:t>Note tipi</a:t>
+            </a:r>
+            <a:r>
+              <a:rPr lang="en-US" sz="1200"/>
+              <a:t>: </a:t>
+            </a:r>
+            <a:r>
+              <a:rPr lang="az-Latn-AZ" sz="1200"/>
+              <a:t>              </a:t>
+            </a:r>
+            <a:r>
+              <a:rPr lang="en-US" sz="1200"/>
+              <a:t>Hər qeydin id, başlıq, təsvir və müəllif məlumatlarını təyin edir.</a:t>
+            </a:r>
+          </a:p>
+          <a:p>
+            <a:pPr marL="171450" indent="-171450">
+              <a:lnSpc>
+                <a:spcPct val="150000"/>
+              </a:lnSpc>
+              <a:buFont typeface="Arial" panose="020B0604020202020204" pitchFamily="34" charset="0"/>
+              <a:buChar char="•"/>
+            </a:pPr>
+            <a:r>
+              <a:rPr lang="en-US" sz="1200" b="1"/>
+              <a:t>Author tipi</a:t>
+            </a:r>
+            <a:r>
+              <a:rPr lang="en-US" sz="1200"/>
+              <a:t>: </a:t>
+            </a:r>
+            <a:r>
+              <a:rPr lang="az-Latn-AZ" sz="1200"/>
+              <a:t>          </a:t>
+            </a:r>
+            <a:r>
+              <a:rPr lang="en-US" sz="1200"/>
+              <a:t>Müəllifin xüsusiyyətlərini təsvir edir. photo opsionaldır, çünki hər müəllifin şəkli olmaya bilər.</a:t>
+            </a:r>
+          </a:p>
+          <a:p>
+            <a:pPr marL="171450" indent="-171450">
+              <a:lnSpc>
+                <a:spcPct val="150000"/>
+              </a:lnSpc>
+              <a:buFont typeface="Arial" panose="020B0604020202020204" pitchFamily="34" charset="0"/>
+              <a:buChar char="•"/>
+            </a:pPr>
+            <a:r>
+              <a:rPr lang="en-US" sz="1200" b="1"/>
+              <a:t>! (nida işarəsi)</a:t>
+            </a:r>
+            <a:r>
+              <a:rPr lang="en-US" sz="1200"/>
+              <a:t>: </a:t>
+            </a:r>
+            <a:r>
+              <a:rPr lang="az-Latn-AZ" sz="1200"/>
+              <a:t>    </a:t>
+            </a:r>
+            <a:r>
+              <a:rPr lang="en-US" sz="1200"/>
+              <a:t>Sahənin mütləq dolu olmasını təmin edir. Məsələn, id: </a:t>
+            </a:r>
+            <a:r>
+              <a:rPr lang="en-US" sz="1200" b="1"/>
+              <a:t>ID! null </a:t>
+            </a:r>
+            <a:r>
+              <a:rPr lang="en-US" sz="1200"/>
+              <a:t>ola bilməz.</a:t>
+            </a:r>
+          </a:p>
+          <a:p>
+            <a:pPr marL="171450" indent="-171450">
+              <a:lnSpc>
+                <a:spcPct val="150000"/>
+              </a:lnSpc>
+              <a:buFont typeface="Arial" panose="020B0604020202020204" pitchFamily="34" charset="0"/>
+              <a:buChar char="•"/>
+            </a:pPr>
+            <a:r>
+              <a:rPr lang="en-US" sz="1200" b="1"/>
+              <a:t>[Note!]!</a:t>
+            </a:r>
+            <a:r>
+              <a:rPr lang="en-US" sz="1200"/>
+              <a:t>: </a:t>
+            </a:r>
+            <a:r>
+              <a:rPr lang="az-Latn-AZ" sz="1200"/>
+              <a:t>               </a:t>
+            </a:r>
+            <a:r>
+              <a:rPr lang="en-US" sz="1200"/>
+              <a:t>Siyahı null ola bilməz (boş olsa belə </a:t>
+            </a:r>
+            <a:r>
+              <a:rPr lang="en-US" sz="1200" b="1"/>
+              <a:t>[</a:t>
+            </a:r>
+            <a:r>
+              <a:rPr lang="az-Latn-AZ" sz="1200" b="1"/>
+              <a:t> </a:t>
+            </a:r>
+            <a:r>
+              <a:rPr lang="en-US" sz="1200" b="1"/>
+              <a:t>]</a:t>
+            </a:r>
+            <a:r>
+              <a:rPr lang="en-US" sz="1200"/>
+              <a:t> qaytarılır), və siyahıdakı hər Note da null ola bilməz.</a:t>
+            </a:r>
+          </a:p>
+          <a:p>
+            <a:endParaRPr lang="en-US" sz="1200"/>
+          </a:p>
+        </p:txBody>
+      </p:sp>
+      <p:pic>
+        <p:nvPicPr>
+          <p:cNvPr id="3" name="Picture 2">
+            <a:extLst>
+              <a:ext uri="{FF2B5EF4-FFF2-40B4-BE49-F238E27FC236}">
+                <a16:creationId xmlns:a16="http://schemas.microsoft.com/office/drawing/2014/main" id="{1D5DC259-F723-CD2C-8F14-757FACEAD080}"/>
+              </a:ext>
+            </a:extLst>
+          </p:cNvPr>
+          <p:cNvPicPr>
+            <a:picLocks noChangeAspect="1"/>
+          </p:cNvPicPr>
+          <p:nvPr/>
+        </p:nvPicPr>
+        <p:blipFill>
+          <a:blip r:embed="rId2"/>
+          <a:stretch>
+            <a:fillRect/>
+          </a:stretch>
+        </p:blipFill>
+        <p:spPr>
+          <a:xfrm>
+            <a:off x="3278908" y="2927418"/>
+            <a:ext cx="8913091" cy="3930582"/>
+          </a:xfrm>
+          <a:prstGeom prst="rect">
+            <a:avLst/>
+          </a:prstGeom>
+        </p:spPr>
+      </p:pic>
+    </p:spTree>
+    <p:extLst>
+      <p:ext uri="{BB962C8B-B14F-4D97-AF65-F5344CB8AC3E}">
+        <p14:creationId xmlns:p14="http://schemas.microsoft.com/office/powerpoint/2010/main" val="3257224311"/>
       </p:ext>
     </p:extLst>
   </p:cSld>
@@ -14748,7 +17740,7 @@
         <p:cNvPr id="1" name="">
           <a:extLst>
             <a:ext uri="{FF2B5EF4-FFF2-40B4-BE49-F238E27FC236}">
-              <a16:creationId xmlns:a16="http://schemas.microsoft.com/office/drawing/2014/main" id="{DB5E0A76-F990-583B-6C0C-5B5B487F045B}"/>
+              <a16:creationId xmlns:a16="http://schemas.microsoft.com/office/drawing/2014/main" id="{D6B4719A-6C39-FA4C-FA2B-8E6DC79F954D}"/>
             </a:ext>
           </a:extLst>
         </p:cNvPr>
@@ -14768,7 +17760,7 @@
           <p:cNvPr id="7" name="TextBox 6">
             <a:extLst>
               <a:ext uri="{FF2B5EF4-FFF2-40B4-BE49-F238E27FC236}">
-                <a16:creationId xmlns:a16="http://schemas.microsoft.com/office/drawing/2014/main" id="{01603ED3-7FA6-7B0D-9DAE-145D2D56BCB8}"/>
+                <a16:creationId xmlns:a16="http://schemas.microsoft.com/office/drawing/2014/main" id="{23A34FF8-E266-417A-C582-4E93A157018F}"/>
               </a:ext>
             </a:extLst>
           </p:cNvPr>
@@ -14778,7 +17770,7 @@
         <p:spPr>
           <a:xfrm>
             <a:off x="203200" y="244826"/>
-            <a:ext cx="11822545" cy="369332"/>
+            <a:ext cx="11822545" cy="954107"/>
           </a:xfrm>
           <a:prstGeom prst="rect">
             <a:avLst/>
@@ -14791,20 +17783,128 @@
           </a:bodyPr>
           <a:lstStyle/>
           <a:p>
-            <a:r>
-              <a:rPr lang="en-US">
-                <a:latin typeface="-apple-system"/>
-              </a:rPr>
-              <a:t>.</a:t>
-            </a:r>
-            <a:endParaRPr lang="en-US"/>
+            <a:pPr marL="285750" indent="-285750">
+              <a:buFont typeface="Arial" panose="020B0604020202020204" pitchFamily="34" charset="0"/>
+              <a:buChar char="•"/>
+            </a:pPr>
+            <a:r>
+              <a:rPr lang="en-US" sz="1400" b="1"/>
+              <a:t>Composer ilə quraşdırma</a:t>
+            </a:r>
+            <a:r>
+              <a:rPr lang="en-US" sz="1400"/>
+              <a:t>: </a:t>
+            </a:r>
+            <a:r>
+              <a:rPr lang="en-US" sz="1400" b="1">
+                <a:solidFill>
+                  <a:srgbClr val="00B0F0"/>
+                </a:solidFill>
+              </a:rPr>
+              <a:t>notesapp/server </a:t>
+            </a:r>
+            <a:r>
+              <a:rPr lang="en-US" sz="1400"/>
+              <a:t>qovluğunda terminalda aşağıdakı əmri icra edin:</a:t>
+            </a:r>
+            <a:r>
+              <a:rPr lang="az-Latn-AZ" sz="1400"/>
+              <a:t> </a:t>
+            </a:r>
+            <a:r>
+              <a:rPr lang="en-US" sz="1400"/>
+              <a:t>Bu, </a:t>
+            </a:r>
+            <a:r>
+              <a:rPr lang="en-US" sz="1400" b="1"/>
+              <a:t>webonyx/graphql-php </a:t>
+            </a:r>
+            <a:r>
+              <a:rPr lang="en-US" sz="1400"/>
+              <a:t>kitabxanasını quraşdırır.</a:t>
+            </a:r>
+          </a:p>
+          <a:p>
+            <a:pPr marL="285750" indent="-285750">
+              <a:buFont typeface="Arial" panose="020B0604020202020204" pitchFamily="34" charset="0"/>
+              <a:buChar char="•"/>
+            </a:pPr>
+            <a:endParaRPr lang="az-Latn-AZ" sz="1400">
+              <a:effectLst/>
+            </a:endParaRPr>
+          </a:p>
+          <a:p>
+            <a:pPr marL="285750" indent="-285750">
+              <a:buFont typeface="Arial" panose="020B0604020202020204" pitchFamily="34" charset="0"/>
+              <a:buChar char="•"/>
+            </a:pPr>
+            <a:r>
+              <a:rPr lang="en-US" sz="1400" b="1"/>
+              <a:t>Verilənlər bazası simulyasiyası</a:t>
+            </a:r>
+            <a:r>
+              <a:rPr lang="en-US" sz="1400"/>
+              <a:t>: Sadəlik üçün məlumatları </a:t>
+            </a:r>
+            <a:r>
+              <a:rPr lang="en-US" sz="1400" b="1"/>
+              <a:t>array</a:t>
+            </a:r>
+            <a:r>
+              <a:rPr lang="en-US" sz="1400"/>
+              <a:t> ilə saxlayacağıq. Gələcəkdə </a:t>
+            </a:r>
+            <a:r>
+              <a:rPr lang="en-US" sz="1400" b="1"/>
+              <a:t>MySQL</a:t>
+            </a:r>
+            <a:r>
+              <a:rPr lang="en-US" sz="1400"/>
+              <a:t> və ya başqa DB ilə əvəz edə bilərsiniz.</a:t>
+            </a:r>
+            <a:endParaRPr lang="az-Latn-AZ" sz="1400"/>
+          </a:p>
+          <a:p>
+            <a:endParaRPr lang="en-US" sz="1400">
+              <a:effectLst/>
+            </a:endParaRPr>
           </a:p>
         </p:txBody>
       </p:sp>
+      <p:pic>
+        <p:nvPicPr>
+          <p:cNvPr id="3" name="Picture 2">
+            <a:extLst>
+              <a:ext uri="{FF2B5EF4-FFF2-40B4-BE49-F238E27FC236}">
+                <a16:creationId xmlns:a16="http://schemas.microsoft.com/office/drawing/2014/main" id="{2AA901EF-153E-DB47-AF10-DF385E86BE85}"/>
+              </a:ext>
+            </a:extLst>
+          </p:cNvPr>
+          <p:cNvPicPr>
+            <a:picLocks noChangeAspect="1"/>
+          </p:cNvPicPr>
+          <p:nvPr/>
+        </p:nvPicPr>
+        <p:blipFill>
+          <a:blip r:embed="rId2"/>
+          <a:stretch>
+            <a:fillRect/>
+          </a:stretch>
+        </p:blipFill>
+        <p:spPr>
+          <a:xfrm>
+            <a:off x="1782618" y="2082242"/>
+            <a:ext cx="10409382" cy="4775757"/>
+          </a:xfrm>
+          <a:prstGeom prst="rect">
+            <a:avLst/>
+          </a:prstGeom>
+        </p:spPr>
+      </p:pic>
     </p:spTree>
     <p:extLst>
       <p:ext uri="{BB962C8B-B14F-4D97-AF65-F5344CB8AC3E}">
-        <p14:creationId xmlns:p14="http://schemas.microsoft.com/office/powerpoint/2010/main" val="571673239"/>
+        <p14:creationId xmlns:p14="http://schemas.microsoft.com/office/powerpoint/2010/main" val="2015016873"/>
       </p:ext>
     </p:extLst>
   </p:cSld>
@@ -14822,7 +17922,7 @@
         <p:cNvPr id="1" name="">
           <a:extLst>
             <a:ext uri="{FF2B5EF4-FFF2-40B4-BE49-F238E27FC236}">
-              <a16:creationId xmlns:a16="http://schemas.microsoft.com/office/drawing/2014/main" id="{D1F05FAD-154F-7394-1819-F09B8141466E}"/>
+              <a16:creationId xmlns:a16="http://schemas.microsoft.com/office/drawing/2014/main" id="{DF787E78-349A-AC20-BB73-541A95B753E6}"/>
             </a:ext>
           </a:extLst>
         </p:cNvPr>
@@ -14842,7 +17942,7 @@
           <p:cNvPr id="7" name="TextBox 6">
             <a:extLst>
               <a:ext uri="{FF2B5EF4-FFF2-40B4-BE49-F238E27FC236}">
-                <a16:creationId xmlns:a16="http://schemas.microsoft.com/office/drawing/2014/main" id="{A431E858-D76B-AD72-9AD4-E9890C9FA522}"/>
+                <a16:creationId xmlns:a16="http://schemas.microsoft.com/office/drawing/2014/main" id="{AF590AE1-5242-5CD5-9F34-0A8BFA37F6AC}"/>
               </a:ext>
             </a:extLst>
           </p:cNvPr>
@@ -14852,7 +17952,7 @@
         <p:spPr>
           <a:xfrm>
             <a:off x="203200" y="244826"/>
-            <a:ext cx="11822545" cy="369332"/>
+            <a:ext cx="11822545" cy="6157711"/>
           </a:xfrm>
           <a:prstGeom prst="rect">
             <a:avLst/>
@@ -14866,19 +17966,528 @@
           <a:lstStyle/>
           <a:p>
             <a:r>
-              <a:rPr lang="en-US">
-                <a:latin typeface="-apple-system"/>
-              </a:rPr>
+              <a:rPr lang="en-US" sz="1200" b="1"/>
+              <a:t>Server Kodunu Yazmaq</a:t>
+            </a:r>
+            <a:endParaRPr lang="az-Latn-AZ" sz="1200" b="1"/>
+          </a:p>
+          <a:p>
+            <a:endParaRPr lang="en-US" sz="1200" b="1"/>
+          </a:p>
+          <a:p>
+            <a:r>
+              <a:rPr lang="en-US" sz="1200" b="1"/>
+              <a:t>notesapp/server/src/index.php </a:t>
+            </a:r>
+            <a:r>
+              <a:rPr lang="en-US" sz="1200"/>
+              <a:t>faylında serveri quracağıq. Bu fayl </a:t>
+            </a:r>
+            <a:r>
+              <a:rPr lang="en-US" sz="1200" b="1" i="1"/>
+              <a:t>schema</a:t>
+            </a:r>
+            <a:r>
+              <a:rPr lang="az-Latn-AZ" sz="1200"/>
+              <a:t> </a:t>
+            </a:r>
+            <a:r>
+              <a:rPr lang="en-US" sz="1200"/>
+              <a:t>-nı oxuyacaq, resolver </a:t>
+            </a:r>
+            <a:endParaRPr lang="az-Latn-AZ" sz="1200"/>
+          </a:p>
+          <a:p>
+            <a:r>
+              <a:rPr lang="en-US" sz="1200"/>
+              <a:t>funksiyaları təyin edəcək və sorğuları icra edəcək.</a:t>
+            </a:r>
+            <a:r>
+              <a:rPr lang="az-Latn-AZ" sz="1200"/>
+              <a:t> Kodumuz biraz uzun olduğu üçün onu hissə-hissə yerləşdirəcəm.</a:t>
+            </a:r>
+          </a:p>
+          <a:p>
+            <a:endParaRPr lang="az-Latn-AZ" sz="1200">
+              <a:effectLst/>
+            </a:endParaRPr>
+          </a:p>
+          <a:p>
+            <a:endParaRPr lang="az-Latn-AZ" sz="1200"/>
+          </a:p>
+          <a:p>
+            <a:endParaRPr lang="az-Latn-AZ" sz="1200">
+              <a:effectLst/>
+            </a:endParaRPr>
+          </a:p>
+          <a:p>
+            <a:pPr marL="285750" indent="-285750">
+              <a:lnSpc>
+                <a:spcPct val="150000"/>
+              </a:lnSpc>
+              <a:buFont typeface="Arial" panose="020B0604020202020204" pitchFamily="34" charset="0"/>
+              <a:buChar char="•"/>
+            </a:pPr>
+            <a:r>
+              <a:rPr lang="en-US" sz="1200" b="1"/>
+              <a:t>GraphQL\GraphQL </a:t>
+            </a:r>
+            <a:r>
+              <a:rPr lang="az-Latn-AZ" sz="1200" b="1"/>
+              <a:t>                  </a:t>
+            </a:r>
+            <a:r>
+              <a:rPr lang="en-US" sz="1200"/>
+              <a:t>→ əsas </a:t>
+            </a:r>
+            <a:r>
+              <a:rPr lang="en-US" sz="1200" b="1"/>
+              <a:t>GraphQL</a:t>
+            </a:r>
+            <a:r>
+              <a:rPr lang="en-US" sz="1200"/>
+              <a:t> əməliyyatlarını (executeQuery) icra etmək üçün </a:t>
+            </a:r>
+            <a:r>
+              <a:rPr lang="az-Latn-AZ" sz="1200"/>
+              <a:t>use (istifadə) etdiyimiz class -dır</a:t>
+            </a:r>
+            <a:r>
+              <a:rPr lang="en-US" sz="1200"/>
               <a:t>.</a:t>
             </a:r>
-            <a:endParaRPr lang="en-US"/>
+          </a:p>
+          <a:p>
+            <a:pPr marL="285750" indent="-285750">
+              <a:lnSpc>
+                <a:spcPct val="150000"/>
+              </a:lnSpc>
+              <a:buFont typeface="Arial" panose="020B0604020202020204" pitchFamily="34" charset="0"/>
+              <a:buChar char="•"/>
+            </a:pPr>
+            <a:r>
+              <a:rPr lang="en-US" sz="1200" b="1"/>
+              <a:t>GraphQL\Utils\BuildSchema </a:t>
+            </a:r>
+            <a:r>
+              <a:rPr lang="en-US" sz="1200"/>
+              <a:t>→ </a:t>
+            </a:r>
+            <a:r>
+              <a:rPr lang="en-US" sz="1200" b="1" i="1"/>
+              <a:t>.graphql </a:t>
+            </a:r>
+            <a:r>
+              <a:rPr lang="en-US" sz="1200"/>
+              <a:t>faylında yazdığı</a:t>
+            </a:r>
+            <a:r>
+              <a:rPr lang="az-Latn-AZ" sz="1200"/>
+              <a:t>mız</a:t>
+            </a:r>
+            <a:r>
+              <a:rPr lang="en-US" sz="1200"/>
+              <a:t> </a:t>
+            </a:r>
+            <a:r>
+              <a:rPr lang="en-US" sz="1200" b="1" i="1"/>
+              <a:t>schema</a:t>
+            </a:r>
+            <a:r>
+              <a:rPr lang="az-Latn-AZ" sz="1200"/>
+              <a:t> </a:t>
+            </a:r>
+            <a:r>
+              <a:rPr lang="en-US" sz="1200"/>
+              <a:t>-nı PHP kodunda işlədilə bilən hala gətir</a:t>
+            </a:r>
+            <a:r>
+              <a:rPr lang="az-Latn-AZ" sz="1200"/>
+              <a:t>ən class -ımızdır</a:t>
+            </a:r>
+            <a:r>
+              <a:rPr lang="en-US" sz="1200"/>
+              <a:t>.</a:t>
+            </a:r>
+            <a:endParaRPr lang="az-Latn-AZ" sz="1200"/>
+          </a:p>
+          <a:p>
+            <a:endParaRPr lang="az-Latn-AZ" sz="1200">
+              <a:effectLst/>
+            </a:endParaRPr>
+          </a:p>
+          <a:p>
+            <a:endParaRPr lang="az-Latn-AZ" sz="1200">
+              <a:effectLst/>
+            </a:endParaRPr>
+          </a:p>
+          <a:p>
+            <a:endParaRPr lang="az-Latn-AZ" sz="1200"/>
+          </a:p>
+          <a:p>
+            <a:endParaRPr lang="az-Latn-AZ" sz="1200">
+              <a:effectLst/>
+            </a:endParaRPr>
+          </a:p>
+          <a:p>
+            <a:endParaRPr lang="az-Latn-AZ" sz="1200"/>
+          </a:p>
+          <a:p>
+            <a:pPr marL="171450" indent="-171450">
+              <a:lnSpc>
+                <a:spcPct val="150000"/>
+              </a:lnSpc>
+              <a:buFont typeface="Arial" panose="020B0604020202020204" pitchFamily="34" charset="0"/>
+              <a:buChar char="•"/>
+            </a:pPr>
+            <a:r>
+              <a:rPr lang="en-US" sz="1200"/>
+              <a:t>Bu sətir </a:t>
+            </a:r>
+            <a:r>
+              <a:rPr lang="en-US" sz="1200" b="1"/>
+              <a:t>composer install </a:t>
+            </a:r>
+            <a:r>
+              <a:rPr lang="en-US" sz="1200"/>
+              <a:t>ilə gələn bütün kitabxanaları (</a:t>
+            </a:r>
+            <a:r>
+              <a:rPr lang="en-US" sz="1200" b="1"/>
+              <a:t>autoload</a:t>
+            </a:r>
+            <a:r>
+              <a:rPr lang="en-US" sz="1200"/>
+              <a:t> mexanizmi) yükləyir.</a:t>
+            </a:r>
+          </a:p>
+          <a:p>
+            <a:pPr marL="171450" indent="-171450">
+              <a:lnSpc>
+                <a:spcPct val="150000"/>
+              </a:lnSpc>
+              <a:buFont typeface="Arial" panose="020B0604020202020204" pitchFamily="34" charset="0"/>
+              <a:buChar char="•"/>
+            </a:pPr>
+            <a:r>
+              <a:rPr lang="en-US" sz="1200"/>
+              <a:t>Yəni </a:t>
+            </a:r>
+            <a:r>
+              <a:rPr lang="en-US" sz="1200" b="1"/>
+              <a:t>webonyx/graphql-php </a:t>
+            </a:r>
+            <a:r>
+              <a:rPr lang="en-US" sz="1200"/>
+              <a:t>paketini və digər </a:t>
+            </a:r>
+            <a:r>
+              <a:rPr lang="en-US" sz="1200" b="1"/>
+              <a:t>dependency</a:t>
+            </a:r>
+            <a:r>
+              <a:rPr lang="en-US" sz="1200"/>
+              <a:t>-ləri </a:t>
+            </a:r>
+            <a:r>
+              <a:rPr lang="en-US" sz="1200" i="1"/>
+              <a:t>avtomatik</a:t>
+            </a:r>
+            <a:r>
+              <a:rPr lang="en-US" sz="1200"/>
+              <a:t> çağırır.</a:t>
+            </a:r>
+          </a:p>
+          <a:p>
+            <a:pPr marL="171450" indent="-171450">
+              <a:lnSpc>
+                <a:spcPct val="150000"/>
+              </a:lnSpc>
+              <a:buFont typeface="Arial" panose="020B0604020202020204" pitchFamily="34" charset="0"/>
+              <a:buChar char="•"/>
+            </a:pPr>
+            <a:r>
+              <a:rPr lang="en-US" sz="1200" b="1"/>
+              <a:t>__DIR__ </a:t>
+            </a:r>
+            <a:r>
+              <a:rPr lang="az-Latn-AZ" sz="1200" b="1"/>
+              <a:t>	                       </a:t>
+            </a:r>
+            <a:r>
+              <a:rPr lang="en-US" sz="1200"/>
+              <a:t>→ PHP-də hazır dəyişəndir, cari faylın qovluğunu göstərir.</a:t>
+            </a:r>
+          </a:p>
+          <a:p>
+            <a:pPr marL="171450" indent="-171450">
+              <a:lnSpc>
+                <a:spcPct val="150000"/>
+              </a:lnSpc>
+              <a:buFont typeface="Arial" panose="020B0604020202020204" pitchFamily="34" charset="0"/>
+              <a:buChar char="•"/>
+            </a:pPr>
+            <a:r>
+              <a:rPr lang="en-US" sz="1200" b="1"/>
+              <a:t>../vendor/autoload.php </a:t>
+            </a:r>
+            <a:r>
+              <a:rPr lang="en-US" sz="1200"/>
+              <a:t>→ vendor qovluğunda yerləşən </a:t>
+            </a:r>
+            <a:r>
+              <a:rPr lang="en-US" sz="1200" i="1"/>
+              <a:t>Composer</a:t>
+            </a:r>
+            <a:r>
+              <a:rPr lang="az-Latn-AZ" sz="1200"/>
+              <a:t> </a:t>
+            </a:r>
+            <a:r>
+              <a:rPr lang="en-US" sz="1200"/>
+              <a:t>-in əsas autoload faylıd</a:t>
+            </a:r>
+            <a:r>
+              <a:rPr lang="az-Latn-AZ" sz="1200"/>
+              <a:t>ır.</a:t>
+            </a:r>
+          </a:p>
+          <a:p>
+            <a:endParaRPr lang="az-Latn-AZ" sz="1200">
+              <a:effectLst/>
+            </a:endParaRPr>
+          </a:p>
+          <a:p>
+            <a:endParaRPr lang="az-Latn-AZ" sz="1200"/>
+          </a:p>
+          <a:p>
+            <a:endParaRPr lang="az-Latn-AZ" sz="1200"/>
+          </a:p>
+          <a:p>
+            <a:endParaRPr lang="az-Latn-AZ" sz="1200"/>
+          </a:p>
+          <a:p>
+            <a:endParaRPr lang="az-Latn-AZ" sz="1200"/>
+          </a:p>
+          <a:p>
+            <a:r>
+              <a:rPr lang="az-Latn-AZ" sz="1200" b="1">
+                <a:effectLst/>
+              </a:rPr>
+              <a:t>Son olaraq isə</a:t>
+            </a:r>
+            <a:r>
+              <a:rPr lang="az-Latn-AZ" sz="1200">
+                <a:effectLst/>
+              </a:rPr>
+              <a:t>: </a:t>
+            </a:r>
+          </a:p>
+          <a:p>
+            <a:pPr marL="171450" indent="-171450">
+              <a:lnSpc>
+                <a:spcPct val="150000"/>
+              </a:lnSpc>
+              <a:buFont typeface="Arial" panose="020B0604020202020204" pitchFamily="34" charset="0"/>
+              <a:buChar char="•"/>
+            </a:pPr>
+            <a:r>
+              <a:rPr lang="az-Latn-AZ" sz="1200"/>
+              <a:t>S</a:t>
+            </a:r>
+            <a:r>
+              <a:rPr lang="en-US" sz="1200"/>
+              <a:t>axta (</a:t>
+            </a:r>
+            <a:r>
+              <a:rPr lang="en-US" sz="1200" b="1"/>
+              <a:t>fake</a:t>
+            </a:r>
+            <a:r>
+              <a:rPr lang="en-US" sz="1200"/>
+              <a:t>) verilənlər bazası </a:t>
+            </a:r>
+            <a:r>
+              <a:rPr lang="az-Latn-AZ" sz="1200"/>
+              <a:t>yaratmışıq</a:t>
+            </a:r>
+            <a:r>
+              <a:rPr lang="en-US" sz="1200"/>
+              <a:t>. Əslində </a:t>
+            </a:r>
+            <a:r>
+              <a:rPr lang="en-US" sz="1200" b="1"/>
+              <a:t>MySQL/PostgreSQL </a:t>
+            </a:r>
+            <a:r>
+              <a:rPr lang="en-US" sz="1200"/>
+              <a:t>ola bilərdi, amma sadəlik üçün massiv (array) istifadə edilib:</a:t>
+            </a:r>
+          </a:p>
+          <a:p>
+            <a:pPr marL="171450" indent="-171450">
+              <a:lnSpc>
+                <a:spcPct val="150000"/>
+              </a:lnSpc>
+              <a:buFont typeface="Arial" panose="020B0604020202020204" pitchFamily="34" charset="0"/>
+              <a:buChar char="•"/>
+            </a:pPr>
+            <a:r>
+              <a:rPr lang="en-US" sz="1200" b="1"/>
+              <a:t>notes</a:t>
+            </a:r>
+            <a:r>
+              <a:rPr lang="az-Latn-AZ" sz="1200" b="1"/>
+              <a:t>    </a:t>
+            </a:r>
+            <a:r>
+              <a:rPr lang="en-US" sz="1200"/>
+              <a:t> → qeydlər siyahısı.</a:t>
+            </a:r>
+          </a:p>
+          <a:p>
+            <a:pPr marL="171450" indent="-171450">
+              <a:lnSpc>
+                <a:spcPct val="150000"/>
+              </a:lnSpc>
+              <a:buFont typeface="Arial" panose="020B0604020202020204" pitchFamily="34" charset="0"/>
+              <a:buChar char="•"/>
+            </a:pPr>
+            <a:r>
+              <a:rPr lang="en-US" sz="1200" b="1"/>
+              <a:t>authors</a:t>
+            </a:r>
+            <a:r>
+              <a:rPr lang="en-US" sz="1200"/>
+              <a:t> → müəlliflər siyahısı.</a:t>
+            </a:r>
+          </a:p>
+          <a:p>
+            <a:pPr marL="171450" indent="-171450">
+              <a:lnSpc>
+                <a:spcPct val="150000"/>
+              </a:lnSpc>
+              <a:buFont typeface="Arial" panose="020B0604020202020204" pitchFamily="34" charset="0"/>
+              <a:buChar char="•"/>
+            </a:pPr>
+            <a:r>
+              <a:rPr lang="en-US" sz="1200"/>
+              <a:t>note obyektində </a:t>
+            </a:r>
+            <a:r>
+              <a:rPr lang="en-US" sz="1200" b="1"/>
+              <a:t>authorId</a:t>
+            </a:r>
+            <a:r>
+              <a:rPr lang="en-US" sz="1200"/>
+              <a:t> saxlanılır ki, həmin id ilə </a:t>
+            </a:r>
+            <a:r>
+              <a:rPr lang="en-US" sz="1200" b="1" i="1"/>
+              <a:t>müəllif</a:t>
+            </a:r>
+            <a:r>
+              <a:rPr lang="en-US" sz="1200"/>
+              <a:t> tapılsın.</a:t>
+            </a:r>
+            <a:endParaRPr lang="az-Latn-AZ" sz="1200"/>
           </a:p>
         </p:txBody>
       </p:sp>
+      <p:pic>
+        <p:nvPicPr>
+          <p:cNvPr id="3" name="Picture 2">
+            <a:extLst>
+              <a:ext uri="{FF2B5EF4-FFF2-40B4-BE49-F238E27FC236}">
+                <a16:creationId xmlns:a16="http://schemas.microsoft.com/office/drawing/2014/main" id="{8B202005-FC29-1046-06C9-F32C38894AC4}"/>
+              </a:ext>
+            </a:extLst>
+          </p:cNvPr>
+          <p:cNvPicPr>
+            <a:picLocks noChangeAspect="1"/>
+          </p:cNvPicPr>
+          <p:nvPr/>
+        </p:nvPicPr>
+        <p:blipFill>
+          <a:blip r:embed="rId2"/>
+          <a:stretch>
+            <a:fillRect/>
+          </a:stretch>
+        </p:blipFill>
+        <p:spPr>
+          <a:xfrm>
+            <a:off x="7740072" y="0"/>
+            <a:ext cx="4451927" cy="1515889"/>
+          </a:xfrm>
+          <a:prstGeom prst="rect">
+            <a:avLst/>
+          </a:prstGeom>
+        </p:spPr>
+      </p:pic>
+      <p:pic>
+        <p:nvPicPr>
+          <p:cNvPr id="6" name="Picture 5">
+            <a:extLst>
+              <a:ext uri="{FF2B5EF4-FFF2-40B4-BE49-F238E27FC236}">
+                <a16:creationId xmlns:a16="http://schemas.microsoft.com/office/drawing/2014/main" id="{A26626B0-2DBB-B5D5-C53A-6ED505FA122A}"/>
+              </a:ext>
+            </a:extLst>
+          </p:cNvPr>
+          <p:cNvPicPr>
+            <a:picLocks noChangeAspect="1"/>
+          </p:cNvPicPr>
+          <p:nvPr/>
+        </p:nvPicPr>
+        <p:blipFill>
+          <a:blip r:embed="rId3"/>
+          <a:stretch>
+            <a:fillRect/>
+          </a:stretch>
+        </p:blipFill>
+        <p:spPr>
+          <a:xfrm>
+            <a:off x="0" y="2502120"/>
+            <a:ext cx="3829584" cy="409632"/>
+          </a:xfrm>
+          <a:prstGeom prst="rect">
+            <a:avLst/>
+          </a:prstGeom>
+        </p:spPr>
+      </p:pic>
+      <p:pic>
+        <p:nvPicPr>
+          <p:cNvPr id="9" name="Picture 8">
+            <a:extLst>
+              <a:ext uri="{FF2B5EF4-FFF2-40B4-BE49-F238E27FC236}">
+                <a16:creationId xmlns:a16="http://schemas.microsoft.com/office/drawing/2014/main" id="{A3EB0FA9-FC20-24DA-DCAB-FB7B73C3641E}"/>
+              </a:ext>
+            </a:extLst>
+          </p:cNvPr>
+          <p:cNvPicPr>
+            <a:picLocks noChangeAspect="1"/>
+          </p:cNvPicPr>
+          <p:nvPr/>
+        </p:nvPicPr>
+        <p:blipFill>
+          <a:blip r:embed="rId4"/>
+          <a:stretch>
+            <a:fillRect/>
+          </a:stretch>
+        </p:blipFill>
+        <p:spPr>
+          <a:xfrm>
+            <a:off x="0" y="1186261"/>
+            <a:ext cx="1828919" cy="374424"/>
+          </a:xfrm>
+          <a:prstGeom prst="rect">
+            <a:avLst/>
+          </a:prstGeom>
+        </p:spPr>
+      </p:pic>
     </p:spTree>
     <p:extLst>
       <p:ext uri="{BB962C8B-B14F-4D97-AF65-F5344CB8AC3E}">
-        <p14:creationId xmlns:p14="http://schemas.microsoft.com/office/powerpoint/2010/main" val="656003231"/>
+        <p14:creationId xmlns:p14="http://schemas.microsoft.com/office/powerpoint/2010/main" val="2779668322"/>
       </p:ext>
     </p:extLst>
   </p:cSld>
@@ -15208,6 +18817,746 @@
 </p:sld>
 </file>
 
+<file path=ppt/slides/slide60.xml><?xml version="1.0" encoding="utf-8"?>
+<p:sld xmlns:a="http://schemas.openxmlformats.org/drawingml/2006/main" xmlns:r="http://schemas.openxmlformats.org/officeDocument/2006/relationships" xmlns:p="http://schemas.openxmlformats.org/presentationml/2006/main">
+  <p:cSld>
+    <p:spTree>
+      <p:nvGrpSpPr>
+        <p:cNvPr id="1" name="">
+          <a:extLst>
+            <a:ext uri="{FF2B5EF4-FFF2-40B4-BE49-F238E27FC236}">
+              <a16:creationId xmlns:a16="http://schemas.microsoft.com/office/drawing/2014/main" id="{8212C36B-3416-6A6E-9E20-34163B07C784}"/>
+            </a:ext>
+          </a:extLst>
+        </p:cNvPr>
+        <p:cNvGrpSpPr/>
+        <p:nvPr/>
+      </p:nvGrpSpPr>
+      <p:grpSpPr>
+        <a:xfrm>
+          <a:off x="0" y="0"/>
+          <a:ext cx="0" cy="0"/>
+          <a:chOff x="0" y="0"/>
+          <a:chExt cx="0" cy="0"/>
+        </a:xfrm>
+      </p:grpSpPr>
+      <p:sp>
+        <p:nvSpPr>
+          <p:cNvPr id="7" name="TextBox 6">
+            <a:extLst>
+              <a:ext uri="{FF2B5EF4-FFF2-40B4-BE49-F238E27FC236}">
+                <a16:creationId xmlns:a16="http://schemas.microsoft.com/office/drawing/2014/main" id="{61830D90-CDE3-800F-3EBE-54F70B5486A1}"/>
+              </a:ext>
+            </a:extLst>
+          </p:cNvPr>
+          <p:cNvSpPr txBox="1"/>
+          <p:nvPr/>
+        </p:nvSpPr>
+        <p:spPr>
+          <a:xfrm>
+            <a:off x="203200" y="244826"/>
+            <a:ext cx="11822545" cy="369332"/>
+          </a:xfrm>
+          <a:prstGeom prst="rect">
+            <a:avLst/>
+          </a:prstGeom>
+          <a:noFill/>
+        </p:spPr>
+        <p:txBody>
+          <a:bodyPr wrap="square">
+            <a:spAutoFit/>
+          </a:bodyPr>
+          <a:lstStyle/>
+          <a:p>
+            <a:r>
+              <a:rPr lang="en-US">
+                <a:latin typeface="-apple-system"/>
+              </a:rPr>
+              <a:t>.</a:t>
+            </a:r>
+            <a:endParaRPr lang="en-US"/>
+          </a:p>
+        </p:txBody>
+      </p:sp>
+    </p:spTree>
+    <p:extLst>
+      <p:ext uri="{BB962C8B-B14F-4D97-AF65-F5344CB8AC3E}">
+        <p14:creationId xmlns:p14="http://schemas.microsoft.com/office/powerpoint/2010/main" val="2872640563"/>
+      </p:ext>
+    </p:extLst>
+  </p:cSld>
+  <p:clrMapOvr>
+    <a:masterClrMapping/>
+  </p:clrMapOvr>
+</p:sld>
+</file>
+
+<file path=ppt/slides/slide61.xml><?xml version="1.0" encoding="utf-8"?>
+<p:sld xmlns:a="http://schemas.openxmlformats.org/drawingml/2006/main" xmlns:r="http://schemas.openxmlformats.org/officeDocument/2006/relationships" xmlns:p="http://schemas.openxmlformats.org/presentationml/2006/main">
+  <p:cSld>
+    <p:spTree>
+      <p:nvGrpSpPr>
+        <p:cNvPr id="1" name="">
+          <a:extLst>
+            <a:ext uri="{FF2B5EF4-FFF2-40B4-BE49-F238E27FC236}">
+              <a16:creationId xmlns:a16="http://schemas.microsoft.com/office/drawing/2014/main" id="{A368606A-ED39-A3B9-78AF-3640E49F36C9}"/>
+            </a:ext>
+          </a:extLst>
+        </p:cNvPr>
+        <p:cNvGrpSpPr/>
+        <p:nvPr/>
+      </p:nvGrpSpPr>
+      <p:grpSpPr>
+        <a:xfrm>
+          <a:off x="0" y="0"/>
+          <a:ext cx="0" cy="0"/>
+          <a:chOff x="0" y="0"/>
+          <a:chExt cx="0" cy="0"/>
+        </a:xfrm>
+      </p:grpSpPr>
+      <p:sp>
+        <p:nvSpPr>
+          <p:cNvPr id="7" name="TextBox 6">
+            <a:extLst>
+              <a:ext uri="{FF2B5EF4-FFF2-40B4-BE49-F238E27FC236}">
+                <a16:creationId xmlns:a16="http://schemas.microsoft.com/office/drawing/2014/main" id="{F4E54EE6-BEA4-6AC3-DA6E-18697ECDC967}"/>
+              </a:ext>
+            </a:extLst>
+          </p:cNvPr>
+          <p:cNvSpPr txBox="1"/>
+          <p:nvPr/>
+        </p:nvSpPr>
+        <p:spPr>
+          <a:xfrm>
+            <a:off x="203200" y="244826"/>
+            <a:ext cx="11822545" cy="369332"/>
+          </a:xfrm>
+          <a:prstGeom prst="rect">
+            <a:avLst/>
+          </a:prstGeom>
+          <a:noFill/>
+        </p:spPr>
+        <p:txBody>
+          <a:bodyPr wrap="square">
+            <a:spAutoFit/>
+          </a:bodyPr>
+          <a:lstStyle/>
+          <a:p>
+            <a:r>
+              <a:rPr lang="en-US">
+                <a:latin typeface="-apple-system"/>
+              </a:rPr>
+              <a:t>.</a:t>
+            </a:r>
+            <a:endParaRPr lang="en-US"/>
+          </a:p>
+        </p:txBody>
+      </p:sp>
+    </p:spTree>
+    <p:extLst>
+      <p:ext uri="{BB962C8B-B14F-4D97-AF65-F5344CB8AC3E}">
+        <p14:creationId xmlns:p14="http://schemas.microsoft.com/office/powerpoint/2010/main" val="4137864166"/>
+      </p:ext>
+    </p:extLst>
+  </p:cSld>
+  <p:clrMapOvr>
+    <a:masterClrMapping/>
+  </p:clrMapOvr>
+</p:sld>
+</file>
+
+<file path=ppt/slides/slide62.xml><?xml version="1.0" encoding="utf-8"?>
+<p:sld xmlns:a="http://schemas.openxmlformats.org/drawingml/2006/main" xmlns:r="http://schemas.openxmlformats.org/officeDocument/2006/relationships" xmlns:p="http://schemas.openxmlformats.org/presentationml/2006/main">
+  <p:cSld>
+    <p:spTree>
+      <p:nvGrpSpPr>
+        <p:cNvPr id="1" name="">
+          <a:extLst>
+            <a:ext uri="{FF2B5EF4-FFF2-40B4-BE49-F238E27FC236}">
+              <a16:creationId xmlns:a16="http://schemas.microsoft.com/office/drawing/2014/main" id="{56D15A39-4235-9184-329A-065631643363}"/>
+            </a:ext>
+          </a:extLst>
+        </p:cNvPr>
+        <p:cNvGrpSpPr/>
+        <p:nvPr/>
+      </p:nvGrpSpPr>
+      <p:grpSpPr>
+        <a:xfrm>
+          <a:off x="0" y="0"/>
+          <a:ext cx="0" cy="0"/>
+          <a:chOff x="0" y="0"/>
+          <a:chExt cx="0" cy="0"/>
+        </a:xfrm>
+      </p:grpSpPr>
+      <p:sp>
+        <p:nvSpPr>
+          <p:cNvPr id="7" name="TextBox 6">
+            <a:extLst>
+              <a:ext uri="{FF2B5EF4-FFF2-40B4-BE49-F238E27FC236}">
+                <a16:creationId xmlns:a16="http://schemas.microsoft.com/office/drawing/2014/main" id="{26E0FA1B-1A8D-B9BE-7703-30AB491BE99F}"/>
+              </a:ext>
+            </a:extLst>
+          </p:cNvPr>
+          <p:cNvSpPr txBox="1"/>
+          <p:nvPr/>
+        </p:nvSpPr>
+        <p:spPr>
+          <a:xfrm>
+            <a:off x="203200" y="244826"/>
+            <a:ext cx="11822545" cy="369332"/>
+          </a:xfrm>
+          <a:prstGeom prst="rect">
+            <a:avLst/>
+          </a:prstGeom>
+          <a:noFill/>
+        </p:spPr>
+        <p:txBody>
+          <a:bodyPr wrap="square">
+            <a:spAutoFit/>
+          </a:bodyPr>
+          <a:lstStyle/>
+          <a:p>
+            <a:r>
+              <a:rPr lang="en-US">
+                <a:latin typeface="-apple-system"/>
+              </a:rPr>
+              <a:t>.</a:t>
+            </a:r>
+            <a:endParaRPr lang="en-US"/>
+          </a:p>
+        </p:txBody>
+      </p:sp>
+    </p:spTree>
+    <p:extLst>
+      <p:ext uri="{BB962C8B-B14F-4D97-AF65-F5344CB8AC3E}">
+        <p14:creationId xmlns:p14="http://schemas.microsoft.com/office/powerpoint/2010/main" val="2197169963"/>
+      </p:ext>
+    </p:extLst>
+  </p:cSld>
+  <p:clrMapOvr>
+    <a:masterClrMapping/>
+  </p:clrMapOvr>
+</p:sld>
+</file>
+
+<file path=ppt/slides/slide63.xml><?xml version="1.0" encoding="utf-8"?>
+<p:sld xmlns:a="http://schemas.openxmlformats.org/drawingml/2006/main" xmlns:r="http://schemas.openxmlformats.org/officeDocument/2006/relationships" xmlns:p="http://schemas.openxmlformats.org/presentationml/2006/main">
+  <p:cSld>
+    <p:spTree>
+      <p:nvGrpSpPr>
+        <p:cNvPr id="1" name="">
+          <a:extLst>
+            <a:ext uri="{FF2B5EF4-FFF2-40B4-BE49-F238E27FC236}">
+              <a16:creationId xmlns:a16="http://schemas.microsoft.com/office/drawing/2014/main" id="{51B019E5-CD3E-94E4-B461-D6E297DF188F}"/>
+            </a:ext>
+          </a:extLst>
+        </p:cNvPr>
+        <p:cNvGrpSpPr/>
+        <p:nvPr/>
+      </p:nvGrpSpPr>
+      <p:grpSpPr>
+        <a:xfrm>
+          <a:off x="0" y="0"/>
+          <a:ext cx="0" cy="0"/>
+          <a:chOff x="0" y="0"/>
+          <a:chExt cx="0" cy="0"/>
+        </a:xfrm>
+      </p:grpSpPr>
+      <p:sp>
+        <p:nvSpPr>
+          <p:cNvPr id="7" name="TextBox 6">
+            <a:extLst>
+              <a:ext uri="{FF2B5EF4-FFF2-40B4-BE49-F238E27FC236}">
+                <a16:creationId xmlns:a16="http://schemas.microsoft.com/office/drawing/2014/main" id="{96895172-48BC-714C-846F-576FE02CE9E8}"/>
+              </a:ext>
+            </a:extLst>
+          </p:cNvPr>
+          <p:cNvSpPr txBox="1"/>
+          <p:nvPr/>
+        </p:nvSpPr>
+        <p:spPr>
+          <a:xfrm>
+            <a:off x="203200" y="244826"/>
+            <a:ext cx="11822545" cy="369332"/>
+          </a:xfrm>
+          <a:prstGeom prst="rect">
+            <a:avLst/>
+          </a:prstGeom>
+          <a:noFill/>
+        </p:spPr>
+        <p:txBody>
+          <a:bodyPr wrap="square">
+            <a:spAutoFit/>
+          </a:bodyPr>
+          <a:lstStyle/>
+          <a:p>
+            <a:r>
+              <a:rPr lang="en-US">
+                <a:latin typeface="-apple-system"/>
+              </a:rPr>
+              <a:t>.</a:t>
+            </a:r>
+            <a:endParaRPr lang="en-US"/>
+          </a:p>
+        </p:txBody>
+      </p:sp>
+    </p:spTree>
+    <p:extLst>
+      <p:ext uri="{BB962C8B-B14F-4D97-AF65-F5344CB8AC3E}">
+        <p14:creationId xmlns:p14="http://schemas.microsoft.com/office/powerpoint/2010/main" val="2669735614"/>
+      </p:ext>
+    </p:extLst>
+  </p:cSld>
+  <p:clrMapOvr>
+    <a:masterClrMapping/>
+  </p:clrMapOvr>
+</p:sld>
+</file>
+
+<file path=ppt/slides/slide64.xml><?xml version="1.0" encoding="utf-8"?>
+<p:sld xmlns:a="http://schemas.openxmlformats.org/drawingml/2006/main" xmlns:r="http://schemas.openxmlformats.org/officeDocument/2006/relationships" xmlns:p="http://schemas.openxmlformats.org/presentationml/2006/main">
+  <p:cSld>
+    <p:spTree>
+      <p:nvGrpSpPr>
+        <p:cNvPr id="1" name="">
+          <a:extLst>
+            <a:ext uri="{FF2B5EF4-FFF2-40B4-BE49-F238E27FC236}">
+              <a16:creationId xmlns:a16="http://schemas.microsoft.com/office/drawing/2014/main" id="{411FAA02-3B09-CC90-05E8-03A4FB710579}"/>
+            </a:ext>
+          </a:extLst>
+        </p:cNvPr>
+        <p:cNvGrpSpPr/>
+        <p:nvPr/>
+      </p:nvGrpSpPr>
+      <p:grpSpPr>
+        <a:xfrm>
+          <a:off x="0" y="0"/>
+          <a:ext cx="0" cy="0"/>
+          <a:chOff x="0" y="0"/>
+          <a:chExt cx="0" cy="0"/>
+        </a:xfrm>
+      </p:grpSpPr>
+      <p:sp>
+        <p:nvSpPr>
+          <p:cNvPr id="7" name="TextBox 6">
+            <a:extLst>
+              <a:ext uri="{FF2B5EF4-FFF2-40B4-BE49-F238E27FC236}">
+                <a16:creationId xmlns:a16="http://schemas.microsoft.com/office/drawing/2014/main" id="{7B356D16-569D-15D9-9572-466C41C1E2CA}"/>
+              </a:ext>
+            </a:extLst>
+          </p:cNvPr>
+          <p:cNvSpPr txBox="1"/>
+          <p:nvPr/>
+        </p:nvSpPr>
+        <p:spPr>
+          <a:xfrm>
+            <a:off x="203200" y="244826"/>
+            <a:ext cx="11822545" cy="369332"/>
+          </a:xfrm>
+          <a:prstGeom prst="rect">
+            <a:avLst/>
+          </a:prstGeom>
+          <a:noFill/>
+        </p:spPr>
+        <p:txBody>
+          <a:bodyPr wrap="square">
+            <a:spAutoFit/>
+          </a:bodyPr>
+          <a:lstStyle/>
+          <a:p>
+            <a:r>
+              <a:rPr lang="en-US">
+                <a:latin typeface="-apple-system"/>
+              </a:rPr>
+              <a:t>.</a:t>
+            </a:r>
+            <a:endParaRPr lang="en-US"/>
+          </a:p>
+        </p:txBody>
+      </p:sp>
+    </p:spTree>
+    <p:extLst>
+      <p:ext uri="{BB962C8B-B14F-4D97-AF65-F5344CB8AC3E}">
+        <p14:creationId xmlns:p14="http://schemas.microsoft.com/office/powerpoint/2010/main" val="3592449092"/>
+      </p:ext>
+    </p:extLst>
+  </p:cSld>
+  <p:clrMapOvr>
+    <a:masterClrMapping/>
+  </p:clrMapOvr>
+</p:sld>
+</file>
+
+<file path=ppt/slides/slide65.xml><?xml version="1.0" encoding="utf-8"?>
+<p:sld xmlns:a="http://schemas.openxmlformats.org/drawingml/2006/main" xmlns:r="http://schemas.openxmlformats.org/officeDocument/2006/relationships" xmlns:p="http://schemas.openxmlformats.org/presentationml/2006/main">
+  <p:cSld>
+    <p:spTree>
+      <p:nvGrpSpPr>
+        <p:cNvPr id="1" name="">
+          <a:extLst>
+            <a:ext uri="{FF2B5EF4-FFF2-40B4-BE49-F238E27FC236}">
+              <a16:creationId xmlns:a16="http://schemas.microsoft.com/office/drawing/2014/main" id="{A6DCE6DE-2AC7-C299-1291-5B71EFBB6AEE}"/>
+            </a:ext>
+          </a:extLst>
+        </p:cNvPr>
+        <p:cNvGrpSpPr/>
+        <p:nvPr/>
+      </p:nvGrpSpPr>
+      <p:grpSpPr>
+        <a:xfrm>
+          <a:off x="0" y="0"/>
+          <a:ext cx="0" cy="0"/>
+          <a:chOff x="0" y="0"/>
+          <a:chExt cx="0" cy="0"/>
+        </a:xfrm>
+      </p:grpSpPr>
+      <p:sp>
+        <p:nvSpPr>
+          <p:cNvPr id="7" name="TextBox 6">
+            <a:extLst>
+              <a:ext uri="{FF2B5EF4-FFF2-40B4-BE49-F238E27FC236}">
+                <a16:creationId xmlns:a16="http://schemas.microsoft.com/office/drawing/2014/main" id="{C3A4A5F3-7AA0-C43B-7082-E3089586E8F3}"/>
+              </a:ext>
+            </a:extLst>
+          </p:cNvPr>
+          <p:cNvSpPr txBox="1"/>
+          <p:nvPr/>
+        </p:nvSpPr>
+        <p:spPr>
+          <a:xfrm>
+            <a:off x="203200" y="244826"/>
+            <a:ext cx="11822545" cy="369332"/>
+          </a:xfrm>
+          <a:prstGeom prst="rect">
+            <a:avLst/>
+          </a:prstGeom>
+          <a:noFill/>
+        </p:spPr>
+        <p:txBody>
+          <a:bodyPr wrap="square">
+            <a:spAutoFit/>
+          </a:bodyPr>
+          <a:lstStyle/>
+          <a:p>
+            <a:r>
+              <a:rPr lang="en-US">
+                <a:latin typeface="-apple-system"/>
+              </a:rPr>
+              <a:t>.</a:t>
+            </a:r>
+            <a:endParaRPr lang="en-US"/>
+          </a:p>
+        </p:txBody>
+      </p:sp>
+    </p:spTree>
+    <p:extLst>
+      <p:ext uri="{BB962C8B-B14F-4D97-AF65-F5344CB8AC3E}">
+        <p14:creationId xmlns:p14="http://schemas.microsoft.com/office/powerpoint/2010/main" val="2834110373"/>
+      </p:ext>
+    </p:extLst>
+  </p:cSld>
+  <p:clrMapOvr>
+    <a:masterClrMapping/>
+  </p:clrMapOvr>
+</p:sld>
+</file>
+
+<file path=ppt/slides/slide66.xml><?xml version="1.0" encoding="utf-8"?>
+<p:sld xmlns:a="http://schemas.openxmlformats.org/drawingml/2006/main" xmlns:r="http://schemas.openxmlformats.org/officeDocument/2006/relationships" xmlns:p="http://schemas.openxmlformats.org/presentationml/2006/main">
+  <p:cSld>
+    <p:spTree>
+      <p:nvGrpSpPr>
+        <p:cNvPr id="1" name="">
+          <a:extLst>
+            <a:ext uri="{FF2B5EF4-FFF2-40B4-BE49-F238E27FC236}">
+              <a16:creationId xmlns:a16="http://schemas.microsoft.com/office/drawing/2014/main" id="{428EFAAF-2521-B62A-B91B-6DF1984A5397}"/>
+            </a:ext>
+          </a:extLst>
+        </p:cNvPr>
+        <p:cNvGrpSpPr/>
+        <p:nvPr/>
+      </p:nvGrpSpPr>
+      <p:grpSpPr>
+        <a:xfrm>
+          <a:off x="0" y="0"/>
+          <a:ext cx="0" cy="0"/>
+          <a:chOff x="0" y="0"/>
+          <a:chExt cx="0" cy="0"/>
+        </a:xfrm>
+      </p:grpSpPr>
+      <p:sp>
+        <p:nvSpPr>
+          <p:cNvPr id="7" name="TextBox 6">
+            <a:extLst>
+              <a:ext uri="{FF2B5EF4-FFF2-40B4-BE49-F238E27FC236}">
+                <a16:creationId xmlns:a16="http://schemas.microsoft.com/office/drawing/2014/main" id="{42EF42FA-58C9-3B20-A7F1-632EBA50F9F8}"/>
+              </a:ext>
+            </a:extLst>
+          </p:cNvPr>
+          <p:cNvSpPr txBox="1"/>
+          <p:nvPr/>
+        </p:nvSpPr>
+        <p:spPr>
+          <a:xfrm>
+            <a:off x="203200" y="244826"/>
+            <a:ext cx="11822545" cy="369332"/>
+          </a:xfrm>
+          <a:prstGeom prst="rect">
+            <a:avLst/>
+          </a:prstGeom>
+          <a:noFill/>
+        </p:spPr>
+        <p:txBody>
+          <a:bodyPr wrap="square">
+            <a:spAutoFit/>
+          </a:bodyPr>
+          <a:lstStyle/>
+          <a:p>
+            <a:r>
+              <a:rPr lang="en-US">
+                <a:latin typeface="-apple-system"/>
+              </a:rPr>
+              <a:t>.</a:t>
+            </a:r>
+            <a:endParaRPr lang="en-US"/>
+          </a:p>
+        </p:txBody>
+      </p:sp>
+    </p:spTree>
+    <p:extLst>
+      <p:ext uri="{BB962C8B-B14F-4D97-AF65-F5344CB8AC3E}">
+        <p14:creationId xmlns:p14="http://schemas.microsoft.com/office/powerpoint/2010/main" val="4100184302"/>
+      </p:ext>
+    </p:extLst>
+  </p:cSld>
+  <p:clrMapOvr>
+    <a:masterClrMapping/>
+  </p:clrMapOvr>
+</p:sld>
+</file>
+
+<file path=ppt/slides/slide67.xml><?xml version="1.0" encoding="utf-8"?>
+<p:sld xmlns:a="http://schemas.openxmlformats.org/drawingml/2006/main" xmlns:r="http://schemas.openxmlformats.org/officeDocument/2006/relationships" xmlns:p="http://schemas.openxmlformats.org/presentationml/2006/main">
+  <p:cSld>
+    <p:spTree>
+      <p:nvGrpSpPr>
+        <p:cNvPr id="1" name="">
+          <a:extLst>
+            <a:ext uri="{FF2B5EF4-FFF2-40B4-BE49-F238E27FC236}">
+              <a16:creationId xmlns:a16="http://schemas.microsoft.com/office/drawing/2014/main" id="{339540BF-609E-AAA5-5266-E89B7896D93D}"/>
+            </a:ext>
+          </a:extLst>
+        </p:cNvPr>
+        <p:cNvGrpSpPr/>
+        <p:nvPr/>
+      </p:nvGrpSpPr>
+      <p:grpSpPr>
+        <a:xfrm>
+          <a:off x="0" y="0"/>
+          <a:ext cx="0" cy="0"/>
+          <a:chOff x="0" y="0"/>
+          <a:chExt cx="0" cy="0"/>
+        </a:xfrm>
+      </p:grpSpPr>
+      <p:sp>
+        <p:nvSpPr>
+          <p:cNvPr id="7" name="TextBox 6">
+            <a:extLst>
+              <a:ext uri="{FF2B5EF4-FFF2-40B4-BE49-F238E27FC236}">
+                <a16:creationId xmlns:a16="http://schemas.microsoft.com/office/drawing/2014/main" id="{D1F8412A-D6A8-041E-231F-2EF1C0ABD405}"/>
+              </a:ext>
+            </a:extLst>
+          </p:cNvPr>
+          <p:cNvSpPr txBox="1"/>
+          <p:nvPr/>
+        </p:nvSpPr>
+        <p:spPr>
+          <a:xfrm>
+            <a:off x="203200" y="244826"/>
+            <a:ext cx="11822545" cy="369332"/>
+          </a:xfrm>
+          <a:prstGeom prst="rect">
+            <a:avLst/>
+          </a:prstGeom>
+          <a:noFill/>
+        </p:spPr>
+        <p:txBody>
+          <a:bodyPr wrap="square">
+            <a:spAutoFit/>
+          </a:bodyPr>
+          <a:lstStyle/>
+          <a:p>
+            <a:r>
+              <a:rPr lang="en-US">
+                <a:latin typeface="-apple-system"/>
+              </a:rPr>
+              <a:t>.</a:t>
+            </a:r>
+            <a:endParaRPr lang="en-US"/>
+          </a:p>
+        </p:txBody>
+      </p:sp>
+    </p:spTree>
+    <p:extLst>
+      <p:ext uri="{BB962C8B-B14F-4D97-AF65-F5344CB8AC3E}">
+        <p14:creationId xmlns:p14="http://schemas.microsoft.com/office/powerpoint/2010/main" val="3911610450"/>
+      </p:ext>
+    </p:extLst>
+  </p:cSld>
+  <p:clrMapOvr>
+    <a:masterClrMapping/>
+  </p:clrMapOvr>
+</p:sld>
+</file>
+
+<file path=ppt/slides/slide68.xml><?xml version="1.0" encoding="utf-8"?>
+<p:sld xmlns:a="http://schemas.openxmlformats.org/drawingml/2006/main" xmlns:r="http://schemas.openxmlformats.org/officeDocument/2006/relationships" xmlns:p="http://schemas.openxmlformats.org/presentationml/2006/main">
+  <p:cSld>
+    <p:spTree>
+      <p:nvGrpSpPr>
+        <p:cNvPr id="1" name="">
+          <a:extLst>
+            <a:ext uri="{FF2B5EF4-FFF2-40B4-BE49-F238E27FC236}">
+              <a16:creationId xmlns:a16="http://schemas.microsoft.com/office/drawing/2014/main" id="{0B98BB03-EDD4-0579-9CEF-2B346457FB36}"/>
+            </a:ext>
+          </a:extLst>
+        </p:cNvPr>
+        <p:cNvGrpSpPr/>
+        <p:nvPr/>
+      </p:nvGrpSpPr>
+      <p:grpSpPr>
+        <a:xfrm>
+          <a:off x="0" y="0"/>
+          <a:ext cx="0" cy="0"/>
+          <a:chOff x="0" y="0"/>
+          <a:chExt cx="0" cy="0"/>
+        </a:xfrm>
+      </p:grpSpPr>
+      <p:sp>
+        <p:nvSpPr>
+          <p:cNvPr id="7" name="TextBox 6">
+            <a:extLst>
+              <a:ext uri="{FF2B5EF4-FFF2-40B4-BE49-F238E27FC236}">
+                <a16:creationId xmlns:a16="http://schemas.microsoft.com/office/drawing/2014/main" id="{563A198B-AADB-CF6B-0214-2ADAD7F3D56E}"/>
+              </a:ext>
+            </a:extLst>
+          </p:cNvPr>
+          <p:cNvSpPr txBox="1"/>
+          <p:nvPr/>
+        </p:nvSpPr>
+        <p:spPr>
+          <a:xfrm>
+            <a:off x="203200" y="244826"/>
+            <a:ext cx="11822545" cy="369332"/>
+          </a:xfrm>
+          <a:prstGeom prst="rect">
+            <a:avLst/>
+          </a:prstGeom>
+          <a:noFill/>
+        </p:spPr>
+        <p:txBody>
+          <a:bodyPr wrap="square">
+            <a:spAutoFit/>
+          </a:bodyPr>
+          <a:lstStyle/>
+          <a:p>
+            <a:r>
+              <a:rPr lang="en-US">
+                <a:latin typeface="-apple-system"/>
+              </a:rPr>
+              <a:t>.</a:t>
+            </a:r>
+            <a:endParaRPr lang="en-US"/>
+          </a:p>
+        </p:txBody>
+      </p:sp>
+    </p:spTree>
+    <p:extLst>
+      <p:ext uri="{BB962C8B-B14F-4D97-AF65-F5344CB8AC3E}">
+        <p14:creationId xmlns:p14="http://schemas.microsoft.com/office/powerpoint/2010/main" val="2301075619"/>
+      </p:ext>
+    </p:extLst>
+  </p:cSld>
+  <p:clrMapOvr>
+    <a:masterClrMapping/>
+  </p:clrMapOvr>
+</p:sld>
+</file>
+
+<file path=ppt/slides/slide69.xml><?xml version="1.0" encoding="utf-8"?>
+<p:sld xmlns:a="http://schemas.openxmlformats.org/drawingml/2006/main" xmlns:r="http://schemas.openxmlformats.org/officeDocument/2006/relationships" xmlns:p="http://schemas.openxmlformats.org/presentationml/2006/main">
+  <p:cSld>
+    <p:spTree>
+      <p:nvGrpSpPr>
+        <p:cNvPr id="1" name="">
+          <a:extLst>
+            <a:ext uri="{FF2B5EF4-FFF2-40B4-BE49-F238E27FC236}">
+              <a16:creationId xmlns:a16="http://schemas.microsoft.com/office/drawing/2014/main" id="{4E218982-6DEC-852E-B5B8-4547E1ECB373}"/>
+            </a:ext>
+          </a:extLst>
+        </p:cNvPr>
+        <p:cNvGrpSpPr/>
+        <p:nvPr/>
+      </p:nvGrpSpPr>
+      <p:grpSpPr>
+        <a:xfrm>
+          <a:off x="0" y="0"/>
+          <a:ext cx="0" cy="0"/>
+          <a:chOff x="0" y="0"/>
+          <a:chExt cx="0" cy="0"/>
+        </a:xfrm>
+      </p:grpSpPr>
+      <p:sp>
+        <p:nvSpPr>
+          <p:cNvPr id="7" name="TextBox 6">
+            <a:extLst>
+              <a:ext uri="{FF2B5EF4-FFF2-40B4-BE49-F238E27FC236}">
+                <a16:creationId xmlns:a16="http://schemas.microsoft.com/office/drawing/2014/main" id="{3BF1926F-FC68-5CA4-24E1-82DBE8ECE4A2}"/>
+              </a:ext>
+            </a:extLst>
+          </p:cNvPr>
+          <p:cNvSpPr txBox="1"/>
+          <p:nvPr/>
+        </p:nvSpPr>
+        <p:spPr>
+          <a:xfrm>
+            <a:off x="203200" y="244826"/>
+            <a:ext cx="11822545" cy="369332"/>
+          </a:xfrm>
+          <a:prstGeom prst="rect">
+            <a:avLst/>
+          </a:prstGeom>
+          <a:noFill/>
+        </p:spPr>
+        <p:txBody>
+          <a:bodyPr wrap="square">
+            <a:spAutoFit/>
+          </a:bodyPr>
+          <a:lstStyle/>
+          <a:p>
+            <a:r>
+              <a:rPr lang="en-US">
+                <a:latin typeface="-apple-system"/>
+              </a:rPr>
+              <a:t>.</a:t>
+            </a:r>
+            <a:endParaRPr lang="en-US"/>
+          </a:p>
+        </p:txBody>
+      </p:sp>
+    </p:spTree>
+    <p:extLst>
+      <p:ext uri="{BB962C8B-B14F-4D97-AF65-F5344CB8AC3E}">
+        <p14:creationId xmlns:p14="http://schemas.microsoft.com/office/powerpoint/2010/main" val="1462682254"/>
+      </p:ext>
+    </p:extLst>
+  </p:cSld>
+  <p:clrMapOvr>
+    <a:masterClrMapping/>
+  </p:clrMapOvr>
+</p:sld>
+</file>
+
 <file path=ppt/slides/slide7.xml><?xml version="1.0" encoding="utf-8"?>
 <p:sld xmlns:a="http://schemas.openxmlformats.org/drawingml/2006/main" xmlns:r="http://schemas.openxmlformats.org/officeDocument/2006/relationships" xmlns:p="http://schemas.openxmlformats.org/presentationml/2006/main">
   <p:cSld>
@@ -15401,6 +19750,302 @@
     <p:extLst>
       <p:ext uri="{BB962C8B-B14F-4D97-AF65-F5344CB8AC3E}">
         <p14:creationId xmlns:p14="http://schemas.microsoft.com/office/powerpoint/2010/main" val="312600157"/>
+      </p:ext>
+    </p:extLst>
+  </p:cSld>
+  <p:clrMapOvr>
+    <a:masterClrMapping/>
+  </p:clrMapOvr>
+</p:sld>
+</file>
+
+<file path=ppt/slides/slide70.xml><?xml version="1.0" encoding="utf-8"?>
+<p:sld xmlns:a="http://schemas.openxmlformats.org/drawingml/2006/main" xmlns:r="http://schemas.openxmlformats.org/officeDocument/2006/relationships" xmlns:p="http://schemas.openxmlformats.org/presentationml/2006/main">
+  <p:cSld>
+    <p:spTree>
+      <p:nvGrpSpPr>
+        <p:cNvPr id="1" name="">
+          <a:extLst>
+            <a:ext uri="{FF2B5EF4-FFF2-40B4-BE49-F238E27FC236}">
+              <a16:creationId xmlns:a16="http://schemas.microsoft.com/office/drawing/2014/main" id="{DF1834BC-DB75-1FBC-7EDF-7D4FACEE3C1C}"/>
+            </a:ext>
+          </a:extLst>
+        </p:cNvPr>
+        <p:cNvGrpSpPr/>
+        <p:nvPr/>
+      </p:nvGrpSpPr>
+      <p:grpSpPr>
+        <a:xfrm>
+          <a:off x="0" y="0"/>
+          <a:ext cx="0" cy="0"/>
+          <a:chOff x="0" y="0"/>
+          <a:chExt cx="0" cy="0"/>
+        </a:xfrm>
+      </p:grpSpPr>
+      <p:sp>
+        <p:nvSpPr>
+          <p:cNvPr id="7" name="TextBox 6">
+            <a:extLst>
+              <a:ext uri="{FF2B5EF4-FFF2-40B4-BE49-F238E27FC236}">
+                <a16:creationId xmlns:a16="http://schemas.microsoft.com/office/drawing/2014/main" id="{E3D6877A-9572-2931-8978-76FD76516DDC}"/>
+              </a:ext>
+            </a:extLst>
+          </p:cNvPr>
+          <p:cNvSpPr txBox="1"/>
+          <p:nvPr/>
+        </p:nvSpPr>
+        <p:spPr>
+          <a:xfrm>
+            <a:off x="203200" y="244826"/>
+            <a:ext cx="11822545" cy="369332"/>
+          </a:xfrm>
+          <a:prstGeom prst="rect">
+            <a:avLst/>
+          </a:prstGeom>
+          <a:noFill/>
+        </p:spPr>
+        <p:txBody>
+          <a:bodyPr wrap="square">
+            <a:spAutoFit/>
+          </a:bodyPr>
+          <a:lstStyle/>
+          <a:p>
+            <a:r>
+              <a:rPr lang="en-US">
+                <a:latin typeface="-apple-system"/>
+              </a:rPr>
+              <a:t>.</a:t>
+            </a:r>
+            <a:endParaRPr lang="en-US"/>
+          </a:p>
+        </p:txBody>
+      </p:sp>
+    </p:spTree>
+    <p:extLst>
+      <p:ext uri="{BB962C8B-B14F-4D97-AF65-F5344CB8AC3E}">
+        <p14:creationId xmlns:p14="http://schemas.microsoft.com/office/powerpoint/2010/main" val="2538651893"/>
+      </p:ext>
+    </p:extLst>
+  </p:cSld>
+  <p:clrMapOvr>
+    <a:masterClrMapping/>
+  </p:clrMapOvr>
+</p:sld>
+</file>
+
+<file path=ppt/slides/slide71.xml><?xml version="1.0" encoding="utf-8"?>
+<p:sld xmlns:a="http://schemas.openxmlformats.org/drawingml/2006/main" xmlns:r="http://schemas.openxmlformats.org/officeDocument/2006/relationships" xmlns:p="http://schemas.openxmlformats.org/presentationml/2006/main">
+  <p:cSld>
+    <p:spTree>
+      <p:nvGrpSpPr>
+        <p:cNvPr id="1" name="">
+          <a:extLst>
+            <a:ext uri="{FF2B5EF4-FFF2-40B4-BE49-F238E27FC236}">
+              <a16:creationId xmlns:a16="http://schemas.microsoft.com/office/drawing/2014/main" id="{8BB1B866-CB47-A3D2-7FC0-F326E57F9351}"/>
+            </a:ext>
+          </a:extLst>
+        </p:cNvPr>
+        <p:cNvGrpSpPr/>
+        <p:nvPr/>
+      </p:nvGrpSpPr>
+      <p:grpSpPr>
+        <a:xfrm>
+          <a:off x="0" y="0"/>
+          <a:ext cx="0" cy="0"/>
+          <a:chOff x="0" y="0"/>
+          <a:chExt cx="0" cy="0"/>
+        </a:xfrm>
+      </p:grpSpPr>
+      <p:sp>
+        <p:nvSpPr>
+          <p:cNvPr id="7" name="TextBox 6">
+            <a:extLst>
+              <a:ext uri="{FF2B5EF4-FFF2-40B4-BE49-F238E27FC236}">
+                <a16:creationId xmlns:a16="http://schemas.microsoft.com/office/drawing/2014/main" id="{F5A91F88-EFC7-9575-1011-3A01F8E4743E}"/>
+              </a:ext>
+            </a:extLst>
+          </p:cNvPr>
+          <p:cNvSpPr txBox="1"/>
+          <p:nvPr/>
+        </p:nvSpPr>
+        <p:spPr>
+          <a:xfrm>
+            <a:off x="203200" y="244826"/>
+            <a:ext cx="11822545" cy="369332"/>
+          </a:xfrm>
+          <a:prstGeom prst="rect">
+            <a:avLst/>
+          </a:prstGeom>
+          <a:noFill/>
+        </p:spPr>
+        <p:txBody>
+          <a:bodyPr wrap="square">
+            <a:spAutoFit/>
+          </a:bodyPr>
+          <a:lstStyle/>
+          <a:p>
+            <a:r>
+              <a:rPr lang="en-US">
+                <a:latin typeface="-apple-system"/>
+              </a:rPr>
+              <a:t>.</a:t>
+            </a:r>
+            <a:endParaRPr lang="en-US"/>
+          </a:p>
+        </p:txBody>
+      </p:sp>
+    </p:spTree>
+    <p:extLst>
+      <p:ext uri="{BB962C8B-B14F-4D97-AF65-F5344CB8AC3E}">
+        <p14:creationId xmlns:p14="http://schemas.microsoft.com/office/powerpoint/2010/main" val="2067443183"/>
+      </p:ext>
+    </p:extLst>
+  </p:cSld>
+  <p:clrMapOvr>
+    <a:masterClrMapping/>
+  </p:clrMapOvr>
+</p:sld>
+</file>
+
+<file path=ppt/slides/slide72.xml><?xml version="1.0" encoding="utf-8"?>
+<p:sld xmlns:a="http://schemas.openxmlformats.org/drawingml/2006/main" xmlns:r="http://schemas.openxmlformats.org/officeDocument/2006/relationships" xmlns:p="http://schemas.openxmlformats.org/presentationml/2006/main">
+  <p:cSld>
+    <p:spTree>
+      <p:nvGrpSpPr>
+        <p:cNvPr id="1" name="">
+          <a:extLst>
+            <a:ext uri="{FF2B5EF4-FFF2-40B4-BE49-F238E27FC236}">
+              <a16:creationId xmlns:a16="http://schemas.microsoft.com/office/drawing/2014/main" id="{DB5E0A76-F990-583B-6C0C-5B5B487F045B}"/>
+            </a:ext>
+          </a:extLst>
+        </p:cNvPr>
+        <p:cNvGrpSpPr/>
+        <p:nvPr/>
+      </p:nvGrpSpPr>
+      <p:grpSpPr>
+        <a:xfrm>
+          <a:off x="0" y="0"/>
+          <a:ext cx="0" cy="0"/>
+          <a:chOff x="0" y="0"/>
+          <a:chExt cx="0" cy="0"/>
+        </a:xfrm>
+      </p:grpSpPr>
+      <p:sp>
+        <p:nvSpPr>
+          <p:cNvPr id="7" name="TextBox 6">
+            <a:extLst>
+              <a:ext uri="{FF2B5EF4-FFF2-40B4-BE49-F238E27FC236}">
+                <a16:creationId xmlns:a16="http://schemas.microsoft.com/office/drawing/2014/main" id="{01603ED3-7FA6-7B0D-9DAE-145D2D56BCB8}"/>
+              </a:ext>
+            </a:extLst>
+          </p:cNvPr>
+          <p:cNvSpPr txBox="1"/>
+          <p:nvPr/>
+        </p:nvSpPr>
+        <p:spPr>
+          <a:xfrm>
+            <a:off x="203200" y="244826"/>
+            <a:ext cx="11822545" cy="369332"/>
+          </a:xfrm>
+          <a:prstGeom prst="rect">
+            <a:avLst/>
+          </a:prstGeom>
+          <a:noFill/>
+        </p:spPr>
+        <p:txBody>
+          <a:bodyPr wrap="square">
+            <a:spAutoFit/>
+          </a:bodyPr>
+          <a:lstStyle/>
+          <a:p>
+            <a:r>
+              <a:rPr lang="en-US">
+                <a:latin typeface="-apple-system"/>
+              </a:rPr>
+              <a:t>.</a:t>
+            </a:r>
+            <a:endParaRPr lang="en-US"/>
+          </a:p>
+        </p:txBody>
+      </p:sp>
+    </p:spTree>
+    <p:extLst>
+      <p:ext uri="{BB962C8B-B14F-4D97-AF65-F5344CB8AC3E}">
+        <p14:creationId xmlns:p14="http://schemas.microsoft.com/office/powerpoint/2010/main" val="571673239"/>
+      </p:ext>
+    </p:extLst>
+  </p:cSld>
+  <p:clrMapOvr>
+    <a:masterClrMapping/>
+  </p:clrMapOvr>
+</p:sld>
+</file>
+
+<file path=ppt/slides/slide73.xml><?xml version="1.0" encoding="utf-8"?>
+<p:sld xmlns:a="http://schemas.openxmlformats.org/drawingml/2006/main" xmlns:r="http://schemas.openxmlformats.org/officeDocument/2006/relationships" xmlns:p="http://schemas.openxmlformats.org/presentationml/2006/main">
+  <p:cSld>
+    <p:spTree>
+      <p:nvGrpSpPr>
+        <p:cNvPr id="1" name="">
+          <a:extLst>
+            <a:ext uri="{FF2B5EF4-FFF2-40B4-BE49-F238E27FC236}">
+              <a16:creationId xmlns:a16="http://schemas.microsoft.com/office/drawing/2014/main" id="{D1F05FAD-154F-7394-1819-F09B8141466E}"/>
+            </a:ext>
+          </a:extLst>
+        </p:cNvPr>
+        <p:cNvGrpSpPr/>
+        <p:nvPr/>
+      </p:nvGrpSpPr>
+      <p:grpSpPr>
+        <a:xfrm>
+          <a:off x="0" y="0"/>
+          <a:ext cx="0" cy="0"/>
+          <a:chOff x="0" y="0"/>
+          <a:chExt cx="0" cy="0"/>
+        </a:xfrm>
+      </p:grpSpPr>
+      <p:sp>
+        <p:nvSpPr>
+          <p:cNvPr id="7" name="TextBox 6">
+            <a:extLst>
+              <a:ext uri="{FF2B5EF4-FFF2-40B4-BE49-F238E27FC236}">
+                <a16:creationId xmlns:a16="http://schemas.microsoft.com/office/drawing/2014/main" id="{A431E858-D76B-AD72-9AD4-E9890C9FA522}"/>
+              </a:ext>
+            </a:extLst>
+          </p:cNvPr>
+          <p:cNvSpPr txBox="1"/>
+          <p:nvPr/>
+        </p:nvSpPr>
+        <p:spPr>
+          <a:xfrm>
+            <a:off x="203200" y="244826"/>
+            <a:ext cx="11822545" cy="369332"/>
+          </a:xfrm>
+          <a:prstGeom prst="rect">
+            <a:avLst/>
+          </a:prstGeom>
+          <a:noFill/>
+        </p:spPr>
+        <p:txBody>
+          <a:bodyPr wrap="square">
+            <a:spAutoFit/>
+          </a:bodyPr>
+          <a:lstStyle/>
+          <a:p>
+            <a:r>
+              <a:rPr lang="en-US">
+                <a:latin typeface="-apple-system"/>
+              </a:rPr>
+              <a:t>.</a:t>
+            </a:r>
+            <a:endParaRPr lang="en-US"/>
+          </a:p>
+        </p:txBody>
+      </p:sp>
+    </p:spTree>
+    <p:extLst>
+      <p:ext uri="{BB962C8B-B14F-4D97-AF65-F5344CB8AC3E}">
+        <p14:creationId xmlns:p14="http://schemas.microsoft.com/office/powerpoint/2010/main" val="656003231"/>
       </p:ext>
     </p:extLst>
   </p:cSld>

--- a/.lessons/7 GraphQL/1.pptx
+++ b/.lessons/7 GraphQL/1.pptx
@@ -60,24 +60,38 @@
     <p:sldId id="312" r:id="rId54"/>
     <p:sldId id="313" r:id="rId55"/>
     <p:sldId id="314" r:id="rId56"/>
-    <p:sldId id="287" r:id="rId57"/>
-    <p:sldId id="316" r:id="rId58"/>
-    <p:sldId id="317" r:id="rId59"/>
-    <p:sldId id="318" r:id="rId60"/>
-    <p:sldId id="319" r:id="rId61"/>
-    <p:sldId id="320" r:id="rId62"/>
-    <p:sldId id="321" r:id="rId63"/>
-    <p:sldId id="322" r:id="rId64"/>
-    <p:sldId id="323" r:id="rId65"/>
-    <p:sldId id="324" r:id="rId66"/>
-    <p:sldId id="325" r:id="rId67"/>
-    <p:sldId id="326" r:id="rId68"/>
-    <p:sldId id="327" r:id="rId69"/>
-    <p:sldId id="328" r:id="rId70"/>
-    <p:sldId id="329" r:id="rId71"/>
-    <p:sldId id="330" r:id="rId72"/>
-    <p:sldId id="288" r:id="rId73"/>
-    <p:sldId id="289" r:id="rId74"/>
+    <p:sldId id="331" r:id="rId57"/>
+    <p:sldId id="287" r:id="rId58"/>
+    <p:sldId id="316" r:id="rId59"/>
+    <p:sldId id="317" r:id="rId60"/>
+    <p:sldId id="318" r:id="rId61"/>
+    <p:sldId id="319" r:id="rId62"/>
+    <p:sldId id="320" r:id="rId63"/>
+    <p:sldId id="321" r:id="rId64"/>
+    <p:sldId id="322" r:id="rId65"/>
+    <p:sldId id="323" r:id="rId66"/>
+    <p:sldId id="324" r:id="rId67"/>
+    <p:sldId id="344" r:id="rId68"/>
+    <p:sldId id="325" r:id="rId69"/>
+    <p:sldId id="332" r:id="rId70"/>
+    <p:sldId id="333" r:id="rId71"/>
+    <p:sldId id="334" r:id="rId72"/>
+    <p:sldId id="335" r:id="rId73"/>
+    <p:sldId id="336" r:id="rId74"/>
+    <p:sldId id="337" r:id="rId75"/>
+    <p:sldId id="338" r:id="rId76"/>
+    <p:sldId id="339" r:id="rId77"/>
+    <p:sldId id="340" r:id="rId78"/>
+    <p:sldId id="341" r:id="rId79"/>
+    <p:sldId id="342" r:id="rId80"/>
+    <p:sldId id="343" r:id="rId81"/>
+    <p:sldId id="326" r:id="rId82"/>
+    <p:sldId id="327" r:id="rId83"/>
+    <p:sldId id="328" r:id="rId84"/>
+    <p:sldId id="329" r:id="rId85"/>
+    <p:sldId id="330" r:id="rId86"/>
+    <p:sldId id="288" r:id="rId87"/>
+    <p:sldId id="289" r:id="rId88"/>
   </p:sldIdLst>
   <p:sldSz cx="12192000" cy="6858000"/>
   <p:notesSz cx="6858000" cy="9144000"/>
@@ -331,7 +345,7 @@
           <a:p>
             <a:fld id="{AD6CDC28-10E2-4CDE-A5FF-6E49B37A1343}" type="datetimeFigureOut">
               <a:rPr lang="en-US" smtClean="0"/>
-              <a:t>9/30/2025</a:t>
+              <a:t>10/1/2025</a:t>
             </a:fld>
             <a:endParaRPr lang="en-US"/>
           </a:p>
@@ -529,7 +543,7 @@
           <a:p>
             <a:fld id="{AD6CDC28-10E2-4CDE-A5FF-6E49B37A1343}" type="datetimeFigureOut">
               <a:rPr lang="en-US" smtClean="0"/>
-              <a:t>9/30/2025</a:t>
+              <a:t>10/1/2025</a:t>
             </a:fld>
             <a:endParaRPr lang="en-US"/>
           </a:p>
@@ -737,7 +751,7 @@
           <a:p>
             <a:fld id="{AD6CDC28-10E2-4CDE-A5FF-6E49B37A1343}" type="datetimeFigureOut">
               <a:rPr lang="en-US" smtClean="0"/>
-              <a:t>9/30/2025</a:t>
+              <a:t>10/1/2025</a:t>
             </a:fld>
             <a:endParaRPr lang="en-US"/>
           </a:p>
@@ -935,7 +949,7 @@
           <a:p>
             <a:fld id="{AD6CDC28-10E2-4CDE-A5FF-6E49B37A1343}" type="datetimeFigureOut">
               <a:rPr lang="en-US" smtClean="0"/>
-              <a:t>9/30/2025</a:t>
+              <a:t>10/1/2025</a:t>
             </a:fld>
             <a:endParaRPr lang="en-US"/>
           </a:p>
@@ -1210,7 +1224,7 @@
           <a:p>
             <a:fld id="{AD6CDC28-10E2-4CDE-A5FF-6E49B37A1343}" type="datetimeFigureOut">
               <a:rPr lang="en-US" smtClean="0"/>
-              <a:t>9/30/2025</a:t>
+              <a:t>10/1/2025</a:t>
             </a:fld>
             <a:endParaRPr lang="en-US"/>
           </a:p>
@@ -1475,7 +1489,7 @@
           <a:p>
             <a:fld id="{AD6CDC28-10E2-4CDE-A5FF-6E49B37A1343}" type="datetimeFigureOut">
               <a:rPr lang="en-US" smtClean="0"/>
-              <a:t>9/30/2025</a:t>
+              <a:t>10/1/2025</a:t>
             </a:fld>
             <a:endParaRPr lang="en-US"/>
           </a:p>
@@ -1887,7 +1901,7 @@
           <a:p>
             <a:fld id="{AD6CDC28-10E2-4CDE-A5FF-6E49B37A1343}" type="datetimeFigureOut">
               <a:rPr lang="en-US" smtClean="0"/>
-              <a:t>9/30/2025</a:t>
+              <a:t>10/1/2025</a:t>
             </a:fld>
             <a:endParaRPr lang="en-US"/>
           </a:p>
@@ -2028,7 +2042,7 @@
           <a:p>
             <a:fld id="{AD6CDC28-10E2-4CDE-A5FF-6E49B37A1343}" type="datetimeFigureOut">
               <a:rPr lang="en-US" smtClean="0"/>
-              <a:t>9/30/2025</a:t>
+              <a:t>10/1/2025</a:t>
             </a:fld>
             <a:endParaRPr lang="en-US"/>
           </a:p>
@@ -2141,7 +2155,7 @@
           <a:p>
             <a:fld id="{AD6CDC28-10E2-4CDE-A5FF-6E49B37A1343}" type="datetimeFigureOut">
               <a:rPr lang="en-US" smtClean="0"/>
-              <a:t>9/30/2025</a:t>
+              <a:t>10/1/2025</a:t>
             </a:fld>
             <a:endParaRPr lang="en-US"/>
           </a:p>
@@ -2452,7 +2466,7 @@
           <a:p>
             <a:fld id="{AD6CDC28-10E2-4CDE-A5FF-6E49B37A1343}" type="datetimeFigureOut">
               <a:rPr lang="en-US" smtClean="0"/>
-              <a:t>9/30/2025</a:t>
+              <a:t>10/1/2025</a:t>
             </a:fld>
             <a:endParaRPr lang="en-US"/>
           </a:p>
@@ -2740,7 +2754,7 @@
           <a:p>
             <a:fld id="{AD6CDC28-10E2-4CDE-A5FF-6E49B37A1343}" type="datetimeFigureOut">
               <a:rPr lang="en-US" smtClean="0"/>
-              <a:t>9/30/2025</a:t>
+              <a:t>10/1/2025</a:t>
             </a:fld>
             <a:endParaRPr lang="en-US"/>
           </a:p>
@@ -2981,7 +2995,7 @@
           <a:p>
             <a:fld id="{AD6CDC28-10E2-4CDE-A5FF-6E49B37A1343}" type="datetimeFigureOut">
               <a:rPr lang="en-US" smtClean="0"/>
-              <a:t>9/30/2025</a:t>
+              <a:t>10/1/2025</a:t>
             </a:fld>
             <a:endParaRPr lang="en-US"/>
           </a:p>
@@ -17114,6 +17128,80 @@
         <p:cNvPr id="1" name="">
           <a:extLst>
             <a:ext uri="{FF2B5EF4-FFF2-40B4-BE49-F238E27FC236}">
+              <a16:creationId xmlns:a16="http://schemas.microsoft.com/office/drawing/2014/main" id="{28B03D1D-011E-4F52-0E97-18F98BAC70C9}"/>
+            </a:ext>
+          </a:extLst>
+        </p:cNvPr>
+        <p:cNvGrpSpPr/>
+        <p:nvPr/>
+      </p:nvGrpSpPr>
+      <p:grpSpPr>
+        <a:xfrm>
+          <a:off x="0" y="0"/>
+          <a:ext cx="0" cy="0"/>
+          <a:chOff x="0" y="0"/>
+          <a:chExt cx="0" cy="0"/>
+        </a:xfrm>
+      </p:grpSpPr>
+      <p:sp>
+        <p:nvSpPr>
+          <p:cNvPr id="7" name="TextBox 6">
+            <a:extLst>
+              <a:ext uri="{FF2B5EF4-FFF2-40B4-BE49-F238E27FC236}">
+                <a16:creationId xmlns:a16="http://schemas.microsoft.com/office/drawing/2014/main" id="{4D978FD7-C78F-82A5-F308-1D98B34C1D02}"/>
+              </a:ext>
+            </a:extLst>
+          </p:cNvPr>
+          <p:cNvSpPr txBox="1"/>
+          <p:nvPr/>
+        </p:nvSpPr>
+        <p:spPr>
+          <a:xfrm>
+            <a:off x="203200" y="244826"/>
+            <a:ext cx="11822545" cy="369332"/>
+          </a:xfrm>
+          <a:prstGeom prst="rect">
+            <a:avLst/>
+          </a:prstGeom>
+          <a:noFill/>
+        </p:spPr>
+        <p:txBody>
+          <a:bodyPr wrap="square">
+            <a:spAutoFit/>
+          </a:bodyPr>
+          <a:lstStyle/>
+          <a:p>
+            <a:r>
+              <a:rPr lang="en-US">
+                <a:latin typeface="-apple-system"/>
+              </a:rPr>
+              <a:t>.</a:t>
+            </a:r>
+            <a:endParaRPr lang="en-US"/>
+          </a:p>
+        </p:txBody>
+      </p:sp>
+    </p:spTree>
+    <p:extLst>
+      <p:ext uri="{BB962C8B-B14F-4D97-AF65-F5344CB8AC3E}">
+        <p14:creationId xmlns:p14="http://schemas.microsoft.com/office/powerpoint/2010/main" val="1098756412"/>
+      </p:ext>
+    </p:extLst>
+  </p:cSld>
+  <p:clrMapOvr>
+    <a:masterClrMapping/>
+  </p:clrMapOvr>
+</p:sld>
+</file>
+
+<file path=ppt/slides/slide57.xml><?xml version="1.0" encoding="utf-8"?>
+<p:sld xmlns:a="http://schemas.openxmlformats.org/drawingml/2006/main" xmlns:r="http://schemas.openxmlformats.org/officeDocument/2006/relationships" xmlns:p="http://schemas.openxmlformats.org/presentationml/2006/main">
+  <p:cSld>
+    <p:spTree>
+      <p:nvGrpSpPr>
+        <p:cNvPr id="1" name="">
+          <a:extLst>
+            <a:ext uri="{FF2B5EF4-FFF2-40B4-BE49-F238E27FC236}">
               <a16:creationId xmlns:a16="http://schemas.microsoft.com/office/drawing/2014/main" id="{A60984CA-B6DB-CEC2-8919-295542B87476}"/>
             </a:ext>
           </a:extLst>
@@ -17335,7 +17423,15 @@
             </a:r>
             <a:r>
               <a:rPr lang="en-US"/>
-              <a:t>bu restoranı idarə etmək üçün alətlər verir.</a:t>
+              <a:t>bu restoranı idarə etmək üçün alətlər verir. </a:t>
+            </a:r>
+            <a:r>
+              <a:rPr lang="en-US" b="1">
+                <a:solidFill>
+                  <a:srgbClr val="FF0000"/>
+                </a:solidFill>
+              </a:rPr>
+              <a:t>CODE1</a:t>
             </a:r>
           </a:p>
         </p:txBody>
@@ -17413,7 +17509,7 @@
 </p:sld>
 </file>
 
-<file path=ppt/slides/slide57.xml><?xml version="1.0" encoding="utf-8"?>
+<file path=ppt/slides/slide58.xml><?xml version="1.0" encoding="utf-8"?>
 <p:sld xmlns:a="http://schemas.openxmlformats.org/drawingml/2006/main" xmlns:r="http://schemas.openxmlformats.org/officeDocument/2006/relationships" xmlns:p="http://schemas.openxmlformats.org/presentationml/2006/main">
   <p:cSld>
     <p:spTree>
@@ -17732,7 +17828,7 @@
 </p:sld>
 </file>
 
-<file path=ppt/slides/slide58.xml><?xml version="1.0" encoding="utf-8"?>
+<file path=ppt/slides/slide59.xml><?xml version="1.0" encoding="utf-8"?>
 <p:sld xmlns:a="http://schemas.openxmlformats.org/drawingml/2006/main" xmlns:r="http://schemas.openxmlformats.org/officeDocument/2006/relationships" xmlns:p="http://schemas.openxmlformats.org/presentationml/2006/main">
   <p:cSld>
     <p:spTree>
@@ -17905,589 +18001,6 @@
     <p:extLst>
       <p:ext uri="{BB962C8B-B14F-4D97-AF65-F5344CB8AC3E}">
         <p14:creationId xmlns:p14="http://schemas.microsoft.com/office/powerpoint/2010/main" val="2015016873"/>
-      </p:ext>
-    </p:extLst>
-  </p:cSld>
-  <p:clrMapOvr>
-    <a:masterClrMapping/>
-  </p:clrMapOvr>
-</p:sld>
-</file>
-
-<file path=ppt/slides/slide59.xml><?xml version="1.0" encoding="utf-8"?>
-<p:sld xmlns:a="http://schemas.openxmlformats.org/drawingml/2006/main" xmlns:r="http://schemas.openxmlformats.org/officeDocument/2006/relationships" xmlns:p="http://schemas.openxmlformats.org/presentationml/2006/main">
-  <p:cSld>
-    <p:spTree>
-      <p:nvGrpSpPr>
-        <p:cNvPr id="1" name="">
-          <a:extLst>
-            <a:ext uri="{FF2B5EF4-FFF2-40B4-BE49-F238E27FC236}">
-              <a16:creationId xmlns:a16="http://schemas.microsoft.com/office/drawing/2014/main" id="{DF787E78-349A-AC20-BB73-541A95B753E6}"/>
-            </a:ext>
-          </a:extLst>
-        </p:cNvPr>
-        <p:cNvGrpSpPr/>
-        <p:nvPr/>
-      </p:nvGrpSpPr>
-      <p:grpSpPr>
-        <a:xfrm>
-          <a:off x="0" y="0"/>
-          <a:ext cx="0" cy="0"/>
-          <a:chOff x="0" y="0"/>
-          <a:chExt cx="0" cy="0"/>
-        </a:xfrm>
-      </p:grpSpPr>
-      <p:sp>
-        <p:nvSpPr>
-          <p:cNvPr id="7" name="TextBox 6">
-            <a:extLst>
-              <a:ext uri="{FF2B5EF4-FFF2-40B4-BE49-F238E27FC236}">
-                <a16:creationId xmlns:a16="http://schemas.microsoft.com/office/drawing/2014/main" id="{AF590AE1-5242-5CD5-9F34-0A8BFA37F6AC}"/>
-              </a:ext>
-            </a:extLst>
-          </p:cNvPr>
-          <p:cNvSpPr txBox="1"/>
-          <p:nvPr/>
-        </p:nvSpPr>
-        <p:spPr>
-          <a:xfrm>
-            <a:off x="203200" y="244826"/>
-            <a:ext cx="11822545" cy="6157711"/>
-          </a:xfrm>
-          <a:prstGeom prst="rect">
-            <a:avLst/>
-          </a:prstGeom>
-          <a:noFill/>
-        </p:spPr>
-        <p:txBody>
-          <a:bodyPr wrap="square">
-            <a:spAutoFit/>
-          </a:bodyPr>
-          <a:lstStyle/>
-          <a:p>
-            <a:r>
-              <a:rPr lang="en-US" sz="1200" b="1"/>
-              <a:t>Server Kodunu Yazmaq</a:t>
-            </a:r>
-            <a:endParaRPr lang="az-Latn-AZ" sz="1200" b="1"/>
-          </a:p>
-          <a:p>
-            <a:endParaRPr lang="en-US" sz="1200" b="1"/>
-          </a:p>
-          <a:p>
-            <a:r>
-              <a:rPr lang="en-US" sz="1200" b="1"/>
-              <a:t>notesapp/server/src/index.php </a:t>
-            </a:r>
-            <a:r>
-              <a:rPr lang="en-US" sz="1200"/>
-              <a:t>faylında serveri quracağıq. Bu fayl </a:t>
-            </a:r>
-            <a:r>
-              <a:rPr lang="en-US" sz="1200" b="1" i="1"/>
-              <a:t>schema</a:t>
-            </a:r>
-            <a:r>
-              <a:rPr lang="az-Latn-AZ" sz="1200"/>
-              <a:t> </a:t>
-            </a:r>
-            <a:r>
-              <a:rPr lang="en-US" sz="1200"/>
-              <a:t>-nı oxuyacaq, resolver </a:t>
-            </a:r>
-            <a:endParaRPr lang="az-Latn-AZ" sz="1200"/>
-          </a:p>
-          <a:p>
-            <a:r>
-              <a:rPr lang="en-US" sz="1200"/>
-              <a:t>funksiyaları təyin edəcək və sorğuları icra edəcək.</a:t>
-            </a:r>
-            <a:r>
-              <a:rPr lang="az-Latn-AZ" sz="1200"/>
-              <a:t> Kodumuz biraz uzun olduğu üçün onu hissə-hissə yerləşdirəcəm.</a:t>
-            </a:r>
-          </a:p>
-          <a:p>
-            <a:endParaRPr lang="az-Latn-AZ" sz="1200">
-              <a:effectLst/>
-            </a:endParaRPr>
-          </a:p>
-          <a:p>
-            <a:endParaRPr lang="az-Latn-AZ" sz="1200"/>
-          </a:p>
-          <a:p>
-            <a:endParaRPr lang="az-Latn-AZ" sz="1200">
-              <a:effectLst/>
-            </a:endParaRPr>
-          </a:p>
-          <a:p>
-            <a:pPr marL="285750" indent="-285750">
-              <a:lnSpc>
-                <a:spcPct val="150000"/>
-              </a:lnSpc>
-              <a:buFont typeface="Arial" panose="020B0604020202020204" pitchFamily="34" charset="0"/>
-              <a:buChar char="•"/>
-            </a:pPr>
-            <a:r>
-              <a:rPr lang="en-US" sz="1200" b="1"/>
-              <a:t>GraphQL\GraphQL </a:t>
-            </a:r>
-            <a:r>
-              <a:rPr lang="az-Latn-AZ" sz="1200" b="1"/>
-              <a:t>                  </a:t>
-            </a:r>
-            <a:r>
-              <a:rPr lang="en-US" sz="1200"/>
-              <a:t>→ əsas </a:t>
-            </a:r>
-            <a:r>
-              <a:rPr lang="en-US" sz="1200" b="1"/>
-              <a:t>GraphQL</a:t>
-            </a:r>
-            <a:r>
-              <a:rPr lang="en-US" sz="1200"/>
-              <a:t> əməliyyatlarını (executeQuery) icra etmək üçün </a:t>
-            </a:r>
-            <a:r>
-              <a:rPr lang="az-Latn-AZ" sz="1200"/>
-              <a:t>use (istifadə) etdiyimiz class -dır</a:t>
-            </a:r>
-            <a:r>
-              <a:rPr lang="en-US" sz="1200"/>
-              <a:t>.</a:t>
-            </a:r>
-          </a:p>
-          <a:p>
-            <a:pPr marL="285750" indent="-285750">
-              <a:lnSpc>
-                <a:spcPct val="150000"/>
-              </a:lnSpc>
-              <a:buFont typeface="Arial" panose="020B0604020202020204" pitchFamily="34" charset="0"/>
-              <a:buChar char="•"/>
-            </a:pPr>
-            <a:r>
-              <a:rPr lang="en-US" sz="1200" b="1"/>
-              <a:t>GraphQL\Utils\BuildSchema </a:t>
-            </a:r>
-            <a:r>
-              <a:rPr lang="en-US" sz="1200"/>
-              <a:t>→ </a:t>
-            </a:r>
-            <a:r>
-              <a:rPr lang="en-US" sz="1200" b="1" i="1"/>
-              <a:t>.graphql </a:t>
-            </a:r>
-            <a:r>
-              <a:rPr lang="en-US" sz="1200"/>
-              <a:t>faylında yazdığı</a:t>
-            </a:r>
-            <a:r>
-              <a:rPr lang="az-Latn-AZ" sz="1200"/>
-              <a:t>mız</a:t>
-            </a:r>
-            <a:r>
-              <a:rPr lang="en-US" sz="1200"/>
-              <a:t> </a:t>
-            </a:r>
-            <a:r>
-              <a:rPr lang="en-US" sz="1200" b="1" i="1"/>
-              <a:t>schema</a:t>
-            </a:r>
-            <a:r>
-              <a:rPr lang="az-Latn-AZ" sz="1200"/>
-              <a:t> </a:t>
-            </a:r>
-            <a:r>
-              <a:rPr lang="en-US" sz="1200"/>
-              <a:t>-nı PHP kodunda işlədilə bilən hala gətir</a:t>
-            </a:r>
-            <a:r>
-              <a:rPr lang="az-Latn-AZ" sz="1200"/>
-              <a:t>ən class -ımızdır</a:t>
-            </a:r>
-            <a:r>
-              <a:rPr lang="en-US" sz="1200"/>
-              <a:t>.</a:t>
-            </a:r>
-            <a:endParaRPr lang="az-Latn-AZ" sz="1200"/>
-          </a:p>
-          <a:p>
-            <a:endParaRPr lang="az-Latn-AZ" sz="1200">
-              <a:effectLst/>
-            </a:endParaRPr>
-          </a:p>
-          <a:p>
-            <a:endParaRPr lang="az-Latn-AZ" sz="1200">
-              <a:effectLst/>
-            </a:endParaRPr>
-          </a:p>
-          <a:p>
-            <a:endParaRPr lang="az-Latn-AZ" sz="1200"/>
-          </a:p>
-          <a:p>
-            <a:endParaRPr lang="az-Latn-AZ" sz="1200">
-              <a:effectLst/>
-            </a:endParaRPr>
-          </a:p>
-          <a:p>
-            <a:endParaRPr lang="az-Latn-AZ" sz="1200"/>
-          </a:p>
-          <a:p>
-            <a:pPr marL="171450" indent="-171450">
-              <a:lnSpc>
-                <a:spcPct val="150000"/>
-              </a:lnSpc>
-              <a:buFont typeface="Arial" panose="020B0604020202020204" pitchFamily="34" charset="0"/>
-              <a:buChar char="•"/>
-            </a:pPr>
-            <a:r>
-              <a:rPr lang="en-US" sz="1200"/>
-              <a:t>Bu sətir </a:t>
-            </a:r>
-            <a:r>
-              <a:rPr lang="en-US" sz="1200" b="1"/>
-              <a:t>composer install </a:t>
-            </a:r>
-            <a:r>
-              <a:rPr lang="en-US" sz="1200"/>
-              <a:t>ilə gələn bütün kitabxanaları (</a:t>
-            </a:r>
-            <a:r>
-              <a:rPr lang="en-US" sz="1200" b="1"/>
-              <a:t>autoload</a:t>
-            </a:r>
-            <a:r>
-              <a:rPr lang="en-US" sz="1200"/>
-              <a:t> mexanizmi) yükləyir.</a:t>
-            </a:r>
-          </a:p>
-          <a:p>
-            <a:pPr marL="171450" indent="-171450">
-              <a:lnSpc>
-                <a:spcPct val="150000"/>
-              </a:lnSpc>
-              <a:buFont typeface="Arial" panose="020B0604020202020204" pitchFamily="34" charset="0"/>
-              <a:buChar char="•"/>
-            </a:pPr>
-            <a:r>
-              <a:rPr lang="en-US" sz="1200"/>
-              <a:t>Yəni </a:t>
-            </a:r>
-            <a:r>
-              <a:rPr lang="en-US" sz="1200" b="1"/>
-              <a:t>webonyx/graphql-php </a:t>
-            </a:r>
-            <a:r>
-              <a:rPr lang="en-US" sz="1200"/>
-              <a:t>paketini və digər </a:t>
-            </a:r>
-            <a:r>
-              <a:rPr lang="en-US" sz="1200" b="1"/>
-              <a:t>dependency</a:t>
-            </a:r>
-            <a:r>
-              <a:rPr lang="en-US" sz="1200"/>
-              <a:t>-ləri </a:t>
-            </a:r>
-            <a:r>
-              <a:rPr lang="en-US" sz="1200" i="1"/>
-              <a:t>avtomatik</a:t>
-            </a:r>
-            <a:r>
-              <a:rPr lang="en-US" sz="1200"/>
-              <a:t> çağırır.</a:t>
-            </a:r>
-          </a:p>
-          <a:p>
-            <a:pPr marL="171450" indent="-171450">
-              <a:lnSpc>
-                <a:spcPct val="150000"/>
-              </a:lnSpc>
-              <a:buFont typeface="Arial" panose="020B0604020202020204" pitchFamily="34" charset="0"/>
-              <a:buChar char="•"/>
-            </a:pPr>
-            <a:r>
-              <a:rPr lang="en-US" sz="1200" b="1"/>
-              <a:t>__DIR__ </a:t>
-            </a:r>
-            <a:r>
-              <a:rPr lang="az-Latn-AZ" sz="1200" b="1"/>
-              <a:t>	                       </a:t>
-            </a:r>
-            <a:r>
-              <a:rPr lang="en-US" sz="1200"/>
-              <a:t>→ PHP-də hazır dəyişəndir, cari faylın qovluğunu göstərir.</a:t>
-            </a:r>
-          </a:p>
-          <a:p>
-            <a:pPr marL="171450" indent="-171450">
-              <a:lnSpc>
-                <a:spcPct val="150000"/>
-              </a:lnSpc>
-              <a:buFont typeface="Arial" panose="020B0604020202020204" pitchFamily="34" charset="0"/>
-              <a:buChar char="•"/>
-            </a:pPr>
-            <a:r>
-              <a:rPr lang="en-US" sz="1200" b="1"/>
-              <a:t>../vendor/autoload.php </a:t>
-            </a:r>
-            <a:r>
-              <a:rPr lang="en-US" sz="1200"/>
-              <a:t>→ vendor qovluğunda yerləşən </a:t>
-            </a:r>
-            <a:r>
-              <a:rPr lang="en-US" sz="1200" i="1"/>
-              <a:t>Composer</a:t>
-            </a:r>
-            <a:r>
-              <a:rPr lang="az-Latn-AZ" sz="1200"/>
-              <a:t> </a:t>
-            </a:r>
-            <a:r>
-              <a:rPr lang="en-US" sz="1200"/>
-              <a:t>-in əsas autoload faylıd</a:t>
-            </a:r>
-            <a:r>
-              <a:rPr lang="az-Latn-AZ" sz="1200"/>
-              <a:t>ır.</a:t>
-            </a:r>
-          </a:p>
-          <a:p>
-            <a:endParaRPr lang="az-Latn-AZ" sz="1200">
-              <a:effectLst/>
-            </a:endParaRPr>
-          </a:p>
-          <a:p>
-            <a:endParaRPr lang="az-Latn-AZ" sz="1200"/>
-          </a:p>
-          <a:p>
-            <a:endParaRPr lang="az-Latn-AZ" sz="1200"/>
-          </a:p>
-          <a:p>
-            <a:endParaRPr lang="az-Latn-AZ" sz="1200"/>
-          </a:p>
-          <a:p>
-            <a:endParaRPr lang="az-Latn-AZ" sz="1200"/>
-          </a:p>
-          <a:p>
-            <a:r>
-              <a:rPr lang="az-Latn-AZ" sz="1200" b="1">
-                <a:effectLst/>
-              </a:rPr>
-              <a:t>Son olaraq isə</a:t>
-            </a:r>
-            <a:r>
-              <a:rPr lang="az-Latn-AZ" sz="1200">
-                <a:effectLst/>
-              </a:rPr>
-              <a:t>: </a:t>
-            </a:r>
-          </a:p>
-          <a:p>
-            <a:pPr marL="171450" indent="-171450">
-              <a:lnSpc>
-                <a:spcPct val="150000"/>
-              </a:lnSpc>
-              <a:buFont typeface="Arial" panose="020B0604020202020204" pitchFamily="34" charset="0"/>
-              <a:buChar char="•"/>
-            </a:pPr>
-            <a:r>
-              <a:rPr lang="az-Latn-AZ" sz="1200"/>
-              <a:t>S</a:t>
-            </a:r>
-            <a:r>
-              <a:rPr lang="en-US" sz="1200"/>
-              <a:t>axta (</a:t>
-            </a:r>
-            <a:r>
-              <a:rPr lang="en-US" sz="1200" b="1"/>
-              <a:t>fake</a:t>
-            </a:r>
-            <a:r>
-              <a:rPr lang="en-US" sz="1200"/>
-              <a:t>) verilənlər bazası </a:t>
-            </a:r>
-            <a:r>
-              <a:rPr lang="az-Latn-AZ" sz="1200"/>
-              <a:t>yaratmışıq</a:t>
-            </a:r>
-            <a:r>
-              <a:rPr lang="en-US" sz="1200"/>
-              <a:t>. Əslində </a:t>
-            </a:r>
-            <a:r>
-              <a:rPr lang="en-US" sz="1200" b="1"/>
-              <a:t>MySQL/PostgreSQL </a:t>
-            </a:r>
-            <a:r>
-              <a:rPr lang="en-US" sz="1200"/>
-              <a:t>ola bilərdi, amma sadəlik üçün massiv (array) istifadə edilib:</a:t>
-            </a:r>
-          </a:p>
-          <a:p>
-            <a:pPr marL="171450" indent="-171450">
-              <a:lnSpc>
-                <a:spcPct val="150000"/>
-              </a:lnSpc>
-              <a:buFont typeface="Arial" panose="020B0604020202020204" pitchFamily="34" charset="0"/>
-              <a:buChar char="•"/>
-            </a:pPr>
-            <a:r>
-              <a:rPr lang="en-US" sz="1200" b="1"/>
-              <a:t>notes</a:t>
-            </a:r>
-            <a:r>
-              <a:rPr lang="az-Latn-AZ" sz="1200" b="1"/>
-              <a:t>    </a:t>
-            </a:r>
-            <a:r>
-              <a:rPr lang="en-US" sz="1200"/>
-              <a:t> → qeydlər siyahısı.</a:t>
-            </a:r>
-          </a:p>
-          <a:p>
-            <a:pPr marL="171450" indent="-171450">
-              <a:lnSpc>
-                <a:spcPct val="150000"/>
-              </a:lnSpc>
-              <a:buFont typeface="Arial" panose="020B0604020202020204" pitchFamily="34" charset="0"/>
-              <a:buChar char="•"/>
-            </a:pPr>
-            <a:r>
-              <a:rPr lang="en-US" sz="1200" b="1"/>
-              <a:t>authors</a:t>
-            </a:r>
-            <a:r>
-              <a:rPr lang="en-US" sz="1200"/>
-              <a:t> → müəlliflər siyahısı.</a:t>
-            </a:r>
-          </a:p>
-          <a:p>
-            <a:pPr marL="171450" indent="-171450">
-              <a:lnSpc>
-                <a:spcPct val="150000"/>
-              </a:lnSpc>
-              <a:buFont typeface="Arial" panose="020B0604020202020204" pitchFamily="34" charset="0"/>
-              <a:buChar char="•"/>
-            </a:pPr>
-            <a:r>
-              <a:rPr lang="en-US" sz="1200"/>
-              <a:t>note obyektində </a:t>
-            </a:r>
-            <a:r>
-              <a:rPr lang="en-US" sz="1200" b="1"/>
-              <a:t>authorId</a:t>
-            </a:r>
-            <a:r>
-              <a:rPr lang="en-US" sz="1200"/>
-              <a:t> saxlanılır ki, həmin id ilə </a:t>
-            </a:r>
-            <a:r>
-              <a:rPr lang="en-US" sz="1200" b="1" i="1"/>
-              <a:t>müəllif</a:t>
-            </a:r>
-            <a:r>
-              <a:rPr lang="en-US" sz="1200"/>
-              <a:t> tapılsın.</a:t>
-            </a:r>
-            <a:endParaRPr lang="az-Latn-AZ" sz="1200"/>
-          </a:p>
-        </p:txBody>
-      </p:sp>
-      <p:pic>
-        <p:nvPicPr>
-          <p:cNvPr id="3" name="Picture 2">
-            <a:extLst>
-              <a:ext uri="{FF2B5EF4-FFF2-40B4-BE49-F238E27FC236}">
-                <a16:creationId xmlns:a16="http://schemas.microsoft.com/office/drawing/2014/main" id="{8B202005-FC29-1046-06C9-F32C38894AC4}"/>
-              </a:ext>
-            </a:extLst>
-          </p:cNvPr>
-          <p:cNvPicPr>
-            <a:picLocks noChangeAspect="1"/>
-          </p:cNvPicPr>
-          <p:nvPr/>
-        </p:nvPicPr>
-        <p:blipFill>
-          <a:blip r:embed="rId2"/>
-          <a:stretch>
-            <a:fillRect/>
-          </a:stretch>
-        </p:blipFill>
-        <p:spPr>
-          <a:xfrm>
-            <a:off x="7740072" y="0"/>
-            <a:ext cx="4451927" cy="1515889"/>
-          </a:xfrm>
-          <a:prstGeom prst="rect">
-            <a:avLst/>
-          </a:prstGeom>
-        </p:spPr>
-      </p:pic>
-      <p:pic>
-        <p:nvPicPr>
-          <p:cNvPr id="6" name="Picture 5">
-            <a:extLst>
-              <a:ext uri="{FF2B5EF4-FFF2-40B4-BE49-F238E27FC236}">
-                <a16:creationId xmlns:a16="http://schemas.microsoft.com/office/drawing/2014/main" id="{A26626B0-2DBB-B5D5-C53A-6ED505FA122A}"/>
-              </a:ext>
-            </a:extLst>
-          </p:cNvPr>
-          <p:cNvPicPr>
-            <a:picLocks noChangeAspect="1"/>
-          </p:cNvPicPr>
-          <p:nvPr/>
-        </p:nvPicPr>
-        <p:blipFill>
-          <a:blip r:embed="rId3"/>
-          <a:stretch>
-            <a:fillRect/>
-          </a:stretch>
-        </p:blipFill>
-        <p:spPr>
-          <a:xfrm>
-            <a:off x="0" y="2502120"/>
-            <a:ext cx="3829584" cy="409632"/>
-          </a:xfrm>
-          <a:prstGeom prst="rect">
-            <a:avLst/>
-          </a:prstGeom>
-        </p:spPr>
-      </p:pic>
-      <p:pic>
-        <p:nvPicPr>
-          <p:cNvPr id="9" name="Picture 8">
-            <a:extLst>
-              <a:ext uri="{FF2B5EF4-FFF2-40B4-BE49-F238E27FC236}">
-                <a16:creationId xmlns:a16="http://schemas.microsoft.com/office/drawing/2014/main" id="{A3EB0FA9-FC20-24DA-DCAB-FB7B73C3641E}"/>
-              </a:ext>
-            </a:extLst>
-          </p:cNvPr>
-          <p:cNvPicPr>
-            <a:picLocks noChangeAspect="1"/>
-          </p:cNvPicPr>
-          <p:nvPr/>
-        </p:nvPicPr>
-        <p:blipFill>
-          <a:blip r:embed="rId4"/>
-          <a:stretch>
-            <a:fillRect/>
-          </a:stretch>
-        </p:blipFill>
-        <p:spPr>
-          <a:xfrm>
-            <a:off x="0" y="1186261"/>
-            <a:ext cx="1828919" cy="374424"/>
-          </a:xfrm>
-          <a:prstGeom prst="rect">
-            <a:avLst/>
-          </a:prstGeom>
-        </p:spPr>
-      </p:pic>
-    </p:spTree>
-    <p:extLst>
-      <p:ext uri="{BB962C8B-B14F-4D97-AF65-F5344CB8AC3E}">
-        <p14:creationId xmlns:p14="http://schemas.microsoft.com/office/powerpoint/2010/main" val="2779668322"/>
       </p:ext>
     </p:extLst>
   </p:cSld>
@@ -18825,6 +18338,589 @@
         <p:cNvPr id="1" name="">
           <a:extLst>
             <a:ext uri="{FF2B5EF4-FFF2-40B4-BE49-F238E27FC236}">
+              <a16:creationId xmlns:a16="http://schemas.microsoft.com/office/drawing/2014/main" id="{DF787E78-349A-AC20-BB73-541A95B753E6}"/>
+            </a:ext>
+          </a:extLst>
+        </p:cNvPr>
+        <p:cNvGrpSpPr/>
+        <p:nvPr/>
+      </p:nvGrpSpPr>
+      <p:grpSpPr>
+        <a:xfrm>
+          <a:off x="0" y="0"/>
+          <a:ext cx="0" cy="0"/>
+          <a:chOff x="0" y="0"/>
+          <a:chExt cx="0" cy="0"/>
+        </a:xfrm>
+      </p:grpSpPr>
+      <p:sp>
+        <p:nvSpPr>
+          <p:cNvPr id="7" name="TextBox 6">
+            <a:extLst>
+              <a:ext uri="{FF2B5EF4-FFF2-40B4-BE49-F238E27FC236}">
+                <a16:creationId xmlns:a16="http://schemas.microsoft.com/office/drawing/2014/main" id="{AF590AE1-5242-5CD5-9F34-0A8BFA37F6AC}"/>
+              </a:ext>
+            </a:extLst>
+          </p:cNvPr>
+          <p:cNvSpPr txBox="1"/>
+          <p:nvPr/>
+        </p:nvSpPr>
+        <p:spPr>
+          <a:xfrm>
+            <a:off x="203200" y="244826"/>
+            <a:ext cx="11822545" cy="6157711"/>
+          </a:xfrm>
+          <a:prstGeom prst="rect">
+            <a:avLst/>
+          </a:prstGeom>
+          <a:noFill/>
+        </p:spPr>
+        <p:txBody>
+          <a:bodyPr wrap="square">
+            <a:spAutoFit/>
+          </a:bodyPr>
+          <a:lstStyle/>
+          <a:p>
+            <a:r>
+              <a:rPr lang="en-US" sz="1200" b="1"/>
+              <a:t>Server Kodunu Yazmaq</a:t>
+            </a:r>
+            <a:endParaRPr lang="az-Latn-AZ" sz="1200" b="1"/>
+          </a:p>
+          <a:p>
+            <a:endParaRPr lang="en-US" sz="1200" b="1"/>
+          </a:p>
+          <a:p>
+            <a:r>
+              <a:rPr lang="en-US" sz="1200" b="1"/>
+              <a:t>notesapp/server/src/index.php </a:t>
+            </a:r>
+            <a:r>
+              <a:rPr lang="en-US" sz="1200"/>
+              <a:t>faylında serveri quracağıq. Bu fayl </a:t>
+            </a:r>
+            <a:r>
+              <a:rPr lang="en-US" sz="1200" b="1" i="1"/>
+              <a:t>schema</a:t>
+            </a:r>
+            <a:r>
+              <a:rPr lang="az-Latn-AZ" sz="1200"/>
+              <a:t> </a:t>
+            </a:r>
+            <a:r>
+              <a:rPr lang="en-US" sz="1200"/>
+              <a:t>-nı oxuyacaq, resolver </a:t>
+            </a:r>
+            <a:endParaRPr lang="az-Latn-AZ" sz="1200"/>
+          </a:p>
+          <a:p>
+            <a:r>
+              <a:rPr lang="en-US" sz="1200"/>
+              <a:t>funksiyaları təyin edəcək və sorğuları icra edəcək.</a:t>
+            </a:r>
+            <a:r>
+              <a:rPr lang="az-Latn-AZ" sz="1200"/>
+              <a:t> Kodumuz biraz uzun olduğu üçün onu hissə-hissə yerləşdirəcəm.</a:t>
+            </a:r>
+          </a:p>
+          <a:p>
+            <a:endParaRPr lang="az-Latn-AZ" sz="1200">
+              <a:effectLst/>
+            </a:endParaRPr>
+          </a:p>
+          <a:p>
+            <a:endParaRPr lang="az-Latn-AZ" sz="1200"/>
+          </a:p>
+          <a:p>
+            <a:endParaRPr lang="az-Latn-AZ" sz="1200">
+              <a:effectLst/>
+            </a:endParaRPr>
+          </a:p>
+          <a:p>
+            <a:pPr marL="285750" indent="-285750">
+              <a:lnSpc>
+                <a:spcPct val="150000"/>
+              </a:lnSpc>
+              <a:buFont typeface="Arial" panose="020B0604020202020204" pitchFamily="34" charset="0"/>
+              <a:buChar char="•"/>
+            </a:pPr>
+            <a:r>
+              <a:rPr lang="en-US" sz="1200" b="1"/>
+              <a:t>GraphQL\GraphQL </a:t>
+            </a:r>
+            <a:r>
+              <a:rPr lang="az-Latn-AZ" sz="1200" b="1"/>
+              <a:t>                  </a:t>
+            </a:r>
+            <a:r>
+              <a:rPr lang="en-US" sz="1200"/>
+              <a:t>→ əsas </a:t>
+            </a:r>
+            <a:r>
+              <a:rPr lang="en-US" sz="1200" b="1"/>
+              <a:t>GraphQL</a:t>
+            </a:r>
+            <a:r>
+              <a:rPr lang="en-US" sz="1200"/>
+              <a:t> əməliyyatlarını (executeQuery) icra etmək üçün </a:t>
+            </a:r>
+            <a:r>
+              <a:rPr lang="az-Latn-AZ" sz="1200"/>
+              <a:t>use (istifadə) etdiyimiz class -dır</a:t>
+            </a:r>
+            <a:r>
+              <a:rPr lang="en-US" sz="1200"/>
+              <a:t>.</a:t>
+            </a:r>
+          </a:p>
+          <a:p>
+            <a:pPr marL="285750" indent="-285750">
+              <a:lnSpc>
+                <a:spcPct val="150000"/>
+              </a:lnSpc>
+              <a:buFont typeface="Arial" panose="020B0604020202020204" pitchFamily="34" charset="0"/>
+              <a:buChar char="•"/>
+            </a:pPr>
+            <a:r>
+              <a:rPr lang="en-US" sz="1200" b="1"/>
+              <a:t>GraphQL\Utils\BuildSchema </a:t>
+            </a:r>
+            <a:r>
+              <a:rPr lang="en-US" sz="1200"/>
+              <a:t>→ </a:t>
+            </a:r>
+            <a:r>
+              <a:rPr lang="en-US" sz="1200" b="1" i="1"/>
+              <a:t>.graphql </a:t>
+            </a:r>
+            <a:r>
+              <a:rPr lang="en-US" sz="1200"/>
+              <a:t>faylında yazdığı</a:t>
+            </a:r>
+            <a:r>
+              <a:rPr lang="az-Latn-AZ" sz="1200"/>
+              <a:t>mız</a:t>
+            </a:r>
+            <a:r>
+              <a:rPr lang="en-US" sz="1200"/>
+              <a:t> </a:t>
+            </a:r>
+            <a:r>
+              <a:rPr lang="en-US" sz="1200" b="1" i="1"/>
+              <a:t>schema</a:t>
+            </a:r>
+            <a:r>
+              <a:rPr lang="az-Latn-AZ" sz="1200"/>
+              <a:t> </a:t>
+            </a:r>
+            <a:r>
+              <a:rPr lang="en-US" sz="1200"/>
+              <a:t>-nı PHP kodunda işlədilə bilən hala gətir</a:t>
+            </a:r>
+            <a:r>
+              <a:rPr lang="az-Latn-AZ" sz="1200"/>
+              <a:t>ən class -ımızdır</a:t>
+            </a:r>
+            <a:r>
+              <a:rPr lang="en-US" sz="1200"/>
+              <a:t>.</a:t>
+            </a:r>
+            <a:endParaRPr lang="az-Latn-AZ" sz="1200"/>
+          </a:p>
+          <a:p>
+            <a:endParaRPr lang="az-Latn-AZ" sz="1200">
+              <a:effectLst/>
+            </a:endParaRPr>
+          </a:p>
+          <a:p>
+            <a:endParaRPr lang="az-Latn-AZ" sz="1200">
+              <a:effectLst/>
+            </a:endParaRPr>
+          </a:p>
+          <a:p>
+            <a:endParaRPr lang="az-Latn-AZ" sz="1200"/>
+          </a:p>
+          <a:p>
+            <a:endParaRPr lang="az-Latn-AZ" sz="1200">
+              <a:effectLst/>
+            </a:endParaRPr>
+          </a:p>
+          <a:p>
+            <a:endParaRPr lang="az-Latn-AZ" sz="1200"/>
+          </a:p>
+          <a:p>
+            <a:pPr marL="171450" indent="-171450">
+              <a:lnSpc>
+                <a:spcPct val="150000"/>
+              </a:lnSpc>
+              <a:buFont typeface="Arial" panose="020B0604020202020204" pitchFamily="34" charset="0"/>
+              <a:buChar char="•"/>
+            </a:pPr>
+            <a:r>
+              <a:rPr lang="en-US" sz="1200"/>
+              <a:t>Bu sətir </a:t>
+            </a:r>
+            <a:r>
+              <a:rPr lang="en-US" sz="1200" b="1"/>
+              <a:t>composer install </a:t>
+            </a:r>
+            <a:r>
+              <a:rPr lang="en-US" sz="1200"/>
+              <a:t>ilə gələn bütün kitabxanaları (</a:t>
+            </a:r>
+            <a:r>
+              <a:rPr lang="en-US" sz="1200" b="1"/>
+              <a:t>autoload</a:t>
+            </a:r>
+            <a:r>
+              <a:rPr lang="en-US" sz="1200"/>
+              <a:t> mexanizmi) yükləyir.</a:t>
+            </a:r>
+          </a:p>
+          <a:p>
+            <a:pPr marL="171450" indent="-171450">
+              <a:lnSpc>
+                <a:spcPct val="150000"/>
+              </a:lnSpc>
+              <a:buFont typeface="Arial" panose="020B0604020202020204" pitchFamily="34" charset="0"/>
+              <a:buChar char="•"/>
+            </a:pPr>
+            <a:r>
+              <a:rPr lang="en-US" sz="1200"/>
+              <a:t>Yəni </a:t>
+            </a:r>
+            <a:r>
+              <a:rPr lang="en-US" sz="1200" b="1"/>
+              <a:t>webonyx/graphql-php </a:t>
+            </a:r>
+            <a:r>
+              <a:rPr lang="en-US" sz="1200"/>
+              <a:t>paketini və digər </a:t>
+            </a:r>
+            <a:r>
+              <a:rPr lang="en-US" sz="1200" b="1"/>
+              <a:t>dependency</a:t>
+            </a:r>
+            <a:r>
+              <a:rPr lang="en-US" sz="1200"/>
+              <a:t>-ləri </a:t>
+            </a:r>
+            <a:r>
+              <a:rPr lang="en-US" sz="1200" i="1"/>
+              <a:t>avtomatik</a:t>
+            </a:r>
+            <a:r>
+              <a:rPr lang="en-US" sz="1200"/>
+              <a:t> çağırır.</a:t>
+            </a:r>
+          </a:p>
+          <a:p>
+            <a:pPr marL="171450" indent="-171450">
+              <a:lnSpc>
+                <a:spcPct val="150000"/>
+              </a:lnSpc>
+              <a:buFont typeface="Arial" panose="020B0604020202020204" pitchFamily="34" charset="0"/>
+              <a:buChar char="•"/>
+            </a:pPr>
+            <a:r>
+              <a:rPr lang="en-US" sz="1200" b="1"/>
+              <a:t>__DIR__ </a:t>
+            </a:r>
+            <a:r>
+              <a:rPr lang="az-Latn-AZ" sz="1200" b="1"/>
+              <a:t>	                       </a:t>
+            </a:r>
+            <a:r>
+              <a:rPr lang="en-US" sz="1200"/>
+              <a:t>→ PHP-də hazır dəyişəndir, cari faylın qovluğunu göstərir.</a:t>
+            </a:r>
+          </a:p>
+          <a:p>
+            <a:pPr marL="171450" indent="-171450">
+              <a:lnSpc>
+                <a:spcPct val="150000"/>
+              </a:lnSpc>
+              <a:buFont typeface="Arial" panose="020B0604020202020204" pitchFamily="34" charset="0"/>
+              <a:buChar char="•"/>
+            </a:pPr>
+            <a:r>
+              <a:rPr lang="en-US" sz="1200" b="1"/>
+              <a:t>../vendor/autoload.php </a:t>
+            </a:r>
+            <a:r>
+              <a:rPr lang="en-US" sz="1200"/>
+              <a:t>→ vendor qovluğunda yerləşən </a:t>
+            </a:r>
+            <a:r>
+              <a:rPr lang="en-US" sz="1200" i="1"/>
+              <a:t>Composer</a:t>
+            </a:r>
+            <a:r>
+              <a:rPr lang="az-Latn-AZ" sz="1200"/>
+              <a:t> </a:t>
+            </a:r>
+            <a:r>
+              <a:rPr lang="en-US" sz="1200"/>
+              <a:t>-in əsas autoload faylıd</a:t>
+            </a:r>
+            <a:r>
+              <a:rPr lang="az-Latn-AZ" sz="1200"/>
+              <a:t>ır.</a:t>
+            </a:r>
+          </a:p>
+          <a:p>
+            <a:endParaRPr lang="az-Latn-AZ" sz="1200">
+              <a:effectLst/>
+            </a:endParaRPr>
+          </a:p>
+          <a:p>
+            <a:endParaRPr lang="az-Latn-AZ" sz="1200"/>
+          </a:p>
+          <a:p>
+            <a:endParaRPr lang="az-Latn-AZ" sz="1200"/>
+          </a:p>
+          <a:p>
+            <a:endParaRPr lang="az-Latn-AZ" sz="1200"/>
+          </a:p>
+          <a:p>
+            <a:endParaRPr lang="az-Latn-AZ" sz="1200"/>
+          </a:p>
+          <a:p>
+            <a:r>
+              <a:rPr lang="az-Latn-AZ" sz="1200" b="1">
+                <a:effectLst/>
+              </a:rPr>
+              <a:t>Son olaraq isə</a:t>
+            </a:r>
+            <a:r>
+              <a:rPr lang="az-Latn-AZ" sz="1200">
+                <a:effectLst/>
+              </a:rPr>
+              <a:t>: </a:t>
+            </a:r>
+          </a:p>
+          <a:p>
+            <a:pPr marL="171450" indent="-171450">
+              <a:lnSpc>
+                <a:spcPct val="150000"/>
+              </a:lnSpc>
+              <a:buFont typeface="Arial" panose="020B0604020202020204" pitchFamily="34" charset="0"/>
+              <a:buChar char="•"/>
+            </a:pPr>
+            <a:r>
+              <a:rPr lang="az-Latn-AZ" sz="1200"/>
+              <a:t>S</a:t>
+            </a:r>
+            <a:r>
+              <a:rPr lang="en-US" sz="1200"/>
+              <a:t>axta (</a:t>
+            </a:r>
+            <a:r>
+              <a:rPr lang="en-US" sz="1200" b="1"/>
+              <a:t>fake</a:t>
+            </a:r>
+            <a:r>
+              <a:rPr lang="en-US" sz="1200"/>
+              <a:t>) verilənlər bazası </a:t>
+            </a:r>
+            <a:r>
+              <a:rPr lang="az-Latn-AZ" sz="1200"/>
+              <a:t>yaratmışıq</a:t>
+            </a:r>
+            <a:r>
+              <a:rPr lang="en-US" sz="1200"/>
+              <a:t>. Əslində </a:t>
+            </a:r>
+            <a:r>
+              <a:rPr lang="en-US" sz="1200" b="1"/>
+              <a:t>MySQL/PostgreSQL </a:t>
+            </a:r>
+            <a:r>
+              <a:rPr lang="en-US" sz="1200"/>
+              <a:t>ola bilərdi, amma sadəlik üçün massiv (array) istifadə edilib:</a:t>
+            </a:r>
+          </a:p>
+          <a:p>
+            <a:pPr marL="171450" indent="-171450">
+              <a:lnSpc>
+                <a:spcPct val="150000"/>
+              </a:lnSpc>
+              <a:buFont typeface="Arial" panose="020B0604020202020204" pitchFamily="34" charset="0"/>
+              <a:buChar char="•"/>
+            </a:pPr>
+            <a:r>
+              <a:rPr lang="en-US" sz="1200" b="1"/>
+              <a:t>notes</a:t>
+            </a:r>
+            <a:r>
+              <a:rPr lang="az-Latn-AZ" sz="1200" b="1"/>
+              <a:t>    </a:t>
+            </a:r>
+            <a:r>
+              <a:rPr lang="en-US" sz="1200"/>
+              <a:t> → qeydlər siyahısı.</a:t>
+            </a:r>
+          </a:p>
+          <a:p>
+            <a:pPr marL="171450" indent="-171450">
+              <a:lnSpc>
+                <a:spcPct val="150000"/>
+              </a:lnSpc>
+              <a:buFont typeface="Arial" panose="020B0604020202020204" pitchFamily="34" charset="0"/>
+              <a:buChar char="•"/>
+            </a:pPr>
+            <a:r>
+              <a:rPr lang="en-US" sz="1200" b="1"/>
+              <a:t>authors</a:t>
+            </a:r>
+            <a:r>
+              <a:rPr lang="en-US" sz="1200"/>
+              <a:t> → müəlliflər siyahısı.</a:t>
+            </a:r>
+          </a:p>
+          <a:p>
+            <a:pPr marL="171450" indent="-171450">
+              <a:lnSpc>
+                <a:spcPct val="150000"/>
+              </a:lnSpc>
+              <a:buFont typeface="Arial" panose="020B0604020202020204" pitchFamily="34" charset="0"/>
+              <a:buChar char="•"/>
+            </a:pPr>
+            <a:r>
+              <a:rPr lang="en-US" sz="1200"/>
+              <a:t>note obyektində </a:t>
+            </a:r>
+            <a:r>
+              <a:rPr lang="en-US" sz="1200" b="1"/>
+              <a:t>authorId</a:t>
+            </a:r>
+            <a:r>
+              <a:rPr lang="en-US" sz="1200"/>
+              <a:t> saxlanılır ki, həmin id ilə </a:t>
+            </a:r>
+            <a:r>
+              <a:rPr lang="en-US" sz="1200" b="1" i="1"/>
+              <a:t>müəllif</a:t>
+            </a:r>
+            <a:r>
+              <a:rPr lang="en-US" sz="1200"/>
+              <a:t> tapılsın.</a:t>
+            </a:r>
+            <a:endParaRPr lang="az-Latn-AZ" sz="1200"/>
+          </a:p>
+        </p:txBody>
+      </p:sp>
+      <p:pic>
+        <p:nvPicPr>
+          <p:cNvPr id="3" name="Picture 2">
+            <a:extLst>
+              <a:ext uri="{FF2B5EF4-FFF2-40B4-BE49-F238E27FC236}">
+                <a16:creationId xmlns:a16="http://schemas.microsoft.com/office/drawing/2014/main" id="{8B202005-FC29-1046-06C9-F32C38894AC4}"/>
+              </a:ext>
+            </a:extLst>
+          </p:cNvPr>
+          <p:cNvPicPr>
+            <a:picLocks noChangeAspect="1"/>
+          </p:cNvPicPr>
+          <p:nvPr/>
+        </p:nvPicPr>
+        <p:blipFill>
+          <a:blip r:embed="rId2"/>
+          <a:stretch>
+            <a:fillRect/>
+          </a:stretch>
+        </p:blipFill>
+        <p:spPr>
+          <a:xfrm>
+            <a:off x="7740072" y="0"/>
+            <a:ext cx="4451927" cy="1515889"/>
+          </a:xfrm>
+          <a:prstGeom prst="rect">
+            <a:avLst/>
+          </a:prstGeom>
+        </p:spPr>
+      </p:pic>
+      <p:pic>
+        <p:nvPicPr>
+          <p:cNvPr id="6" name="Picture 5">
+            <a:extLst>
+              <a:ext uri="{FF2B5EF4-FFF2-40B4-BE49-F238E27FC236}">
+                <a16:creationId xmlns:a16="http://schemas.microsoft.com/office/drawing/2014/main" id="{A26626B0-2DBB-B5D5-C53A-6ED505FA122A}"/>
+              </a:ext>
+            </a:extLst>
+          </p:cNvPr>
+          <p:cNvPicPr>
+            <a:picLocks noChangeAspect="1"/>
+          </p:cNvPicPr>
+          <p:nvPr/>
+        </p:nvPicPr>
+        <p:blipFill>
+          <a:blip r:embed="rId3"/>
+          <a:stretch>
+            <a:fillRect/>
+          </a:stretch>
+        </p:blipFill>
+        <p:spPr>
+          <a:xfrm>
+            <a:off x="0" y="2502120"/>
+            <a:ext cx="3829584" cy="409632"/>
+          </a:xfrm>
+          <a:prstGeom prst="rect">
+            <a:avLst/>
+          </a:prstGeom>
+        </p:spPr>
+      </p:pic>
+      <p:pic>
+        <p:nvPicPr>
+          <p:cNvPr id="9" name="Picture 8">
+            <a:extLst>
+              <a:ext uri="{FF2B5EF4-FFF2-40B4-BE49-F238E27FC236}">
+                <a16:creationId xmlns:a16="http://schemas.microsoft.com/office/drawing/2014/main" id="{A3EB0FA9-FC20-24DA-DCAB-FB7B73C3641E}"/>
+              </a:ext>
+            </a:extLst>
+          </p:cNvPr>
+          <p:cNvPicPr>
+            <a:picLocks noChangeAspect="1"/>
+          </p:cNvPicPr>
+          <p:nvPr/>
+        </p:nvPicPr>
+        <p:blipFill>
+          <a:blip r:embed="rId4"/>
+          <a:stretch>
+            <a:fillRect/>
+          </a:stretch>
+        </p:blipFill>
+        <p:spPr>
+          <a:xfrm>
+            <a:off x="0" y="1186261"/>
+            <a:ext cx="1828919" cy="374424"/>
+          </a:xfrm>
+          <a:prstGeom prst="rect">
+            <a:avLst/>
+          </a:prstGeom>
+        </p:spPr>
+      </p:pic>
+    </p:spTree>
+    <p:extLst>
+      <p:ext uri="{BB962C8B-B14F-4D97-AF65-F5344CB8AC3E}">
+        <p14:creationId xmlns:p14="http://schemas.microsoft.com/office/powerpoint/2010/main" val="2779668322"/>
+      </p:ext>
+    </p:extLst>
+  </p:cSld>
+  <p:clrMapOvr>
+    <a:masterClrMapping/>
+  </p:clrMapOvr>
+</p:sld>
+</file>
+
+<file path=ppt/slides/slide61.xml><?xml version="1.0" encoding="utf-8"?>
+<p:sld xmlns:a="http://schemas.openxmlformats.org/drawingml/2006/main" xmlns:r="http://schemas.openxmlformats.org/officeDocument/2006/relationships" xmlns:p="http://schemas.openxmlformats.org/presentationml/2006/main">
+  <p:cSld>
+    <p:spTree>
+      <p:nvGrpSpPr>
+        <p:cNvPr id="1" name="">
+          <a:extLst>
+            <a:ext uri="{FF2B5EF4-FFF2-40B4-BE49-F238E27FC236}">
               <a16:creationId xmlns:a16="http://schemas.microsoft.com/office/drawing/2014/main" id="{8212C36B-3416-6A6E-9E20-34163B07C784}"/>
             </a:ext>
           </a:extLst>
@@ -18854,8 +18950,8 @@
         </p:nvSpPr>
         <p:spPr>
           <a:xfrm>
-            <a:off x="203200" y="244826"/>
-            <a:ext cx="11822545" cy="369332"/>
+            <a:off x="0" y="1565625"/>
+            <a:ext cx="5368359" cy="1384995"/>
           </a:xfrm>
           <a:prstGeom prst="rect">
             <a:avLst/>
@@ -18869,15 +18965,217 @@
           <a:lstStyle/>
           <a:p>
             <a:r>
-              <a:rPr lang="en-US">
-                <a:latin typeface="-apple-system"/>
-              </a:rPr>
-              <a:t>.</a:t>
-            </a:r>
-            <a:endParaRPr lang="en-US"/>
+              <a:rPr lang="en-US" sz="1200"/>
+              <a:t>Bu sətir </a:t>
+            </a:r>
+            <a:r>
+              <a:rPr lang="en-US" sz="1200" b="1"/>
+              <a:t>GraphQL</a:t>
+            </a:r>
+            <a:r>
+              <a:rPr lang="en-US" sz="1200"/>
+              <a:t> </a:t>
+            </a:r>
+            <a:r>
+              <a:rPr lang="en-US" sz="1200" b="1"/>
+              <a:t>sxemini</a:t>
+            </a:r>
+            <a:r>
+              <a:rPr lang="en-US" sz="1200"/>
+              <a:t> fayldan oxuyur.</a:t>
+            </a:r>
+          </a:p>
+          <a:p>
+            <a:endParaRPr lang="en-US" sz="1200"/>
+          </a:p>
+          <a:p>
+            <a:pPr marL="171450" indent="-171450">
+              <a:buFont typeface="Arial" panose="020B0604020202020204" pitchFamily="34" charset="0"/>
+              <a:buChar char="•"/>
+            </a:pPr>
+            <a:r>
+              <a:rPr lang="en-US" sz="1200" b="1">
+                <a:solidFill>
+                  <a:srgbClr val="FF0000"/>
+                </a:solidFill>
+              </a:rPr>
+              <a:t>file_get_contents </a:t>
+            </a:r>
+            <a:r>
+              <a:rPr lang="en-US" sz="1200"/>
+              <a:t>→ faylın içindəki mətni oxuyub dəyişənə yazır.</a:t>
+            </a:r>
+          </a:p>
+          <a:p>
+            <a:pPr marL="171450" indent="-171450">
+              <a:buFont typeface="Arial" panose="020B0604020202020204" pitchFamily="34" charset="0"/>
+              <a:buChar char="•"/>
+            </a:pPr>
+            <a:endParaRPr lang="en-US" sz="1200"/>
+          </a:p>
+          <a:p>
+            <a:pPr marL="171450" indent="-171450">
+              <a:buFont typeface="Arial" panose="020B0604020202020204" pitchFamily="34" charset="0"/>
+              <a:buChar char="•"/>
+            </a:pPr>
+            <a:r>
+              <a:rPr lang="en-US" sz="1200"/>
+              <a:t>Burada </a:t>
+            </a:r>
+            <a:r>
+              <a:rPr lang="en-US" sz="1200" b="1"/>
+              <a:t>schema.graphql </a:t>
+            </a:r>
+            <a:r>
+              <a:rPr lang="en-US" sz="1200"/>
+              <a:t>faylındakı </a:t>
+            </a:r>
+            <a:r>
+              <a:rPr lang="en-US" sz="1200" b="1"/>
+              <a:t>Query</a:t>
+            </a:r>
+            <a:r>
+              <a:rPr lang="en-US" sz="1200"/>
+              <a:t>, </a:t>
+            </a:r>
+            <a:r>
+              <a:rPr lang="en-US" sz="1200" b="1"/>
+              <a:t>Note</a:t>
+            </a:r>
+            <a:r>
+              <a:rPr lang="en-US" sz="1200"/>
+              <a:t>, </a:t>
+            </a:r>
+            <a:r>
+              <a:rPr lang="en-US" sz="1200" b="1"/>
+              <a:t>Author</a:t>
+            </a:r>
+            <a:r>
+              <a:rPr lang="en-US" sz="1200"/>
+              <a:t> tipləri </a:t>
+            </a:r>
+            <a:r>
+              <a:rPr lang="en-US" sz="1200" b="1" i="1"/>
+              <a:t>string</a:t>
+            </a:r>
+            <a:r>
+              <a:rPr lang="en-US" sz="1200"/>
+              <a:t> kimi alınır.</a:t>
+            </a:r>
+            <a:endParaRPr lang="az-Latn-AZ" sz="1200"/>
+          </a:p>
+          <a:p>
+            <a:endParaRPr lang="az-Latn-AZ" sz="1200"/>
+          </a:p>
+          <a:p>
+            <a:endParaRPr lang="en-US" sz="1200"/>
           </a:p>
         </p:txBody>
       </p:sp>
+      <p:pic>
+        <p:nvPicPr>
+          <p:cNvPr id="3" name="Picture 2">
+            <a:extLst>
+              <a:ext uri="{FF2B5EF4-FFF2-40B4-BE49-F238E27FC236}">
+                <a16:creationId xmlns:a16="http://schemas.microsoft.com/office/drawing/2014/main" id="{DBD92514-4E62-7030-DC48-707031955C47}"/>
+              </a:ext>
+            </a:extLst>
+          </p:cNvPr>
+          <p:cNvPicPr>
+            <a:picLocks noChangeAspect="1"/>
+          </p:cNvPicPr>
+          <p:nvPr/>
+        </p:nvPicPr>
+        <p:blipFill>
+          <a:blip r:embed="rId2"/>
+          <a:stretch>
+            <a:fillRect/>
+          </a:stretch>
+        </p:blipFill>
+        <p:spPr>
+          <a:xfrm>
+            <a:off x="5368359" y="0"/>
+            <a:ext cx="6823641" cy="6858000"/>
+          </a:xfrm>
+          <a:prstGeom prst="rect">
+            <a:avLst/>
+          </a:prstGeom>
+        </p:spPr>
+      </p:pic>
+      <p:pic>
+        <p:nvPicPr>
+          <p:cNvPr id="8" name="Picture 7">
+            <a:extLst>
+              <a:ext uri="{FF2B5EF4-FFF2-40B4-BE49-F238E27FC236}">
+                <a16:creationId xmlns:a16="http://schemas.microsoft.com/office/drawing/2014/main" id="{512DB614-638C-97DB-2649-A0666C1C83D3}"/>
+              </a:ext>
+            </a:extLst>
+          </p:cNvPr>
+          <p:cNvPicPr>
+            <a:picLocks noChangeAspect="1"/>
+          </p:cNvPicPr>
+          <p:nvPr/>
+        </p:nvPicPr>
+        <p:blipFill>
+          <a:blip r:embed="rId3"/>
+          <a:stretch>
+            <a:fillRect/>
+          </a:stretch>
+        </p:blipFill>
+        <p:spPr>
+          <a:xfrm>
+            <a:off x="0" y="0"/>
+            <a:ext cx="5098473" cy="1060079"/>
+          </a:xfrm>
+          <a:prstGeom prst="rect">
+            <a:avLst/>
+          </a:prstGeom>
+        </p:spPr>
+      </p:pic>
+      <p:pic>
+        <p:nvPicPr>
+          <p:cNvPr id="10" name="Picture 9">
+            <a:extLst>
+              <a:ext uri="{FF2B5EF4-FFF2-40B4-BE49-F238E27FC236}">
+                <a16:creationId xmlns:a16="http://schemas.microsoft.com/office/drawing/2014/main" id="{CF41530E-DC49-6290-657E-108091D34728}"/>
+              </a:ext>
+            </a:extLst>
+          </p:cNvPr>
+          <p:cNvPicPr>
+            <a:picLocks noChangeAspect="1"/>
+          </p:cNvPicPr>
+          <p:nvPr/>
+        </p:nvPicPr>
+        <p:blipFill>
+          <a:blip r:embed="rId4"/>
+          <a:stretch>
+            <a:fillRect/>
+          </a:stretch>
+        </p:blipFill>
+        <p:spPr>
+          <a:xfrm>
+            <a:off x="0" y="2863273"/>
+            <a:ext cx="5185726" cy="2706254"/>
+          </a:xfrm>
+          <a:prstGeom prst="rect">
+            <a:avLst/>
+          </a:prstGeom>
+          <a:ln w="38100" cap="sq">
+            <a:solidFill>
+              <a:srgbClr val="000000"/>
+            </a:solidFill>
+            <a:prstDash val="solid"/>
+            <a:miter lim="800000"/>
+          </a:ln>
+          <a:effectLst>
+            <a:outerShdw blurRad="50800" dist="38100" dir="2700000" algn="tl" rotWithShape="0">
+              <a:srgbClr val="000000">
+                <a:alpha val="43000"/>
+              </a:srgbClr>
+            </a:outerShdw>
+          </a:effectLst>
+        </p:spPr>
+      </p:pic>
     </p:spTree>
     <p:extLst>
       <p:ext uri="{BB962C8B-B14F-4D97-AF65-F5344CB8AC3E}">
@@ -18891,7 +19189,7 @@
 </p:sld>
 </file>
 
-<file path=ppt/slides/slide61.xml><?xml version="1.0" encoding="utf-8"?>
+<file path=ppt/slides/slide62.xml><?xml version="1.0" encoding="utf-8"?>
 <p:sld xmlns:a="http://schemas.openxmlformats.org/drawingml/2006/main" xmlns:r="http://schemas.openxmlformats.org/officeDocument/2006/relationships" xmlns:p="http://schemas.openxmlformats.org/presentationml/2006/main">
   <p:cSld>
     <p:spTree>
@@ -18928,8 +19226,8 @@
         </p:nvSpPr>
         <p:spPr>
           <a:xfrm>
-            <a:off x="203200" y="244826"/>
-            <a:ext cx="11822545" cy="369332"/>
+            <a:off x="184727" y="586571"/>
+            <a:ext cx="11822545" cy="4583242"/>
           </a:xfrm>
           <a:prstGeom prst="rect">
             <a:avLst/>
@@ -18942,16 +19240,598 @@
           </a:bodyPr>
           <a:lstStyle/>
           <a:p>
-            <a:r>
-              <a:rPr lang="en-US">
-                <a:latin typeface="-apple-system"/>
-              </a:rPr>
-              <a:t>.</a:t>
-            </a:r>
-            <a:endParaRPr lang="en-US"/>
+            <a:pPr>
+              <a:lnSpc>
+                <a:spcPct val="150000"/>
+              </a:lnSpc>
+            </a:pPr>
+            <a:r>
+              <a:rPr lang="en-US" sz="1400">
+                <a:latin typeface="-apple-system"/>
+              </a:rPr>
+              <a:t>Burada </a:t>
+            </a:r>
+            <a:r>
+              <a:rPr lang="en-US" sz="1400" b="1">
+                <a:latin typeface="-apple-system"/>
+              </a:rPr>
+              <a:t>anonim funksiya </a:t>
+            </a:r>
+            <a:r>
+              <a:rPr lang="en-US" sz="1400">
+                <a:latin typeface="-apple-system"/>
+              </a:rPr>
+              <a:t>(</a:t>
+            </a:r>
+            <a:r>
+              <a:rPr lang="en-US" sz="1400" b="1">
+                <a:latin typeface="-apple-system"/>
+              </a:rPr>
+              <a:t>closure</a:t>
+            </a:r>
+            <a:r>
+              <a:rPr lang="en-US" sz="1400">
+                <a:latin typeface="-apple-system"/>
+              </a:rPr>
+              <a:t>) yaradılır.</a:t>
+            </a:r>
+          </a:p>
+          <a:p>
+            <a:pPr>
+              <a:lnSpc>
+                <a:spcPct val="150000"/>
+              </a:lnSpc>
+            </a:pPr>
+            <a:r>
+              <a:rPr lang="en-US" sz="1400">
+                <a:latin typeface="-apple-system"/>
+              </a:rPr>
+              <a:t> </a:t>
+            </a:r>
+          </a:p>
+          <a:p>
+            <a:pPr marL="285750" indent="-285750">
+              <a:lnSpc>
+                <a:spcPct val="150000"/>
+              </a:lnSpc>
+              <a:buFont typeface="Arial" panose="020B0604020202020204" pitchFamily="34" charset="0"/>
+              <a:buChar char="•"/>
+            </a:pPr>
+            <a:r>
+              <a:rPr lang="en-US" sz="1400" b="1">
+                <a:solidFill>
+                  <a:srgbClr val="7030A0"/>
+                </a:solidFill>
+                <a:latin typeface="-apple-system"/>
+              </a:rPr>
+              <a:t>$typeConfigDecorator </a:t>
+            </a:r>
+            <a:r>
+              <a:rPr lang="en-US" sz="1400" b="1">
+                <a:latin typeface="-apple-system"/>
+              </a:rPr>
+              <a:t>=</a:t>
+            </a:r>
+            <a:r>
+              <a:rPr lang="az-Latn-AZ" sz="1400" b="1">
+                <a:latin typeface="-apple-system"/>
+              </a:rPr>
+              <a:t> </a:t>
+            </a:r>
+            <a:r>
+              <a:rPr lang="en-US" sz="1400" b="1">
+                <a:latin typeface="-apple-system"/>
+              </a:rPr>
+              <a:t>function </a:t>
+            </a:r>
+            <a:r>
+              <a:rPr lang="en-US" sz="1400" b="1">
+                <a:solidFill>
+                  <a:srgbClr val="0070C0"/>
+                </a:solidFill>
+                <a:latin typeface="-apple-system"/>
+              </a:rPr>
+              <a:t>($typeConfig</a:t>
+            </a:r>
+            <a:r>
+              <a:rPr lang="en-US" sz="1400" b="1">
+                <a:latin typeface="-apple-system"/>
+              </a:rPr>
+              <a:t>) </a:t>
+            </a:r>
+            <a:r>
+              <a:rPr lang="en-US" sz="1400" b="1">
+                <a:solidFill>
+                  <a:srgbClr val="FF0000"/>
+                </a:solidFill>
+                <a:latin typeface="-apple-system"/>
+              </a:rPr>
+              <a:t>use</a:t>
+            </a:r>
+            <a:r>
+              <a:rPr lang="en-US" sz="1400" b="1">
+                <a:latin typeface="-apple-system"/>
+              </a:rPr>
+              <a:t> </a:t>
+            </a:r>
+            <a:r>
+              <a:rPr lang="en-US" sz="1400" b="1">
+                <a:solidFill>
+                  <a:srgbClr val="00B050"/>
+                </a:solidFill>
+                <a:latin typeface="-apple-system"/>
+              </a:rPr>
+              <a:t>($fakeDatabase</a:t>
+            </a:r>
+            <a:r>
+              <a:rPr lang="en-US" sz="1400" b="1">
+                <a:latin typeface="-apple-system"/>
+              </a:rPr>
+              <a:t>) </a:t>
+            </a:r>
+            <a:r>
+              <a:rPr lang="en-US" sz="1400">
+                <a:latin typeface="-apple-system"/>
+              </a:rPr>
+              <a:t>→ </a:t>
+            </a:r>
+            <a:r>
+              <a:rPr lang="en-US" sz="1400" b="1">
+                <a:solidFill>
+                  <a:srgbClr val="FF0000"/>
+                </a:solidFill>
+                <a:latin typeface="-apple-system"/>
+              </a:rPr>
+              <a:t>use</a:t>
+            </a:r>
+            <a:r>
+              <a:rPr lang="en-US" sz="1400">
+                <a:latin typeface="-apple-system"/>
+              </a:rPr>
+              <a:t> o deməkdir ki, bu anonim funksiya, onun çölündə olan </a:t>
+            </a:r>
+            <a:r>
+              <a:rPr lang="en-US" sz="1400" b="1">
+                <a:latin typeface="-apple-system"/>
+              </a:rPr>
+              <a:t>$fakeDatabase </a:t>
+            </a:r>
+            <a:r>
+              <a:rPr lang="az-Latn-AZ" sz="1400">
+                <a:latin typeface="-apple-system"/>
+              </a:rPr>
+              <a:t>adlı </a:t>
+            </a:r>
+            <a:r>
+              <a:rPr lang="en-US" sz="1400">
+                <a:latin typeface="-apple-system"/>
+              </a:rPr>
+              <a:t>dəyişəni öz içində istifadə edə bilər.</a:t>
+            </a:r>
+            <a:r>
+              <a:rPr lang="az-Latn-AZ" sz="1400">
+                <a:latin typeface="-apple-system"/>
+              </a:rPr>
+              <a:t> Çünki normalda </a:t>
+            </a:r>
+            <a:r>
+              <a:rPr lang="az-Latn-AZ" sz="1400" b="1">
+                <a:latin typeface="-apple-system"/>
+              </a:rPr>
+              <a:t>$fakeDatabase, </a:t>
+            </a:r>
+            <a:r>
+              <a:rPr lang="az-Latn-AZ" sz="1400">
+                <a:latin typeface="-apple-system"/>
+              </a:rPr>
+              <a:t>funksiyanın içində görünməzdi. </a:t>
+            </a:r>
+            <a:r>
+              <a:rPr lang="az-Latn-AZ" sz="1400" b="1">
+                <a:solidFill>
+                  <a:srgbClr val="FF0000"/>
+                </a:solidFill>
+                <a:latin typeface="-apple-system"/>
+              </a:rPr>
+              <a:t>use</a:t>
+            </a:r>
+            <a:r>
+              <a:rPr lang="az-Latn-AZ" sz="1400">
+                <a:latin typeface="-apple-system"/>
+              </a:rPr>
+              <a:t> isə onu funksiyanın içinə daşıyır.</a:t>
+            </a:r>
+          </a:p>
+          <a:p>
+            <a:pPr marL="285750" indent="-285750">
+              <a:lnSpc>
+                <a:spcPct val="150000"/>
+              </a:lnSpc>
+              <a:buFont typeface="Arial" panose="020B0604020202020204" pitchFamily="34" charset="0"/>
+              <a:buChar char="•"/>
+            </a:pPr>
+            <a:endParaRPr lang="az-Latn-AZ" sz="1400">
+              <a:latin typeface="-apple-system"/>
+            </a:endParaRPr>
+          </a:p>
+          <a:p>
+            <a:pPr marL="285750" indent="-285750">
+              <a:lnSpc>
+                <a:spcPct val="150000"/>
+              </a:lnSpc>
+              <a:buFont typeface="Arial" panose="020B0604020202020204" pitchFamily="34" charset="0"/>
+              <a:buChar char="•"/>
+            </a:pPr>
+            <a:r>
+              <a:rPr lang="en-US" sz="1400" b="1">
+                <a:solidFill>
+                  <a:srgbClr val="0070C0"/>
+                </a:solidFill>
+                <a:latin typeface="-apple-system"/>
+              </a:rPr>
+              <a:t>$typeConfig</a:t>
+            </a:r>
+            <a:r>
+              <a:rPr lang="az-Latn-AZ" sz="1400" b="1">
+                <a:solidFill>
+                  <a:srgbClr val="0070C0"/>
+                </a:solidFill>
+                <a:latin typeface="-apple-system"/>
+              </a:rPr>
+              <a:t> </a:t>
+            </a:r>
+            <a:r>
+              <a:rPr lang="en-US" sz="1400">
+                <a:latin typeface="-apple-system"/>
+              </a:rPr>
+              <a:t>→</a:t>
+            </a:r>
+            <a:r>
+              <a:rPr lang="az-Latn-AZ" sz="1400">
+                <a:latin typeface="-apple-system"/>
+              </a:rPr>
+              <a:t> bu parametrin tərkibində, </a:t>
+            </a:r>
+            <a:r>
+              <a:rPr lang="az-Latn-AZ" sz="1400" b="1">
+                <a:latin typeface="-apple-system"/>
+              </a:rPr>
+              <a:t>Note</a:t>
+            </a:r>
+            <a:r>
+              <a:rPr lang="az-Latn-AZ" sz="1400">
+                <a:latin typeface="-apple-system"/>
+              </a:rPr>
+              <a:t>, </a:t>
+            </a:r>
+            <a:r>
+              <a:rPr lang="az-Latn-AZ" sz="1400" b="1">
+                <a:latin typeface="-apple-system"/>
+              </a:rPr>
+              <a:t>Author</a:t>
+            </a:r>
+            <a:r>
+              <a:rPr lang="az-Latn-AZ" sz="1400">
+                <a:latin typeface="-apple-system"/>
+              </a:rPr>
+              <a:t>, </a:t>
+            </a:r>
+            <a:r>
+              <a:rPr lang="az-Latn-AZ" sz="1400" b="1">
+                <a:latin typeface="-apple-system"/>
+              </a:rPr>
+              <a:t>Query</a:t>
+            </a:r>
+            <a:r>
+              <a:rPr lang="az-Latn-AZ" sz="1400">
+                <a:latin typeface="-apple-system"/>
+              </a:rPr>
+              <a:t> dəyərləri var. Çünki, </a:t>
+            </a:r>
+            <a:r>
+              <a:rPr lang="az-Latn-AZ" sz="1400" b="1">
+                <a:solidFill>
+                  <a:srgbClr val="FF0000"/>
+                </a:solidFill>
+                <a:latin typeface="-apple-system"/>
+              </a:rPr>
+              <a:t>build() </a:t>
+            </a:r>
+            <a:r>
+              <a:rPr lang="az-Latn-AZ" sz="1400">
+                <a:latin typeface="-apple-system"/>
+              </a:rPr>
+              <a:t>metodu, sxemi quranda hər tipin konfiqurasiyasını </a:t>
+            </a:r>
+            <a:r>
+              <a:rPr lang="az-Latn-AZ" sz="1400" b="1">
+                <a:solidFill>
+                  <a:schemeClr val="accent2"/>
+                </a:solidFill>
+                <a:latin typeface="-apple-system"/>
+              </a:rPr>
+              <a:t>$schemaContent </a:t>
+            </a:r>
+            <a:r>
+              <a:rPr lang="az-Latn-AZ" sz="1400">
+                <a:latin typeface="-apple-system"/>
+              </a:rPr>
+              <a:t>dəyişənindən əldə edərək, </a:t>
+            </a:r>
+            <a:r>
+              <a:rPr lang="az-Latn-AZ" sz="1400" b="1">
+                <a:solidFill>
+                  <a:srgbClr val="7030A0"/>
+                </a:solidFill>
+                <a:latin typeface="-apple-system"/>
+              </a:rPr>
+              <a:t>$typeConfigDecorator </a:t>
+            </a:r>
+            <a:r>
+              <a:rPr lang="az-Latn-AZ" sz="1400">
+                <a:latin typeface="-apple-system"/>
+              </a:rPr>
+              <a:t>-a göndərir. Bu dəyişənə mənimsədilən funksiyanın </a:t>
+            </a:r>
+            <a:r>
+              <a:rPr lang="en-US" sz="1400" b="1">
+                <a:solidFill>
+                  <a:srgbClr val="0070C0"/>
+                </a:solidFill>
+                <a:latin typeface="-apple-system"/>
+              </a:rPr>
+              <a:t>$typeConfig</a:t>
+            </a:r>
+            <a:r>
+              <a:rPr lang="az-Latn-AZ" sz="1400" b="1">
+                <a:solidFill>
+                  <a:srgbClr val="0070C0"/>
+                </a:solidFill>
+                <a:latin typeface="-apple-system"/>
+              </a:rPr>
+              <a:t> </a:t>
+            </a:r>
+            <a:r>
+              <a:rPr lang="az-Latn-AZ" sz="1400">
+                <a:latin typeface="-apple-system"/>
+              </a:rPr>
+              <a:t>parametri, avtomatik olaraq </a:t>
+            </a:r>
+            <a:r>
+              <a:rPr lang="az-Latn-AZ" sz="1400" b="1">
+                <a:latin typeface="-apple-system"/>
+              </a:rPr>
+              <a:t>Note</a:t>
+            </a:r>
+            <a:r>
+              <a:rPr lang="az-Latn-AZ" sz="1400">
+                <a:latin typeface="-apple-system"/>
+              </a:rPr>
+              <a:t>, </a:t>
+            </a:r>
+            <a:r>
+              <a:rPr lang="az-Latn-AZ" sz="1400" b="1">
+                <a:latin typeface="-apple-system"/>
+              </a:rPr>
+              <a:t>Author</a:t>
+            </a:r>
+            <a:r>
+              <a:rPr lang="az-Latn-AZ" sz="1400">
+                <a:latin typeface="-apple-system"/>
+              </a:rPr>
+              <a:t>, </a:t>
+            </a:r>
+            <a:r>
+              <a:rPr lang="az-Latn-AZ" sz="1400" b="1">
+                <a:latin typeface="-apple-system"/>
+              </a:rPr>
+              <a:t>Query</a:t>
+            </a:r>
+            <a:r>
+              <a:rPr lang="az-Latn-AZ" sz="1400">
+                <a:latin typeface="-apple-system"/>
+              </a:rPr>
+              <a:t> dəyərlərini qəbul edir. Çünki </a:t>
+            </a:r>
+            <a:r>
+              <a:rPr lang="az-Latn-AZ" sz="1400" b="1">
+                <a:latin typeface="-apple-system"/>
+              </a:rPr>
+              <a:t>function ($typeConfig) </a:t>
+            </a:r>
+            <a:r>
+              <a:rPr lang="az-Latn-AZ" sz="1400">
+                <a:latin typeface="-apple-system"/>
+              </a:rPr>
+              <a:t>funksiyası hər dəfə Query, Note, Author üçün təkrar-təkrar çağırılır.</a:t>
+            </a:r>
+            <a:endParaRPr lang="en-US" sz="1400">
+              <a:latin typeface="-apple-system"/>
+            </a:endParaRPr>
+          </a:p>
+          <a:p>
+            <a:pPr marL="1200150" lvl="2" indent="-285750">
+              <a:lnSpc>
+                <a:spcPct val="150000"/>
+              </a:lnSpc>
+              <a:buFont typeface="Wingdings" panose="05000000000000000000" pitchFamily="2" charset="2"/>
+              <a:buChar char="q"/>
+            </a:pPr>
+            <a:r>
+              <a:rPr lang="az-Latn-AZ" sz="1400" b="1" i="1">
+                <a:latin typeface="-apple-system"/>
+              </a:rPr>
+              <a:t>Yəni bu funksiya çox dəfə çağırılır</a:t>
+            </a:r>
+            <a:r>
+              <a:rPr lang="az-Latn-AZ" sz="1400">
+                <a:latin typeface="-apple-system"/>
+              </a:rPr>
+              <a:t>:</a:t>
+            </a:r>
+            <a:endParaRPr lang="en-US" sz="1400"/>
+          </a:p>
+          <a:p>
+            <a:pPr marL="1657350" lvl="3" indent="-285750">
+              <a:lnSpc>
+                <a:spcPct val="150000"/>
+              </a:lnSpc>
+              <a:buFont typeface="Wingdings" panose="05000000000000000000" pitchFamily="2" charset="2"/>
+              <a:buChar char="Ø"/>
+            </a:pPr>
+            <a:r>
+              <a:rPr lang="en-US" sz="1400" b="1"/>
+              <a:t>$typeConfig['name’] </a:t>
+            </a:r>
+            <a:r>
+              <a:rPr lang="az-Latn-AZ" sz="1400" b="1"/>
+              <a:t>           </a:t>
+            </a:r>
+            <a:r>
+              <a:rPr lang="en-US" sz="1400"/>
+              <a:t>= "Query" </a:t>
+            </a:r>
+            <a:r>
+              <a:rPr lang="az-Latn-AZ" sz="1400"/>
+              <a:t>  </a:t>
+            </a:r>
+            <a:r>
+              <a:rPr lang="en-US" sz="1400"/>
+              <a:t>gəlir</a:t>
+            </a:r>
+          </a:p>
+          <a:p>
+            <a:pPr marL="1657350" lvl="3" indent="-285750">
+              <a:lnSpc>
+                <a:spcPct val="150000"/>
+              </a:lnSpc>
+              <a:buFont typeface="Wingdings" panose="05000000000000000000" pitchFamily="2" charset="2"/>
+              <a:buChar char="Ø"/>
+            </a:pPr>
+            <a:r>
+              <a:rPr lang="en-US" sz="1400"/>
+              <a:t>sonra </a:t>
+            </a:r>
+            <a:r>
+              <a:rPr lang="en-US" sz="1400" b="1"/>
+              <a:t>$typeConfig['name'] </a:t>
+            </a:r>
+            <a:r>
+              <a:rPr lang="en-US" sz="1400"/>
+              <a:t>= "Note" </a:t>
+            </a:r>
+            <a:r>
+              <a:rPr lang="az-Latn-AZ" sz="1400"/>
+              <a:t>    </a:t>
+            </a:r>
+            <a:r>
+              <a:rPr lang="en-US" sz="1400"/>
+              <a:t>gəlir</a:t>
+            </a:r>
+          </a:p>
+          <a:p>
+            <a:pPr marL="1657350" lvl="3" indent="-285750">
+              <a:lnSpc>
+                <a:spcPct val="150000"/>
+              </a:lnSpc>
+              <a:buFont typeface="Wingdings" panose="05000000000000000000" pitchFamily="2" charset="2"/>
+              <a:buChar char="Ø"/>
+            </a:pPr>
+            <a:r>
+              <a:rPr lang="en-US" sz="1400"/>
+              <a:t>sonra </a:t>
+            </a:r>
+            <a:r>
+              <a:rPr lang="en-US" sz="1400" b="1"/>
+              <a:t>$typeConfig['name'] </a:t>
+            </a:r>
+            <a:r>
+              <a:rPr lang="en-US" sz="1400"/>
+              <a:t>= "Author" gəlir</a:t>
+            </a:r>
+          </a:p>
+          <a:p>
+            <a:pPr>
+              <a:lnSpc>
+                <a:spcPct val="150000"/>
+              </a:lnSpc>
+            </a:pPr>
+            <a:endParaRPr lang="en-US" sz="1400">
+              <a:latin typeface="-apple-system"/>
+            </a:endParaRPr>
+          </a:p>
+          <a:p>
+            <a:pPr>
+              <a:lnSpc>
+                <a:spcPct val="150000"/>
+              </a:lnSpc>
+            </a:pPr>
+            <a:endParaRPr lang="en-US" sz="1400" b="1">
+              <a:latin typeface="-apple-system"/>
+            </a:endParaRPr>
           </a:p>
         </p:txBody>
       </p:sp>
+      <p:pic>
+        <p:nvPicPr>
+          <p:cNvPr id="3" name="Picture 2">
+            <a:extLst>
+              <a:ext uri="{FF2B5EF4-FFF2-40B4-BE49-F238E27FC236}">
+                <a16:creationId xmlns:a16="http://schemas.microsoft.com/office/drawing/2014/main" id="{267CE849-26B5-A76D-D3C6-B4D7839B1DBD}"/>
+              </a:ext>
+            </a:extLst>
+          </p:cNvPr>
+          <p:cNvPicPr>
+            <a:picLocks noChangeAspect="1"/>
+          </p:cNvPicPr>
+          <p:nvPr/>
+        </p:nvPicPr>
+        <p:blipFill>
+          <a:blip r:embed="rId2"/>
+          <a:stretch>
+            <a:fillRect/>
+          </a:stretch>
+        </p:blipFill>
+        <p:spPr>
+          <a:xfrm>
+            <a:off x="0" y="0"/>
+            <a:ext cx="5287113" cy="447737"/>
+          </a:xfrm>
+          <a:prstGeom prst="rect">
+            <a:avLst/>
+          </a:prstGeom>
+        </p:spPr>
+      </p:pic>
+      <p:pic>
+        <p:nvPicPr>
+          <p:cNvPr id="5" name="Picture 4">
+            <a:extLst>
+              <a:ext uri="{FF2B5EF4-FFF2-40B4-BE49-F238E27FC236}">
+                <a16:creationId xmlns:a16="http://schemas.microsoft.com/office/drawing/2014/main" id="{957459F9-83E8-AF4D-48A0-5D41B6223277}"/>
+              </a:ext>
+            </a:extLst>
+          </p:cNvPr>
+          <p:cNvPicPr>
+            <a:picLocks noChangeAspect="1"/>
+          </p:cNvPicPr>
+          <p:nvPr/>
+        </p:nvPicPr>
+        <p:blipFill>
+          <a:blip r:embed="rId3"/>
+          <a:stretch>
+            <a:fillRect/>
+          </a:stretch>
+        </p:blipFill>
+        <p:spPr>
+          <a:xfrm>
+            <a:off x="7712364" y="3477686"/>
+            <a:ext cx="4479636" cy="3380313"/>
+          </a:xfrm>
+          <a:prstGeom prst="rect">
+            <a:avLst/>
+          </a:prstGeom>
+        </p:spPr>
+      </p:pic>
     </p:spTree>
     <p:extLst>
       <p:ext uri="{BB962C8B-B14F-4D97-AF65-F5344CB8AC3E}">
@@ -18965,7 +19845,7 @@
 </p:sld>
 </file>
 
-<file path=ppt/slides/slide62.xml><?xml version="1.0" encoding="utf-8"?>
+<file path=ppt/slides/slide63.xml><?xml version="1.0" encoding="utf-8"?>
 <p:sld xmlns:a="http://schemas.openxmlformats.org/drawingml/2006/main" xmlns:r="http://schemas.openxmlformats.org/officeDocument/2006/relationships" xmlns:p="http://schemas.openxmlformats.org/presentationml/2006/main">
   <p:cSld>
     <p:spTree>
@@ -19017,15 +19897,101 @@
           <a:lstStyle/>
           <a:p>
             <a:r>
-              <a:rPr lang="en-US">
-                <a:latin typeface="-apple-system"/>
-              </a:rPr>
-              <a:t>.</a:t>
+              <a:rPr lang="az-Latn-AZ">
+                <a:latin typeface="-apple-system"/>
+              </a:rPr>
+              <a:t>İstəsəz </a:t>
+            </a:r>
+            <a:r>
+              <a:rPr lang="az-Latn-AZ" b="1">
+                <a:latin typeface="-apple-system"/>
+              </a:rPr>
+              <a:t>print_r() </a:t>
+            </a:r>
+            <a:r>
+              <a:rPr lang="az-Latn-AZ">
+                <a:latin typeface="-apple-system"/>
+              </a:rPr>
+              <a:t>metodu ilə geri qayıdan nəticələri görə bilərsiz.</a:t>
             </a:r>
             <a:endParaRPr lang="en-US"/>
           </a:p>
         </p:txBody>
       </p:sp>
+      <p:pic>
+        <p:nvPicPr>
+          <p:cNvPr id="3" name="Picture 2">
+            <a:extLst>
+              <a:ext uri="{FF2B5EF4-FFF2-40B4-BE49-F238E27FC236}">
+                <a16:creationId xmlns:a16="http://schemas.microsoft.com/office/drawing/2014/main" id="{99CC5916-BFAC-D53A-45F4-9F43F3AE871A}"/>
+              </a:ext>
+            </a:extLst>
+          </p:cNvPr>
+          <p:cNvPicPr>
+            <a:picLocks noChangeAspect="1"/>
+          </p:cNvPicPr>
+          <p:nvPr/>
+        </p:nvPicPr>
+        <p:blipFill>
+          <a:blip r:embed="rId2"/>
+          <a:stretch>
+            <a:fillRect/>
+          </a:stretch>
+        </p:blipFill>
+        <p:spPr>
+          <a:xfrm>
+            <a:off x="2662940" y="1902691"/>
+            <a:ext cx="9529060" cy="4955309"/>
+          </a:xfrm>
+          <a:prstGeom prst="rect">
+            <a:avLst/>
+          </a:prstGeom>
+          <a:ln w="38100" cap="sq">
+            <a:solidFill>
+              <a:srgbClr val="000000"/>
+            </a:solidFill>
+            <a:prstDash val="solid"/>
+            <a:miter lim="800000"/>
+          </a:ln>
+          <a:effectLst>
+            <a:outerShdw blurRad="50800" dist="38100" dir="2700000" algn="tl" rotWithShape="0">
+              <a:srgbClr val="000000">
+                <a:alpha val="43000"/>
+              </a:srgbClr>
+            </a:outerShdw>
+          </a:effectLst>
+        </p:spPr>
+      </p:pic>
+      <p:pic>
+        <p:nvPicPr>
+          <p:cNvPr id="5" name="Picture 4">
+            <a:extLst>
+              <a:ext uri="{FF2B5EF4-FFF2-40B4-BE49-F238E27FC236}">
+                <a16:creationId xmlns:a16="http://schemas.microsoft.com/office/drawing/2014/main" id="{6AACAE80-7ADF-FFA3-7DE5-7F37E64AB027}"/>
+              </a:ext>
+            </a:extLst>
+          </p:cNvPr>
+          <p:cNvPicPr>
+            <a:picLocks noChangeAspect="1"/>
+          </p:cNvPicPr>
+          <p:nvPr/>
+        </p:nvPicPr>
+        <p:blipFill>
+          <a:blip r:embed="rId3"/>
+          <a:stretch>
+            <a:fillRect/>
+          </a:stretch>
+        </p:blipFill>
+        <p:spPr>
+          <a:xfrm>
+            <a:off x="7028729" y="0"/>
+            <a:ext cx="5163271" cy="1143160"/>
+          </a:xfrm>
+          <a:prstGeom prst="rect">
+            <a:avLst/>
+          </a:prstGeom>
+        </p:spPr>
+      </p:pic>
     </p:spTree>
     <p:extLst>
       <p:ext uri="{BB962C8B-B14F-4D97-AF65-F5344CB8AC3E}">
@@ -19039,7 +20005,7 @@
 </p:sld>
 </file>
 
-<file path=ppt/slides/slide63.xml><?xml version="1.0" encoding="utf-8"?>
+<file path=ppt/slides/slide64.xml><?xml version="1.0" encoding="utf-8"?>
 <p:sld xmlns:a="http://schemas.openxmlformats.org/drawingml/2006/main" xmlns:r="http://schemas.openxmlformats.org/officeDocument/2006/relationships" xmlns:p="http://schemas.openxmlformats.org/presentationml/2006/main">
   <p:cSld>
     <p:spTree>
@@ -19076,8 +20042,8 @@
         </p:nvSpPr>
         <p:spPr>
           <a:xfrm>
-            <a:off x="203200" y="244826"/>
-            <a:ext cx="11822545" cy="369332"/>
+            <a:off x="184727" y="586571"/>
+            <a:ext cx="11822545" cy="5170646"/>
           </a:xfrm>
           <a:prstGeom prst="rect">
             <a:avLst/>
@@ -19091,15 +20057,395 @@
           <a:lstStyle/>
           <a:p>
             <a:r>
-              <a:rPr lang="en-US">
-                <a:latin typeface="-apple-system"/>
-              </a:rPr>
-              <a:t>.</a:t>
-            </a:r>
-            <a:endParaRPr lang="en-US"/>
+              <a:rPr lang="en-US" sz="1300">
+                <a:latin typeface="-apple-system"/>
+              </a:rPr>
+              <a:t>Yoxlanılır: əgər hazırda </a:t>
+            </a:r>
+            <a:r>
+              <a:rPr lang="az-Latn-AZ" sz="1300">
+                <a:latin typeface="-apple-system"/>
+              </a:rPr>
+              <a:t>gələn</a:t>
+            </a:r>
+            <a:r>
+              <a:rPr lang="en-US" sz="1300">
+                <a:latin typeface="-apple-system"/>
+              </a:rPr>
+              <a:t> tip </a:t>
+            </a:r>
+            <a:r>
+              <a:rPr lang="en-US" sz="1300" b="1" i="1">
+                <a:latin typeface="-apple-system"/>
+              </a:rPr>
+              <a:t>Note</a:t>
+            </a:r>
+            <a:r>
+              <a:rPr lang="az-Latn-AZ" sz="1300">
+                <a:latin typeface="-apple-system"/>
+              </a:rPr>
+              <a:t> </a:t>
+            </a:r>
+            <a:r>
+              <a:rPr lang="en-US" sz="1300">
+                <a:latin typeface="-apple-system"/>
+              </a:rPr>
+              <a:t>-dursa, o zaman xüsusi </a:t>
+            </a:r>
+            <a:r>
+              <a:rPr lang="az-Latn-AZ" sz="1300">
+                <a:latin typeface="-apple-system"/>
+              </a:rPr>
+              <a:t> </a:t>
+            </a:r>
+            <a:r>
+              <a:rPr lang="en-US" sz="1300">
+                <a:latin typeface="-apple-system"/>
+              </a:rPr>
+              <a:t>“</a:t>
+            </a:r>
+            <a:r>
+              <a:rPr lang="en-US" sz="1300" b="1">
+                <a:latin typeface="-apple-system"/>
+              </a:rPr>
+              <a:t>resolver</a:t>
+            </a:r>
+            <a:r>
+              <a:rPr lang="en-US" sz="1300">
+                <a:latin typeface="-apple-system"/>
+              </a:rPr>
+              <a:t>” əlavə et.</a:t>
+            </a:r>
+            <a:r>
+              <a:rPr lang="az-Latn-AZ" sz="1300">
+                <a:latin typeface="-apple-system"/>
+              </a:rPr>
+              <a:t> </a:t>
+            </a:r>
+            <a:r>
+              <a:rPr lang="az-Latn-AZ" sz="1300" b="1">
+                <a:solidFill>
+                  <a:srgbClr val="FF0000"/>
+                </a:solidFill>
+                <a:latin typeface="-apple-system"/>
+              </a:rPr>
+              <a:t>Resolver</a:t>
+            </a:r>
+            <a:r>
+              <a:rPr lang="az-Latn-AZ" sz="1300" b="1">
+                <a:latin typeface="-apple-system"/>
+              </a:rPr>
+              <a:t>,</a:t>
+            </a:r>
+            <a:r>
+              <a:rPr lang="az-Latn-AZ" sz="1300">
+                <a:latin typeface="-apple-system"/>
+              </a:rPr>
+              <a:t> GraphQL -də hər sahənin “cavabını gətirən funksiya”dır.</a:t>
+            </a:r>
+          </a:p>
+          <a:p>
+            <a:endParaRPr lang="az-Latn-AZ" sz="1300">
+              <a:latin typeface="-apple-system"/>
+            </a:endParaRPr>
+          </a:p>
+          <a:p>
+            <a:endParaRPr lang="az-Latn-AZ" sz="1300">
+              <a:latin typeface="-apple-system"/>
+            </a:endParaRPr>
+          </a:p>
+          <a:p>
+            <a:endParaRPr lang="az-Latn-AZ" sz="1300">
+              <a:latin typeface="-apple-system"/>
+            </a:endParaRPr>
+          </a:p>
+          <a:p>
+            <a:endParaRPr lang="az-Latn-AZ" sz="1300">
+              <a:latin typeface="-apple-system"/>
+            </a:endParaRPr>
+          </a:p>
+          <a:p>
+            <a:r>
+              <a:rPr lang="en-US" sz="1300" b="1"/>
+              <a:t>Note</a:t>
+            </a:r>
+            <a:r>
+              <a:rPr lang="en-US" sz="1300"/>
+              <a:t> tipinin orijinal </a:t>
+            </a:r>
+            <a:r>
+              <a:rPr lang="en-US" sz="1300" b="1"/>
+              <a:t>fields</a:t>
+            </a:r>
+            <a:r>
+              <a:rPr lang="en-US" sz="1300"/>
+              <a:t> (yəni </a:t>
+            </a:r>
+            <a:r>
+              <a:rPr lang="en-US" sz="1300" b="1"/>
+              <a:t>id</a:t>
+            </a:r>
+            <a:r>
+              <a:rPr lang="en-US" sz="1300"/>
+              <a:t>, </a:t>
+            </a:r>
+            <a:r>
+              <a:rPr lang="en-US" sz="1300" b="1"/>
+              <a:t>title</a:t>
+            </a:r>
+            <a:r>
+              <a:rPr lang="en-US" sz="1300"/>
+              <a:t>, </a:t>
+            </a:r>
+            <a:r>
+              <a:rPr lang="en-US" sz="1300" b="1"/>
+              <a:t>description</a:t>
+            </a:r>
+            <a:r>
+              <a:rPr lang="en-US" sz="1300"/>
+              <a:t>, </a:t>
+            </a:r>
+            <a:r>
+              <a:rPr lang="en-US" sz="1300" b="1"/>
+              <a:t>author</a:t>
+            </a:r>
+            <a:r>
+              <a:rPr lang="en-US" sz="1300"/>
+              <a:t>) sahələri götürülür.</a:t>
+            </a:r>
+            <a:endParaRPr lang="az-Latn-AZ" sz="1300"/>
+          </a:p>
+          <a:p>
+            <a:endParaRPr lang="az-Latn-AZ" sz="1300"/>
+          </a:p>
+          <a:p>
+            <a:endParaRPr lang="az-Latn-AZ" sz="1300"/>
+          </a:p>
+          <a:p>
+            <a:endParaRPr lang="az-Latn-AZ" sz="1300"/>
+          </a:p>
+          <a:p>
+            <a:endParaRPr lang="az-Latn-AZ" sz="1300"/>
+          </a:p>
+          <a:p>
+            <a:endParaRPr lang="az-Latn-AZ" sz="1300"/>
+          </a:p>
+          <a:p>
+            <a:r>
+              <a:rPr lang="en-US" sz="1300"/>
+              <a:t>Yenidən </a:t>
+            </a:r>
+            <a:r>
+              <a:rPr lang="en-US" sz="1300" b="1"/>
+              <a:t>fields</a:t>
+            </a:r>
+            <a:r>
+              <a:rPr lang="az-Latn-AZ" sz="1300"/>
+              <a:t> </a:t>
+            </a:r>
+            <a:r>
+              <a:rPr lang="en-US" sz="1300"/>
+              <a:t>-i funksiya ilə dəyişirik. Yenə </a:t>
+            </a:r>
+            <a:r>
+              <a:rPr lang="en-US" sz="1300" b="1"/>
+              <a:t>use</a:t>
+            </a:r>
+            <a:r>
+              <a:rPr lang="en-US" sz="1300"/>
+              <a:t> istifadə olunub → </a:t>
+            </a:r>
+            <a:r>
+              <a:rPr lang="en-US" sz="1300" b="1" i="1"/>
+              <a:t>$fakeDatabase</a:t>
+            </a:r>
+            <a:r>
+              <a:rPr lang="en-US" sz="1300"/>
+              <a:t> və </a:t>
+            </a:r>
+            <a:r>
+              <a:rPr lang="en-US" sz="1300" b="1" i="1"/>
+              <a:t>$originalFields </a:t>
+            </a:r>
+            <a:r>
+              <a:rPr lang="en-US" sz="1300"/>
+              <a:t>bu funksiyanın içində işləsin deyə.</a:t>
+            </a:r>
+            <a:endParaRPr lang="az-Latn-AZ" sz="1300"/>
+          </a:p>
+          <a:p>
+            <a:endParaRPr lang="az-Latn-AZ" sz="1300"/>
+          </a:p>
+          <a:p>
+            <a:endParaRPr lang="az-Latn-AZ" sz="1300"/>
+          </a:p>
+          <a:p>
+            <a:endParaRPr lang="az-Latn-AZ" sz="1300"/>
+          </a:p>
+          <a:p>
+            <a:endParaRPr lang="az-Latn-AZ" sz="1300"/>
+          </a:p>
+          <a:p>
+            <a:endParaRPr lang="az-Latn-AZ" sz="1300"/>
+          </a:p>
+          <a:p>
+            <a:endParaRPr lang="az-Latn-AZ" sz="1300"/>
+          </a:p>
+          <a:p>
+            <a:endParaRPr lang="az-Latn-AZ" sz="1300"/>
+          </a:p>
+          <a:p>
+            <a:endParaRPr lang="az-Latn-AZ" sz="1300"/>
+          </a:p>
+          <a:p>
+            <a:endParaRPr lang="az-Latn-AZ" sz="1300"/>
+          </a:p>
+          <a:p>
+            <a:endParaRPr lang="az-Latn-AZ" sz="1300"/>
+          </a:p>
+          <a:p>
+            <a:endParaRPr lang="az-Latn-AZ" sz="1300"/>
+          </a:p>
+          <a:p>
+            <a:endParaRPr lang="az-Latn-AZ" sz="1300"/>
+          </a:p>
+          <a:p>
+            <a:r>
+              <a:rPr lang="en-US" sz="1400"/>
+              <a:t>Əgər əvvəl sahələr varsa (</a:t>
+            </a:r>
+            <a:r>
+              <a:rPr lang="en-US"/>
+              <a:t>Note</a:t>
+            </a:r>
+            <a:r>
+              <a:rPr lang="en-US" sz="1400"/>
+              <a:t> tipində id, title, description, author var), onları götür, əks halda boş siyahı ver.</a:t>
+            </a:r>
+            <a:endParaRPr lang="en-US" sz="1300"/>
           </a:p>
         </p:txBody>
       </p:sp>
+      <p:pic>
+        <p:nvPicPr>
+          <p:cNvPr id="3" name="Picture 2">
+            <a:extLst>
+              <a:ext uri="{FF2B5EF4-FFF2-40B4-BE49-F238E27FC236}">
+                <a16:creationId xmlns:a16="http://schemas.microsoft.com/office/drawing/2014/main" id="{4BFCECFE-B802-D02D-701D-3E19A8DDF912}"/>
+              </a:ext>
+            </a:extLst>
+          </p:cNvPr>
+          <p:cNvPicPr>
+            <a:picLocks noChangeAspect="1"/>
+          </p:cNvPicPr>
+          <p:nvPr/>
+        </p:nvPicPr>
+        <p:blipFill>
+          <a:blip r:embed="rId2"/>
+          <a:stretch>
+            <a:fillRect/>
+          </a:stretch>
+        </p:blipFill>
+        <p:spPr>
+          <a:xfrm>
+            <a:off x="0" y="0"/>
+            <a:ext cx="2381582" cy="419158"/>
+          </a:xfrm>
+          <a:prstGeom prst="rect">
+            <a:avLst/>
+          </a:prstGeom>
+        </p:spPr>
+      </p:pic>
+      <p:pic>
+        <p:nvPicPr>
+          <p:cNvPr id="5" name="Picture 4">
+            <a:extLst>
+              <a:ext uri="{FF2B5EF4-FFF2-40B4-BE49-F238E27FC236}">
+                <a16:creationId xmlns:a16="http://schemas.microsoft.com/office/drawing/2014/main" id="{1A9611DF-C8D1-AB34-E35B-A0EF73F3382A}"/>
+              </a:ext>
+            </a:extLst>
+          </p:cNvPr>
+          <p:cNvPicPr>
+            <a:picLocks noChangeAspect="1"/>
+          </p:cNvPicPr>
+          <p:nvPr/>
+        </p:nvPicPr>
+        <p:blipFill>
+          <a:blip r:embed="rId3"/>
+          <a:stretch>
+            <a:fillRect/>
+          </a:stretch>
+        </p:blipFill>
+        <p:spPr>
+          <a:xfrm>
+            <a:off x="0" y="1863083"/>
+            <a:ext cx="3191320" cy="543001"/>
+          </a:xfrm>
+          <a:prstGeom prst="rect">
+            <a:avLst/>
+          </a:prstGeom>
+        </p:spPr>
+      </p:pic>
+      <p:pic>
+        <p:nvPicPr>
+          <p:cNvPr id="8" name="Picture 7">
+            <a:extLst>
+              <a:ext uri="{FF2B5EF4-FFF2-40B4-BE49-F238E27FC236}">
+                <a16:creationId xmlns:a16="http://schemas.microsoft.com/office/drawing/2014/main" id="{750FE46F-D123-5647-A68F-774056E42921}"/>
+              </a:ext>
+            </a:extLst>
+          </p:cNvPr>
+          <p:cNvPicPr>
+            <a:picLocks noChangeAspect="1"/>
+          </p:cNvPicPr>
+          <p:nvPr/>
+        </p:nvPicPr>
+        <p:blipFill>
+          <a:blip r:embed="rId4"/>
+          <a:stretch>
+            <a:fillRect/>
+          </a:stretch>
+        </p:blipFill>
+        <p:spPr>
+          <a:xfrm>
+            <a:off x="0" y="3079561"/>
+            <a:ext cx="5744377" cy="466790"/>
+          </a:xfrm>
+          <a:prstGeom prst="rect">
+            <a:avLst/>
+          </a:prstGeom>
+        </p:spPr>
+      </p:pic>
+      <p:pic>
+        <p:nvPicPr>
+          <p:cNvPr id="10" name="Picture 9">
+            <a:extLst>
+              <a:ext uri="{FF2B5EF4-FFF2-40B4-BE49-F238E27FC236}">
+                <a16:creationId xmlns:a16="http://schemas.microsoft.com/office/drawing/2014/main" id="{C16063CC-261E-5575-E277-AFA15ECF37A7}"/>
+              </a:ext>
+            </a:extLst>
+          </p:cNvPr>
+          <p:cNvPicPr>
+            <a:picLocks noChangeAspect="1"/>
+          </p:cNvPicPr>
+          <p:nvPr/>
+        </p:nvPicPr>
+        <p:blipFill>
+          <a:blip r:embed="rId5"/>
+          <a:stretch>
+            <a:fillRect/>
+          </a:stretch>
+        </p:blipFill>
+        <p:spPr>
+          <a:xfrm>
+            <a:off x="0" y="4899074"/>
+            <a:ext cx="4067743" cy="447737"/>
+          </a:xfrm>
+          <a:prstGeom prst="rect">
+            <a:avLst/>
+          </a:prstGeom>
+        </p:spPr>
+      </p:pic>
     </p:spTree>
     <p:extLst>
       <p:ext uri="{BB962C8B-B14F-4D97-AF65-F5344CB8AC3E}">
@@ -19113,7 +20459,7 @@
 </p:sld>
 </file>
 
-<file path=ppt/slides/slide64.xml><?xml version="1.0" encoding="utf-8"?>
+<file path=ppt/slides/slide65.xml><?xml version="1.0" encoding="utf-8"?>
 <p:sld xmlns:a="http://schemas.openxmlformats.org/drawingml/2006/main" xmlns:r="http://schemas.openxmlformats.org/officeDocument/2006/relationships" xmlns:p="http://schemas.openxmlformats.org/presentationml/2006/main">
   <p:cSld>
     <p:spTree>
@@ -19165,15 +20511,45 @@
           <a:lstStyle/>
           <a:p>
             <a:r>
-              <a:rPr lang="en-US">
-                <a:latin typeface="-apple-system"/>
-              </a:rPr>
-              <a:t>.</a:t>
+              <a:rPr lang="az-Latn-AZ">
+                <a:latin typeface="-apple-system"/>
+              </a:rPr>
+              <a:t>İstəsəz yenə çap edərək qayıdan dəyərlərə baxa bilərsiz.</a:t>
             </a:r>
             <a:endParaRPr lang="en-US"/>
           </a:p>
         </p:txBody>
       </p:sp>
+      <p:pic>
+        <p:nvPicPr>
+          <p:cNvPr id="3" name="Picture 2">
+            <a:extLst>
+              <a:ext uri="{FF2B5EF4-FFF2-40B4-BE49-F238E27FC236}">
+                <a16:creationId xmlns:a16="http://schemas.microsoft.com/office/drawing/2014/main" id="{B22915F8-3ADF-EC1F-3C90-4DC44CC85430}"/>
+              </a:ext>
+            </a:extLst>
+          </p:cNvPr>
+          <p:cNvPicPr>
+            <a:picLocks noChangeAspect="1"/>
+          </p:cNvPicPr>
+          <p:nvPr/>
+        </p:nvPicPr>
+        <p:blipFill>
+          <a:blip r:embed="rId2"/>
+          <a:stretch>
+            <a:fillRect/>
+          </a:stretch>
+        </p:blipFill>
+        <p:spPr>
+          <a:xfrm>
+            <a:off x="7095414" y="0"/>
+            <a:ext cx="5096586" cy="1552792"/>
+          </a:xfrm>
+          <a:prstGeom prst="rect">
+            <a:avLst/>
+          </a:prstGeom>
+        </p:spPr>
+      </p:pic>
     </p:spTree>
     <p:extLst>
       <p:ext uri="{BB962C8B-B14F-4D97-AF65-F5344CB8AC3E}">
@@ -19187,7 +20563,7 @@
 </p:sld>
 </file>
 
-<file path=ppt/slides/slide65.xml><?xml version="1.0" encoding="utf-8"?>
+<file path=ppt/slides/slide66.xml><?xml version="1.0" encoding="utf-8"?>
 <p:sld xmlns:a="http://schemas.openxmlformats.org/drawingml/2006/main" xmlns:r="http://schemas.openxmlformats.org/officeDocument/2006/relationships" xmlns:p="http://schemas.openxmlformats.org/presentationml/2006/main">
   <p:cSld>
     <p:spTree>
@@ -19225,7 +20601,7 @@
         <p:spPr>
           <a:xfrm>
             <a:off x="203200" y="244826"/>
-            <a:ext cx="11822545" cy="369332"/>
+            <a:ext cx="11822545" cy="3970318"/>
           </a:xfrm>
           <a:prstGeom prst="rect">
             <a:avLst/>
@@ -19239,15 +20615,362 @@
           <a:lstStyle/>
           <a:p>
             <a:r>
-              <a:rPr lang="en-US">
-                <a:latin typeface="-apple-system"/>
-              </a:rPr>
+              <a:rPr lang="en-US" sz="1200" b="1">
+                <a:latin typeface="-apple-system"/>
+              </a:rPr>
+              <a:t>$typeConfig['fields'] </a:t>
+            </a:r>
+            <a:r>
+              <a:rPr lang="en-US" sz="1200">
+                <a:latin typeface="-apple-system"/>
+              </a:rPr>
+              <a:t>nədir?</a:t>
+            </a:r>
+            <a:endParaRPr lang="az-Latn-AZ" sz="1200">
+              <a:latin typeface="-apple-system"/>
+            </a:endParaRPr>
+          </a:p>
+          <a:p>
+            <a:pPr marL="285750" indent="-285750">
+              <a:lnSpc>
+                <a:spcPct val="150000"/>
+              </a:lnSpc>
+              <a:buFont typeface="Arial" panose="020B0604020202020204" pitchFamily="34" charset="0"/>
+              <a:buChar char="•"/>
+            </a:pPr>
+            <a:r>
+              <a:rPr lang="en-US" sz="1200" b="1"/>
+              <a:t>type Note { ... } </a:t>
+            </a:r>
+            <a:r>
+              <a:rPr lang="en-US" sz="1200"/>
+              <a:t>içindəki sahələrin siyahısıdır → yəni </a:t>
+            </a:r>
+            <a:r>
+              <a:rPr lang="en-US" sz="1200" b="1"/>
+              <a:t>id</a:t>
+            </a:r>
+            <a:r>
+              <a:rPr lang="en-US" sz="1200"/>
+              <a:t>, </a:t>
+            </a:r>
+            <a:r>
+              <a:rPr lang="en-US" sz="1200" b="1"/>
+              <a:t>title</a:t>
+            </a:r>
+            <a:r>
+              <a:rPr lang="en-US" sz="1200"/>
+              <a:t>, </a:t>
+            </a:r>
+            <a:r>
+              <a:rPr lang="en-US" sz="1200" b="1"/>
+              <a:t>description</a:t>
+            </a:r>
+            <a:r>
+              <a:rPr lang="en-US" sz="1200"/>
+              <a:t>, </a:t>
+            </a:r>
+            <a:r>
+              <a:rPr lang="en-US" sz="1200" b="1"/>
+              <a:t>author</a:t>
+            </a:r>
+            <a:r>
+              <a:rPr lang="en-US" sz="1200"/>
               <a:t>.</a:t>
             </a:r>
-            <a:endParaRPr lang="en-US"/>
+          </a:p>
+          <a:p>
+            <a:pPr marL="285750" indent="-285750">
+              <a:lnSpc>
+                <a:spcPct val="150000"/>
+              </a:lnSpc>
+              <a:buFont typeface="Arial" panose="020B0604020202020204" pitchFamily="34" charset="0"/>
+              <a:buChar char="•"/>
+            </a:pPr>
+            <a:r>
+              <a:rPr lang="en-US" sz="1200"/>
+              <a:t>Normalda bu </a:t>
+            </a:r>
+            <a:r>
+              <a:rPr lang="en-US" sz="1200" b="1"/>
+              <a:t>fields</a:t>
+            </a:r>
+            <a:r>
+              <a:rPr lang="en-US" sz="1200"/>
+              <a:t> bir </a:t>
+            </a:r>
+            <a:r>
+              <a:rPr lang="en-US" sz="1200" b="1"/>
+              <a:t>array</a:t>
+            </a:r>
+            <a:r>
+              <a:rPr lang="az-Latn-AZ" sz="1200"/>
+              <a:t> </a:t>
+            </a:r>
+            <a:r>
+              <a:rPr lang="en-US" sz="1200"/>
+              <a:t>-dir, amma </a:t>
+            </a:r>
+            <a:r>
+              <a:rPr lang="en-US" sz="1200" b="1"/>
+              <a:t>graphql-php</a:t>
+            </a:r>
+            <a:r>
+              <a:rPr lang="en-US" sz="1200"/>
+              <a:t> kitabxanasında o</a:t>
+            </a:r>
+            <a:r>
+              <a:rPr lang="az-Latn-AZ" sz="1200"/>
+              <a:t>, </a:t>
+            </a:r>
+            <a:r>
+              <a:rPr lang="en-US" sz="1200"/>
+              <a:t>funksiya da qaytara bilər.</a:t>
+            </a:r>
+            <a:endParaRPr lang="az-Latn-AZ" sz="1200"/>
+          </a:p>
+          <a:p>
+            <a:endParaRPr lang="az-Latn-AZ" sz="1200"/>
+          </a:p>
+          <a:p>
+            <a:r>
+              <a:rPr lang="en-US" sz="1200"/>
+              <a:t>Bu o deməkdir ki, sən sahələrin siyahısını dərhal </a:t>
+            </a:r>
+            <a:r>
+              <a:rPr lang="en-US" sz="1200" b="1"/>
+              <a:t>array</a:t>
+            </a:r>
+            <a:r>
+              <a:rPr lang="en-US" sz="1200"/>
+              <a:t> kimi vermək əvəzinə, onları bir funksiya vasitəsilə sonradan </a:t>
+            </a:r>
+            <a:r>
+              <a:rPr lang="en-US" sz="1200" i="1"/>
+              <a:t>dinamik</a:t>
+            </a:r>
+            <a:r>
+              <a:rPr lang="en-US" sz="1200"/>
+              <a:t> və ya </a:t>
+            </a:r>
+            <a:r>
+              <a:rPr lang="en-US" sz="1200" i="1"/>
+              <a:t>təxirə salınmış </a:t>
+            </a:r>
+            <a:r>
+              <a:rPr lang="en-US" sz="1200"/>
+              <a:t>(</a:t>
+            </a:r>
+            <a:r>
+              <a:rPr lang="en-US" sz="1200" b="1">
+                <a:solidFill>
+                  <a:srgbClr val="FF0000"/>
+                </a:solidFill>
+              </a:rPr>
+              <a:t>lazy</a:t>
+            </a:r>
+            <a:r>
+              <a:rPr lang="en-US" sz="1200"/>
+              <a:t>) şəkildə qaytara bilərsən.</a:t>
+            </a:r>
+            <a:endParaRPr lang="az-Latn-AZ" sz="1200"/>
+          </a:p>
+          <a:p>
+            <a:endParaRPr lang="az-Latn-AZ" sz="1200"/>
+          </a:p>
+          <a:p>
+            <a:endParaRPr lang="az-Latn-AZ" sz="1200"/>
+          </a:p>
+          <a:p>
+            <a:r>
+              <a:rPr lang="az-Latn-AZ" sz="1200" b="1"/>
+              <a:t>a) Normal istifadə (array kimi)</a:t>
+            </a:r>
+            <a:r>
+              <a:rPr lang="az-Latn-AZ" sz="1200"/>
+              <a:t>: Burada </a:t>
+            </a:r>
+            <a:r>
+              <a:rPr lang="az-Latn-AZ" sz="1200" b="1"/>
+              <a:t>fields</a:t>
+            </a:r>
+            <a:r>
+              <a:rPr lang="az-Latn-AZ" sz="1200"/>
+              <a:t> sadəcə </a:t>
+            </a:r>
+            <a:r>
+              <a:rPr lang="az-Latn-AZ" sz="1200" b="1"/>
+              <a:t>düz array </a:t>
+            </a:r>
+            <a:r>
+              <a:rPr lang="az-Latn-AZ" sz="1200"/>
+              <a:t>olaraq verilir → tipin sahələri dərhal müəyyənləşir.</a:t>
+            </a:r>
+          </a:p>
+          <a:p>
+            <a:endParaRPr lang="az-Latn-AZ" sz="1200"/>
+          </a:p>
+          <a:p>
+            <a:endParaRPr lang="az-Latn-AZ" sz="1200"/>
+          </a:p>
+          <a:p>
+            <a:endParaRPr lang="az-Latn-AZ" sz="1200"/>
+          </a:p>
+          <a:p>
+            <a:endParaRPr lang="az-Latn-AZ" sz="1200"/>
+          </a:p>
+          <a:p>
+            <a:endParaRPr lang="az-Latn-AZ" sz="1200"/>
+          </a:p>
+          <a:p>
+            <a:endParaRPr lang="az-Latn-AZ" sz="1200"/>
+          </a:p>
+          <a:p>
+            <a:endParaRPr lang="az-Latn-AZ" sz="1200"/>
+          </a:p>
+          <a:p>
+            <a:endParaRPr lang="az-Latn-AZ" sz="1200"/>
+          </a:p>
+          <a:p>
+            <a:endParaRPr lang="az-Latn-AZ" sz="1200"/>
+          </a:p>
+          <a:p>
+            <a:endParaRPr lang="az-Latn-AZ" sz="1200"/>
+          </a:p>
+          <a:p>
+            <a:endParaRPr lang="en-US" sz="1200"/>
+          </a:p>
+          <a:p>
+            <a:r>
+              <a:rPr lang="az-Latn-AZ" sz="1200"/>
+              <a:t>b) </a:t>
+            </a:r>
+            <a:r>
+              <a:rPr lang="az-Latn-AZ" sz="1200" b="1"/>
+              <a:t>Funksiya ilə qaytarmaq</a:t>
+            </a:r>
+            <a:r>
+              <a:rPr lang="az-Latn-AZ" sz="1200"/>
+              <a:t>: Yəni </a:t>
+            </a:r>
+            <a:r>
+              <a:rPr lang="az-Latn-AZ" sz="1200" b="1"/>
+              <a:t>fields</a:t>
+            </a:r>
+            <a:r>
+              <a:rPr lang="az-Latn-AZ" sz="1200"/>
+              <a:t> bir funksiya (closure) ola bilər, və bu funksiya </a:t>
+            </a:r>
+            <a:r>
+              <a:rPr lang="az-Latn-AZ" sz="1200" b="1" i="1"/>
+              <a:t>çağırıldıqda</a:t>
+            </a:r>
+            <a:r>
+              <a:rPr lang="az-Latn-AZ" sz="1200"/>
+              <a:t> həmin </a:t>
+            </a:r>
+            <a:r>
+              <a:rPr lang="az-Latn-AZ" sz="1200" b="1"/>
+              <a:t>array</a:t>
+            </a:r>
+            <a:r>
+              <a:rPr lang="az-Latn-AZ" sz="1200"/>
+              <a:t> -i qaytarır.</a:t>
+            </a:r>
+            <a:endParaRPr lang="en-US" sz="1200"/>
           </a:p>
         </p:txBody>
       </p:sp>
+      <p:pic>
+        <p:nvPicPr>
+          <p:cNvPr id="3" name="Picture 2">
+            <a:extLst>
+              <a:ext uri="{FF2B5EF4-FFF2-40B4-BE49-F238E27FC236}">
+                <a16:creationId xmlns:a16="http://schemas.microsoft.com/office/drawing/2014/main" id="{FB9121A3-6250-C59D-8180-F9D987CFEDEC}"/>
+              </a:ext>
+            </a:extLst>
+          </p:cNvPr>
+          <p:cNvPicPr>
+            <a:picLocks noChangeAspect="1"/>
+          </p:cNvPicPr>
+          <p:nvPr/>
+        </p:nvPicPr>
+        <p:blipFill>
+          <a:blip r:embed="rId2"/>
+          <a:stretch>
+            <a:fillRect/>
+          </a:stretch>
+        </p:blipFill>
+        <p:spPr>
+          <a:xfrm>
+            <a:off x="6323781" y="-26675"/>
+            <a:ext cx="5868219" cy="543001"/>
+          </a:xfrm>
+          <a:prstGeom prst="rect">
+            <a:avLst/>
+          </a:prstGeom>
+        </p:spPr>
+      </p:pic>
+      <p:pic>
+        <p:nvPicPr>
+          <p:cNvPr id="8" name="Picture 7">
+            <a:extLst>
+              <a:ext uri="{FF2B5EF4-FFF2-40B4-BE49-F238E27FC236}">
+                <a16:creationId xmlns:a16="http://schemas.microsoft.com/office/drawing/2014/main" id="{0F589B43-197F-BC01-78FA-D5E2512D67D2}"/>
+              </a:ext>
+            </a:extLst>
+          </p:cNvPr>
+          <p:cNvPicPr>
+            <a:picLocks noChangeAspect="1"/>
+          </p:cNvPicPr>
+          <p:nvPr/>
+        </p:nvPicPr>
+        <p:blipFill>
+          <a:blip r:embed="rId3"/>
+          <a:stretch>
+            <a:fillRect/>
+          </a:stretch>
+        </p:blipFill>
+        <p:spPr>
+          <a:xfrm>
+            <a:off x="267855" y="2068086"/>
+            <a:ext cx="2538412" cy="1432496"/>
+          </a:xfrm>
+          <a:prstGeom prst="rect">
+            <a:avLst/>
+          </a:prstGeom>
+        </p:spPr>
+      </p:pic>
+      <p:pic>
+        <p:nvPicPr>
+          <p:cNvPr id="10" name="Picture 9">
+            <a:extLst>
+              <a:ext uri="{FF2B5EF4-FFF2-40B4-BE49-F238E27FC236}">
+                <a16:creationId xmlns:a16="http://schemas.microsoft.com/office/drawing/2014/main" id="{BB1EE49A-2A5A-D33C-3933-A156F02FF279}"/>
+              </a:ext>
+            </a:extLst>
+          </p:cNvPr>
+          <p:cNvPicPr>
+            <a:picLocks noChangeAspect="1"/>
+          </p:cNvPicPr>
+          <p:nvPr/>
+        </p:nvPicPr>
+        <p:blipFill>
+          <a:blip r:embed="rId4"/>
+          <a:stretch>
+            <a:fillRect/>
+          </a:stretch>
+        </p:blipFill>
+        <p:spPr>
+          <a:xfrm>
+            <a:off x="264726" y="4264689"/>
+            <a:ext cx="2541541" cy="1652982"/>
+          </a:xfrm>
+          <a:prstGeom prst="rect">
+            <a:avLst/>
+          </a:prstGeom>
+        </p:spPr>
+      </p:pic>
     </p:spTree>
     <p:extLst>
       <p:ext uri="{BB962C8B-B14F-4D97-AF65-F5344CB8AC3E}">
@@ -19261,7 +20984,350 @@
 </p:sld>
 </file>
 
-<file path=ppt/slides/slide66.xml><?xml version="1.0" encoding="utf-8"?>
+<file path=ppt/slides/slide67.xml><?xml version="1.0" encoding="utf-8"?>
+<p:sld xmlns:a="http://schemas.openxmlformats.org/drawingml/2006/main" xmlns:r="http://schemas.openxmlformats.org/officeDocument/2006/relationships" xmlns:p="http://schemas.openxmlformats.org/presentationml/2006/main">
+  <p:cSld>
+    <p:spTree>
+      <p:nvGrpSpPr>
+        <p:cNvPr id="1" name="">
+          <a:extLst>
+            <a:ext uri="{FF2B5EF4-FFF2-40B4-BE49-F238E27FC236}">
+              <a16:creationId xmlns:a16="http://schemas.microsoft.com/office/drawing/2014/main" id="{9425DF1B-ABEE-A7A2-DE9F-D90FF0FB10AE}"/>
+            </a:ext>
+          </a:extLst>
+        </p:cNvPr>
+        <p:cNvGrpSpPr/>
+        <p:nvPr/>
+      </p:nvGrpSpPr>
+      <p:grpSpPr>
+        <a:xfrm>
+          <a:off x="0" y="0"/>
+          <a:ext cx="0" cy="0"/>
+          <a:chOff x="0" y="0"/>
+          <a:chExt cx="0" cy="0"/>
+        </a:xfrm>
+      </p:grpSpPr>
+      <p:sp>
+        <p:nvSpPr>
+          <p:cNvPr id="7" name="TextBox 6">
+            <a:extLst>
+              <a:ext uri="{FF2B5EF4-FFF2-40B4-BE49-F238E27FC236}">
+                <a16:creationId xmlns:a16="http://schemas.microsoft.com/office/drawing/2014/main" id="{BDE61ABA-0F9B-F4F4-52F0-4F1BBF2BE0C5}"/>
+              </a:ext>
+            </a:extLst>
+          </p:cNvPr>
+          <p:cNvSpPr txBox="1"/>
+          <p:nvPr/>
+        </p:nvSpPr>
+        <p:spPr>
+          <a:xfrm>
+            <a:off x="203200" y="244826"/>
+            <a:ext cx="11822545" cy="4524315"/>
+          </a:xfrm>
+          <a:prstGeom prst="rect">
+            <a:avLst/>
+          </a:prstGeom>
+          <a:noFill/>
+        </p:spPr>
+        <p:txBody>
+          <a:bodyPr wrap="square">
+            <a:spAutoFit/>
+          </a:bodyPr>
+          <a:lstStyle/>
+          <a:p>
+            <a:r>
+              <a:rPr lang="az-Latn-AZ" sz="1200" b="1"/>
+              <a:t>Bəs "funksiya ilə qaytara bilərsən" nə deməkdir? </a:t>
+            </a:r>
+          </a:p>
+          <a:p>
+            <a:endParaRPr lang="az-Latn-AZ" sz="1200" b="1"/>
+          </a:p>
+          <a:p>
+            <a:r>
+              <a:rPr lang="az-Latn-AZ" sz="1200"/>
+              <a:t>Bu o deməkdir ki, sən sahələrin siyahısını dərhal </a:t>
+            </a:r>
+            <a:r>
+              <a:rPr lang="az-Latn-AZ" sz="1200" b="1"/>
+              <a:t>array</a:t>
+            </a:r>
+            <a:r>
+              <a:rPr lang="az-Latn-AZ" sz="1200"/>
+              <a:t> kimi vermək əvəzinə, onları bir funksiya vasitəsilə sonradan dinamik və ya təxirə salınmış (</a:t>
+            </a:r>
+            <a:r>
+              <a:rPr lang="az-Latn-AZ" sz="1200" b="1"/>
+              <a:t>lazy</a:t>
+            </a:r>
+            <a:r>
+              <a:rPr lang="az-Latn-AZ" sz="1200"/>
+              <a:t>) şəkildə qaytara bilərsən.</a:t>
+            </a:r>
+          </a:p>
+          <a:p>
+            <a:endParaRPr lang="az-Latn-AZ" sz="1200"/>
+          </a:p>
+          <a:p>
+            <a:r>
+              <a:rPr lang="en-US" sz="1200" b="1"/>
+              <a:t>Bunun faydası</a:t>
+            </a:r>
+            <a:r>
+              <a:rPr lang="en-US" sz="1200"/>
+              <a:t>:</a:t>
+            </a:r>
+          </a:p>
+          <a:p>
+            <a:endParaRPr lang="en-US" sz="1200"/>
+          </a:p>
+          <a:p>
+            <a:pPr marL="228600" indent="-228600">
+              <a:buAutoNum type="arabicParenR"/>
+            </a:pPr>
+            <a:r>
+              <a:rPr lang="en-US" sz="1200" b="1">
+                <a:solidFill>
+                  <a:srgbClr val="FF0000"/>
+                </a:solidFill>
+              </a:rPr>
+              <a:t>Circular dependency </a:t>
+            </a:r>
+            <a:r>
+              <a:rPr lang="en-US" sz="1200"/>
+              <a:t>(dairəvi asılılıq) problemindən qaçmaq üçün.</a:t>
+            </a:r>
+            <a:endParaRPr lang="az-Latn-AZ" sz="1200"/>
+          </a:p>
+          <a:p>
+            <a:pPr marL="228600" indent="-228600">
+              <a:buAutoNum type="arabicParenR"/>
+            </a:pPr>
+            <a:endParaRPr lang="en-US" sz="1200"/>
+          </a:p>
+          <a:p>
+            <a:r>
+              <a:rPr lang="en-US" sz="1200"/>
+              <a:t>Məsələn, </a:t>
+            </a:r>
+            <a:r>
+              <a:rPr lang="en-US" sz="1200" b="1"/>
+              <a:t>User</a:t>
+            </a:r>
+            <a:r>
+              <a:rPr lang="en-US" sz="1200"/>
+              <a:t> tipində </a:t>
+            </a:r>
+            <a:r>
+              <a:rPr lang="en-US" sz="1200" b="1"/>
+              <a:t>Post</a:t>
+            </a:r>
+            <a:r>
+              <a:rPr lang="en-US" sz="1200"/>
+              <a:t> var, </a:t>
+            </a:r>
+            <a:r>
+              <a:rPr lang="en-US" sz="1200" b="1"/>
+              <a:t>Post</a:t>
+            </a:r>
+            <a:r>
+              <a:rPr lang="en-US" sz="1200"/>
+              <a:t> tipində də </a:t>
+            </a:r>
+            <a:r>
+              <a:rPr lang="en-US" sz="1200" b="1"/>
+              <a:t>User</a:t>
+            </a:r>
+            <a:r>
+              <a:rPr lang="en-US" sz="1200"/>
+              <a:t> var → bu zaman əvvəlcə </a:t>
+            </a:r>
+            <a:r>
+              <a:rPr lang="en-US" sz="1200" b="1"/>
+              <a:t>Post</a:t>
+            </a:r>
+            <a:r>
+              <a:rPr lang="en-US" sz="1200"/>
+              <a:t> hələ yaradılmayıb, </a:t>
+            </a:r>
+            <a:r>
+              <a:rPr lang="en-US" sz="1200" b="1"/>
+              <a:t>User</a:t>
+            </a:r>
+            <a:r>
+              <a:rPr lang="en-US" sz="1200"/>
+              <a:t> isə </a:t>
+            </a:r>
+            <a:r>
+              <a:rPr lang="en-US" sz="1200" b="1"/>
+              <a:t>Post</a:t>
+            </a:r>
+            <a:r>
+              <a:rPr lang="az-Latn-AZ" sz="1200"/>
+              <a:t> </a:t>
+            </a:r>
+            <a:r>
+              <a:rPr lang="en-US" sz="1200"/>
+              <a:t>-a ehtiyac duyur. </a:t>
+            </a:r>
+            <a:r>
+              <a:rPr lang="en-US" sz="1200" i="1" u="sng"/>
+              <a:t>Funksiya ilə gecikdirilmiş qaytarış</a:t>
+            </a:r>
+            <a:r>
+              <a:rPr lang="en-US" sz="1200" i="1"/>
+              <a:t> </a:t>
+            </a:r>
+            <a:r>
+              <a:rPr lang="en-US" sz="1200"/>
+              <a:t>bu problemi həll edir.</a:t>
+            </a:r>
+            <a:endParaRPr lang="az-Latn-AZ" sz="1200"/>
+          </a:p>
+          <a:p>
+            <a:endParaRPr lang="az-Latn-AZ" sz="1200"/>
+          </a:p>
+          <a:p>
+            <a:endParaRPr lang="az-Latn-AZ" sz="1200"/>
+          </a:p>
+          <a:p>
+            <a:endParaRPr lang="az-Latn-AZ" sz="1200"/>
+          </a:p>
+          <a:p>
+            <a:endParaRPr lang="az-Latn-AZ" sz="1200"/>
+          </a:p>
+          <a:p>
+            <a:endParaRPr lang="az-Latn-AZ" sz="1200"/>
+          </a:p>
+          <a:p>
+            <a:endParaRPr lang="az-Latn-AZ" sz="1200"/>
+          </a:p>
+          <a:p>
+            <a:endParaRPr lang="az-Latn-AZ" sz="1200"/>
+          </a:p>
+          <a:p>
+            <a:endParaRPr lang="az-Latn-AZ" sz="1200"/>
+          </a:p>
+          <a:p>
+            <a:endParaRPr lang="az-Latn-AZ" sz="1200"/>
+          </a:p>
+          <a:p>
+            <a:endParaRPr lang="az-Latn-AZ" sz="1200"/>
+          </a:p>
+          <a:p>
+            <a:endParaRPr lang="az-Latn-AZ" sz="1200"/>
+          </a:p>
+          <a:p>
+            <a:endParaRPr lang="az-Latn-AZ" sz="1200"/>
+          </a:p>
+          <a:p>
+            <a:endParaRPr lang="az-Latn-AZ" sz="1200"/>
+          </a:p>
+          <a:p>
+            <a:endParaRPr lang="az-Latn-AZ" sz="1200"/>
+          </a:p>
+          <a:p>
+            <a:r>
+              <a:rPr lang="az-Latn-AZ" sz="1200"/>
+              <a:t>2) </a:t>
+            </a:r>
+            <a:r>
+              <a:rPr lang="en-US" sz="1200" b="1">
+                <a:solidFill>
+                  <a:srgbClr val="FF0000"/>
+                </a:solidFill>
+              </a:rPr>
+              <a:t>Dinamik field yaratmaq</a:t>
+            </a:r>
+            <a:r>
+              <a:rPr lang="en-US" sz="1200">
+                <a:solidFill>
+                  <a:srgbClr val="FF0000"/>
+                </a:solidFill>
+              </a:rPr>
+              <a:t> </a:t>
+            </a:r>
+            <a:r>
+              <a:rPr lang="en-US" sz="1200"/>
+              <a:t>– məsələn, config faylından, istifadəçi roluna görə və ya başqa şərtlərə görə hansı field-lərin olacağını təyin edə bilərsən.</a:t>
+            </a:r>
+          </a:p>
+        </p:txBody>
+      </p:sp>
+      <p:pic>
+        <p:nvPicPr>
+          <p:cNvPr id="5" name="Picture 4">
+            <a:extLst>
+              <a:ext uri="{FF2B5EF4-FFF2-40B4-BE49-F238E27FC236}">
+                <a16:creationId xmlns:a16="http://schemas.microsoft.com/office/drawing/2014/main" id="{D299250E-4F81-4AC6-26A6-6B976015E464}"/>
+              </a:ext>
+            </a:extLst>
+          </p:cNvPr>
+          <p:cNvPicPr>
+            <a:picLocks noChangeAspect="1"/>
+          </p:cNvPicPr>
+          <p:nvPr/>
+        </p:nvPicPr>
+        <p:blipFill>
+          <a:blip r:embed="rId2"/>
+          <a:stretch>
+            <a:fillRect/>
+          </a:stretch>
+        </p:blipFill>
+        <p:spPr>
+          <a:xfrm>
+            <a:off x="203200" y="2097233"/>
+            <a:ext cx="2780145" cy="2050357"/>
+          </a:xfrm>
+          <a:prstGeom prst="rect">
+            <a:avLst/>
+          </a:prstGeom>
+        </p:spPr>
+      </p:pic>
+      <p:pic>
+        <p:nvPicPr>
+          <p:cNvPr id="4" name="Picture 3">
+            <a:extLst>
+              <a:ext uri="{FF2B5EF4-FFF2-40B4-BE49-F238E27FC236}">
+                <a16:creationId xmlns:a16="http://schemas.microsoft.com/office/drawing/2014/main" id="{3079EE0D-4712-E2E5-8E6B-DED25017210A}"/>
+              </a:ext>
+            </a:extLst>
+          </p:cNvPr>
+          <p:cNvPicPr>
+            <a:picLocks noChangeAspect="1"/>
+          </p:cNvPicPr>
+          <p:nvPr/>
+        </p:nvPicPr>
+        <p:blipFill>
+          <a:blip r:embed="rId3"/>
+          <a:stretch>
+            <a:fillRect/>
+          </a:stretch>
+        </p:blipFill>
+        <p:spPr>
+          <a:xfrm>
+            <a:off x="203201" y="4864946"/>
+            <a:ext cx="1976582" cy="1993054"/>
+          </a:xfrm>
+          <a:prstGeom prst="rect">
+            <a:avLst/>
+          </a:prstGeom>
+        </p:spPr>
+      </p:pic>
+    </p:spTree>
+    <p:extLst>
+      <p:ext uri="{BB962C8B-B14F-4D97-AF65-F5344CB8AC3E}">
+        <p14:creationId xmlns:p14="http://schemas.microsoft.com/office/powerpoint/2010/main" val="1870024290"/>
+      </p:ext>
+    </p:extLst>
+  </p:cSld>
+  <p:clrMapOvr>
+    <a:masterClrMapping/>
+  </p:clrMapOvr>
+</p:sld>
+</file>
+
+<file path=ppt/slides/slide68.xml><?xml version="1.0" encoding="utf-8"?>
 <p:sld xmlns:a="http://schemas.openxmlformats.org/drawingml/2006/main" xmlns:r="http://schemas.openxmlformats.org/officeDocument/2006/relationships" xmlns:p="http://schemas.openxmlformats.org/presentationml/2006/main">
   <p:cSld>
     <p:spTree>
@@ -19299,7 +21365,7 @@
         <p:spPr>
           <a:xfrm>
             <a:off x="203200" y="244826"/>
-            <a:ext cx="11822545" cy="369332"/>
+            <a:ext cx="11822545" cy="1448730"/>
           </a:xfrm>
           <a:prstGeom prst="rect">
             <a:avLst/>
@@ -19312,13 +21378,170 @@
           </a:bodyPr>
           <a:lstStyle/>
           <a:p>
-            <a:r>
-              <a:rPr lang="en-US">
-                <a:latin typeface="-apple-system"/>
-              </a:rPr>
-              <a:t>.</a:t>
-            </a:r>
-            <a:endParaRPr lang="en-US"/>
+            <a:pPr>
+              <a:lnSpc>
+                <a:spcPct val="150000"/>
+              </a:lnSpc>
+            </a:pPr>
+            <a:r>
+              <a:rPr lang="en-US" sz="1200" b="1">
+                <a:latin typeface="-apple-system"/>
+              </a:rPr>
+              <a:t>Niyə bu yanaşma lazımdır? </a:t>
+            </a:r>
+            <a:endParaRPr lang="az-Latn-AZ" sz="1200" b="1">
+              <a:latin typeface="-apple-system"/>
+            </a:endParaRPr>
+          </a:p>
+          <a:p>
+            <a:pPr marL="285750" indent="-285750">
+              <a:lnSpc>
+                <a:spcPct val="150000"/>
+              </a:lnSpc>
+              <a:buFont typeface="Arial" panose="020B0604020202020204" pitchFamily="34" charset="0"/>
+              <a:buChar char="•"/>
+            </a:pPr>
+            <a:r>
+              <a:rPr lang="en-US" sz="1200">
+                <a:latin typeface="-apple-system"/>
+              </a:rPr>
+              <a:t>Çünki </a:t>
+            </a:r>
+            <a:r>
+              <a:rPr lang="en-US" sz="1200" b="1">
+                <a:latin typeface="-apple-system"/>
+              </a:rPr>
+              <a:t>GraphQL</a:t>
+            </a:r>
+            <a:r>
+              <a:rPr lang="en-US" sz="1200">
+                <a:latin typeface="-apple-system"/>
+              </a:rPr>
+              <a:t>-də </a:t>
+            </a:r>
+            <a:r>
+              <a:rPr lang="en-US" sz="1200" b="1">
+                <a:highlight>
+                  <a:srgbClr val="FFFF00"/>
+                </a:highlight>
+                <a:latin typeface="-apple-system"/>
+              </a:rPr>
+              <a:t>resolve</a:t>
+            </a:r>
+            <a:r>
+              <a:rPr lang="az-Latn-AZ" sz="1200" b="1">
+                <a:latin typeface="-apple-system"/>
+              </a:rPr>
+              <a:t>,</a:t>
+            </a:r>
+            <a:r>
+              <a:rPr lang="en-US" sz="1200">
+                <a:latin typeface="-apple-system"/>
+              </a:rPr>
+              <a:t> sahə səviyyəsində təyin olunur. Əgər biz </a:t>
+            </a:r>
+            <a:r>
+              <a:rPr lang="en-US" sz="1200" b="1">
+                <a:latin typeface="-apple-system"/>
+              </a:rPr>
+              <a:t>$typeConfig['fields']</a:t>
+            </a:r>
+            <a:r>
+              <a:rPr lang="en-US" sz="1200">
+                <a:latin typeface="-apple-system"/>
+              </a:rPr>
+              <a:t>-i birbaşa </a:t>
+            </a:r>
+            <a:r>
+              <a:rPr lang="en-US" sz="1200" b="1">
+                <a:latin typeface="-apple-system"/>
+              </a:rPr>
+              <a:t>array</a:t>
+            </a:r>
+            <a:r>
+              <a:rPr lang="en-US" sz="1200">
+                <a:latin typeface="-apple-system"/>
+              </a:rPr>
+              <a:t> ilə dəyişsəydik → orijinal sahələri (id, title, description) itirmiş olardıq. </a:t>
+            </a:r>
+            <a:endParaRPr lang="az-Latn-AZ" sz="1200">
+              <a:latin typeface="-apple-system"/>
+            </a:endParaRPr>
+          </a:p>
+          <a:p>
+            <a:pPr marL="285750" indent="-285750">
+              <a:lnSpc>
+                <a:spcPct val="150000"/>
+              </a:lnSpc>
+              <a:buFont typeface="Arial" panose="020B0604020202020204" pitchFamily="34" charset="0"/>
+              <a:buChar char="•"/>
+            </a:pPr>
+            <a:r>
+              <a:rPr lang="en-US" sz="1200">
+                <a:latin typeface="-apple-system"/>
+              </a:rPr>
+              <a:t>Amma </a:t>
+            </a:r>
+            <a:r>
+              <a:rPr lang="en-US" sz="1200" b="1">
+                <a:latin typeface="-apple-system"/>
+              </a:rPr>
+              <a:t>funksiya</a:t>
+            </a:r>
+            <a:r>
+              <a:rPr lang="en-US" sz="1200">
+                <a:latin typeface="-apple-system"/>
+              </a:rPr>
+              <a:t> yazmaqla → əvvəlki sahələri saxlayırıq, sadəcə </a:t>
+            </a:r>
+            <a:r>
+              <a:rPr lang="en-US" sz="1200" b="1">
+                <a:latin typeface="-apple-system"/>
+              </a:rPr>
+              <a:t>author</a:t>
+            </a:r>
+            <a:r>
+              <a:rPr lang="en-US" sz="1200">
+                <a:latin typeface="-apple-system"/>
+              </a:rPr>
+              <a:t>-a əlavə “</a:t>
+            </a:r>
+            <a:r>
+              <a:rPr lang="en-US" sz="1200" b="1">
+                <a:highlight>
+                  <a:srgbClr val="FFFF00"/>
+                </a:highlight>
+                <a:latin typeface="-apple-system"/>
+              </a:rPr>
+              <a:t>resolver</a:t>
+            </a:r>
+            <a:r>
+              <a:rPr lang="en-US" sz="1200">
+                <a:latin typeface="-apple-system"/>
+              </a:rPr>
+              <a:t>” qoyuruq.</a:t>
+            </a:r>
+            <a:endParaRPr lang="az-Latn-AZ" sz="1200">
+              <a:latin typeface="-apple-system"/>
+            </a:endParaRPr>
+          </a:p>
+          <a:p>
+            <a:pPr>
+              <a:lnSpc>
+                <a:spcPct val="150000"/>
+              </a:lnSpc>
+            </a:pPr>
+            <a:endParaRPr lang="az-Latn-AZ" sz="1200">
+              <a:latin typeface="-apple-system"/>
+            </a:endParaRPr>
+          </a:p>
+          <a:p>
+            <a:pPr>
+              <a:lnSpc>
+                <a:spcPct val="150000"/>
+              </a:lnSpc>
+            </a:pPr>
+            <a:endParaRPr lang="en-US" sz="1200"/>
           </a:p>
         </p:txBody>
       </p:sp>
@@ -19335,7 +21558,7 @@
 </p:sld>
 </file>
 
-<file path=ppt/slides/slide67.xml><?xml version="1.0" encoding="utf-8"?>
+<file path=ppt/slides/slide69.xml><?xml version="1.0" encoding="utf-8"?>
 <p:sld xmlns:a="http://schemas.openxmlformats.org/drawingml/2006/main" xmlns:r="http://schemas.openxmlformats.org/officeDocument/2006/relationships" xmlns:p="http://schemas.openxmlformats.org/presentationml/2006/main">
   <p:cSld>
     <p:spTree>
@@ -19343,7 +21566,7 @@
         <p:cNvPr id="1" name="">
           <a:extLst>
             <a:ext uri="{FF2B5EF4-FFF2-40B4-BE49-F238E27FC236}">
-              <a16:creationId xmlns:a16="http://schemas.microsoft.com/office/drawing/2014/main" id="{339540BF-609E-AAA5-5266-E89B7896D93D}"/>
+              <a16:creationId xmlns:a16="http://schemas.microsoft.com/office/drawing/2014/main" id="{B0699C86-31F7-C82E-9D21-C6B924F9867A}"/>
             </a:ext>
           </a:extLst>
         </p:cNvPr>
@@ -19363,7 +21586,7 @@
           <p:cNvPr id="7" name="TextBox 6">
             <a:extLst>
               <a:ext uri="{FF2B5EF4-FFF2-40B4-BE49-F238E27FC236}">
-                <a16:creationId xmlns:a16="http://schemas.microsoft.com/office/drawing/2014/main" id="{D1F8412A-D6A8-041E-231F-2EF1C0ABD405}"/>
+                <a16:creationId xmlns:a16="http://schemas.microsoft.com/office/drawing/2014/main" id="{127B3EED-4E80-2D65-4388-1D4EE80413B4}"/>
               </a:ext>
             </a:extLst>
           </p:cNvPr>
@@ -19372,8 +21595,8 @@
         </p:nvSpPr>
         <p:spPr>
           <a:xfrm>
-            <a:off x="203200" y="244826"/>
-            <a:ext cx="11822545" cy="369332"/>
+            <a:off x="184727" y="780535"/>
+            <a:ext cx="11822545" cy="3788858"/>
           </a:xfrm>
           <a:prstGeom prst="rect">
             <a:avLst/>
@@ -19386,168 +21609,370 @@
           </a:bodyPr>
           <a:lstStyle/>
           <a:p>
+            <a:pPr>
+              <a:lnSpc>
+                <a:spcPct val="150000"/>
+              </a:lnSpc>
+            </a:pPr>
             <a:r>
               <a:rPr lang="en-US">
                 <a:latin typeface="-apple-system"/>
               </a:rPr>
-              <a:t>.</a:t>
-            </a:r>
+              <a:t>Burada </a:t>
+            </a:r>
+            <a:r>
+              <a:rPr lang="en-US" b="1">
+                <a:latin typeface="-apple-system"/>
+              </a:rPr>
+              <a:t>author</a:t>
+            </a:r>
+            <a:r>
+              <a:rPr lang="en-US">
+                <a:latin typeface="-apple-system"/>
+              </a:rPr>
+              <a:t> sahəsi üçün </a:t>
+            </a:r>
+            <a:r>
+              <a:rPr lang="en-US" b="1">
+                <a:latin typeface="-apple-system"/>
+              </a:rPr>
+              <a:t>resolver</a:t>
+            </a:r>
+            <a:r>
+              <a:rPr lang="en-US">
+                <a:latin typeface="-apple-system"/>
+              </a:rPr>
+              <a:t> yazılır.</a:t>
+            </a:r>
+          </a:p>
+          <a:p>
+            <a:pPr>
+              <a:lnSpc>
+                <a:spcPct val="150000"/>
+              </a:lnSpc>
+            </a:pPr>
+            <a:endParaRPr lang="en-US">
+              <a:latin typeface="-apple-system"/>
+            </a:endParaRPr>
+          </a:p>
+          <a:p>
+            <a:pPr marL="742950" lvl="1" indent="-285750">
+              <a:lnSpc>
+                <a:spcPct val="150000"/>
+              </a:lnSpc>
+              <a:buFont typeface="Arial" panose="020B0604020202020204" pitchFamily="34" charset="0"/>
+              <a:buChar char="•"/>
+            </a:pPr>
+            <a:r>
+              <a:rPr lang="en-US" b="1">
+                <a:latin typeface="-apple-system"/>
+              </a:rPr>
+              <a:t>resolve funksiyası </a:t>
+            </a:r>
+            <a:r>
+              <a:rPr lang="en-US">
+                <a:latin typeface="-apple-system"/>
+              </a:rPr>
+              <a:t>→ GraphQL-də konkret bir field soruşulanda məlumatın necə tapılacağını göstərir.</a:t>
+            </a:r>
+          </a:p>
+          <a:p>
+            <a:pPr marL="742950" lvl="1" indent="-285750">
+              <a:lnSpc>
+                <a:spcPct val="150000"/>
+              </a:lnSpc>
+              <a:buFont typeface="Arial" panose="020B0604020202020204" pitchFamily="34" charset="0"/>
+              <a:buChar char="•"/>
+            </a:pPr>
+            <a:endParaRPr lang="en-US">
+              <a:latin typeface="-apple-system"/>
+            </a:endParaRPr>
+          </a:p>
+          <a:p>
+            <a:pPr marL="742950" lvl="1" indent="-285750">
+              <a:lnSpc>
+                <a:spcPct val="150000"/>
+              </a:lnSpc>
+              <a:buFont typeface="Arial" panose="020B0604020202020204" pitchFamily="34" charset="0"/>
+              <a:buChar char="•"/>
+            </a:pPr>
+            <a:r>
+              <a:rPr lang="en-US" b="1">
+                <a:latin typeface="-apple-system"/>
+              </a:rPr>
+              <a:t>$note </a:t>
+            </a:r>
+            <a:r>
+              <a:rPr lang="en-US">
+                <a:latin typeface="-apple-system"/>
+              </a:rPr>
+              <a:t>→ hazırda işlənən note obyektidir (</a:t>
+            </a:r>
+            <a:r>
+              <a:rPr lang="az-Latn-AZ">
+                <a:latin typeface="-apple-system"/>
+              </a:rPr>
+              <a:t>   </a:t>
+            </a:r>
+            <a:r>
+              <a:rPr lang="en-US">
+                <a:highlight>
+                  <a:srgbClr val="FFFF00"/>
+                </a:highlight>
+                <a:latin typeface="-apple-system"/>
+              </a:rPr>
+              <a:t>{ </a:t>
+            </a:r>
+            <a:r>
+              <a:rPr lang="en-US" b="1">
+                <a:highlight>
+                  <a:srgbClr val="FFFF00"/>
+                </a:highlight>
+                <a:latin typeface="-apple-system"/>
+              </a:rPr>
+              <a:t>id</a:t>
+            </a:r>
+            <a:r>
+              <a:rPr lang="en-US">
+                <a:highlight>
+                  <a:srgbClr val="FFFF00"/>
+                </a:highlight>
+                <a:latin typeface="-apple-system"/>
+              </a:rPr>
+              <a:t>: "1", </a:t>
+            </a:r>
+            <a:r>
+              <a:rPr lang="en-US" b="1">
+                <a:highlight>
+                  <a:srgbClr val="FFFF00"/>
+                </a:highlight>
+                <a:latin typeface="-apple-system"/>
+              </a:rPr>
+              <a:t>title</a:t>
+            </a:r>
+            <a:r>
+              <a:rPr lang="en-US">
+                <a:highlight>
+                  <a:srgbClr val="FFFF00"/>
+                </a:highlight>
+                <a:latin typeface="-apple-system"/>
+              </a:rPr>
+              <a:t>: "...", </a:t>
+            </a:r>
+            <a:r>
+              <a:rPr lang="en-US" b="1">
+                <a:highlight>
+                  <a:srgbClr val="FFFF00"/>
+                </a:highlight>
+                <a:latin typeface="-apple-system"/>
+              </a:rPr>
+              <a:t>authorId</a:t>
+            </a:r>
+            <a:r>
+              <a:rPr lang="en-US">
+                <a:highlight>
+                  <a:srgbClr val="FFFF00"/>
+                </a:highlight>
+                <a:latin typeface="-apple-system"/>
+              </a:rPr>
+              <a:t>: "1" }</a:t>
+            </a:r>
+            <a:r>
+              <a:rPr lang="az-Latn-AZ">
+                <a:latin typeface="-apple-system"/>
+              </a:rPr>
+              <a:t>   </a:t>
+            </a:r>
+            <a:r>
+              <a:rPr lang="en-US">
+                <a:latin typeface="-apple-system"/>
+              </a:rPr>
+              <a:t>).</a:t>
+            </a:r>
+            <a:r>
+              <a:rPr lang="az-Latn-AZ">
+                <a:latin typeface="-apple-system"/>
+              </a:rPr>
+              <a:t> Çünki </a:t>
+            </a:r>
+            <a:r>
+              <a:rPr lang="az-Latn-AZ" b="1">
+                <a:solidFill>
+                  <a:srgbClr val="0070C0"/>
+                </a:solidFill>
+                <a:latin typeface="-apple-system"/>
+              </a:rPr>
+              <a:t>if ($name === </a:t>
+            </a:r>
+            <a:r>
+              <a:rPr lang="en-US" b="1">
+                <a:solidFill>
+                  <a:srgbClr val="0070C0"/>
+                </a:solidFill>
+                <a:latin typeface="-apple-system"/>
+              </a:rPr>
+              <a:t>‘</a:t>
+            </a:r>
+            <a:r>
+              <a:rPr lang="az-Latn-AZ" b="1">
+                <a:solidFill>
+                  <a:srgbClr val="0070C0"/>
+                </a:solidFill>
+                <a:latin typeface="-apple-system"/>
+              </a:rPr>
+              <a:t>Note</a:t>
+            </a:r>
+            <a:r>
+              <a:rPr lang="en-US" b="1">
+                <a:solidFill>
+                  <a:srgbClr val="0070C0"/>
+                </a:solidFill>
+                <a:latin typeface="-apple-system"/>
+              </a:rPr>
+              <a:t>’</a:t>
+            </a:r>
+            <a:r>
+              <a:rPr lang="az-Latn-AZ" b="1">
+                <a:solidFill>
+                  <a:srgbClr val="0070C0"/>
+                </a:solidFill>
+                <a:latin typeface="-apple-system"/>
+              </a:rPr>
+              <a:t>)</a:t>
+            </a:r>
+            <a:r>
+              <a:rPr lang="az-Latn-AZ">
+                <a:latin typeface="-apple-system"/>
+              </a:rPr>
+              <a:t> şərti ilə biz sadəcə </a:t>
+            </a:r>
+            <a:r>
+              <a:rPr lang="az-Latn-AZ" b="1">
+                <a:latin typeface="-apple-system"/>
+              </a:rPr>
+              <a:t>Note</a:t>
+            </a:r>
+            <a:r>
+              <a:rPr lang="az-Latn-AZ">
+                <a:latin typeface="-apple-system"/>
+              </a:rPr>
+              <a:t> ilə işləyirik. </a:t>
+            </a:r>
+            <a:r>
+              <a:rPr lang="az-Latn-AZ" b="1">
+                <a:latin typeface="-apple-system"/>
+              </a:rPr>
+              <a:t>Author</a:t>
+            </a:r>
+            <a:r>
+              <a:rPr lang="az-Latn-AZ">
+                <a:latin typeface="-apple-system"/>
+              </a:rPr>
+              <a:t> isə bu </a:t>
+            </a:r>
+            <a:r>
+              <a:rPr lang="az-Latn-AZ" b="1">
+                <a:latin typeface="-apple-system"/>
+              </a:rPr>
+              <a:t>Note</a:t>
+            </a:r>
+            <a:r>
+              <a:rPr lang="az-Latn-AZ">
+                <a:latin typeface="-apple-system"/>
+              </a:rPr>
+              <a:t> içindədir. Bizə həmin </a:t>
+            </a:r>
+            <a:r>
+              <a:rPr lang="az-Latn-AZ" b="1">
+                <a:latin typeface="-apple-system"/>
+              </a:rPr>
+              <a:t>Author</a:t>
+            </a:r>
+            <a:r>
+              <a:rPr lang="az-Latn-AZ">
+                <a:latin typeface="-apple-system"/>
+              </a:rPr>
+              <a:t> üçün bilavasitə </a:t>
+            </a:r>
+            <a:r>
+              <a:rPr lang="az-Latn-AZ" b="1">
+                <a:latin typeface="-apple-system"/>
+              </a:rPr>
+              <a:t>Note</a:t>
+            </a:r>
+            <a:r>
+              <a:rPr lang="az-Latn-AZ">
+                <a:latin typeface="-apple-system"/>
+              </a:rPr>
+              <a:t> üzərində müraciət edərək </a:t>
+            </a:r>
+            <a:r>
+              <a:rPr lang="az-Latn-AZ" b="1">
+                <a:latin typeface="-apple-system"/>
+              </a:rPr>
+              <a:t>resolve funskiya </a:t>
+            </a:r>
+            <a:r>
+              <a:rPr lang="az-Latn-AZ">
+                <a:latin typeface="-apple-system"/>
+              </a:rPr>
+              <a:t>yazırıq.</a:t>
+            </a:r>
+          </a:p>
+          <a:p>
+            <a:pPr>
+              <a:lnSpc>
+                <a:spcPct val="150000"/>
+              </a:lnSpc>
+            </a:pPr>
+            <a:endParaRPr lang="az-Latn-AZ">
+              <a:latin typeface="-apple-system"/>
+            </a:endParaRPr>
+          </a:p>
+          <a:p>
+            <a:pPr>
+              <a:lnSpc>
+                <a:spcPct val="150000"/>
+              </a:lnSpc>
+            </a:pPr>
             <a:endParaRPr lang="en-US"/>
           </a:p>
         </p:txBody>
       </p:sp>
-    </p:spTree>
-    <p:extLst>
-      <p:ext uri="{BB962C8B-B14F-4D97-AF65-F5344CB8AC3E}">
-        <p14:creationId xmlns:p14="http://schemas.microsoft.com/office/powerpoint/2010/main" val="3911610450"/>
-      </p:ext>
-    </p:extLst>
-  </p:cSld>
-  <p:clrMapOvr>
-    <a:masterClrMapping/>
-  </p:clrMapOvr>
-</p:sld>
-</file>
-
-<file path=ppt/slides/slide68.xml><?xml version="1.0" encoding="utf-8"?>
-<p:sld xmlns:a="http://schemas.openxmlformats.org/drawingml/2006/main" xmlns:r="http://schemas.openxmlformats.org/officeDocument/2006/relationships" xmlns:p="http://schemas.openxmlformats.org/presentationml/2006/main">
-  <p:cSld>
-    <p:spTree>
-      <p:nvGrpSpPr>
-        <p:cNvPr id="1" name="">
-          <a:extLst>
-            <a:ext uri="{FF2B5EF4-FFF2-40B4-BE49-F238E27FC236}">
-              <a16:creationId xmlns:a16="http://schemas.microsoft.com/office/drawing/2014/main" id="{0B98BB03-EDD4-0579-9CEF-2B346457FB36}"/>
-            </a:ext>
-          </a:extLst>
-        </p:cNvPr>
-        <p:cNvGrpSpPr/>
-        <p:nvPr/>
-      </p:nvGrpSpPr>
-      <p:grpSpPr>
-        <a:xfrm>
-          <a:off x="0" y="0"/>
-          <a:ext cx="0" cy="0"/>
-          <a:chOff x="0" y="0"/>
-          <a:chExt cx="0" cy="0"/>
-        </a:xfrm>
-      </p:grpSpPr>
-      <p:sp>
-        <p:nvSpPr>
-          <p:cNvPr id="7" name="TextBox 6">
-            <a:extLst>
-              <a:ext uri="{FF2B5EF4-FFF2-40B4-BE49-F238E27FC236}">
-                <a16:creationId xmlns:a16="http://schemas.microsoft.com/office/drawing/2014/main" id="{563A198B-AADB-CF6B-0214-2ADAD7F3D56E}"/>
-              </a:ext>
-            </a:extLst>
-          </p:cNvPr>
-          <p:cNvSpPr txBox="1"/>
+      <p:pic>
+        <p:nvPicPr>
+          <p:cNvPr id="3" name="Picture 2">
+            <a:extLst>
+              <a:ext uri="{FF2B5EF4-FFF2-40B4-BE49-F238E27FC236}">
+                <a16:creationId xmlns:a16="http://schemas.microsoft.com/office/drawing/2014/main" id="{ABF8518B-9CA8-32A0-E2F1-C434C6923E78}"/>
+              </a:ext>
+            </a:extLst>
+          </p:cNvPr>
+          <p:cNvPicPr>
+            <a:picLocks noChangeAspect="1"/>
+          </p:cNvPicPr>
           <p:nvPr/>
-        </p:nvSpPr>
+        </p:nvPicPr>
+        <p:blipFill>
+          <a:blip r:embed="rId2"/>
+          <a:stretch>
+            <a:fillRect/>
+          </a:stretch>
+        </p:blipFill>
         <p:spPr>
           <a:xfrm>
-            <a:off x="203200" y="244826"/>
-            <a:ext cx="11822545" cy="369332"/>
+            <a:off x="0" y="0"/>
+            <a:ext cx="5706271" cy="666843"/>
           </a:xfrm>
           <a:prstGeom prst="rect">
             <a:avLst/>
           </a:prstGeom>
-          <a:noFill/>
         </p:spPr>
-        <p:txBody>
-          <a:bodyPr wrap="square">
-            <a:spAutoFit/>
-          </a:bodyPr>
-          <a:lstStyle/>
-          <a:p>
-            <a:r>
-              <a:rPr lang="en-US">
-                <a:latin typeface="-apple-system"/>
-              </a:rPr>
-              <a:t>.</a:t>
-            </a:r>
-            <a:endParaRPr lang="en-US"/>
-          </a:p>
-        </p:txBody>
-      </p:sp>
+      </p:pic>
     </p:spTree>
     <p:extLst>
       <p:ext uri="{BB962C8B-B14F-4D97-AF65-F5344CB8AC3E}">
-        <p14:creationId xmlns:p14="http://schemas.microsoft.com/office/powerpoint/2010/main" val="2301075619"/>
-      </p:ext>
-    </p:extLst>
-  </p:cSld>
-  <p:clrMapOvr>
-    <a:masterClrMapping/>
-  </p:clrMapOvr>
-</p:sld>
-</file>
-
-<file path=ppt/slides/slide69.xml><?xml version="1.0" encoding="utf-8"?>
-<p:sld xmlns:a="http://schemas.openxmlformats.org/drawingml/2006/main" xmlns:r="http://schemas.openxmlformats.org/officeDocument/2006/relationships" xmlns:p="http://schemas.openxmlformats.org/presentationml/2006/main">
-  <p:cSld>
-    <p:spTree>
-      <p:nvGrpSpPr>
-        <p:cNvPr id="1" name="">
-          <a:extLst>
-            <a:ext uri="{FF2B5EF4-FFF2-40B4-BE49-F238E27FC236}">
-              <a16:creationId xmlns:a16="http://schemas.microsoft.com/office/drawing/2014/main" id="{4E218982-6DEC-852E-B5B8-4547E1ECB373}"/>
-            </a:ext>
-          </a:extLst>
-        </p:cNvPr>
-        <p:cNvGrpSpPr/>
-        <p:nvPr/>
-      </p:nvGrpSpPr>
-      <p:grpSpPr>
-        <a:xfrm>
-          <a:off x="0" y="0"/>
-          <a:ext cx="0" cy="0"/>
-          <a:chOff x="0" y="0"/>
-          <a:chExt cx="0" cy="0"/>
-        </a:xfrm>
-      </p:grpSpPr>
-      <p:sp>
-        <p:nvSpPr>
-          <p:cNvPr id="7" name="TextBox 6">
-            <a:extLst>
-              <a:ext uri="{FF2B5EF4-FFF2-40B4-BE49-F238E27FC236}">
-                <a16:creationId xmlns:a16="http://schemas.microsoft.com/office/drawing/2014/main" id="{3BF1926F-FC68-5CA4-24E1-82DBE8ECE4A2}"/>
-              </a:ext>
-            </a:extLst>
-          </p:cNvPr>
-          <p:cNvSpPr txBox="1"/>
-          <p:nvPr/>
-        </p:nvSpPr>
-        <p:spPr>
-          <a:xfrm>
-            <a:off x="203200" y="244826"/>
-            <a:ext cx="11822545" cy="369332"/>
-          </a:xfrm>
-          <a:prstGeom prst="rect">
-            <a:avLst/>
-          </a:prstGeom>
-          <a:noFill/>
-        </p:spPr>
-        <p:txBody>
-          <a:bodyPr wrap="square">
-            <a:spAutoFit/>
-          </a:bodyPr>
-          <a:lstStyle/>
-          <a:p>
-            <a:r>
-              <a:rPr lang="en-US">
-                <a:latin typeface="-apple-system"/>
-              </a:rPr>
-              <a:t>.</a:t>
-            </a:r>
-            <a:endParaRPr lang="en-US"/>
-          </a:p>
-        </p:txBody>
-      </p:sp>
-    </p:spTree>
-    <p:extLst>
-      <p:ext uri="{BB962C8B-B14F-4D97-AF65-F5344CB8AC3E}">
-        <p14:creationId xmlns:p14="http://schemas.microsoft.com/office/powerpoint/2010/main" val="1462682254"/>
+        <p14:creationId xmlns:p14="http://schemas.microsoft.com/office/powerpoint/2010/main" val="2171182834"/>
       </p:ext>
     </p:extLst>
   </p:cSld>
@@ -19767,7 +22192,7 @@
         <p:cNvPr id="1" name="">
           <a:extLst>
             <a:ext uri="{FF2B5EF4-FFF2-40B4-BE49-F238E27FC236}">
-              <a16:creationId xmlns:a16="http://schemas.microsoft.com/office/drawing/2014/main" id="{DF1834BC-DB75-1FBC-7EDF-7D4FACEE3C1C}"/>
+              <a16:creationId xmlns:a16="http://schemas.microsoft.com/office/drawing/2014/main" id="{0CA55F3F-3E3C-5339-2EC7-99279C7D1849}"/>
             </a:ext>
           </a:extLst>
         </p:cNvPr>
@@ -19787,7 +22212,952 @@
           <p:cNvPr id="7" name="TextBox 6">
             <a:extLst>
               <a:ext uri="{FF2B5EF4-FFF2-40B4-BE49-F238E27FC236}">
-                <a16:creationId xmlns:a16="http://schemas.microsoft.com/office/drawing/2014/main" id="{E3D6877A-9572-2931-8978-76FD76516DDC}"/>
+                <a16:creationId xmlns:a16="http://schemas.microsoft.com/office/drawing/2014/main" id="{FEC86564-DA05-B339-BC6C-C17701DB2C82}"/>
+              </a:ext>
+            </a:extLst>
+          </p:cNvPr>
+          <p:cNvSpPr txBox="1"/>
+          <p:nvPr/>
+        </p:nvSpPr>
+        <p:spPr>
+          <a:xfrm>
+            <a:off x="110837" y="217117"/>
+            <a:ext cx="11822545" cy="6463308"/>
+          </a:xfrm>
+          <a:prstGeom prst="rect">
+            <a:avLst/>
+          </a:prstGeom>
+          <a:noFill/>
+        </p:spPr>
+        <p:txBody>
+          <a:bodyPr wrap="square">
+            <a:spAutoFit/>
+          </a:bodyPr>
+          <a:lstStyle/>
+          <a:p>
+            <a:endParaRPr lang="az-Latn-AZ">
+              <a:latin typeface="-apple-system"/>
+            </a:endParaRPr>
+          </a:p>
+          <a:p>
+            <a:endParaRPr lang="az-Latn-AZ">
+              <a:latin typeface="-apple-system"/>
+            </a:endParaRPr>
+          </a:p>
+          <a:p>
+            <a:endParaRPr lang="az-Latn-AZ">
+              <a:latin typeface="-apple-system"/>
+            </a:endParaRPr>
+          </a:p>
+          <a:p>
+            <a:endParaRPr lang="az-Latn-AZ">
+              <a:latin typeface="-apple-system"/>
+            </a:endParaRPr>
+          </a:p>
+          <a:p>
+            <a:endParaRPr lang="az-Latn-AZ">
+              <a:latin typeface="-apple-system"/>
+            </a:endParaRPr>
+          </a:p>
+          <a:p>
+            <a:r>
+              <a:rPr lang="en-US">
+                <a:latin typeface="-apple-system"/>
+              </a:rPr>
+              <a:t>Burada sadə dövrə ilə müəllif axtarılır.</a:t>
+            </a:r>
+          </a:p>
+          <a:p>
+            <a:endParaRPr lang="en-US">
+              <a:latin typeface="-apple-system"/>
+            </a:endParaRPr>
+          </a:p>
+          <a:p>
+            <a:pPr marL="742950" lvl="1" indent="-285750">
+              <a:buFont typeface="Arial" panose="020B0604020202020204" pitchFamily="34" charset="0"/>
+              <a:buChar char="•"/>
+            </a:pPr>
+            <a:r>
+              <a:rPr lang="en-US">
+                <a:latin typeface="-apple-system"/>
+              </a:rPr>
+              <a:t>Əgər </a:t>
+            </a:r>
+            <a:r>
+              <a:rPr lang="en-US" b="1">
+                <a:latin typeface="-apple-system"/>
+              </a:rPr>
+              <a:t>note['authorId'] </a:t>
+            </a:r>
+            <a:r>
+              <a:rPr lang="en-US">
+                <a:latin typeface="-apple-system"/>
+              </a:rPr>
+              <a:t>ilə </a:t>
+            </a:r>
+            <a:r>
+              <a:rPr lang="en-US" b="1">
+                <a:latin typeface="-apple-system"/>
+              </a:rPr>
+              <a:t>author['id'] </a:t>
+            </a:r>
+            <a:r>
+              <a:rPr lang="en-US">
+                <a:latin typeface="-apple-system"/>
+              </a:rPr>
+              <a:t>eyni olsa, həmin müəllif qaytarılır.</a:t>
+            </a:r>
+          </a:p>
+          <a:p>
+            <a:pPr marL="742950" lvl="1" indent="-285750">
+              <a:buFont typeface="Arial" panose="020B0604020202020204" pitchFamily="34" charset="0"/>
+              <a:buChar char="•"/>
+            </a:pPr>
+            <a:endParaRPr lang="en-US">
+              <a:latin typeface="-apple-system"/>
+            </a:endParaRPr>
+          </a:p>
+          <a:p>
+            <a:pPr marL="742950" lvl="1" indent="-285750">
+              <a:buFont typeface="Arial" panose="020B0604020202020204" pitchFamily="34" charset="0"/>
+              <a:buChar char="•"/>
+            </a:pPr>
+            <a:r>
+              <a:rPr lang="en-US">
+                <a:latin typeface="-apple-system"/>
+              </a:rPr>
+              <a:t>Əgər heç kim tapılmazsa, </a:t>
+            </a:r>
+            <a:r>
+              <a:rPr lang="en-US" b="1">
+                <a:latin typeface="-apple-system"/>
+              </a:rPr>
+              <a:t>null</a:t>
+            </a:r>
+            <a:r>
+              <a:rPr lang="en-US">
+                <a:latin typeface="-apple-system"/>
+              </a:rPr>
+              <a:t> qaytarır.</a:t>
+            </a:r>
+            <a:endParaRPr lang="az-Latn-AZ">
+              <a:latin typeface="-apple-system"/>
+            </a:endParaRPr>
+          </a:p>
+          <a:p>
+            <a:endParaRPr lang="az-Latn-AZ">
+              <a:latin typeface="-apple-system"/>
+            </a:endParaRPr>
+          </a:p>
+          <a:p>
+            <a:endParaRPr lang="az-Latn-AZ">
+              <a:latin typeface="-apple-system"/>
+            </a:endParaRPr>
+          </a:p>
+          <a:p>
+            <a:endParaRPr lang="az-Latn-AZ">
+              <a:latin typeface="-apple-system"/>
+            </a:endParaRPr>
+          </a:p>
+          <a:p>
+            <a:endParaRPr lang="az-Latn-AZ">
+              <a:latin typeface="-apple-system"/>
+            </a:endParaRPr>
+          </a:p>
+          <a:p>
+            <a:endParaRPr lang="az-Latn-AZ">
+              <a:latin typeface="-apple-system"/>
+            </a:endParaRPr>
+          </a:p>
+          <a:p>
+            <a:endParaRPr lang="az-Latn-AZ">
+              <a:latin typeface="-apple-system"/>
+            </a:endParaRPr>
+          </a:p>
+          <a:p>
+            <a:r>
+              <a:rPr lang="az-Latn-AZ">
+                <a:latin typeface="-apple-system"/>
+              </a:rPr>
+              <a:t>Sonda sahələr yenilənmiş formada geri qaytarılır (yəni author artıq resolver-lə birlikdə işləyəcək).</a:t>
+            </a:r>
+          </a:p>
+          <a:p>
+            <a:endParaRPr lang="az-Latn-AZ">
+              <a:latin typeface="-apple-system"/>
+            </a:endParaRPr>
+          </a:p>
+          <a:p>
+            <a:endParaRPr lang="az-Latn-AZ">
+              <a:latin typeface="-apple-system"/>
+            </a:endParaRPr>
+          </a:p>
+          <a:p>
+            <a:endParaRPr lang="en-US"/>
+          </a:p>
+          <a:p>
+            <a:endParaRPr lang="en-US"/>
+          </a:p>
+          <a:p>
+            <a:endParaRPr lang="en-US"/>
+          </a:p>
+          <a:p>
+            <a:r>
+              <a:rPr lang="en-US"/>
+              <a:t>Əlavə edilmiş resolver-li tip konfiqurasiyası geri qaytarılır.</a:t>
+            </a:r>
+          </a:p>
+        </p:txBody>
+      </p:sp>
+      <p:pic>
+        <p:nvPicPr>
+          <p:cNvPr id="3" name="Picture 2">
+            <a:extLst>
+              <a:ext uri="{FF2B5EF4-FFF2-40B4-BE49-F238E27FC236}">
+                <a16:creationId xmlns:a16="http://schemas.microsoft.com/office/drawing/2014/main" id="{CD190625-72D1-255C-551C-95C87006F3AD}"/>
+              </a:ext>
+            </a:extLst>
+          </p:cNvPr>
+          <p:cNvPicPr>
+            <a:picLocks noChangeAspect="1"/>
+          </p:cNvPicPr>
+          <p:nvPr/>
+        </p:nvPicPr>
+        <p:blipFill>
+          <a:blip r:embed="rId2"/>
+          <a:stretch>
+            <a:fillRect/>
+          </a:stretch>
+        </p:blipFill>
+        <p:spPr>
+          <a:xfrm>
+            <a:off x="0" y="0"/>
+            <a:ext cx="3734321" cy="1514686"/>
+          </a:xfrm>
+          <a:prstGeom prst="rect">
+            <a:avLst/>
+          </a:prstGeom>
+        </p:spPr>
+      </p:pic>
+      <p:pic>
+        <p:nvPicPr>
+          <p:cNvPr id="5" name="Picture 4">
+            <a:extLst>
+              <a:ext uri="{FF2B5EF4-FFF2-40B4-BE49-F238E27FC236}">
+                <a16:creationId xmlns:a16="http://schemas.microsoft.com/office/drawing/2014/main" id="{60BDA0D1-B28C-69E8-6136-E2FF5F7782D5}"/>
+              </a:ext>
+            </a:extLst>
+          </p:cNvPr>
+          <p:cNvPicPr>
+            <a:picLocks noChangeAspect="1"/>
+          </p:cNvPicPr>
+          <p:nvPr/>
+        </p:nvPicPr>
+        <p:blipFill>
+          <a:blip r:embed="rId3"/>
+          <a:stretch>
+            <a:fillRect/>
+          </a:stretch>
+        </p:blipFill>
+        <p:spPr>
+          <a:xfrm>
+            <a:off x="0" y="4152584"/>
+            <a:ext cx="1524213" cy="400106"/>
+          </a:xfrm>
+          <a:prstGeom prst="rect">
+            <a:avLst/>
+          </a:prstGeom>
+        </p:spPr>
+      </p:pic>
+      <p:pic>
+        <p:nvPicPr>
+          <p:cNvPr id="8" name="Picture 7">
+            <a:extLst>
+              <a:ext uri="{FF2B5EF4-FFF2-40B4-BE49-F238E27FC236}">
+                <a16:creationId xmlns:a16="http://schemas.microsoft.com/office/drawing/2014/main" id="{89A403D0-4628-A838-8B90-D27BB7DDE06D}"/>
+              </a:ext>
+            </a:extLst>
+          </p:cNvPr>
+          <p:cNvPicPr>
+            <a:picLocks noChangeAspect="1"/>
+          </p:cNvPicPr>
+          <p:nvPr/>
+        </p:nvPicPr>
+        <p:blipFill>
+          <a:blip r:embed="rId4"/>
+          <a:stretch>
+            <a:fillRect/>
+          </a:stretch>
+        </p:blipFill>
+        <p:spPr>
+          <a:xfrm>
+            <a:off x="0" y="5843628"/>
+            <a:ext cx="1619476" cy="381053"/>
+          </a:xfrm>
+          <a:prstGeom prst="rect">
+            <a:avLst/>
+          </a:prstGeom>
+        </p:spPr>
+      </p:pic>
+    </p:spTree>
+    <p:extLst>
+      <p:ext uri="{BB962C8B-B14F-4D97-AF65-F5344CB8AC3E}">
+        <p14:creationId xmlns:p14="http://schemas.microsoft.com/office/powerpoint/2010/main" val="3231862043"/>
+      </p:ext>
+    </p:extLst>
+  </p:cSld>
+  <p:clrMapOvr>
+    <a:masterClrMapping/>
+  </p:clrMapOvr>
+</p:sld>
+</file>
+
+<file path=ppt/slides/slide71.xml><?xml version="1.0" encoding="utf-8"?>
+<p:sld xmlns:a="http://schemas.openxmlformats.org/drawingml/2006/main" xmlns:r="http://schemas.openxmlformats.org/officeDocument/2006/relationships" xmlns:p="http://schemas.openxmlformats.org/presentationml/2006/main">
+  <p:cSld>
+    <p:spTree>
+      <p:nvGrpSpPr>
+        <p:cNvPr id="1" name="">
+          <a:extLst>
+            <a:ext uri="{FF2B5EF4-FFF2-40B4-BE49-F238E27FC236}">
+              <a16:creationId xmlns:a16="http://schemas.microsoft.com/office/drawing/2014/main" id="{DC413446-6405-4F00-2830-807E3F0B4F6E}"/>
+            </a:ext>
+          </a:extLst>
+        </p:cNvPr>
+        <p:cNvGrpSpPr/>
+        <p:nvPr/>
+      </p:nvGrpSpPr>
+      <p:grpSpPr>
+        <a:xfrm>
+          <a:off x="0" y="0"/>
+          <a:ext cx="0" cy="0"/>
+          <a:chOff x="0" y="0"/>
+          <a:chExt cx="0" cy="0"/>
+        </a:xfrm>
+      </p:grpSpPr>
+      <p:sp>
+        <p:nvSpPr>
+          <p:cNvPr id="7" name="TextBox 6">
+            <a:extLst>
+              <a:ext uri="{FF2B5EF4-FFF2-40B4-BE49-F238E27FC236}">
+                <a16:creationId xmlns:a16="http://schemas.microsoft.com/office/drawing/2014/main" id="{E144D4E7-83DD-4009-C474-22475FC1E8EC}"/>
+              </a:ext>
+            </a:extLst>
+          </p:cNvPr>
+          <p:cNvSpPr txBox="1"/>
+          <p:nvPr/>
+        </p:nvSpPr>
+        <p:spPr>
+          <a:xfrm>
+            <a:off x="203200" y="244826"/>
+            <a:ext cx="11822545" cy="4524315"/>
+          </a:xfrm>
+          <a:prstGeom prst="rect">
+            <a:avLst/>
+          </a:prstGeom>
+          <a:noFill/>
+        </p:spPr>
+        <p:txBody>
+          <a:bodyPr wrap="square">
+            <a:spAutoFit/>
+          </a:bodyPr>
+          <a:lstStyle/>
+          <a:p>
+            <a:r>
+              <a:rPr lang="en-US">
+                <a:latin typeface="-apple-system"/>
+              </a:rPr>
+              <a:t>.</a:t>
+            </a:r>
+          </a:p>
+          <a:p>
+            <a:endParaRPr lang="en-US">
+              <a:latin typeface="-apple-system"/>
+            </a:endParaRPr>
+          </a:p>
+          <a:p>
+            <a:endParaRPr lang="en-US">
+              <a:latin typeface="-apple-system"/>
+            </a:endParaRPr>
+          </a:p>
+          <a:p>
+            <a:endParaRPr lang="en-US">
+              <a:latin typeface="-apple-system"/>
+            </a:endParaRPr>
+          </a:p>
+          <a:p>
+            <a:endParaRPr lang="en-US">
+              <a:latin typeface="-apple-system"/>
+            </a:endParaRPr>
+          </a:p>
+          <a:p>
+            <a:r>
+              <a:rPr lang="en-US"/>
+              <a:t>Burada HTTP POST ilə gələn JSON oxunur:</a:t>
+            </a:r>
+          </a:p>
+          <a:p>
+            <a:endParaRPr lang="en-US"/>
+          </a:p>
+          <a:p>
+            <a:pPr marL="742950" lvl="1" indent="-285750">
+              <a:buFont typeface="Arial" panose="020B0604020202020204" pitchFamily="34" charset="0"/>
+              <a:buChar char="•"/>
+            </a:pPr>
+            <a:r>
+              <a:rPr lang="en-US"/>
+              <a:t>php://input 		→ request-in xam (raw) məzmununu götürür.</a:t>
+            </a:r>
+          </a:p>
+          <a:p>
+            <a:pPr marL="742950" lvl="1" indent="-285750">
+              <a:buFont typeface="Arial" panose="020B0604020202020204" pitchFamily="34" charset="0"/>
+              <a:buChar char="•"/>
+            </a:pPr>
+            <a:endParaRPr lang="en-US"/>
+          </a:p>
+          <a:p>
+            <a:pPr marL="742950" lvl="1" indent="-285750">
+              <a:buFont typeface="Arial" panose="020B0604020202020204" pitchFamily="34" charset="0"/>
+              <a:buChar char="•"/>
+            </a:pPr>
+            <a:r>
+              <a:rPr lang="en-US"/>
+              <a:t>json_decode(..., true) 	→ JSON-u massivə çevirir.</a:t>
+            </a:r>
+          </a:p>
+          <a:p>
+            <a:pPr marL="742950" lvl="1" indent="-285750">
+              <a:buFont typeface="Arial" panose="020B0604020202020204" pitchFamily="34" charset="0"/>
+              <a:buChar char="•"/>
+            </a:pPr>
+            <a:endParaRPr lang="en-US"/>
+          </a:p>
+          <a:p>
+            <a:pPr marL="742950" lvl="1" indent="-285750">
+              <a:buFont typeface="Arial" panose="020B0604020202020204" pitchFamily="34" charset="0"/>
+              <a:buChar char="•"/>
+            </a:pPr>
+            <a:r>
+              <a:rPr lang="en-US"/>
+              <a:t>$query 			→ GraphQL sorğusu ({ notes { id title author { name } } }).</a:t>
+            </a:r>
+          </a:p>
+          <a:p>
+            <a:pPr marL="742950" lvl="1" indent="-285750">
+              <a:buFont typeface="Arial" panose="020B0604020202020204" pitchFamily="34" charset="0"/>
+              <a:buChar char="•"/>
+            </a:pPr>
+            <a:endParaRPr lang="en-US"/>
+          </a:p>
+          <a:p>
+            <a:pPr marL="742950" lvl="1" indent="-285750">
+              <a:buFont typeface="Arial" panose="020B0604020202020204" pitchFamily="34" charset="0"/>
+              <a:buChar char="•"/>
+            </a:pPr>
+            <a:r>
+              <a:rPr lang="en-US"/>
+              <a:t>$variables 			→ əgər dəyişənlər istifadə olunursa (məsələn, $id ilə sorğu).</a:t>
+            </a:r>
+          </a:p>
+          <a:p>
+            <a:endParaRPr lang="en-US"/>
+          </a:p>
+          <a:p>
+            <a:endParaRPr lang="en-US"/>
+          </a:p>
+        </p:txBody>
+      </p:sp>
+      <p:pic>
+        <p:nvPicPr>
+          <p:cNvPr id="3" name="Picture 2">
+            <a:extLst>
+              <a:ext uri="{FF2B5EF4-FFF2-40B4-BE49-F238E27FC236}">
+                <a16:creationId xmlns:a16="http://schemas.microsoft.com/office/drawing/2014/main" id="{0E9B7004-418E-0470-DC2A-EF60B59CCBE6}"/>
+              </a:ext>
+            </a:extLst>
+          </p:cNvPr>
+          <p:cNvPicPr>
+            <a:picLocks noChangeAspect="1"/>
+          </p:cNvPicPr>
+          <p:nvPr/>
+        </p:nvPicPr>
+        <p:blipFill>
+          <a:blip r:embed="rId2"/>
+          <a:stretch>
+            <a:fillRect/>
+          </a:stretch>
+        </p:blipFill>
+        <p:spPr>
+          <a:xfrm>
+            <a:off x="0" y="0"/>
+            <a:ext cx="5106113" cy="1105054"/>
+          </a:xfrm>
+          <a:prstGeom prst="rect">
+            <a:avLst/>
+          </a:prstGeom>
+        </p:spPr>
+      </p:pic>
+    </p:spTree>
+    <p:extLst>
+      <p:ext uri="{BB962C8B-B14F-4D97-AF65-F5344CB8AC3E}">
+        <p14:creationId xmlns:p14="http://schemas.microsoft.com/office/powerpoint/2010/main" val="3425007062"/>
+      </p:ext>
+    </p:extLst>
+  </p:cSld>
+  <p:clrMapOvr>
+    <a:masterClrMapping/>
+  </p:clrMapOvr>
+</p:sld>
+</file>
+
+<file path=ppt/slides/slide72.xml><?xml version="1.0" encoding="utf-8"?>
+<p:sld xmlns:a="http://schemas.openxmlformats.org/drawingml/2006/main" xmlns:r="http://schemas.openxmlformats.org/officeDocument/2006/relationships" xmlns:p="http://schemas.openxmlformats.org/presentationml/2006/main">
+  <p:cSld>
+    <p:spTree>
+      <p:nvGrpSpPr>
+        <p:cNvPr id="1" name="">
+          <a:extLst>
+            <a:ext uri="{FF2B5EF4-FFF2-40B4-BE49-F238E27FC236}">
+              <a16:creationId xmlns:a16="http://schemas.microsoft.com/office/drawing/2014/main" id="{6929E5D8-739A-A1EC-43CC-520532FEBC2B}"/>
+            </a:ext>
+          </a:extLst>
+        </p:cNvPr>
+        <p:cNvGrpSpPr/>
+        <p:nvPr/>
+      </p:nvGrpSpPr>
+      <p:grpSpPr>
+        <a:xfrm>
+          <a:off x="0" y="0"/>
+          <a:ext cx="0" cy="0"/>
+          <a:chOff x="0" y="0"/>
+          <a:chExt cx="0" cy="0"/>
+        </a:xfrm>
+      </p:grpSpPr>
+      <p:sp>
+        <p:nvSpPr>
+          <p:cNvPr id="7" name="TextBox 6">
+            <a:extLst>
+              <a:ext uri="{FF2B5EF4-FFF2-40B4-BE49-F238E27FC236}">
+                <a16:creationId xmlns:a16="http://schemas.microsoft.com/office/drawing/2014/main" id="{E3F021FB-3293-069C-81A2-8F7950631E10}"/>
+              </a:ext>
+            </a:extLst>
+          </p:cNvPr>
+          <p:cNvSpPr txBox="1"/>
+          <p:nvPr/>
+        </p:nvSpPr>
+        <p:spPr>
+          <a:xfrm>
+            <a:off x="203200" y="244826"/>
+            <a:ext cx="11822545" cy="6186309"/>
+          </a:xfrm>
+          <a:prstGeom prst="rect">
+            <a:avLst/>
+          </a:prstGeom>
+          <a:noFill/>
+        </p:spPr>
+        <p:txBody>
+          <a:bodyPr wrap="square">
+            <a:spAutoFit/>
+          </a:bodyPr>
+          <a:lstStyle/>
+          <a:p>
+            <a:r>
+              <a:rPr lang="en-US">
+                <a:latin typeface="-apple-system"/>
+              </a:rPr>
+              <a:t>.</a:t>
+            </a:r>
+          </a:p>
+          <a:p>
+            <a:endParaRPr lang="en-US">
+              <a:latin typeface="-apple-system"/>
+            </a:endParaRPr>
+          </a:p>
+          <a:p>
+            <a:endParaRPr lang="en-US">
+              <a:latin typeface="-apple-system"/>
+            </a:endParaRPr>
+          </a:p>
+          <a:p>
+            <a:endParaRPr lang="en-US">
+              <a:latin typeface="-apple-system"/>
+            </a:endParaRPr>
+          </a:p>
+          <a:p>
+            <a:endParaRPr lang="en-US">
+              <a:latin typeface="-apple-system"/>
+            </a:endParaRPr>
+          </a:p>
+          <a:p>
+            <a:endParaRPr lang="en-US">
+              <a:latin typeface="-apple-system"/>
+            </a:endParaRPr>
+          </a:p>
+          <a:p>
+            <a:endParaRPr lang="en-US">
+              <a:latin typeface="-apple-system"/>
+            </a:endParaRPr>
+          </a:p>
+          <a:p>
+            <a:endParaRPr lang="en-US">
+              <a:latin typeface="-apple-system"/>
+            </a:endParaRPr>
+          </a:p>
+          <a:p>
+            <a:endParaRPr lang="en-US">
+              <a:latin typeface="-apple-system"/>
+            </a:endParaRPr>
+          </a:p>
+          <a:p>
+            <a:endParaRPr lang="en-US">
+              <a:latin typeface="-apple-system"/>
+            </a:endParaRPr>
+          </a:p>
+          <a:p>
+            <a:endParaRPr lang="en-US">
+              <a:latin typeface="-apple-system"/>
+            </a:endParaRPr>
+          </a:p>
+          <a:p>
+            <a:r>
+              <a:rPr lang="en-US"/>
+              <a:t>Əsas GraphQL sorğusunun icrası.</a:t>
+            </a:r>
+          </a:p>
+          <a:p>
+            <a:endParaRPr lang="en-US"/>
+          </a:p>
+          <a:p>
+            <a:pPr marL="285750" indent="-285750">
+              <a:buFont typeface="Arial" panose="020B0604020202020204" pitchFamily="34" charset="0"/>
+              <a:buChar char="•"/>
+            </a:pPr>
+            <a:r>
+              <a:rPr lang="en-US"/>
+              <a:t>$schema → işlədiləcək sxem.</a:t>
+            </a:r>
+          </a:p>
+          <a:p>
+            <a:pPr marL="285750" indent="-285750">
+              <a:buFont typeface="Arial" panose="020B0604020202020204" pitchFamily="34" charset="0"/>
+              <a:buChar char="•"/>
+            </a:pPr>
+            <a:endParaRPr lang="en-US"/>
+          </a:p>
+          <a:p>
+            <a:pPr marL="285750" indent="-285750">
+              <a:buFont typeface="Arial" panose="020B0604020202020204" pitchFamily="34" charset="0"/>
+              <a:buChar char="•"/>
+            </a:pPr>
+            <a:r>
+              <a:rPr lang="en-US"/>
+              <a:t>$query → müştərinin göndərdiyi sorğu.</a:t>
+            </a:r>
+          </a:p>
+          <a:p>
+            <a:pPr marL="285750" indent="-285750">
+              <a:buFont typeface="Arial" panose="020B0604020202020204" pitchFamily="34" charset="0"/>
+              <a:buChar char="•"/>
+            </a:pPr>
+            <a:endParaRPr lang="en-US"/>
+          </a:p>
+          <a:p>
+            <a:pPr marL="285750" indent="-285750">
+              <a:buFont typeface="Arial" panose="020B0604020202020204" pitchFamily="34" charset="0"/>
+              <a:buChar char="•"/>
+            </a:pPr>
+            <a:r>
+              <a:rPr lang="en-US"/>
+              <a:t>$rootValue → yuxarıda qeyd edilən əsas resolver-lər.</a:t>
+            </a:r>
+          </a:p>
+          <a:p>
+            <a:pPr marL="285750" indent="-285750">
+              <a:buFont typeface="Arial" panose="020B0604020202020204" pitchFamily="34" charset="0"/>
+              <a:buChar char="•"/>
+            </a:pPr>
+            <a:endParaRPr lang="en-US"/>
+          </a:p>
+          <a:p>
+            <a:pPr marL="285750" indent="-285750">
+              <a:buFont typeface="Arial" panose="020B0604020202020204" pitchFamily="34" charset="0"/>
+              <a:buChar char="•"/>
+            </a:pPr>
+            <a:r>
+              <a:rPr lang="en-US"/>
+              <a:t>setErrorFormatter → əgər səhv baş verərsə, cavab JSON-da həm message, həm də trace qaytarsın.</a:t>
+            </a:r>
+          </a:p>
+          <a:p>
+            <a:endParaRPr lang="en-US"/>
+          </a:p>
+          <a:p>
+            <a:endParaRPr lang="en-US"/>
+          </a:p>
+        </p:txBody>
+      </p:sp>
+      <p:pic>
+        <p:nvPicPr>
+          <p:cNvPr id="3" name="Picture 2">
+            <a:extLst>
+              <a:ext uri="{FF2B5EF4-FFF2-40B4-BE49-F238E27FC236}">
+                <a16:creationId xmlns:a16="http://schemas.microsoft.com/office/drawing/2014/main" id="{AAF0385C-FF6E-7586-9B75-A3570A5884EE}"/>
+              </a:ext>
+            </a:extLst>
+          </p:cNvPr>
+          <p:cNvPicPr>
+            <a:picLocks noChangeAspect="1"/>
+          </p:cNvPicPr>
+          <p:nvPr/>
+        </p:nvPicPr>
+        <p:blipFill>
+          <a:blip r:embed="rId2"/>
+          <a:stretch>
+            <a:fillRect/>
+          </a:stretch>
+        </p:blipFill>
+        <p:spPr>
+          <a:xfrm>
+            <a:off x="0" y="0"/>
+            <a:ext cx="3391373" cy="2886478"/>
+          </a:xfrm>
+          <a:prstGeom prst="rect">
+            <a:avLst/>
+          </a:prstGeom>
+        </p:spPr>
+      </p:pic>
+    </p:spTree>
+    <p:extLst>
+      <p:ext uri="{BB962C8B-B14F-4D97-AF65-F5344CB8AC3E}">
+        <p14:creationId xmlns:p14="http://schemas.microsoft.com/office/powerpoint/2010/main" val="3399322641"/>
+      </p:ext>
+    </p:extLst>
+  </p:cSld>
+  <p:clrMapOvr>
+    <a:masterClrMapping/>
+  </p:clrMapOvr>
+</p:sld>
+</file>
+
+<file path=ppt/slides/slide73.xml><?xml version="1.0" encoding="utf-8"?>
+<p:sld xmlns:a="http://schemas.openxmlformats.org/drawingml/2006/main" xmlns:r="http://schemas.openxmlformats.org/officeDocument/2006/relationships" xmlns:p="http://schemas.openxmlformats.org/presentationml/2006/main">
+  <p:cSld>
+    <p:spTree>
+      <p:nvGrpSpPr>
+        <p:cNvPr id="1" name="">
+          <a:extLst>
+            <a:ext uri="{FF2B5EF4-FFF2-40B4-BE49-F238E27FC236}">
+              <a16:creationId xmlns:a16="http://schemas.microsoft.com/office/drawing/2014/main" id="{D9C834EB-09B5-2211-5DD3-0EA4327CC77F}"/>
+            </a:ext>
+          </a:extLst>
+        </p:cNvPr>
+        <p:cNvGrpSpPr/>
+        <p:nvPr/>
+      </p:nvGrpSpPr>
+      <p:grpSpPr>
+        <a:xfrm>
+          <a:off x="0" y="0"/>
+          <a:ext cx="0" cy="0"/>
+          <a:chOff x="0" y="0"/>
+          <a:chExt cx="0" cy="0"/>
+        </a:xfrm>
+      </p:grpSpPr>
+      <p:sp>
+        <p:nvSpPr>
+          <p:cNvPr id="7" name="TextBox 6">
+            <a:extLst>
+              <a:ext uri="{FF2B5EF4-FFF2-40B4-BE49-F238E27FC236}">
+                <a16:creationId xmlns:a16="http://schemas.microsoft.com/office/drawing/2014/main" id="{B9E8B98C-D9A7-7C23-3286-20A37FA4E44A}"/>
+              </a:ext>
+            </a:extLst>
+          </p:cNvPr>
+          <p:cNvSpPr txBox="1"/>
+          <p:nvPr/>
+        </p:nvSpPr>
+        <p:spPr>
+          <a:xfrm>
+            <a:off x="203200" y="244826"/>
+            <a:ext cx="11822545" cy="4801314"/>
+          </a:xfrm>
+          <a:prstGeom prst="rect">
+            <a:avLst/>
+          </a:prstGeom>
+          <a:noFill/>
+        </p:spPr>
+        <p:txBody>
+          <a:bodyPr wrap="square">
+            <a:spAutoFit/>
+          </a:bodyPr>
+          <a:lstStyle/>
+          <a:p>
+            <a:r>
+              <a:rPr lang="en-US">
+                <a:latin typeface="-apple-system"/>
+              </a:rPr>
+              <a:t>.</a:t>
+            </a:r>
+          </a:p>
+          <a:p>
+            <a:endParaRPr lang="en-US">
+              <a:latin typeface="-apple-system"/>
+            </a:endParaRPr>
+          </a:p>
+          <a:p>
+            <a:r>
+              <a:rPr lang="en-US"/>
+              <a:t>Cavab JSON formatında müştəriyə qaytarılır.</a:t>
+            </a:r>
+          </a:p>
+          <a:p>
+            <a:endParaRPr lang="en-US"/>
+          </a:p>
+          <a:p>
+            <a:endParaRPr lang="en-US"/>
+          </a:p>
+          <a:p>
+            <a:endParaRPr lang="en-US"/>
+          </a:p>
+          <a:p>
+            <a:endParaRPr lang="en-US"/>
+          </a:p>
+          <a:p>
+            <a:endParaRPr lang="en-US"/>
+          </a:p>
+          <a:p>
+            <a:endParaRPr lang="en-US"/>
+          </a:p>
+          <a:p>
+            <a:endParaRPr lang="en-US"/>
+          </a:p>
+          <a:p>
+            <a:endParaRPr lang="en-US"/>
+          </a:p>
+          <a:p>
+            <a:endParaRPr lang="en-US"/>
+          </a:p>
+          <a:p>
+            <a:endParaRPr lang="en-US"/>
+          </a:p>
+          <a:p>
+            <a:endParaRPr lang="en-US"/>
+          </a:p>
+          <a:p>
+            <a:endParaRPr lang="en-US"/>
+          </a:p>
+          <a:p>
+            <a:endParaRPr lang="en-US"/>
+          </a:p>
+          <a:p>
+            <a:r>
+              <a:rPr lang="en-US"/>
+              <a:t>Əgər try içində hər hansı xəta olsa, sadə JSON cavabı ilə səhv mesajı göstərilir.</a:t>
+            </a:r>
+          </a:p>
+        </p:txBody>
+      </p:sp>
+      <p:pic>
+        <p:nvPicPr>
+          <p:cNvPr id="3" name="Picture 2">
+            <a:extLst>
+              <a:ext uri="{FF2B5EF4-FFF2-40B4-BE49-F238E27FC236}">
+                <a16:creationId xmlns:a16="http://schemas.microsoft.com/office/drawing/2014/main" id="{D96959B0-4F48-CBE8-A7DE-32F4C4C1E744}"/>
+              </a:ext>
+            </a:extLst>
+          </p:cNvPr>
+          <p:cNvPicPr>
+            <a:picLocks noChangeAspect="1"/>
+          </p:cNvPicPr>
+          <p:nvPr/>
+        </p:nvPicPr>
+        <p:blipFill>
+          <a:blip r:embed="rId2"/>
+          <a:stretch>
+            <a:fillRect/>
+          </a:stretch>
+        </p:blipFill>
+        <p:spPr>
+          <a:xfrm>
+            <a:off x="0" y="-6927"/>
+            <a:ext cx="3267531" cy="647790"/>
+          </a:xfrm>
+          <a:prstGeom prst="rect">
+            <a:avLst/>
+          </a:prstGeom>
+        </p:spPr>
+      </p:pic>
+      <p:pic>
+        <p:nvPicPr>
+          <p:cNvPr id="5" name="Picture 4">
+            <a:extLst>
+              <a:ext uri="{FF2B5EF4-FFF2-40B4-BE49-F238E27FC236}">
+                <a16:creationId xmlns:a16="http://schemas.microsoft.com/office/drawing/2014/main" id="{870A5A99-5627-642A-0C4A-273778A55629}"/>
+              </a:ext>
+            </a:extLst>
+          </p:cNvPr>
+          <p:cNvPicPr>
+            <a:picLocks noChangeAspect="1"/>
+          </p:cNvPicPr>
+          <p:nvPr/>
+        </p:nvPicPr>
+        <p:blipFill>
+          <a:blip r:embed="rId3"/>
+          <a:stretch>
+            <a:fillRect/>
+          </a:stretch>
+        </p:blipFill>
+        <p:spPr>
+          <a:xfrm>
+            <a:off x="0" y="3347817"/>
+            <a:ext cx="5391902" cy="1086002"/>
+          </a:xfrm>
+          <a:prstGeom prst="rect">
+            <a:avLst/>
+          </a:prstGeom>
+        </p:spPr>
+      </p:pic>
+    </p:spTree>
+    <p:extLst>
+      <p:ext uri="{BB962C8B-B14F-4D97-AF65-F5344CB8AC3E}">
+        <p14:creationId xmlns:p14="http://schemas.microsoft.com/office/powerpoint/2010/main" val="3091009442"/>
+      </p:ext>
+    </p:extLst>
+  </p:cSld>
+  <p:clrMapOvr>
+    <a:masterClrMapping/>
+  </p:clrMapOvr>
+</p:sld>
+</file>
+
+<file path=ppt/slides/slide74.xml><?xml version="1.0" encoding="utf-8"?>
+<p:sld xmlns:a="http://schemas.openxmlformats.org/drawingml/2006/main" xmlns:r="http://schemas.openxmlformats.org/officeDocument/2006/relationships" xmlns:p="http://schemas.openxmlformats.org/presentationml/2006/main">
+  <p:cSld>
+    <p:spTree>
+      <p:nvGrpSpPr>
+        <p:cNvPr id="1" name="">
+          <a:extLst>
+            <a:ext uri="{FF2B5EF4-FFF2-40B4-BE49-F238E27FC236}">
+              <a16:creationId xmlns:a16="http://schemas.microsoft.com/office/drawing/2014/main" id="{51077F5F-E2F2-B8CE-C3EE-B231D14627CC}"/>
+            </a:ext>
+          </a:extLst>
+        </p:cNvPr>
+        <p:cNvGrpSpPr/>
+        <p:nvPr/>
+      </p:nvGrpSpPr>
+      <p:grpSpPr>
+        <a:xfrm>
+          <a:off x="0" y="0"/>
+          <a:ext cx="0" cy="0"/>
+          <a:chOff x="0" y="0"/>
+          <a:chExt cx="0" cy="0"/>
+        </a:xfrm>
+      </p:grpSpPr>
+      <p:sp>
+        <p:nvSpPr>
+          <p:cNvPr id="7" name="TextBox 6">
+            <a:extLst>
+              <a:ext uri="{FF2B5EF4-FFF2-40B4-BE49-F238E27FC236}">
+                <a16:creationId xmlns:a16="http://schemas.microsoft.com/office/drawing/2014/main" id="{B89BFC10-AEBE-4049-2250-CC93EC59B5A4}"/>
               </a:ext>
             </a:extLst>
           </p:cNvPr>
@@ -19811,19 +23181,266 @@
           <a:lstStyle/>
           <a:p>
             <a:r>
-              <a:rPr lang="en-US">
-                <a:latin typeface="-apple-system"/>
-              </a:rPr>
-              <a:t>.</a:t>
+              <a:rPr lang="az-Latn-AZ">
+                <a:latin typeface="-apple-system"/>
+              </a:rPr>
+              <a:t>İndi </a:t>
+            </a:r>
+            <a:r>
+              <a:rPr lang="az-Latn-AZ" b="1">
+                <a:solidFill>
+                  <a:srgbClr val="FF0000"/>
+                </a:solidFill>
+                <a:latin typeface="-apple-system"/>
+              </a:rPr>
+              <a:t>USE</a:t>
+            </a:r>
+            <a:r>
+              <a:rPr lang="az-Latn-AZ">
+                <a:latin typeface="-apple-system"/>
+              </a:rPr>
+              <a:t> haqqında qısa teoriya. Bu kodun nəticəsi aşağıdakı kimidir.</a:t>
             </a:r>
             <a:endParaRPr lang="en-US"/>
+          </a:p>
+        </p:txBody>
+      </p:sp>
+      <p:pic>
+        <p:nvPicPr>
+          <p:cNvPr id="3" name="Picture 2">
+            <a:extLst>
+              <a:ext uri="{FF2B5EF4-FFF2-40B4-BE49-F238E27FC236}">
+                <a16:creationId xmlns:a16="http://schemas.microsoft.com/office/drawing/2014/main" id="{E3FAF301-340B-368F-50DD-F75680B25F6A}"/>
+              </a:ext>
+            </a:extLst>
+          </p:cNvPr>
+          <p:cNvPicPr>
+            <a:picLocks noChangeAspect="1"/>
+          </p:cNvPicPr>
+          <p:nvPr/>
+        </p:nvPicPr>
+        <p:blipFill>
+          <a:blip r:embed="rId2"/>
+          <a:stretch>
+            <a:fillRect/>
+          </a:stretch>
+        </p:blipFill>
+        <p:spPr>
+          <a:xfrm>
+            <a:off x="7407564" y="0"/>
+            <a:ext cx="4784436" cy="2798444"/>
+          </a:xfrm>
+          <a:prstGeom prst="rect">
+            <a:avLst/>
+          </a:prstGeom>
+        </p:spPr>
+      </p:pic>
+      <p:pic>
+        <p:nvPicPr>
+          <p:cNvPr id="5" name="Picture 4">
+            <a:extLst>
+              <a:ext uri="{FF2B5EF4-FFF2-40B4-BE49-F238E27FC236}">
+                <a16:creationId xmlns:a16="http://schemas.microsoft.com/office/drawing/2014/main" id="{016C2691-D6DC-E9BF-AC1F-AA464C2D6688}"/>
+              </a:ext>
+            </a:extLst>
+          </p:cNvPr>
+          <p:cNvPicPr>
+            <a:picLocks noChangeAspect="1"/>
+          </p:cNvPicPr>
+          <p:nvPr/>
+        </p:nvPicPr>
+        <p:blipFill>
+          <a:blip r:embed="rId3"/>
+          <a:stretch>
+            <a:fillRect/>
+          </a:stretch>
+        </p:blipFill>
+        <p:spPr>
+          <a:xfrm>
+            <a:off x="36945" y="858984"/>
+            <a:ext cx="3999344" cy="5999016"/>
+          </a:xfrm>
+          <a:prstGeom prst="rect">
+            <a:avLst/>
+          </a:prstGeom>
+          <a:ln w="38100" cap="sq">
+            <a:solidFill>
+              <a:srgbClr val="000000"/>
+            </a:solidFill>
+            <a:prstDash val="solid"/>
+            <a:miter lim="800000"/>
+          </a:ln>
+          <a:effectLst>
+            <a:outerShdw blurRad="50800" dist="38100" dir="2700000" algn="tl" rotWithShape="0">
+              <a:srgbClr val="000000">
+                <a:alpha val="43000"/>
+              </a:srgbClr>
+            </a:outerShdw>
+          </a:effectLst>
+        </p:spPr>
+      </p:pic>
+      <p:sp>
+        <p:nvSpPr>
+          <p:cNvPr id="8" name="TextBox 7">
+            <a:extLst>
+              <a:ext uri="{FF2B5EF4-FFF2-40B4-BE49-F238E27FC236}">
+                <a16:creationId xmlns:a16="http://schemas.microsoft.com/office/drawing/2014/main" id="{B80B7E3C-6604-DF34-E160-413C8436509E}"/>
+              </a:ext>
+            </a:extLst>
+          </p:cNvPr>
+          <p:cNvSpPr txBox="1"/>
+          <p:nvPr/>
+        </p:nvSpPr>
+        <p:spPr>
+          <a:xfrm>
+            <a:off x="4479636" y="3858492"/>
+            <a:ext cx="7675419" cy="2492990"/>
+          </a:xfrm>
+          <a:prstGeom prst="rect">
+            <a:avLst/>
+          </a:prstGeom>
+          <a:noFill/>
+        </p:spPr>
+        <p:txBody>
+          <a:bodyPr wrap="square">
+            <a:spAutoFit/>
+          </a:bodyPr>
+          <a:lstStyle/>
+          <a:p>
+            <a:r>
+              <a:rPr lang="en-US" sz="1200" b="1"/>
+              <a:t>Bu sintaksis closure (anonim funksiya) obyektidir.</a:t>
+            </a:r>
+          </a:p>
+          <a:p>
+            <a:endParaRPr lang="en-US" sz="1200"/>
+          </a:p>
+          <a:p>
+            <a:pPr marL="171450" indent="-171450">
+              <a:buFont typeface="Wingdings" panose="05000000000000000000" pitchFamily="2" charset="2"/>
+              <a:buChar char="q"/>
+            </a:pPr>
+            <a:r>
+              <a:rPr lang="en-US" sz="1200"/>
+              <a:t>Burada notes açarının dəyəri bir anonim funksiya (Closure)-dur.</a:t>
+            </a:r>
+          </a:p>
+          <a:p>
+            <a:pPr marL="171450" indent="-171450">
+              <a:buFont typeface="Wingdings" panose="05000000000000000000" pitchFamily="2" charset="2"/>
+              <a:buChar char="q"/>
+            </a:pPr>
+            <a:endParaRPr lang="en-US" sz="1200"/>
+          </a:p>
+          <a:p>
+            <a:pPr marL="171450" indent="-171450">
+              <a:buFont typeface="Wingdings" panose="05000000000000000000" pitchFamily="2" charset="2"/>
+              <a:buChar char="q"/>
+            </a:pPr>
+            <a:r>
+              <a:rPr lang="en-US" sz="1200"/>
+              <a:t>Closure obyektinin özündə funksiya kodu saxlanmır, amma PHP debug məqsədli olaraq static hissədə hansı dəyişənləri </a:t>
+            </a:r>
+            <a:r>
+              <a:rPr lang="en-US" sz="1200" b="1"/>
+              <a:t>use</a:t>
+            </a:r>
+            <a:r>
+              <a:rPr lang="en-US" sz="1200"/>
+              <a:t> ilə “daşıdığını” göstərir.</a:t>
+            </a:r>
+          </a:p>
+          <a:p>
+            <a:pPr marL="171450" indent="-171450">
+              <a:buFont typeface="Wingdings" panose="05000000000000000000" pitchFamily="2" charset="2"/>
+              <a:buChar char="q"/>
+            </a:pPr>
+            <a:endParaRPr lang="en-US" sz="1200"/>
+          </a:p>
+          <a:p>
+            <a:pPr marL="171450" indent="-171450">
+              <a:buFont typeface="Wingdings" panose="05000000000000000000" pitchFamily="2" charset="2"/>
+              <a:buChar char="q"/>
+            </a:pPr>
+            <a:r>
+              <a:rPr lang="en-US" sz="1200" b="1"/>
+              <a:t>use ($fakeDatabase) </a:t>
+            </a:r>
+            <a:r>
+              <a:rPr lang="en-US" sz="1200"/>
+              <a:t>isə o deməkdir ki, </a:t>
+            </a:r>
+            <a:r>
+              <a:rPr lang="en-US" sz="1200" b="1"/>
+              <a:t>closure</a:t>
+            </a:r>
+            <a:r>
+              <a:rPr lang="az-Latn-AZ" sz="1200"/>
+              <a:t> </a:t>
+            </a:r>
+            <a:r>
+              <a:rPr lang="en-US" sz="1200"/>
+              <a:t>-un daxilində </a:t>
+            </a:r>
+            <a:r>
+              <a:rPr lang="en-US" sz="1200" b="1"/>
+              <a:t>$fakeDatabase</a:t>
+            </a:r>
+            <a:r>
+              <a:rPr lang="az-Latn-AZ" sz="1200" b="1"/>
+              <a:t> </a:t>
+            </a:r>
+            <a:r>
+              <a:rPr lang="en-US" sz="1200"/>
+              <a:t>-i istifadə edə biləsən deyə, PHP onu closure</a:t>
+            </a:r>
+            <a:r>
+              <a:rPr lang="az-Latn-AZ" sz="1200"/>
+              <a:t> </a:t>
+            </a:r>
+            <a:r>
+              <a:rPr lang="en-US" sz="1200"/>
+              <a:t>-un static massivinə kopyalayır.</a:t>
+            </a:r>
+          </a:p>
+          <a:p>
+            <a:pPr marL="171450" indent="-171450">
+              <a:buFont typeface="Wingdings" panose="05000000000000000000" pitchFamily="2" charset="2"/>
+              <a:buChar char="q"/>
+            </a:pPr>
+            <a:endParaRPr lang="en-US" sz="1200"/>
+          </a:p>
+          <a:p>
+            <a:pPr marL="171450" indent="-171450">
+              <a:buFont typeface="Wingdings" panose="05000000000000000000" pitchFamily="2" charset="2"/>
+              <a:buChar char="q"/>
+            </a:pPr>
+            <a:r>
+              <a:rPr lang="en-US" sz="1200"/>
+              <a:t>Ona görə də sən return true; yazsan da, closure-un static massivində </a:t>
+            </a:r>
+            <a:r>
+              <a:rPr lang="en-US" sz="1200" b="1"/>
+              <a:t>$fakeDatabase </a:t>
+            </a:r>
+            <a:r>
+              <a:rPr lang="en-US" sz="1200"/>
+              <a:t>görünür.</a:t>
+            </a:r>
+            <a:endParaRPr lang="az-Latn-AZ" sz="1200"/>
+          </a:p>
+          <a:p>
+            <a:endParaRPr lang="az-Latn-AZ" sz="1200"/>
+          </a:p>
+          <a:p>
+            <a:endParaRPr lang="en-US" sz="1200"/>
           </a:p>
         </p:txBody>
       </p:sp>
     </p:spTree>
     <p:extLst>
       <p:ext uri="{BB962C8B-B14F-4D97-AF65-F5344CB8AC3E}">
-        <p14:creationId xmlns:p14="http://schemas.microsoft.com/office/powerpoint/2010/main" val="2538651893"/>
+        <p14:creationId xmlns:p14="http://schemas.microsoft.com/office/powerpoint/2010/main" val="2438944243"/>
       </p:ext>
     </p:extLst>
   </p:cSld>
@@ -19833,7 +23450,7 @@
 </p:sld>
 </file>
 
-<file path=ppt/slides/slide71.xml><?xml version="1.0" encoding="utf-8"?>
+<file path=ppt/slides/slide75.xml><?xml version="1.0" encoding="utf-8"?>
 <p:sld xmlns:a="http://schemas.openxmlformats.org/drawingml/2006/main" xmlns:r="http://schemas.openxmlformats.org/officeDocument/2006/relationships" xmlns:p="http://schemas.openxmlformats.org/presentationml/2006/main">
   <p:cSld>
     <p:spTree>
@@ -19841,7 +23458,7 @@
         <p:cNvPr id="1" name="">
           <a:extLst>
             <a:ext uri="{FF2B5EF4-FFF2-40B4-BE49-F238E27FC236}">
-              <a16:creationId xmlns:a16="http://schemas.microsoft.com/office/drawing/2014/main" id="{8BB1B866-CB47-A3D2-7FC0-F326E57F9351}"/>
+              <a16:creationId xmlns:a16="http://schemas.microsoft.com/office/drawing/2014/main" id="{7C827FCF-5C25-11CC-DB25-70A73705E4B3}"/>
             </a:ext>
           </a:extLst>
         </p:cNvPr>
@@ -19861,7 +23478,165 @@
           <p:cNvPr id="7" name="TextBox 6">
             <a:extLst>
               <a:ext uri="{FF2B5EF4-FFF2-40B4-BE49-F238E27FC236}">
-                <a16:creationId xmlns:a16="http://schemas.microsoft.com/office/drawing/2014/main" id="{F5A91F88-EFC7-9575-1011-3A01F8E4743E}"/>
+                <a16:creationId xmlns:a16="http://schemas.microsoft.com/office/drawing/2014/main" id="{56573B64-05A0-FD90-BEE2-C93AC78081FF}"/>
+              </a:ext>
+            </a:extLst>
+          </p:cNvPr>
+          <p:cNvSpPr txBox="1"/>
+          <p:nvPr/>
+        </p:nvSpPr>
+        <p:spPr>
+          <a:xfrm>
+            <a:off x="203200" y="244826"/>
+            <a:ext cx="11822545" cy="2862322"/>
+          </a:xfrm>
+          <a:prstGeom prst="rect">
+            <a:avLst/>
+          </a:prstGeom>
+          <a:noFill/>
+        </p:spPr>
+        <p:txBody>
+          <a:bodyPr wrap="square">
+            <a:spAutoFit/>
+          </a:bodyPr>
+          <a:lstStyle/>
+          <a:p>
+            <a:r>
+              <a:rPr lang="az-Latn-AZ">
+                <a:latin typeface="-apple-system"/>
+              </a:rPr>
+              <a:t>Postman ilə POST sorğu göndərərək</a:t>
+            </a:r>
+          </a:p>
+          <a:p>
+            <a:r>
+              <a:rPr lang="az-Latn-AZ">
+                <a:latin typeface="-apple-system"/>
+              </a:rPr>
+              <a:t>test edirik.</a:t>
+            </a:r>
+          </a:p>
+          <a:p>
+            <a:endParaRPr lang="az-Latn-AZ">
+              <a:latin typeface="-apple-system"/>
+            </a:endParaRPr>
+          </a:p>
+          <a:p>
+            <a:r>
+              <a:rPr lang="az-Latn-AZ">
+                <a:latin typeface="-apple-system"/>
+              </a:rPr>
+              <a:t>Nəticə olaraq məlumatlar əldə edildi.</a:t>
+            </a:r>
+            <a:endParaRPr lang="en-US">
+              <a:latin typeface="-apple-system"/>
+            </a:endParaRPr>
+          </a:p>
+          <a:p>
+            <a:endParaRPr lang="en-US">
+              <a:latin typeface="-apple-system"/>
+            </a:endParaRPr>
+          </a:p>
+          <a:p>
+            <a:endParaRPr lang="en-US">
+              <a:latin typeface="-apple-system"/>
+            </a:endParaRPr>
+          </a:p>
+          <a:p>
+            <a:r>
+              <a:rPr lang="en-US" b="1">
+                <a:latin typeface="-apple-system"/>
+              </a:rPr>
+              <a:t>CODE1</a:t>
+            </a:r>
+          </a:p>
+          <a:p>
+            <a:endParaRPr lang="en-US">
+              <a:latin typeface="-apple-system"/>
+            </a:endParaRPr>
+          </a:p>
+          <a:p>
+            <a:endParaRPr lang="en-US">
+              <a:latin typeface="-apple-system"/>
+            </a:endParaRPr>
+          </a:p>
+          <a:p>
+            <a:endParaRPr lang="en-US"/>
+          </a:p>
+        </p:txBody>
+      </p:sp>
+      <p:pic>
+        <p:nvPicPr>
+          <p:cNvPr id="3" name="Picture 2">
+            <a:extLst>
+              <a:ext uri="{FF2B5EF4-FFF2-40B4-BE49-F238E27FC236}">
+                <a16:creationId xmlns:a16="http://schemas.microsoft.com/office/drawing/2014/main" id="{71EB77F8-29B8-827F-DAC0-9D2C9E46BE78}"/>
+              </a:ext>
+            </a:extLst>
+          </p:cNvPr>
+          <p:cNvPicPr>
+            <a:picLocks noChangeAspect="1"/>
+          </p:cNvPicPr>
+          <p:nvPr/>
+        </p:nvPicPr>
+        <p:blipFill>
+          <a:blip r:embed="rId2"/>
+          <a:stretch>
+            <a:fillRect/>
+          </a:stretch>
+        </p:blipFill>
+        <p:spPr>
+          <a:xfrm>
+            <a:off x="4436008" y="0"/>
+            <a:ext cx="7755992" cy="6858000"/>
+          </a:xfrm>
+          <a:prstGeom prst="rect">
+            <a:avLst/>
+          </a:prstGeom>
+        </p:spPr>
+      </p:pic>
+    </p:spTree>
+    <p:extLst>
+      <p:ext uri="{BB962C8B-B14F-4D97-AF65-F5344CB8AC3E}">
+        <p14:creationId xmlns:p14="http://schemas.microsoft.com/office/powerpoint/2010/main" val="981174279"/>
+      </p:ext>
+    </p:extLst>
+  </p:cSld>
+  <p:clrMapOvr>
+    <a:masterClrMapping/>
+  </p:clrMapOvr>
+</p:sld>
+</file>
+
+<file path=ppt/slides/slide76.xml><?xml version="1.0" encoding="utf-8"?>
+<p:sld xmlns:a="http://schemas.openxmlformats.org/drawingml/2006/main" xmlns:r="http://schemas.openxmlformats.org/officeDocument/2006/relationships" xmlns:p="http://schemas.openxmlformats.org/presentationml/2006/main">
+  <p:cSld>
+    <p:spTree>
+      <p:nvGrpSpPr>
+        <p:cNvPr id="1" name="">
+          <a:extLst>
+            <a:ext uri="{FF2B5EF4-FFF2-40B4-BE49-F238E27FC236}">
+              <a16:creationId xmlns:a16="http://schemas.microsoft.com/office/drawing/2014/main" id="{ECFBC063-19F6-D333-4AFE-A53EA6D4D5A1}"/>
+            </a:ext>
+          </a:extLst>
+        </p:cNvPr>
+        <p:cNvGrpSpPr/>
+        <p:nvPr/>
+      </p:nvGrpSpPr>
+      <p:grpSpPr>
+        <a:xfrm>
+          <a:off x="0" y="0"/>
+          <a:ext cx="0" cy="0"/>
+          <a:chOff x="0" y="0"/>
+          <a:chExt cx="0" cy="0"/>
+        </a:xfrm>
+      </p:grpSpPr>
+      <p:sp>
+        <p:nvSpPr>
+          <p:cNvPr id="7" name="TextBox 6">
+            <a:extLst>
+              <a:ext uri="{FF2B5EF4-FFF2-40B4-BE49-F238E27FC236}">
+                <a16:creationId xmlns:a16="http://schemas.microsoft.com/office/drawing/2014/main" id="{7F8BE934-BC8E-B802-78E0-CBB114B31679}"/>
               </a:ext>
             </a:extLst>
           </p:cNvPr>
@@ -19897,7 +23672,7 @@
     </p:spTree>
     <p:extLst>
       <p:ext uri="{BB962C8B-B14F-4D97-AF65-F5344CB8AC3E}">
-        <p14:creationId xmlns:p14="http://schemas.microsoft.com/office/powerpoint/2010/main" val="2067443183"/>
+        <p14:creationId xmlns:p14="http://schemas.microsoft.com/office/powerpoint/2010/main" val="2803923941"/>
       </p:ext>
     </p:extLst>
   </p:cSld>
@@ -19907,7 +23682,7 @@
 </p:sld>
 </file>
 
-<file path=ppt/slides/slide72.xml><?xml version="1.0" encoding="utf-8"?>
+<file path=ppt/slides/slide77.xml><?xml version="1.0" encoding="utf-8"?>
 <p:sld xmlns:a="http://schemas.openxmlformats.org/drawingml/2006/main" xmlns:r="http://schemas.openxmlformats.org/officeDocument/2006/relationships" xmlns:p="http://schemas.openxmlformats.org/presentationml/2006/main">
   <p:cSld>
     <p:spTree>
@@ -19915,7 +23690,7 @@
         <p:cNvPr id="1" name="">
           <a:extLst>
             <a:ext uri="{FF2B5EF4-FFF2-40B4-BE49-F238E27FC236}">
-              <a16:creationId xmlns:a16="http://schemas.microsoft.com/office/drawing/2014/main" id="{DB5E0A76-F990-583B-6C0C-5B5B487F045B}"/>
+              <a16:creationId xmlns:a16="http://schemas.microsoft.com/office/drawing/2014/main" id="{697CBC8A-A5CF-688C-90F4-3913A2A09E3D}"/>
             </a:ext>
           </a:extLst>
         </p:cNvPr>
@@ -19935,7 +23710,7 @@
           <p:cNvPr id="7" name="TextBox 6">
             <a:extLst>
               <a:ext uri="{FF2B5EF4-FFF2-40B4-BE49-F238E27FC236}">
-                <a16:creationId xmlns:a16="http://schemas.microsoft.com/office/drawing/2014/main" id="{01603ED3-7FA6-7B0D-9DAE-145D2D56BCB8}"/>
+                <a16:creationId xmlns:a16="http://schemas.microsoft.com/office/drawing/2014/main" id="{C3948AF1-E0A3-7915-C164-A65DD88D6334}"/>
               </a:ext>
             </a:extLst>
           </p:cNvPr>
@@ -19971,7 +23746,7 @@
     </p:spTree>
     <p:extLst>
       <p:ext uri="{BB962C8B-B14F-4D97-AF65-F5344CB8AC3E}">
-        <p14:creationId xmlns:p14="http://schemas.microsoft.com/office/powerpoint/2010/main" val="571673239"/>
+        <p14:creationId xmlns:p14="http://schemas.microsoft.com/office/powerpoint/2010/main" val="3167808383"/>
       </p:ext>
     </p:extLst>
   </p:cSld>
@@ -19981,7 +23756,7 @@
 </p:sld>
 </file>
 
-<file path=ppt/slides/slide73.xml><?xml version="1.0" encoding="utf-8"?>
+<file path=ppt/slides/slide78.xml><?xml version="1.0" encoding="utf-8"?>
 <p:sld xmlns:a="http://schemas.openxmlformats.org/drawingml/2006/main" xmlns:r="http://schemas.openxmlformats.org/officeDocument/2006/relationships" xmlns:p="http://schemas.openxmlformats.org/presentationml/2006/main">
   <p:cSld>
     <p:spTree>
@@ -19989,7 +23764,7 @@
         <p:cNvPr id="1" name="">
           <a:extLst>
             <a:ext uri="{FF2B5EF4-FFF2-40B4-BE49-F238E27FC236}">
-              <a16:creationId xmlns:a16="http://schemas.microsoft.com/office/drawing/2014/main" id="{D1F05FAD-154F-7394-1819-F09B8141466E}"/>
+              <a16:creationId xmlns:a16="http://schemas.microsoft.com/office/drawing/2014/main" id="{CBE956A4-1226-9B67-C1E5-D7D0EEA8B283}"/>
             </a:ext>
           </a:extLst>
         </p:cNvPr>
@@ -20009,7 +23784,7 @@
           <p:cNvPr id="7" name="TextBox 6">
             <a:extLst>
               <a:ext uri="{FF2B5EF4-FFF2-40B4-BE49-F238E27FC236}">
-                <a16:creationId xmlns:a16="http://schemas.microsoft.com/office/drawing/2014/main" id="{A431E858-D76B-AD72-9AD4-E9890C9FA522}"/>
+                <a16:creationId xmlns:a16="http://schemas.microsoft.com/office/drawing/2014/main" id="{B36C100F-5634-CF7E-6C29-DEA84C84280C}"/>
               </a:ext>
             </a:extLst>
           </p:cNvPr>
@@ -20045,7 +23820,81 @@
     </p:spTree>
     <p:extLst>
       <p:ext uri="{BB962C8B-B14F-4D97-AF65-F5344CB8AC3E}">
-        <p14:creationId xmlns:p14="http://schemas.microsoft.com/office/powerpoint/2010/main" val="656003231"/>
+        <p14:creationId xmlns:p14="http://schemas.microsoft.com/office/powerpoint/2010/main" val="1406396389"/>
+      </p:ext>
+    </p:extLst>
+  </p:cSld>
+  <p:clrMapOvr>
+    <a:masterClrMapping/>
+  </p:clrMapOvr>
+</p:sld>
+</file>
+
+<file path=ppt/slides/slide79.xml><?xml version="1.0" encoding="utf-8"?>
+<p:sld xmlns:a="http://schemas.openxmlformats.org/drawingml/2006/main" xmlns:r="http://schemas.openxmlformats.org/officeDocument/2006/relationships" xmlns:p="http://schemas.openxmlformats.org/presentationml/2006/main">
+  <p:cSld>
+    <p:spTree>
+      <p:nvGrpSpPr>
+        <p:cNvPr id="1" name="">
+          <a:extLst>
+            <a:ext uri="{FF2B5EF4-FFF2-40B4-BE49-F238E27FC236}">
+              <a16:creationId xmlns:a16="http://schemas.microsoft.com/office/drawing/2014/main" id="{5ACA9B90-888A-F491-61F7-B694E1AF0031}"/>
+            </a:ext>
+          </a:extLst>
+        </p:cNvPr>
+        <p:cNvGrpSpPr/>
+        <p:nvPr/>
+      </p:nvGrpSpPr>
+      <p:grpSpPr>
+        <a:xfrm>
+          <a:off x="0" y="0"/>
+          <a:ext cx="0" cy="0"/>
+          <a:chOff x="0" y="0"/>
+          <a:chExt cx="0" cy="0"/>
+        </a:xfrm>
+      </p:grpSpPr>
+      <p:sp>
+        <p:nvSpPr>
+          <p:cNvPr id="7" name="TextBox 6">
+            <a:extLst>
+              <a:ext uri="{FF2B5EF4-FFF2-40B4-BE49-F238E27FC236}">
+                <a16:creationId xmlns:a16="http://schemas.microsoft.com/office/drawing/2014/main" id="{B2BA9760-E7A8-22D6-2E5E-19C53D851BAF}"/>
+              </a:ext>
+            </a:extLst>
+          </p:cNvPr>
+          <p:cNvSpPr txBox="1"/>
+          <p:nvPr/>
+        </p:nvSpPr>
+        <p:spPr>
+          <a:xfrm>
+            <a:off x="203200" y="244826"/>
+            <a:ext cx="11822545" cy="369332"/>
+          </a:xfrm>
+          <a:prstGeom prst="rect">
+            <a:avLst/>
+          </a:prstGeom>
+          <a:noFill/>
+        </p:spPr>
+        <p:txBody>
+          <a:bodyPr wrap="square">
+            <a:spAutoFit/>
+          </a:bodyPr>
+          <a:lstStyle/>
+          <a:p>
+            <a:r>
+              <a:rPr lang="en-US">
+                <a:latin typeface="-apple-system"/>
+              </a:rPr>
+              <a:t>.</a:t>
+            </a:r>
+            <a:endParaRPr lang="en-US"/>
+          </a:p>
+        </p:txBody>
+      </p:sp>
+    </p:spTree>
+    <p:extLst>
+      <p:ext uri="{BB962C8B-B14F-4D97-AF65-F5344CB8AC3E}">
+        <p14:creationId xmlns:p14="http://schemas.microsoft.com/office/powerpoint/2010/main" val="300503061"/>
       </p:ext>
     </p:extLst>
   </p:cSld>
@@ -20252,6 +24101,598 @@
     <p:extLst>
       <p:ext uri="{BB962C8B-B14F-4D97-AF65-F5344CB8AC3E}">
         <p14:creationId xmlns:p14="http://schemas.microsoft.com/office/powerpoint/2010/main" val="30429725"/>
+      </p:ext>
+    </p:extLst>
+  </p:cSld>
+  <p:clrMapOvr>
+    <a:masterClrMapping/>
+  </p:clrMapOvr>
+</p:sld>
+</file>
+
+<file path=ppt/slides/slide80.xml><?xml version="1.0" encoding="utf-8"?>
+<p:sld xmlns:a="http://schemas.openxmlformats.org/drawingml/2006/main" xmlns:r="http://schemas.openxmlformats.org/officeDocument/2006/relationships" xmlns:p="http://schemas.openxmlformats.org/presentationml/2006/main">
+  <p:cSld>
+    <p:spTree>
+      <p:nvGrpSpPr>
+        <p:cNvPr id="1" name="">
+          <a:extLst>
+            <a:ext uri="{FF2B5EF4-FFF2-40B4-BE49-F238E27FC236}">
+              <a16:creationId xmlns:a16="http://schemas.microsoft.com/office/drawing/2014/main" id="{2890CC4F-E502-158B-FF31-2346069AE2B2}"/>
+            </a:ext>
+          </a:extLst>
+        </p:cNvPr>
+        <p:cNvGrpSpPr/>
+        <p:nvPr/>
+      </p:nvGrpSpPr>
+      <p:grpSpPr>
+        <a:xfrm>
+          <a:off x="0" y="0"/>
+          <a:ext cx="0" cy="0"/>
+          <a:chOff x="0" y="0"/>
+          <a:chExt cx="0" cy="0"/>
+        </a:xfrm>
+      </p:grpSpPr>
+      <p:sp>
+        <p:nvSpPr>
+          <p:cNvPr id="7" name="TextBox 6">
+            <a:extLst>
+              <a:ext uri="{FF2B5EF4-FFF2-40B4-BE49-F238E27FC236}">
+                <a16:creationId xmlns:a16="http://schemas.microsoft.com/office/drawing/2014/main" id="{067E4904-754A-7CB5-03EA-959BE317AA14}"/>
+              </a:ext>
+            </a:extLst>
+          </p:cNvPr>
+          <p:cNvSpPr txBox="1"/>
+          <p:nvPr/>
+        </p:nvSpPr>
+        <p:spPr>
+          <a:xfrm>
+            <a:off x="203200" y="244826"/>
+            <a:ext cx="11822545" cy="369332"/>
+          </a:xfrm>
+          <a:prstGeom prst="rect">
+            <a:avLst/>
+          </a:prstGeom>
+          <a:noFill/>
+        </p:spPr>
+        <p:txBody>
+          <a:bodyPr wrap="square">
+            <a:spAutoFit/>
+          </a:bodyPr>
+          <a:lstStyle/>
+          <a:p>
+            <a:r>
+              <a:rPr lang="en-US">
+                <a:latin typeface="-apple-system"/>
+              </a:rPr>
+              <a:t>.</a:t>
+            </a:r>
+            <a:endParaRPr lang="en-US"/>
+          </a:p>
+        </p:txBody>
+      </p:sp>
+    </p:spTree>
+    <p:extLst>
+      <p:ext uri="{BB962C8B-B14F-4D97-AF65-F5344CB8AC3E}">
+        <p14:creationId xmlns:p14="http://schemas.microsoft.com/office/powerpoint/2010/main" val="2292786754"/>
+      </p:ext>
+    </p:extLst>
+  </p:cSld>
+  <p:clrMapOvr>
+    <a:masterClrMapping/>
+  </p:clrMapOvr>
+</p:sld>
+</file>
+
+<file path=ppt/slides/slide81.xml><?xml version="1.0" encoding="utf-8"?>
+<p:sld xmlns:a="http://schemas.openxmlformats.org/drawingml/2006/main" xmlns:r="http://schemas.openxmlformats.org/officeDocument/2006/relationships" xmlns:p="http://schemas.openxmlformats.org/presentationml/2006/main">
+  <p:cSld>
+    <p:spTree>
+      <p:nvGrpSpPr>
+        <p:cNvPr id="1" name="">
+          <a:extLst>
+            <a:ext uri="{FF2B5EF4-FFF2-40B4-BE49-F238E27FC236}">
+              <a16:creationId xmlns:a16="http://schemas.microsoft.com/office/drawing/2014/main" id="{339540BF-609E-AAA5-5266-E89B7896D93D}"/>
+            </a:ext>
+          </a:extLst>
+        </p:cNvPr>
+        <p:cNvGrpSpPr/>
+        <p:nvPr/>
+      </p:nvGrpSpPr>
+      <p:grpSpPr>
+        <a:xfrm>
+          <a:off x="0" y="0"/>
+          <a:ext cx="0" cy="0"/>
+          <a:chOff x="0" y="0"/>
+          <a:chExt cx="0" cy="0"/>
+        </a:xfrm>
+      </p:grpSpPr>
+      <p:sp>
+        <p:nvSpPr>
+          <p:cNvPr id="7" name="TextBox 6">
+            <a:extLst>
+              <a:ext uri="{FF2B5EF4-FFF2-40B4-BE49-F238E27FC236}">
+                <a16:creationId xmlns:a16="http://schemas.microsoft.com/office/drawing/2014/main" id="{D1F8412A-D6A8-041E-231F-2EF1C0ABD405}"/>
+              </a:ext>
+            </a:extLst>
+          </p:cNvPr>
+          <p:cNvSpPr txBox="1"/>
+          <p:nvPr/>
+        </p:nvSpPr>
+        <p:spPr>
+          <a:xfrm>
+            <a:off x="203200" y="244826"/>
+            <a:ext cx="11822545" cy="369332"/>
+          </a:xfrm>
+          <a:prstGeom prst="rect">
+            <a:avLst/>
+          </a:prstGeom>
+          <a:noFill/>
+        </p:spPr>
+        <p:txBody>
+          <a:bodyPr wrap="square">
+            <a:spAutoFit/>
+          </a:bodyPr>
+          <a:lstStyle/>
+          <a:p>
+            <a:r>
+              <a:rPr lang="en-US">
+                <a:latin typeface="-apple-system"/>
+              </a:rPr>
+              <a:t>.</a:t>
+            </a:r>
+            <a:endParaRPr lang="en-US"/>
+          </a:p>
+        </p:txBody>
+      </p:sp>
+    </p:spTree>
+    <p:extLst>
+      <p:ext uri="{BB962C8B-B14F-4D97-AF65-F5344CB8AC3E}">
+        <p14:creationId xmlns:p14="http://schemas.microsoft.com/office/powerpoint/2010/main" val="3911610450"/>
+      </p:ext>
+    </p:extLst>
+  </p:cSld>
+  <p:clrMapOvr>
+    <a:masterClrMapping/>
+  </p:clrMapOvr>
+</p:sld>
+</file>
+
+<file path=ppt/slides/slide82.xml><?xml version="1.0" encoding="utf-8"?>
+<p:sld xmlns:a="http://schemas.openxmlformats.org/drawingml/2006/main" xmlns:r="http://schemas.openxmlformats.org/officeDocument/2006/relationships" xmlns:p="http://schemas.openxmlformats.org/presentationml/2006/main">
+  <p:cSld>
+    <p:spTree>
+      <p:nvGrpSpPr>
+        <p:cNvPr id="1" name="">
+          <a:extLst>
+            <a:ext uri="{FF2B5EF4-FFF2-40B4-BE49-F238E27FC236}">
+              <a16:creationId xmlns:a16="http://schemas.microsoft.com/office/drawing/2014/main" id="{0B98BB03-EDD4-0579-9CEF-2B346457FB36}"/>
+            </a:ext>
+          </a:extLst>
+        </p:cNvPr>
+        <p:cNvGrpSpPr/>
+        <p:nvPr/>
+      </p:nvGrpSpPr>
+      <p:grpSpPr>
+        <a:xfrm>
+          <a:off x="0" y="0"/>
+          <a:ext cx="0" cy="0"/>
+          <a:chOff x="0" y="0"/>
+          <a:chExt cx="0" cy="0"/>
+        </a:xfrm>
+      </p:grpSpPr>
+      <p:sp>
+        <p:nvSpPr>
+          <p:cNvPr id="7" name="TextBox 6">
+            <a:extLst>
+              <a:ext uri="{FF2B5EF4-FFF2-40B4-BE49-F238E27FC236}">
+                <a16:creationId xmlns:a16="http://schemas.microsoft.com/office/drawing/2014/main" id="{563A198B-AADB-CF6B-0214-2ADAD7F3D56E}"/>
+              </a:ext>
+            </a:extLst>
+          </p:cNvPr>
+          <p:cNvSpPr txBox="1"/>
+          <p:nvPr/>
+        </p:nvSpPr>
+        <p:spPr>
+          <a:xfrm>
+            <a:off x="203200" y="244826"/>
+            <a:ext cx="11822545" cy="369332"/>
+          </a:xfrm>
+          <a:prstGeom prst="rect">
+            <a:avLst/>
+          </a:prstGeom>
+          <a:noFill/>
+        </p:spPr>
+        <p:txBody>
+          <a:bodyPr wrap="square">
+            <a:spAutoFit/>
+          </a:bodyPr>
+          <a:lstStyle/>
+          <a:p>
+            <a:r>
+              <a:rPr lang="en-US">
+                <a:latin typeface="-apple-system"/>
+              </a:rPr>
+              <a:t>.</a:t>
+            </a:r>
+            <a:endParaRPr lang="en-US"/>
+          </a:p>
+        </p:txBody>
+      </p:sp>
+    </p:spTree>
+    <p:extLst>
+      <p:ext uri="{BB962C8B-B14F-4D97-AF65-F5344CB8AC3E}">
+        <p14:creationId xmlns:p14="http://schemas.microsoft.com/office/powerpoint/2010/main" val="2301075619"/>
+      </p:ext>
+    </p:extLst>
+  </p:cSld>
+  <p:clrMapOvr>
+    <a:masterClrMapping/>
+  </p:clrMapOvr>
+</p:sld>
+</file>
+
+<file path=ppt/slides/slide83.xml><?xml version="1.0" encoding="utf-8"?>
+<p:sld xmlns:a="http://schemas.openxmlformats.org/drawingml/2006/main" xmlns:r="http://schemas.openxmlformats.org/officeDocument/2006/relationships" xmlns:p="http://schemas.openxmlformats.org/presentationml/2006/main">
+  <p:cSld>
+    <p:spTree>
+      <p:nvGrpSpPr>
+        <p:cNvPr id="1" name="">
+          <a:extLst>
+            <a:ext uri="{FF2B5EF4-FFF2-40B4-BE49-F238E27FC236}">
+              <a16:creationId xmlns:a16="http://schemas.microsoft.com/office/drawing/2014/main" id="{4E218982-6DEC-852E-B5B8-4547E1ECB373}"/>
+            </a:ext>
+          </a:extLst>
+        </p:cNvPr>
+        <p:cNvGrpSpPr/>
+        <p:nvPr/>
+      </p:nvGrpSpPr>
+      <p:grpSpPr>
+        <a:xfrm>
+          <a:off x="0" y="0"/>
+          <a:ext cx="0" cy="0"/>
+          <a:chOff x="0" y="0"/>
+          <a:chExt cx="0" cy="0"/>
+        </a:xfrm>
+      </p:grpSpPr>
+      <p:sp>
+        <p:nvSpPr>
+          <p:cNvPr id="7" name="TextBox 6">
+            <a:extLst>
+              <a:ext uri="{FF2B5EF4-FFF2-40B4-BE49-F238E27FC236}">
+                <a16:creationId xmlns:a16="http://schemas.microsoft.com/office/drawing/2014/main" id="{3BF1926F-FC68-5CA4-24E1-82DBE8ECE4A2}"/>
+              </a:ext>
+            </a:extLst>
+          </p:cNvPr>
+          <p:cNvSpPr txBox="1"/>
+          <p:nvPr/>
+        </p:nvSpPr>
+        <p:spPr>
+          <a:xfrm>
+            <a:off x="203200" y="244826"/>
+            <a:ext cx="11822545" cy="369332"/>
+          </a:xfrm>
+          <a:prstGeom prst="rect">
+            <a:avLst/>
+          </a:prstGeom>
+          <a:noFill/>
+        </p:spPr>
+        <p:txBody>
+          <a:bodyPr wrap="square">
+            <a:spAutoFit/>
+          </a:bodyPr>
+          <a:lstStyle/>
+          <a:p>
+            <a:r>
+              <a:rPr lang="en-US">
+                <a:latin typeface="-apple-system"/>
+              </a:rPr>
+              <a:t>.</a:t>
+            </a:r>
+            <a:endParaRPr lang="en-US"/>
+          </a:p>
+        </p:txBody>
+      </p:sp>
+    </p:spTree>
+    <p:extLst>
+      <p:ext uri="{BB962C8B-B14F-4D97-AF65-F5344CB8AC3E}">
+        <p14:creationId xmlns:p14="http://schemas.microsoft.com/office/powerpoint/2010/main" val="1462682254"/>
+      </p:ext>
+    </p:extLst>
+  </p:cSld>
+  <p:clrMapOvr>
+    <a:masterClrMapping/>
+  </p:clrMapOvr>
+</p:sld>
+</file>
+
+<file path=ppt/slides/slide84.xml><?xml version="1.0" encoding="utf-8"?>
+<p:sld xmlns:a="http://schemas.openxmlformats.org/drawingml/2006/main" xmlns:r="http://schemas.openxmlformats.org/officeDocument/2006/relationships" xmlns:p="http://schemas.openxmlformats.org/presentationml/2006/main">
+  <p:cSld>
+    <p:spTree>
+      <p:nvGrpSpPr>
+        <p:cNvPr id="1" name="">
+          <a:extLst>
+            <a:ext uri="{FF2B5EF4-FFF2-40B4-BE49-F238E27FC236}">
+              <a16:creationId xmlns:a16="http://schemas.microsoft.com/office/drawing/2014/main" id="{DF1834BC-DB75-1FBC-7EDF-7D4FACEE3C1C}"/>
+            </a:ext>
+          </a:extLst>
+        </p:cNvPr>
+        <p:cNvGrpSpPr/>
+        <p:nvPr/>
+      </p:nvGrpSpPr>
+      <p:grpSpPr>
+        <a:xfrm>
+          <a:off x="0" y="0"/>
+          <a:ext cx="0" cy="0"/>
+          <a:chOff x="0" y="0"/>
+          <a:chExt cx="0" cy="0"/>
+        </a:xfrm>
+      </p:grpSpPr>
+      <p:sp>
+        <p:nvSpPr>
+          <p:cNvPr id="7" name="TextBox 6">
+            <a:extLst>
+              <a:ext uri="{FF2B5EF4-FFF2-40B4-BE49-F238E27FC236}">
+                <a16:creationId xmlns:a16="http://schemas.microsoft.com/office/drawing/2014/main" id="{E3D6877A-9572-2931-8978-76FD76516DDC}"/>
+              </a:ext>
+            </a:extLst>
+          </p:cNvPr>
+          <p:cNvSpPr txBox="1"/>
+          <p:nvPr/>
+        </p:nvSpPr>
+        <p:spPr>
+          <a:xfrm>
+            <a:off x="203200" y="244826"/>
+            <a:ext cx="11822545" cy="369332"/>
+          </a:xfrm>
+          <a:prstGeom prst="rect">
+            <a:avLst/>
+          </a:prstGeom>
+          <a:noFill/>
+        </p:spPr>
+        <p:txBody>
+          <a:bodyPr wrap="square">
+            <a:spAutoFit/>
+          </a:bodyPr>
+          <a:lstStyle/>
+          <a:p>
+            <a:r>
+              <a:rPr lang="en-US">
+                <a:latin typeface="-apple-system"/>
+              </a:rPr>
+              <a:t>.</a:t>
+            </a:r>
+            <a:endParaRPr lang="en-US"/>
+          </a:p>
+        </p:txBody>
+      </p:sp>
+    </p:spTree>
+    <p:extLst>
+      <p:ext uri="{BB962C8B-B14F-4D97-AF65-F5344CB8AC3E}">
+        <p14:creationId xmlns:p14="http://schemas.microsoft.com/office/powerpoint/2010/main" val="2538651893"/>
+      </p:ext>
+    </p:extLst>
+  </p:cSld>
+  <p:clrMapOvr>
+    <a:masterClrMapping/>
+  </p:clrMapOvr>
+</p:sld>
+</file>
+
+<file path=ppt/slides/slide85.xml><?xml version="1.0" encoding="utf-8"?>
+<p:sld xmlns:a="http://schemas.openxmlformats.org/drawingml/2006/main" xmlns:r="http://schemas.openxmlformats.org/officeDocument/2006/relationships" xmlns:p="http://schemas.openxmlformats.org/presentationml/2006/main">
+  <p:cSld>
+    <p:spTree>
+      <p:nvGrpSpPr>
+        <p:cNvPr id="1" name="">
+          <a:extLst>
+            <a:ext uri="{FF2B5EF4-FFF2-40B4-BE49-F238E27FC236}">
+              <a16:creationId xmlns:a16="http://schemas.microsoft.com/office/drawing/2014/main" id="{8BB1B866-CB47-A3D2-7FC0-F326E57F9351}"/>
+            </a:ext>
+          </a:extLst>
+        </p:cNvPr>
+        <p:cNvGrpSpPr/>
+        <p:nvPr/>
+      </p:nvGrpSpPr>
+      <p:grpSpPr>
+        <a:xfrm>
+          <a:off x="0" y="0"/>
+          <a:ext cx="0" cy="0"/>
+          <a:chOff x="0" y="0"/>
+          <a:chExt cx="0" cy="0"/>
+        </a:xfrm>
+      </p:grpSpPr>
+      <p:sp>
+        <p:nvSpPr>
+          <p:cNvPr id="7" name="TextBox 6">
+            <a:extLst>
+              <a:ext uri="{FF2B5EF4-FFF2-40B4-BE49-F238E27FC236}">
+                <a16:creationId xmlns:a16="http://schemas.microsoft.com/office/drawing/2014/main" id="{F5A91F88-EFC7-9575-1011-3A01F8E4743E}"/>
+              </a:ext>
+            </a:extLst>
+          </p:cNvPr>
+          <p:cNvSpPr txBox="1"/>
+          <p:nvPr/>
+        </p:nvSpPr>
+        <p:spPr>
+          <a:xfrm>
+            <a:off x="203200" y="244826"/>
+            <a:ext cx="11822545" cy="369332"/>
+          </a:xfrm>
+          <a:prstGeom prst="rect">
+            <a:avLst/>
+          </a:prstGeom>
+          <a:noFill/>
+        </p:spPr>
+        <p:txBody>
+          <a:bodyPr wrap="square">
+            <a:spAutoFit/>
+          </a:bodyPr>
+          <a:lstStyle/>
+          <a:p>
+            <a:r>
+              <a:rPr lang="en-US">
+                <a:latin typeface="-apple-system"/>
+              </a:rPr>
+              <a:t>.</a:t>
+            </a:r>
+            <a:endParaRPr lang="en-US"/>
+          </a:p>
+        </p:txBody>
+      </p:sp>
+    </p:spTree>
+    <p:extLst>
+      <p:ext uri="{BB962C8B-B14F-4D97-AF65-F5344CB8AC3E}">
+        <p14:creationId xmlns:p14="http://schemas.microsoft.com/office/powerpoint/2010/main" val="2067443183"/>
+      </p:ext>
+    </p:extLst>
+  </p:cSld>
+  <p:clrMapOvr>
+    <a:masterClrMapping/>
+  </p:clrMapOvr>
+</p:sld>
+</file>
+
+<file path=ppt/slides/slide86.xml><?xml version="1.0" encoding="utf-8"?>
+<p:sld xmlns:a="http://schemas.openxmlformats.org/drawingml/2006/main" xmlns:r="http://schemas.openxmlformats.org/officeDocument/2006/relationships" xmlns:p="http://schemas.openxmlformats.org/presentationml/2006/main">
+  <p:cSld>
+    <p:spTree>
+      <p:nvGrpSpPr>
+        <p:cNvPr id="1" name="">
+          <a:extLst>
+            <a:ext uri="{FF2B5EF4-FFF2-40B4-BE49-F238E27FC236}">
+              <a16:creationId xmlns:a16="http://schemas.microsoft.com/office/drawing/2014/main" id="{DB5E0A76-F990-583B-6C0C-5B5B487F045B}"/>
+            </a:ext>
+          </a:extLst>
+        </p:cNvPr>
+        <p:cNvGrpSpPr/>
+        <p:nvPr/>
+      </p:nvGrpSpPr>
+      <p:grpSpPr>
+        <a:xfrm>
+          <a:off x="0" y="0"/>
+          <a:ext cx="0" cy="0"/>
+          <a:chOff x="0" y="0"/>
+          <a:chExt cx="0" cy="0"/>
+        </a:xfrm>
+      </p:grpSpPr>
+      <p:sp>
+        <p:nvSpPr>
+          <p:cNvPr id="7" name="TextBox 6">
+            <a:extLst>
+              <a:ext uri="{FF2B5EF4-FFF2-40B4-BE49-F238E27FC236}">
+                <a16:creationId xmlns:a16="http://schemas.microsoft.com/office/drawing/2014/main" id="{01603ED3-7FA6-7B0D-9DAE-145D2D56BCB8}"/>
+              </a:ext>
+            </a:extLst>
+          </p:cNvPr>
+          <p:cNvSpPr txBox="1"/>
+          <p:nvPr/>
+        </p:nvSpPr>
+        <p:spPr>
+          <a:xfrm>
+            <a:off x="203200" y="244826"/>
+            <a:ext cx="11822545" cy="369332"/>
+          </a:xfrm>
+          <a:prstGeom prst="rect">
+            <a:avLst/>
+          </a:prstGeom>
+          <a:noFill/>
+        </p:spPr>
+        <p:txBody>
+          <a:bodyPr wrap="square">
+            <a:spAutoFit/>
+          </a:bodyPr>
+          <a:lstStyle/>
+          <a:p>
+            <a:r>
+              <a:rPr lang="en-US">
+                <a:latin typeface="-apple-system"/>
+              </a:rPr>
+              <a:t>.</a:t>
+            </a:r>
+            <a:endParaRPr lang="en-US"/>
+          </a:p>
+        </p:txBody>
+      </p:sp>
+    </p:spTree>
+    <p:extLst>
+      <p:ext uri="{BB962C8B-B14F-4D97-AF65-F5344CB8AC3E}">
+        <p14:creationId xmlns:p14="http://schemas.microsoft.com/office/powerpoint/2010/main" val="571673239"/>
+      </p:ext>
+    </p:extLst>
+  </p:cSld>
+  <p:clrMapOvr>
+    <a:masterClrMapping/>
+  </p:clrMapOvr>
+</p:sld>
+</file>
+
+<file path=ppt/slides/slide87.xml><?xml version="1.0" encoding="utf-8"?>
+<p:sld xmlns:a="http://schemas.openxmlformats.org/drawingml/2006/main" xmlns:r="http://schemas.openxmlformats.org/officeDocument/2006/relationships" xmlns:p="http://schemas.openxmlformats.org/presentationml/2006/main">
+  <p:cSld>
+    <p:spTree>
+      <p:nvGrpSpPr>
+        <p:cNvPr id="1" name="">
+          <a:extLst>
+            <a:ext uri="{FF2B5EF4-FFF2-40B4-BE49-F238E27FC236}">
+              <a16:creationId xmlns:a16="http://schemas.microsoft.com/office/drawing/2014/main" id="{D1F05FAD-154F-7394-1819-F09B8141466E}"/>
+            </a:ext>
+          </a:extLst>
+        </p:cNvPr>
+        <p:cNvGrpSpPr/>
+        <p:nvPr/>
+      </p:nvGrpSpPr>
+      <p:grpSpPr>
+        <a:xfrm>
+          <a:off x="0" y="0"/>
+          <a:ext cx="0" cy="0"/>
+          <a:chOff x="0" y="0"/>
+          <a:chExt cx="0" cy="0"/>
+        </a:xfrm>
+      </p:grpSpPr>
+      <p:sp>
+        <p:nvSpPr>
+          <p:cNvPr id="7" name="TextBox 6">
+            <a:extLst>
+              <a:ext uri="{FF2B5EF4-FFF2-40B4-BE49-F238E27FC236}">
+                <a16:creationId xmlns:a16="http://schemas.microsoft.com/office/drawing/2014/main" id="{A431E858-D76B-AD72-9AD4-E9890C9FA522}"/>
+              </a:ext>
+            </a:extLst>
+          </p:cNvPr>
+          <p:cNvSpPr txBox="1"/>
+          <p:nvPr/>
+        </p:nvSpPr>
+        <p:spPr>
+          <a:xfrm>
+            <a:off x="203200" y="244826"/>
+            <a:ext cx="11822545" cy="369332"/>
+          </a:xfrm>
+          <a:prstGeom prst="rect">
+            <a:avLst/>
+          </a:prstGeom>
+          <a:noFill/>
+        </p:spPr>
+        <p:txBody>
+          <a:bodyPr wrap="square">
+            <a:spAutoFit/>
+          </a:bodyPr>
+          <a:lstStyle/>
+          <a:p>
+            <a:r>
+              <a:rPr lang="en-US">
+                <a:latin typeface="-apple-system"/>
+              </a:rPr>
+              <a:t>.</a:t>
+            </a:r>
+            <a:endParaRPr lang="en-US"/>
+          </a:p>
+        </p:txBody>
+      </p:sp>
+    </p:spTree>
+    <p:extLst>
+      <p:ext uri="{BB962C8B-B14F-4D97-AF65-F5344CB8AC3E}">
+        <p14:creationId xmlns:p14="http://schemas.microsoft.com/office/powerpoint/2010/main" val="656003231"/>
       </p:ext>
     </p:extLst>
   </p:cSld>

--- a/.lessons/7 GraphQL/1.pptx
+++ b/.lessons/7 GraphQL/1.pptx
@@ -23720,7 +23720,7 @@
         <p:spPr>
           <a:xfrm>
             <a:off x="203200" y="244826"/>
-            <a:ext cx="11822545" cy="369332"/>
+            <a:ext cx="11822545" cy="923330"/>
           </a:xfrm>
           <a:prstGeom prst="rect">
             <a:avLst/>
@@ -23734,15 +23734,115 @@
           <a:lstStyle/>
           <a:p>
             <a:r>
-              <a:rPr lang="en-US">
-                <a:latin typeface="-apple-system"/>
-              </a:rPr>
-              <a:t>.</a:t>
+              <a:rPr lang="az-Latn-AZ" b="1">
+                <a:solidFill>
+                  <a:srgbClr val="0070C0"/>
+                </a:solidFill>
+                <a:latin typeface="-apple-system"/>
+              </a:rPr>
+              <a:t>.graphql</a:t>
+            </a:r>
+            <a:r>
+              <a:rPr lang="en-US" b="1">
+                <a:solidFill>
+                  <a:srgbClr val="0070C0"/>
+                </a:solidFill>
+                <a:latin typeface="-apple-system"/>
+              </a:rPr>
+              <a:t> </a:t>
+            </a:r>
+            <a:r>
+              <a:rPr lang="az-Latn-AZ">
+                <a:latin typeface="-apple-system"/>
+              </a:rPr>
+              <a:t>faylı olmadan </a:t>
+            </a:r>
+            <a:r>
+              <a:rPr lang="az-Latn-AZ" b="1">
+                <a:solidFill>
+                  <a:srgbClr val="FF0000"/>
+                </a:solidFill>
+                <a:latin typeface="-apple-system"/>
+              </a:rPr>
+              <a:t>ObjectType</a:t>
+            </a:r>
+            <a:r>
+              <a:rPr lang="az-Latn-AZ">
+                <a:latin typeface="-apple-system"/>
+              </a:rPr>
+              <a:t> klası ilə </a:t>
+            </a:r>
+            <a:r>
+              <a:rPr lang="az-Latn-AZ" b="1">
+                <a:latin typeface="-apple-system"/>
+              </a:rPr>
+              <a:t>GraphQL</a:t>
+            </a:r>
+            <a:r>
+              <a:rPr lang="az-Latn-AZ">
+                <a:latin typeface="-apple-system"/>
+              </a:rPr>
+              <a:t> məntiqinin yazılması.  </a:t>
+            </a:r>
+            <a:r>
+              <a:rPr lang="az-Latn-AZ" b="1">
+                <a:latin typeface="-apple-system"/>
+              </a:rPr>
+              <a:t>CODE2</a:t>
+            </a:r>
+            <a:r>
+              <a:rPr lang="az-Latn-AZ">
+                <a:latin typeface="-apple-system"/>
+              </a:rPr>
+              <a:t> qovluğu.</a:t>
+            </a:r>
+          </a:p>
+          <a:p>
+            <a:endParaRPr lang="az-Latn-AZ">
+              <a:latin typeface="-apple-system"/>
+            </a:endParaRPr>
+          </a:p>
+          <a:p>
+            <a:r>
+              <a:rPr lang="az-Latn-AZ">
+                <a:latin typeface="-apple-system"/>
+              </a:rPr>
+              <a:t>Bu nümunədə olan kodları izah etmiyəcəm. Sadəcə mümkün olduğunu göstərmək üçün hazırlanmışdır.</a:t>
             </a:r>
             <a:endParaRPr lang="en-US"/>
           </a:p>
         </p:txBody>
       </p:sp>
+      <p:pic>
+        <p:nvPicPr>
+          <p:cNvPr id="3" name="Picture 2">
+            <a:extLst>
+              <a:ext uri="{FF2B5EF4-FFF2-40B4-BE49-F238E27FC236}">
+                <a16:creationId xmlns:a16="http://schemas.microsoft.com/office/drawing/2014/main" id="{D051F7C6-0294-2242-E81A-FB6A9327CD24}"/>
+              </a:ext>
+            </a:extLst>
+          </p:cNvPr>
+          <p:cNvPicPr>
+            <a:picLocks noChangeAspect="1"/>
+          </p:cNvPicPr>
+          <p:nvPr/>
+        </p:nvPicPr>
+        <p:blipFill>
+          <a:blip r:embed="rId2"/>
+          <a:stretch>
+            <a:fillRect/>
+          </a:stretch>
+        </p:blipFill>
+        <p:spPr>
+          <a:xfrm>
+            <a:off x="5812270" y="1967344"/>
+            <a:ext cx="6379729" cy="4890655"/>
+          </a:xfrm>
+          <a:prstGeom prst="rect">
+            <a:avLst/>
+          </a:prstGeom>
+        </p:spPr>
+      </p:pic>
     </p:spTree>
     <p:extLst>
       <p:ext uri="{BB962C8B-B14F-4D97-AF65-F5344CB8AC3E}">
@@ -23868,7 +23968,7 @@
         <p:spPr>
           <a:xfrm>
             <a:off x="203200" y="244826"/>
-            <a:ext cx="11822545" cy="369332"/>
+            <a:ext cx="11822545" cy="2308324"/>
           </a:xfrm>
           <a:prstGeom prst="rect">
             <a:avLst/>
@@ -23882,15 +23982,142 @@
           <a:lstStyle/>
           <a:p>
             <a:r>
-              <a:rPr lang="en-US">
-                <a:latin typeface="-apple-system"/>
-              </a:rPr>
-              <a:t>.</a:t>
-            </a:r>
-            <a:endParaRPr lang="en-US"/>
+              <a:rPr lang="az-Latn-AZ">
+                <a:latin typeface="-apple-system"/>
+              </a:rPr>
+              <a:t>İndi isə </a:t>
+            </a:r>
+            <a:r>
+              <a:rPr lang="az-Latn-AZ" b="1">
+                <a:latin typeface="-apple-system"/>
+              </a:rPr>
+              <a:t>APİ</a:t>
+            </a:r>
+            <a:r>
+              <a:rPr lang="az-Latn-AZ">
+                <a:latin typeface="-apple-system"/>
+              </a:rPr>
+              <a:t> -ni </a:t>
+            </a:r>
+            <a:r>
+              <a:rPr lang="az-Latn-AZ" b="1">
+                <a:latin typeface="-apple-system"/>
+              </a:rPr>
+              <a:t>Front</a:t>
+            </a:r>
+            <a:r>
+              <a:rPr lang="az-Latn-AZ">
+                <a:latin typeface="-apple-system"/>
+              </a:rPr>
+              <a:t> -da istifadə edək.</a:t>
+            </a:r>
+          </a:p>
+          <a:p>
+            <a:endParaRPr lang="az-Latn-AZ">
+              <a:latin typeface="-apple-system"/>
+            </a:endParaRPr>
+          </a:p>
+          <a:p>
+            <a:r>
+              <a:rPr lang="az-Latn-AZ" b="1">
+                <a:latin typeface="-apple-system"/>
+              </a:rPr>
+              <a:t>APİ</a:t>
+            </a:r>
+            <a:r>
+              <a:rPr lang="az-Latn-AZ">
+                <a:latin typeface="-apple-system"/>
+              </a:rPr>
+              <a:t> ilə dataları çağıraraq </a:t>
+            </a:r>
+            <a:r>
+              <a:rPr lang="az-Latn-AZ" b="1">
+                <a:latin typeface="-apple-system"/>
+              </a:rPr>
+              <a:t>Front</a:t>
+            </a:r>
+            <a:r>
+              <a:rPr lang="az-Latn-AZ">
+                <a:latin typeface="-apple-system"/>
+              </a:rPr>
+              <a:t> -da əks etdirəcəyik.</a:t>
+            </a:r>
+          </a:p>
+          <a:p>
+            <a:endParaRPr lang="az-Latn-AZ">
+              <a:latin typeface="-apple-system"/>
+            </a:endParaRPr>
+          </a:p>
+          <a:p>
+            <a:r>
+              <a:rPr lang="az-Latn-AZ">
+                <a:latin typeface="-apple-system"/>
+              </a:rPr>
+              <a:t>İlk olaraq </a:t>
+            </a:r>
+            <a:r>
+              <a:rPr lang="az-Latn-AZ" b="1">
+                <a:latin typeface="-apple-system"/>
+              </a:rPr>
+              <a:t>react</a:t>
+            </a:r>
+            <a:r>
+              <a:rPr lang="az-Latn-AZ">
+                <a:latin typeface="-apple-system"/>
+              </a:rPr>
+              <a:t> proyekt quraq. Ancaq vacib deyildir. Normal HTML - JS </a:t>
+            </a:r>
+          </a:p>
+          <a:p>
+            <a:r>
+              <a:rPr lang="az-Latn-AZ">
+                <a:latin typeface="-apple-system"/>
+              </a:rPr>
+              <a:t>ilə də bunu etmək mümkündür.</a:t>
+            </a:r>
+          </a:p>
+          <a:p>
+            <a:endParaRPr lang="az-Latn-AZ">
+              <a:latin typeface="-apple-system"/>
+            </a:endParaRPr>
+          </a:p>
+          <a:p>
+            <a:endParaRPr lang="az-Latn-AZ">
+              <a:latin typeface="-apple-system"/>
+            </a:endParaRPr>
           </a:p>
         </p:txBody>
       </p:sp>
+      <p:pic>
+        <p:nvPicPr>
+          <p:cNvPr id="3" name="Picture 2">
+            <a:extLst>
+              <a:ext uri="{FF2B5EF4-FFF2-40B4-BE49-F238E27FC236}">
+                <a16:creationId xmlns:a16="http://schemas.microsoft.com/office/drawing/2014/main" id="{BD5FA37B-3C11-4ED5-7AC3-3000E3BB6451}"/>
+              </a:ext>
+            </a:extLst>
+          </p:cNvPr>
+          <p:cNvPicPr>
+            <a:picLocks noChangeAspect="1"/>
+          </p:cNvPicPr>
+          <p:nvPr/>
+        </p:nvPicPr>
+        <p:blipFill>
+          <a:blip r:embed="rId2"/>
+          <a:stretch>
+            <a:fillRect/>
+          </a:stretch>
+        </p:blipFill>
+        <p:spPr>
+          <a:xfrm>
+            <a:off x="8142585" y="0"/>
+            <a:ext cx="4049415" cy="6858000"/>
+          </a:xfrm>
+          <a:prstGeom prst="rect">
+            <a:avLst/>
+          </a:prstGeom>
+        </p:spPr>
+      </p:pic>
     </p:spTree>
     <p:extLst>
       <p:ext uri="{BB962C8B-B14F-4D97-AF65-F5344CB8AC3E}">
@@ -24148,7 +24375,7 @@
         <p:spPr>
           <a:xfrm>
             <a:off x="203200" y="244826"/>
-            <a:ext cx="11822545" cy="369332"/>
+            <a:ext cx="11822545" cy="923330"/>
           </a:xfrm>
           <a:prstGeom prst="rect">
             <a:avLst/>
@@ -24162,15 +24389,82 @@
           <a:lstStyle/>
           <a:p>
             <a:r>
-              <a:rPr lang="en-US">
-                <a:latin typeface="-apple-system"/>
-              </a:rPr>
-              <a:t>.</a:t>
+              <a:rPr lang="az-Latn-AZ">
+                <a:latin typeface="-apple-system"/>
+              </a:rPr>
+              <a:t>React proyekti qurduqdan sonra </a:t>
+            </a:r>
+            <a:r>
+              <a:rPr lang="az-Latn-AZ" b="1">
+                <a:solidFill>
+                  <a:srgbClr val="FF0000"/>
+                </a:solidFill>
+                <a:latin typeface="-apple-system"/>
+              </a:rPr>
+              <a:t>Apollo-Client</a:t>
+            </a:r>
+            <a:r>
+              <a:rPr lang="az-Latn-AZ">
+                <a:latin typeface="-apple-system"/>
+              </a:rPr>
+              <a:t> da qururuq - </a:t>
+            </a:r>
+            <a:r>
+              <a:rPr lang="az-Latn-AZ" u="sng">
+                <a:solidFill>
+                  <a:srgbClr val="00B0F0"/>
+                </a:solidFill>
+                <a:latin typeface="-apple-system"/>
+              </a:rPr>
+              <a:t>https://www.apollographql.com/docs/react/get-started</a:t>
+            </a:r>
+          </a:p>
+          <a:p>
+            <a:endParaRPr lang="az-Latn-AZ">
+              <a:latin typeface="-apple-system"/>
+            </a:endParaRPr>
+          </a:p>
+          <a:p>
+            <a:r>
+              <a:rPr lang="az-Latn-AZ">
+                <a:latin typeface="-apple-system"/>
+              </a:rPr>
+              <a:t>Addımlar apollonun veb saytında mövcuddur.</a:t>
             </a:r>
             <a:endParaRPr lang="en-US"/>
           </a:p>
         </p:txBody>
       </p:sp>
+      <p:pic>
+        <p:nvPicPr>
+          <p:cNvPr id="5" name="Picture 4">
+            <a:extLst>
+              <a:ext uri="{FF2B5EF4-FFF2-40B4-BE49-F238E27FC236}">
+                <a16:creationId xmlns:a16="http://schemas.microsoft.com/office/drawing/2014/main" id="{232DC412-38FC-9687-1823-DAD25D12E329}"/>
+              </a:ext>
+            </a:extLst>
+          </p:cNvPr>
+          <p:cNvPicPr>
+            <a:picLocks noChangeAspect="1"/>
+          </p:cNvPicPr>
+          <p:nvPr/>
+        </p:nvPicPr>
+        <p:blipFill>
+          <a:blip r:embed="rId2"/>
+          <a:stretch>
+            <a:fillRect/>
+          </a:stretch>
+        </p:blipFill>
+        <p:spPr>
+          <a:xfrm>
+            <a:off x="6304728" y="4800313"/>
+            <a:ext cx="5887272" cy="2057687"/>
+          </a:xfrm>
+          <a:prstGeom prst="rect">
+            <a:avLst/>
+          </a:prstGeom>
+        </p:spPr>
+      </p:pic>
     </p:spTree>
     <p:extLst>
       <p:ext uri="{BB962C8B-B14F-4D97-AF65-F5344CB8AC3E}">
@@ -24236,15 +24530,45 @@
           <a:lstStyle/>
           <a:p>
             <a:r>
-              <a:rPr lang="en-US">
-                <a:latin typeface="-apple-system"/>
-              </a:rPr>
-              <a:t>.</a:t>
+              <a:rPr lang="az-Latn-AZ">
+                <a:latin typeface="-apple-system"/>
+              </a:rPr>
+              <a:t>Apollo saytından bir çox lazımlı kodu götürürük.</a:t>
             </a:r>
             <a:endParaRPr lang="en-US"/>
           </a:p>
         </p:txBody>
       </p:sp>
+      <p:pic>
+        <p:nvPicPr>
+          <p:cNvPr id="3" name="Picture 2">
+            <a:extLst>
+              <a:ext uri="{FF2B5EF4-FFF2-40B4-BE49-F238E27FC236}">
+                <a16:creationId xmlns:a16="http://schemas.microsoft.com/office/drawing/2014/main" id="{9B3273EF-5507-C3EB-AF90-21FBB47DB501}"/>
+              </a:ext>
+            </a:extLst>
+          </p:cNvPr>
+          <p:cNvPicPr>
+            <a:picLocks noChangeAspect="1"/>
+          </p:cNvPicPr>
+          <p:nvPr/>
+        </p:nvPicPr>
+        <p:blipFill>
+          <a:blip r:embed="rId2"/>
+          <a:stretch>
+            <a:fillRect/>
+          </a:stretch>
+        </p:blipFill>
+        <p:spPr>
+          <a:xfrm>
+            <a:off x="1834838" y="969818"/>
+            <a:ext cx="10357161" cy="5888182"/>
+          </a:xfrm>
+          <a:prstGeom prst="rect">
+            <a:avLst/>
+          </a:prstGeom>
+        </p:spPr>
+      </p:pic>
     </p:spTree>
     <p:extLst>
       <p:ext uri="{BB962C8B-B14F-4D97-AF65-F5344CB8AC3E}">
@@ -24310,15 +24634,45 @@
           <a:lstStyle/>
           <a:p>
             <a:r>
-              <a:rPr lang="en-US">
-                <a:latin typeface="-apple-system"/>
-              </a:rPr>
-              <a:t>.</a:t>
+              <a:rPr lang="az-Latn-AZ">
+                <a:latin typeface="-apple-system"/>
+              </a:rPr>
+              <a:t>Sistemi `npm run dev` yazaraq işə salırıq.</a:t>
             </a:r>
             <a:endParaRPr lang="en-US"/>
           </a:p>
         </p:txBody>
       </p:sp>
+      <p:pic>
+        <p:nvPicPr>
+          <p:cNvPr id="3" name="Picture 2">
+            <a:extLst>
+              <a:ext uri="{FF2B5EF4-FFF2-40B4-BE49-F238E27FC236}">
+                <a16:creationId xmlns:a16="http://schemas.microsoft.com/office/drawing/2014/main" id="{4B91B563-420C-2BA1-E1D9-FEA73B20C0C9}"/>
+              </a:ext>
+            </a:extLst>
+          </p:cNvPr>
+          <p:cNvPicPr>
+            <a:picLocks noChangeAspect="1"/>
+          </p:cNvPicPr>
+          <p:nvPr/>
+        </p:nvPicPr>
+        <p:blipFill>
+          <a:blip r:embed="rId2"/>
+          <a:stretch>
+            <a:fillRect/>
+          </a:stretch>
+        </p:blipFill>
+        <p:spPr>
+          <a:xfrm>
+            <a:off x="7381204" y="0"/>
+            <a:ext cx="4810796" cy="2876951"/>
+          </a:xfrm>
+          <a:prstGeom prst="rect">
+            <a:avLst/>
+          </a:prstGeom>
+        </p:spPr>
+      </p:pic>
     </p:spTree>
     <p:extLst>
       <p:ext uri="{BB962C8B-B14F-4D97-AF65-F5344CB8AC3E}">
@@ -24384,15 +24738,60 @@
           <a:lstStyle/>
           <a:p>
             <a:r>
-              <a:rPr lang="en-US">
-                <a:latin typeface="-apple-system"/>
-              </a:rPr>
-              <a:t>.</a:t>
+              <a:rPr lang="az-Latn-AZ">
+                <a:latin typeface="-apple-system"/>
+              </a:rPr>
+              <a:t>Belə bir </a:t>
+            </a:r>
+            <a:r>
+              <a:rPr lang="az-Latn-AZ" b="1">
+                <a:solidFill>
+                  <a:srgbClr val="FF0000"/>
+                </a:solidFill>
+                <a:latin typeface="-apple-system"/>
+              </a:rPr>
+              <a:t>CORS</a:t>
+            </a:r>
+            <a:r>
+              <a:rPr lang="az-Latn-AZ">
+                <a:latin typeface="-apple-system"/>
+              </a:rPr>
+              <a:t> xətası ilə qarşılacağıq.</a:t>
             </a:r>
             <a:endParaRPr lang="en-US"/>
           </a:p>
         </p:txBody>
       </p:sp>
+      <p:pic>
+        <p:nvPicPr>
+          <p:cNvPr id="3" name="Picture 2">
+            <a:extLst>
+              <a:ext uri="{FF2B5EF4-FFF2-40B4-BE49-F238E27FC236}">
+                <a16:creationId xmlns:a16="http://schemas.microsoft.com/office/drawing/2014/main" id="{21837C2F-5068-08B8-1EA8-403F59B46B7B}"/>
+              </a:ext>
+            </a:extLst>
+          </p:cNvPr>
+          <p:cNvPicPr>
+            <a:picLocks noChangeAspect="1"/>
+          </p:cNvPicPr>
+          <p:nvPr/>
+        </p:nvPicPr>
+        <p:blipFill>
+          <a:blip r:embed="rId2"/>
+          <a:stretch>
+            <a:fillRect/>
+          </a:stretch>
+        </p:blipFill>
+        <p:spPr>
+          <a:xfrm>
+            <a:off x="0" y="3331913"/>
+            <a:ext cx="12192000" cy="3526087"/>
+          </a:xfrm>
+          <a:prstGeom prst="rect">
+            <a:avLst/>
+          </a:prstGeom>
+        </p:spPr>
+      </p:pic>
     </p:spTree>
     <p:extLst>
       <p:ext uri="{BB962C8B-B14F-4D97-AF65-F5344CB8AC3E}">
@@ -24444,7 +24843,7 @@
         <p:spPr>
           <a:xfrm>
             <a:off x="203200" y="244826"/>
-            <a:ext cx="11822545" cy="369332"/>
+            <a:ext cx="11822545" cy="923330"/>
           </a:xfrm>
           <a:prstGeom prst="rect">
             <a:avLst/>
@@ -24458,15 +24857,79 @@
           <a:lstStyle/>
           <a:p>
             <a:r>
-              <a:rPr lang="en-US">
-                <a:latin typeface="-apple-system"/>
-              </a:rPr>
-              <a:t>.</a:t>
+              <a:rPr lang="az-Latn-AZ" b="1">
+                <a:latin typeface="-apple-system"/>
+              </a:rPr>
+              <a:t>CORS</a:t>
+            </a:r>
+            <a:r>
+              <a:rPr lang="az-Latn-AZ">
+                <a:latin typeface="-apple-system"/>
+              </a:rPr>
+              <a:t> xətasını aradan qaldırmaq üçün </a:t>
+            </a:r>
+            <a:r>
+              <a:rPr lang="az-Latn-AZ" b="1">
+                <a:solidFill>
+                  <a:srgbClr val="FF0000"/>
+                </a:solidFill>
+                <a:latin typeface="-apple-system"/>
+              </a:rPr>
+              <a:t>header() </a:t>
+            </a:r>
+            <a:r>
+              <a:rPr lang="az-Latn-AZ">
+                <a:latin typeface="-apple-system"/>
+              </a:rPr>
+              <a:t>metodu ilə başlıqlar əlavə edirik.</a:t>
+            </a:r>
+          </a:p>
+          <a:p>
+            <a:endParaRPr lang="az-Latn-AZ">
+              <a:latin typeface="-apple-system"/>
+            </a:endParaRPr>
+          </a:p>
+          <a:p>
+            <a:r>
+              <a:rPr lang="az-Latn-AZ">
+                <a:latin typeface="-apple-system"/>
+              </a:rPr>
+              <a:t>Birdə internetdən şəkil URL -</a:t>
             </a:r>
             <a:endParaRPr lang="en-US"/>
           </a:p>
         </p:txBody>
       </p:sp>
+      <p:pic>
+        <p:nvPicPr>
+          <p:cNvPr id="3" name="Picture 2">
+            <a:extLst>
+              <a:ext uri="{FF2B5EF4-FFF2-40B4-BE49-F238E27FC236}">
+                <a16:creationId xmlns:a16="http://schemas.microsoft.com/office/drawing/2014/main" id="{E0BFF95B-00C8-826A-854D-48F44686BDCD}"/>
+              </a:ext>
+            </a:extLst>
+          </p:cNvPr>
+          <p:cNvPicPr>
+            <a:picLocks noChangeAspect="1"/>
+          </p:cNvPicPr>
+          <p:nvPr/>
+        </p:nvPicPr>
+        <p:blipFill>
+          <a:blip r:embed="rId2"/>
+          <a:stretch>
+            <a:fillRect/>
+          </a:stretch>
+        </p:blipFill>
+        <p:spPr>
+          <a:xfrm>
+            <a:off x="2591030" y="1607126"/>
+            <a:ext cx="9600969" cy="5250873"/>
+          </a:xfrm>
+          <a:prstGeom prst="rect">
+            <a:avLst/>
+          </a:prstGeom>
+        </p:spPr>
+      </p:pic>
     </p:spTree>
     <p:extLst>
       <p:ext uri="{BB962C8B-B14F-4D97-AF65-F5344CB8AC3E}">
@@ -24532,15 +24995,45 @@
           <a:lstStyle/>
           <a:p>
             <a:r>
-              <a:rPr lang="en-US">
-                <a:latin typeface="-apple-system"/>
-              </a:rPr>
-              <a:t>.</a:t>
+              <a:rPr lang="az-Latn-AZ">
+                <a:latin typeface="-apple-system"/>
+              </a:rPr>
+              <a:t>Nəticə.</a:t>
             </a:r>
             <a:endParaRPr lang="en-US"/>
           </a:p>
         </p:txBody>
       </p:sp>
+      <p:pic>
+        <p:nvPicPr>
+          <p:cNvPr id="3" name="Picture 2">
+            <a:extLst>
+              <a:ext uri="{FF2B5EF4-FFF2-40B4-BE49-F238E27FC236}">
+                <a16:creationId xmlns:a16="http://schemas.microsoft.com/office/drawing/2014/main" id="{BDE104BB-5EF1-72E6-02FC-808357FAC79E}"/>
+              </a:ext>
+            </a:extLst>
+          </p:cNvPr>
+          <p:cNvPicPr>
+            <a:picLocks noChangeAspect="1"/>
+          </p:cNvPicPr>
+          <p:nvPr/>
+        </p:nvPicPr>
+        <p:blipFill>
+          <a:blip r:embed="rId2"/>
+          <a:stretch>
+            <a:fillRect/>
+          </a:stretch>
+        </p:blipFill>
+        <p:spPr>
+          <a:xfrm>
+            <a:off x="3574239" y="0"/>
+            <a:ext cx="8617761" cy="6858000"/>
+          </a:xfrm>
+          <a:prstGeom prst="rect">
+            <a:avLst/>
+          </a:prstGeom>
+        </p:spPr>
+      </p:pic>
     </p:spTree>
     <p:extLst>
       <p:ext uri="{BB962C8B-B14F-4D97-AF65-F5344CB8AC3E}">

--- a/.lessons/7 GraphQL/1.pptx
+++ b/.lessons/7 GraphQL/1.pptx
@@ -92,6 +92,12 @@
     <p:sldId id="330" r:id="rId86"/>
     <p:sldId id="288" r:id="rId87"/>
     <p:sldId id="289" r:id="rId88"/>
+    <p:sldId id="345" r:id="rId89"/>
+    <p:sldId id="346" r:id="rId90"/>
+    <p:sldId id="347" r:id="rId91"/>
+    <p:sldId id="348" r:id="rId92"/>
+    <p:sldId id="349" r:id="rId93"/>
+    <p:sldId id="350" r:id="rId94"/>
   </p:sldIdLst>
   <p:sldSz cx="12192000" cy="6858000"/>
   <p:notesSz cx="6858000" cy="9144000"/>
@@ -24637,7 +24643,19 @@
               <a:rPr lang="az-Latn-AZ">
                 <a:latin typeface="-apple-system"/>
               </a:rPr>
-              <a:t>Sistemi `npm run dev` yazaraq işə salırıq.</a:t>
+              <a:t>Sistemi `</a:t>
+            </a:r>
+            <a:r>
+              <a:rPr lang="az-Latn-AZ" b="1">
+                <a:latin typeface="-apple-system"/>
+              </a:rPr>
+              <a:t>npm run dev</a:t>
+            </a:r>
+            <a:r>
+              <a:rPr lang="az-Latn-AZ">
+                <a:latin typeface="-apple-system"/>
+              </a:rPr>
+              <a:t>` yazaraq işə salırıq.</a:t>
             </a:r>
             <a:endParaRPr lang="en-US"/>
           </a:p>
@@ -24894,7 +24912,19 @@
               <a:rPr lang="az-Latn-AZ">
                 <a:latin typeface="-apple-system"/>
               </a:rPr>
-              <a:t>Birdə internetdən şəkil URL -</a:t>
+              <a:t>Birdə internetdən şək</a:t>
+            </a:r>
+            <a:r>
+              <a:rPr lang="en-US">
+                <a:latin typeface="-apple-system"/>
+              </a:rPr>
+              <a:t>il </a:t>
+            </a:r>
+            <a:r>
+              <a:rPr lang="az-Latn-AZ">
+                <a:latin typeface="-apple-system"/>
+              </a:rPr>
+              <a:t>üçün URL kopyalayaq.</a:t>
             </a:r>
             <a:endParaRPr lang="en-US"/>
           </a:p>
@@ -25159,7 +25189,7 @@
         <p:spPr>
           <a:xfrm>
             <a:off x="203200" y="244826"/>
-            <a:ext cx="11822545" cy="369332"/>
+            <a:ext cx="11822545" cy="5586145"/>
           </a:xfrm>
           <a:prstGeom prst="rect">
             <a:avLst/>
@@ -25173,12 +25203,321 @@
           <a:lstStyle/>
           <a:p>
             <a:r>
-              <a:rPr lang="en-US">
-                <a:latin typeface="-apple-system"/>
-              </a:rPr>
-              <a:t>.</a:t>
-            </a:r>
-            <a:endParaRPr lang="en-US"/>
+              <a:rPr lang="en-US" sz="1400" b="1">
+                <a:solidFill>
+                  <a:srgbClr val="FF0000"/>
+                </a:solidFill>
+                <a:latin typeface="-apple-system"/>
+              </a:rPr>
+              <a:t>Resolver nədir?</a:t>
+            </a:r>
+          </a:p>
+          <a:p>
+            <a:endParaRPr lang="en-US" sz="1400">
+              <a:latin typeface="-apple-system"/>
+            </a:endParaRPr>
+          </a:p>
+          <a:p>
+            <a:r>
+              <a:rPr lang="en-US" sz="1400" b="1">
+                <a:latin typeface="-apple-system"/>
+              </a:rPr>
+              <a:t>Resolver = “cavab verən” </a:t>
+            </a:r>
+            <a:r>
+              <a:rPr lang="en-US" sz="1400">
+                <a:latin typeface="-apple-system"/>
+              </a:rPr>
+              <a:t>funksiya deməkdir.</a:t>
+            </a:r>
+            <a:r>
+              <a:rPr lang="az-Latn-AZ" sz="1400">
+                <a:latin typeface="-apple-system"/>
+              </a:rPr>
+              <a:t> </a:t>
+            </a:r>
+            <a:r>
+              <a:rPr lang="en-US" sz="1400">
+                <a:latin typeface="-apple-system"/>
+              </a:rPr>
+              <a:t>GraphQL-də resolver, istifadəçi sorğu göndərəndə (query yazanda), həmin sorğunu cavablayan kod parçasıdır.</a:t>
+            </a:r>
+          </a:p>
+          <a:p>
+            <a:endParaRPr lang="en-US" sz="1400">
+              <a:latin typeface="-apple-system"/>
+            </a:endParaRPr>
+          </a:p>
+          <a:p>
+            <a:r>
+              <a:rPr lang="en-US" sz="1400" b="1">
+                <a:latin typeface="-apple-system"/>
+              </a:rPr>
+              <a:t>Təsəvvür elə ki</a:t>
+            </a:r>
+            <a:r>
+              <a:rPr lang="en-US" sz="1400">
+                <a:latin typeface="-apple-system"/>
+              </a:rPr>
+              <a:t>:</a:t>
+            </a:r>
+          </a:p>
+          <a:p>
+            <a:pPr marL="628650" lvl="1" indent="-171450">
+              <a:lnSpc>
+                <a:spcPct val="150000"/>
+              </a:lnSpc>
+              <a:buFont typeface="Arial" panose="020B0604020202020204" pitchFamily="34" charset="0"/>
+              <a:buChar char="•"/>
+            </a:pPr>
+            <a:r>
+              <a:rPr lang="en-US" sz="1400" b="1">
+                <a:latin typeface="-apple-system"/>
+              </a:rPr>
+              <a:t>GraphQL sorğu (query) </a:t>
+            </a:r>
+            <a:r>
+              <a:rPr lang="en-US" sz="1400">
+                <a:latin typeface="-apple-system"/>
+              </a:rPr>
+              <a:t>= tələbə müəllimdən sual soruşur.</a:t>
+            </a:r>
+          </a:p>
+          <a:p>
+            <a:pPr marL="628650" lvl="1" indent="-171450">
+              <a:lnSpc>
+                <a:spcPct val="150000"/>
+              </a:lnSpc>
+              <a:buFont typeface="Arial" panose="020B0604020202020204" pitchFamily="34" charset="0"/>
+              <a:buChar char="•"/>
+            </a:pPr>
+            <a:r>
+              <a:rPr lang="en-US" sz="1400" b="1">
+                <a:latin typeface="-apple-system"/>
+              </a:rPr>
+              <a:t>Resolver</a:t>
+            </a:r>
+            <a:r>
+              <a:rPr lang="en-US" sz="1400">
+                <a:latin typeface="-apple-system"/>
+              </a:rPr>
+              <a:t> = müəllimin verdiyi cavabdır.</a:t>
+            </a:r>
+          </a:p>
+          <a:p>
+            <a:pPr marL="628650" lvl="1" indent="-171450">
+              <a:lnSpc>
+                <a:spcPct val="150000"/>
+              </a:lnSpc>
+              <a:buFont typeface="Arial" panose="020B0604020202020204" pitchFamily="34" charset="0"/>
+              <a:buChar char="•"/>
+            </a:pPr>
+            <a:r>
+              <a:rPr lang="en-US" sz="1400" b="1">
+                <a:latin typeface="-apple-system"/>
+              </a:rPr>
+              <a:t>Database</a:t>
+            </a:r>
+            <a:r>
+              <a:rPr lang="en-US" sz="1400">
+                <a:latin typeface="-apple-system"/>
+              </a:rPr>
+              <a:t> = müəllimin kitabı və ya dəftəri.</a:t>
+            </a:r>
+          </a:p>
+          <a:p>
+            <a:endParaRPr lang="en-US" sz="1400">
+              <a:latin typeface="-apple-system"/>
+            </a:endParaRPr>
+          </a:p>
+          <a:p>
+            <a:pPr>
+              <a:lnSpc>
+                <a:spcPct val="150000"/>
+              </a:lnSpc>
+            </a:pPr>
+            <a:r>
+              <a:rPr lang="en-US" sz="1400" b="1">
+                <a:latin typeface="-apple-system"/>
+              </a:rPr>
+              <a:t>Yəni tələbə (istifadəçi) deyir</a:t>
+            </a:r>
+            <a:r>
+              <a:rPr lang="en-US" sz="1400">
+                <a:latin typeface="-apple-system"/>
+              </a:rPr>
+              <a:t>:</a:t>
+            </a:r>
+            <a:r>
+              <a:rPr lang="az-Latn-AZ" sz="1400">
+                <a:latin typeface="-apple-system"/>
+              </a:rPr>
+              <a:t> </a:t>
+            </a:r>
+            <a:r>
+              <a:rPr lang="en-US" sz="1400">
+                <a:latin typeface="-apple-system"/>
+              </a:rPr>
+              <a:t>"Müəllim, mənə bütün qeydləri göstər."</a:t>
+            </a:r>
+          </a:p>
+          <a:p>
+            <a:pPr>
+              <a:lnSpc>
+                <a:spcPct val="150000"/>
+              </a:lnSpc>
+            </a:pPr>
+            <a:r>
+              <a:rPr lang="en-US" sz="1400">
+                <a:latin typeface="-apple-system"/>
+              </a:rPr>
+              <a:t>Müəllim (</a:t>
+            </a:r>
+            <a:r>
+              <a:rPr lang="en-US" sz="1400" b="1">
+                <a:latin typeface="-apple-system"/>
+              </a:rPr>
+              <a:t>resolver</a:t>
+            </a:r>
+            <a:r>
+              <a:rPr lang="en-US" sz="1400">
+                <a:latin typeface="-apple-system"/>
+              </a:rPr>
+              <a:t>) kitabdan (</a:t>
+            </a:r>
+            <a:r>
+              <a:rPr lang="en-US" sz="1400" b="1">
+                <a:latin typeface="-apple-system"/>
+              </a:rPr>
+              <a:t>database</a:t>
+            </a:r>
+            <a:r>
+              <a:rPr lang="en-US" sz="1400">
+                <a:latin typeface="-apple-system"/>
+              </a:rPr>
+              <a:t>) oxuyur və cavab verir.</a:t>
+            </a:r>
+          </a:p>
+          <a:p>
+            <a:endParaRPr lang="en-US" sz="1400">
+              <a:latin typeface="-apple-system"/>
+            </a:endParaRPr>
+          </a:p>
+          <a:p>
+            <a:endParaRPr lang="en-US" sz="1400">
+              <a:latin typeface="-apple-system"/>
+            </a:endParaRPr>
+          </a:p>
+          <a:p>
+            <a:endParaRPr lang="en-US" sz="1400">
+              <a:latin typeface="-apple-system"/>
+            </a:endParaRPr>
+          </a:p>
+          <a:p>
+            <a:endParaRPr lang="en-US" sz="1400">
+              <a:latin typeface="-apple-system"/>
+            </a:endParaRPr>
+          </a:p>
+          <a:p>
+            <a:r>
+              <a:rPr lang="en-US" sz="1400" b="1">
+                <a:latin typeface="-apple-system"/>
+              </a:rPr>
+              <a:t>Resolver nə vaxt işə düşür?</a:t>
+            </a:r>
+            <a:endParaRPr lang="en-US" sz="1400">
+              <a:latin typeface="-apple-system"/>
+            </a:endParaRPr>
+          </a:p>
+          <a:p>
+            <a:pPr marL="628650" lvl="1" indent="-171450">
+              <a:lnSpc>
+                <a:spcPct val="150000"/>
+              </a:lnSpc>
+              <a:buFont typeface="Arial" panose="020B0604020202020204" pitchFamily="34" charset="0"/>
+              <a:buChar char="•"/>
+            </a:pPr>
+            <a:r>
+              <a:rPr lang="en-US" sz="1400">
+                <a:latin typeface="-apple-system"/>
+              </a:rPr>
+              <a:t>İstifadəçi notes soruşanda </a:t>
+            </a:r>
+            <a:r>
+              <a:rPr lang="az-Latn-AZ" sz="1400">
+                <a:latin typeface="-apple-system"/>
+              </a:rPr>
+              <a:t>	                    </a:t>
+            </a:r>
+            <a:r>
+              <a:rPr lang="en-US" sz="1400">
+                <a:latin typeface="-apple-system"/>
+              </a:rPr>
+              <a:t>→ notes üçün yazdığımız resolver işləyir.</a:t>
+            </a:r>
+          </a:p>
+          <a:p>
+            <a:pPr marL="628650" lvl="1" indent="-171450">
+              <a:lnSpc>
+                <a:spcPct val="150000"/>
+              </a:lnSpc>
+              <a:buFont typeface="Arial" panose="020B0604020202020204" pitchFamily="34" charset="0"/>
+              <a:buChar char="•"/>
+            </a:pPr>
+            <a:r>
+              <a:rPr lang="en-US" sz="1400">
+                <a:latin typeface="-apple-system"/>
+              </a:rPr>
+              <a:t>İstifadəçi bir note içində author istəyirsə → həmin author üçün ayrıca resolver işləyir.</a:t>
+            </a:r>
+          </a:p>
+          <a:p>
+            <a:endParaRPr lang="en-US" sz="1400">
+              <a:latin typeface="-apple-system"/>
+            </a:endParaRPr>
+          </a:p>
+          <a:p>
+            <a:r>
+              <a:rPr lang="en-US" sz="1400">
+                <a:latin typeface="-apple-system"/>
+              </a:rPr>
+              <a:t>Yəni hər sahənin (</a:t>
+            </a:r>
+            <a:r>
+              <a:rPr lang="az-Latn-AZ" sz="1400">
+                <a:latin typeface="-apple-system"/>
+              </a:rPr>
+              <a:t> </a:t>
+            </a:r>
+            <a:r>
+              <a:rPr lang="en-US" sz="1400">
+                <a:latin typeface="-apple-system"/>
+              </a:rPr>
+              <a:t>field-in</a:t>
+            </a:r>
+            <a:r>
+              <a:rPr lang="az-Latn-AZ" sz="1400">
+                <a:latin typeface="-apple-system"/>
+              </a:rPr>
+              <a:t> </a:t>
+            </a:r>
+            <a:r>
+              <a:rPr lang="en-US" sz="1400">
+                <a:latin typeface="-apple-system"/>
+              </a:rPr>
+              <a:t>) öz cavab verən funksiyası ola bilər.</a:t>
+            </a:r>
+            <a:endParaRPr lang="az-Latn-AZ" sz="1400">
+              <a:latin typeface="-apple-system"/>
+            </a:endParaRPr>
+          </a:p>
+          <a:p>
+            <a:endParaRPr lang="az-Latn-AZ" sz="1400">
+              <a:latin typeface="-apple-system"/>
+            </a:endParaRPr>
+          </a:p>
+          <a:p>
+            <a:endParaRPr lang="en-US" sz="1400"/>
           </a:p>
         </p:txBody>
       </p:sp>
@@ -25186,6 +25525,751 @@
     <p:extLst>
       <p:ext uri="{BB962C8B-B14F-4D97-AF65-F5344CB8AC3E}">
         <p14:creationId xmlns:p14="http://schemas.microsoft.com/office/powerpoint/2010/main" val="656003231"/>
+      </p:ext>
+    </p:extLst>
+  </p:cSld>
+  <p:clrMapOvr>
+    <a:masterClrMapping/>
+  </p:clrMapOvr>
+</p:sld>
+</file>
+
+<file path=ppt/slides/slide88.xml><?xml version="1.0" encoding="utf-8"?>
+<p:sld xmlns:a="http://schemas.openxmlformats.org/drawingml/2006/main" xmlns:r="http://schemas.openxmlformats.org/officeDocument/2006/relationships" xmlns:p="http://schemas.openxmlformats.org/presentationml/2006/main">
+  <p:cSld>
+    <p:spTree>
+      <p:nvGrpSpPr>
+        <p:cNvPr id="1" name="">
+          <a:extLst>
+            <a:ext uri="{FF2B5EF4-FFF2-40B4-BE49-F238E27FC236}">
+              <a16:creationId xmlns:a16="http://schemas.microsoft.com/office/drawing/2014/main" id="{1A821D86-8AC0-C41E-D9FD-A0A4426DC36A}"/>
+            </a:ext>
+          </a:extLst>
+        </p:cNvPr>
+        <p:cNvGrpSpPr/>
+        <p:nvPr/>
+      </p:nvGrpSpPr>
+      <p:grpSpPr>
+        <a:xfrm>
+          <a:off x="0" y="0"/>
+          <a:ext cx="0" cy="0"/>
+          <a:chOff x="0" y="0"/>
+          <a:chExt cx="0" cy="0"/>
+        </a:xfrm>
+      </p:grpSpPr>
+      <p:sp>
+        <p:nvSpPr>
+          <p:cNvPr id="7" name="TextBox 6">
+            <a:extLst>
+              <a:ext uri="{FF2B5EF4-FFF2-40B4-BE49-F238E27FC236}">
+                <a16:creationId xmlns:a16="http://schemas.microsoft.com/office/drawing/2014/main" id="{E0272548-6653-644A-8ADF-1CB4D86A9A2B}"/>
+              </a:ext>
+            </a:extLst>
+          </p:cNvPr>
+          <p:cNvSpPr txBox="1"/>
+          <p:nvPr/>
+        </p:nvSpPr>
+        <p:spPr>
+          <a:xfrm>
+            <a:off x="203200" y="244826"/>
+            <a:ext cx="11822545" cy="6420347"/>
+          </a:xfrm>
+          <a:prstGeom prst="rect">
+            <a:avLst/>
+          </a:prstGeom>
+          <a:noFill/>
+        </p:spPr>
+        <p:txBody>
+          <a:bodyPr wrap="square">
+            <a:spAutoFit/>
+          </a:bodyPr>
+          <a:lstStyle/>
+          <a:p>
+            <a:r>
+              <a:rPr lang="en-US" b="1">
+                <a:latin typeface="-apple-system"/>
+              </a:rPr>
+              <a:t>PHP-də resolver sənin kodunda necədir?</a:t>
+            </a:r>
+            <a:endParaRPr lang="az-Latn-AZ" b="1">
+              <a:latin typeface="-apple-system"/>
+            </a:endParaRPr>
+          </a:p>
+          <a:p>
+            <a:endParaRPr lang="az-Latn-AZ">
+              <a:latin typeface="-apple-system"/>
+            </a:endParaRPr>
+          </a:p>
+          <a:p>
+            <a:r>
+              <a:rPr lang="en-US" b="1"/>
+              <a:t>notes</a:t>
+            </a:r>
+            <a:r>
+              <a:rPr lang="en-US"/>
+              <a:t> resolveri:</a:t>
+            </a:r>
+            <a:r>
+              <a:rPr lang="az-Latn-AZ"/>
+              <a:t> Burda notes üçün </a:t>
+            </a:r>
+            <a:r>
+              <a:rPr lang="az-Latn-AZ" b="1"/>
+              <a:t>resolver</a:t>
+            </a:r>
+            <a:r>
+              <a:rPr lang="az-Latn-AZ"/>
+              <a:t> yazılıb. İstifadəçi </a:t>
+            </a:r>
+            <a:r>
+              <a:rPr lang="az-Latn-AZ" b="1"/>
+              <a:t>notes</a:t>
+            </a:r>
+            <a:r>
+              <a:rPr lang="az-Latn-AZ"/>
+              <a:t> soruşanda bu funksiya işləyir və </a:t>
+            </a:r>
+            <a:r>
+              <a:rPr lang="az-Latn-AZ" b="1"/>
+              <a:t>$fakeDatabase['notes'] </a:t>
+            </a:r>
+            <a:r>
+              <a:rPr lang="az-Latn-AZ"/>
+              <a:t>qaytarır.</a:t>
+            </a:r>
+          </a:p>
+          <a:p>
+            <a:endParaRPr lang="az-Latn-AZ"/>
+          </a:p>
+          <a:p>
+            <a:endParaRPr lang="az-Latn-AZ"/>
+          </a:p>
+          <a:p>
+            <a:endParaRPr lang="az-Latn-AZ"/>
+          </a:p>
+          <a:p>
+            <a:endParaRPr lang="az-Latn-AZ"/>
+          </a:p>
+          <a:p>
+            <a:endParaRPr lang="az-Latn-AZ"/>
+          </a:p>
+          <a:p>
+            <a:endParaRPr lang="az-Latn-AZ"/>
+          </a:p>
+          <a:p>
+            <a:r>
+              <a:rPr lang="en-US" b="1"/>
+              <a:t>author resolveri</a:t>
+            </a:r>
+            <a:r>
+              <a:rPr lang="en-US"/>
+              <a:t>:</a:t>
+            </a:r>
+            <a:r>
+              <a:rPr lang="az-Latn-AZ"/>
+              <a:t> </a:t>
+            </a:r>
+            <a:r>
+              <a:rPr lang="en-US"/>
+              <a:t>Burda isə hər bir note-un içində author çağrılarkən kim cavab verəcək deyə </a:t>
+            </a:r>
+            <a:r>
+              <a:rPr lang="en-US" b="1"/>
+              <a:t>resolver</a:t>
+            </a:r>
+            <a:r>
+              <a:rPr lang="en-US"/>
+              <a:t> yazmı</a:t>
+            </a:r>
+            <a:r>
+              <a:rPr lang="az-Latn-AZ"/>
+              <a:t>şıq.</a:t>
+            </a:r>
+          </a:p>
+          <a:p>
+            <a:endParaRPr lang="az-Latn-AZ"/>
+          </a:p>
+          <a:p>
+            <a:endParaRPr lang="az-Latn-AZ"/>
+          </a:p>
+          <a:p>
+            <a:endParaRPr lang="az-Latn-AZ"/>
+          </a:p>
+          <a:p>
+            <a:endParaRPr lang="az-Latn-AZ"/>
+          </a:p>
+          <a:p>
+            <a:endParaRPr lang="az-Latn-AZ"/>
+          </a:p>
+          <a:p>
+            <a:endParaRPr lang="az-Latn-AZ"/>
+          </a:p>
+          <a:p>
+            <a:endParaRPr lang="az-Latn-AZ"/>
+          </a:p>
+          <a:p>
+            <a:endParaRPr lang="az-Latn-AZ"/>
+          </a:p>
+          <a:p>
+            <a:r>
+              <a:rPr lang="az-Latn-AZ" b="1"/>
+              <a:t>Yəni</a:t>
+            </a:r>
+            <a:r>
+              <a:rPr lang="az-Latn-AZ"/>
+              <a:t>: </a:t>
+            </a:r>
+          </a:p>
+          <a:p>
+            <a:pPr marL="742950" lvl="1" indent="-285750">
+              <a:lnSpc>
+                <a:spcPct val="150000"/>
+              </a:lnSpc>
+              <a:buFont typeface="Arial" panose="020B0604020202020204" pitchFamily="34" charset="0"/>
+              <a:buChar char="•"/>
+            </a:pPr>
+            <a:r>
+              <a:rPr lang="en-US" b="1"/>
+              <a:t>notes</a:t>
+            </a:r>
+            <a:r>
+              <a:rPr lang="en-US"/>
+              <a:t> soruşuldu → </a:t>
+            </a:r>
+            <a:r>
+              <a:rPr lang="en-US" b="1"/>
+              <a:t>notes resolver </a:t>
+            </a:r>
+            <a:r>
+              <a:rPr lang="en-US"/>
+              <a:t>işə düşdü → bütün qeydləri qaytardı.</a:t>
+            </a:r>
+          </a:p>
+          <a:p>
+            <a:pPr marL="742950" lvl="1" indent="-285750">
+              <a:lnSpc>
+                <a:spcPct val="150000"/>
+              </a:lnSpc>
+              <a:buFont typeface="Arial" panose="020B0604020202020204" pitchFamily="34" charset="0"/>
+              <a:buChar char="•"/>
+            </a:pPr>
+            <a:r>
+              <a:rPr lang="en-US"/>
+              <a:t>Hər </a:t>
+            </a:r>
+            <a:r>
+              <a:rPr lang="en-US" b="1"/>
+              <a:t>note</a:t>
+            </a:r>
+            <a:r>
+              <a:rPr lang="en-US"/>
+              <a:t> içində </a:t>
+            </a:r>
+            <a:r>
+              <a:rPr lang="en-US" b="1"/>
+              <a:t>author</a:t>
+            </a:r>
+            <a:r>
+              <a:rPr lang="en-US"/>
+              <a:t> soruşuldu → </a:t>
+            </a:r>
+            <a:r>
+              <a:rPr lang="en-US" b="1"/>
+              <a:t>author</a:t>
+            </a:r>
+            <a:r>
+              <a:rPr lang="en-US"/>
+              <a:t> </a:t>
+            </a:r>
+            <a:r>
+              <a:rPr lang="en-US" b="1"/>
+              <a:t>resolver</a:t>
+            </a:r>
+            <a:r>
+              <a:rPr lang="en-US"/>
+              <a:t> işə düşdü → müəllif məlumatını qaytardı.</a:t>
+            </a:r>
+          </a:p>
+        </p:txBody>
+      </p:sp>
+      <p:pic>
+        <p:nvPicPr>
+          <p:cNvPr id="3" name="Picture 2">
+            <a:extLst>
+              <a:ext uri="{FF2B5EF4-FFF2-40B4-BE49-F238E27FC236}">
+                <a16:creationId xmlns:a16="http://schemas.microsoft.com/office/drawing/2014/main" id="{ADF05753-B67A-EC12-30B4-9F8C0428BB55}"/>
+              </a:ext>
+            </a:extLst>
+          </p:cNvPr>
+          <p:cNvPicPr>
+            <a:picLocks noChangeAspect="1"/>
+          </p:cNvPicPr>
+          <p:nvPr/>
+        </p:nvPicPr>
+        <p:blipFill>
+          <a:blip r:embed="rId2"/>
+          <a:stretch>
+            <a:fillRect/>
+          </a:stretch>
+        </p:blipFill>
+        <p:spPr>
+          <a:xfrm>
+            <a:off x="0" y="1423498"/>
+            <a:ext cx="4915586" cy="1152686"/>
+          </a:xfrm>
+          <a:prstGeom prst="rect">
+            <a:avLst/>
+          </a:prstGeom>
+        </p:spPr>
+      </p:pic>
+      <p:pic>
+        <p:nvPicPr>
+          <p:cNvPr id="5" name="Picture 4">
+            <a:extLst>
+              <a:ext uri="{FF2B5EF4-FFF2-40B4-BE49-F238E27FC236}">
+                <a16:creationId xmlns:a16="http://schemas.microsoft.com/office/drawing/2014/main" id="{D87B429D-32D4-225A-34B5-3786435499C6}"/>
+              </a:ext>
+            </a:extLst>
+          </p:cNvPr>
+          <p:cNvPicPr>
+            <a:picLocks noChangeAspect="1"/>
+          </p:cNvPicPr>
+          <p:nvPr/>
+        </p:nvPicPr>
+        <p:blipFill>
+          <a:blip r:embed="rId3"/>
+          <a:stretch>
+            <a:fillRect/>
+          </a:stretch>
+        </p:blipFill>
+        <p:spPr>
+          <a:xfrm>
+            <a:off x="0" y="3313656"/>
+            <a:ext cx="5033818" cy="1807012"/>
+          </a:xfrm>
+          <a:prstGeom prst="rect">
+            <a:avLst/>
+          </a:prstGeom>
+        </p:spPr>
+      </p:pic>
+    </p:spTree>
+    <p:extLst>
+      <p:ext uri="{BB962C8B-B14F-4D97-AF65-F5344CB8AC3E}">
+        <p14:creationId xmlns:p14="http://schemas.microsoft.com/office/powerpoint/2010/main" val="882011282"/>
+      </p:ext>
+    </p:extLst>
+  </p:cSld>
+  <p:clrMapOvr>
+    <a:masterClrMapping/>
+  </p:clrMapOvr>
+</p:sld>
+</file>
+
+<file path=ppt/slides/slide89.xml><?xml version="1.0" encoding="utf-8"?>
+<p:sld xmlns:a="http://schemas.openxmlformats.org/drawingml/2006/main" xmlns:r="http://schemas.openxmlformats.org/officeDocument/2006/relationships" xmlns:p="http://schemas.openxmlformats.org/presentationml/2006/main">
+  <p:cSld>
+    <p:spTree>
+      <p:nvGrpSpPr>
+        <p:cNvPr id="1" name="">
+          <a:extLst>
+            <a:ext uri="{FF2B5EF4-FFF2-40B4-BE49-F238E27FC236}">
+              <a16:creationId xmlns:a16="http://schemas.microsoft.com/office/drawing/2014/main" id="{94F34CE5-39FE-2559-9A9D-ADCF20130316}"/>
+            </a:ext>
+          </a:extLst>
+        </p:cNvPr>
+        <p:cNvGrpSpPr/>
+        <p:nvPr/>
+      </p:nvGrpSpPr>
+      <p:grpSpPr>
+        <a:xfrm>
+          <a:off x="0" y="0"/>
+          <a:ext cx="0" cy="0"/>
+          <a:chOff x="0" y="0"/>
+          <a:chExt cx="0" cy="0"/>
+        </a:xfrm>
+      </p:grpSpPr>
+      <p:sp>
+        <p:nvSpPr>
+          <p:cNvPr id="7" name="TextBox 6">
+            <a:extLst>
+              <a:ext uri="{FF2B5EF4-FFF2-40B4-BE49-F238E27FC236}">
+                <a16:creationId xmlns:a16="http://schemas.microsoft.com/office/drawing/2014/main" id="{14404AE6-1732-0233-3565-D77BDF4B2416}"/>
+              </a:ext>
+            </a:extLst>
+          </p:cNvPr>
+          <p:cNvSpPr txBox="1"/>
+          <p:nvPr/>
+        </p:nvSpPr>
+        <p:spPr>
+          <a:xfrm>
+            <a:off x="203200" y="244826"/>
+            <a:ext cx="11822545" cy="4893647"/>
+          </a:xfrm>
+          <a:prstGeom prst="rect">
+            <a:avLst/>
+          </a:prstGeom>
+          <a:noFill/>
+        </p:spPr>
+        <p:txBody>
+          <a:bodyPr wrap="square">
+            <a:spAutoFit/>
+          </a:bodyPr>
+          <a:lstStyle/>
+          <a:p>
+            <a:r>
+              <a:rPr lang="en-US" sz="1300">
+                <a:latin typeface="-apple-system"/>
+              </a:rPr>
+              <a:t>“Əgər mən bu</a:t>
+            </a:r>
+            <a:r>
+              <a:rPr lang="az-Latn-AZ" sz="1300">
+                <a:latin typeface="-apple-system"/>
+              </a:rPr>
+              <a:t> işləri</a:t>
+            </a:r>
+            <a:r>
+              <a:rPr lang="en-US" sz="1300">
+                <a:latin typeface="-apple-system"/>
+              </a:rPr>
+              <a:t> PHP-də, Laravel-də, hətta sadə array ilə edə bilirəmsə, onda GraphQL nəyə lazımdır?”</a:t>
+            </a:r>
+            <a:endParaRPr lang="az-Latn-AZ" sz="1300">
+              <a:latin typeface="-apple-system"/>
+            </a:endParaRPr>
+          </a:p>
+          <a:p>
+            <a:endParaRPr lang="az-Latn-AZ" sz="1300">
+              <a:latin typeface="-apple-system"/>
+            </a:endParaRPr>
+          </a:p>
+          <a:p>
+            <a:r>
+              <a:rPr lang="en-US" sz="1300" b="1">
+                <a:solidFill>
+                  <a:srgbClr val="00B050"/>
+                </a:solidFill>
+              </a:rPr>
+              <a:t>1. GraphQL olmadan necə işləyirik?</a:t>
+            </a:r>
+          </a:p>
+          <a:p>
+            <a:pPr marL="285750" indent="-285750">
+              <a:lnSpc>
+                <a:spcPct val="150000"/>
+              </a:lnSpc>
+              <a:buFont typeface="Arial" panose="020B0604020202020204" pitchFamily="34" charset="0"/>
+              <a:buChar char="•"/>
+            </a:pPr>
+            <a:r>
+              <a:rPr lang="en-US" sz="1300"/>
+              <a:t>Laravel-də (və ya sadə PHP-də):</a:t>
+            </a:r>
+          </a:p>
+          <a:p>
+            <a:pPr marL="285750" indent="-285750">
+              <a:lnSpc>
+                <a:spcPct val="150000"/>
+              </a:lnSpc>
+              <a:buFont typeface="Arial" panose="020B0604020202020204" pitchFamily="34" charset="0"/>
+              <a:buChar char="•"/>
+            </a:pPr>
+            <a:r>
+              <a:rPr lang="en-US" sz="1300"/>
+              <a:t>Backend tərəfdə </a:t>
+            </a:r>
+            <a:r>
+              <a:rPr lang="en-US" sz="1300" b="1"/>
+              <a:t>controller</a:t>
+            </a:r>
+            <a:r>
+              <a:rPr lang="en-US" sz="1300"/>
+              <a:t> və </a:t>
+            </a:r>
+            <a:r>
+              <a:rPr lang="en-US" sz="1300" b="1"/>
+              <a:t>route</a:t>
+            </a:r>
+            <a:r>
+              <a:rPr lang="en-US" sz="1300"/>
+              <a:t> yazırsan.</a:t>
+            </a:r>
+          </a:p>
+          <a:p>
+            <a:pPr marL="285750" indent="-285750">
+              <a:lnSpc>
+                <a:spcPct val="150000"/>
+              </a:lnSpc>
+              <a:buFont typeface="Arial" panose="020B0604020202020204" pitchFamily="34" charset="0"/>
+              <a:buChar char="•"/>
+            </a:pPr>
+            <a:r>
+              <a:rPr lang="en-US" sz="1300" b="1"/>
+              <a:t>API endpoint </a:t>
+            </a:r>
+            <a:r>
+              <a:rPr lang="en-US" sz="1300"/>
+              <a:t>məsələn </a:t>
+            </a:r>
+            <a:r>
+              <a:rPr lang="en-US" sz="1300" b="1"/>
+              <a:t>/notes </a:t>
+            </a:r>
+            <a:r>
+              <a:rPr lang="en-US" sz="1300"/>
+              <a:t>olur.</a:t>
+            </a:r>
+          </a:p>
+          <a:p>
+            <a:pPr marL="285750" indent="-285750">
+              <a:lnSpc>
+                <a:spcPct val="150000"/>
+              </a:lnSpc>
+              <a:buFont typeface="Arial" panose="020B0604020202020204" pitchFamily="34" charset="0"/>
+              <a:buChar char="•"/>
+            </a:pPr>
+            <a:r>
+              <a:rPr lang="en-US" sz="1300"/>
+              <a:t>İçində hansı sahələri (</a:t>
+            </a:r>
+            <a:r>
+              <a:rPr lang="en-US" sz="1300" b="1"/>
+              <a:t>title, description, author və s</a:t>
+            </a:r>
+            <a:r>
+              <a:rPr lang="en-US" sz="1300"/>
+              <a:t>.) geri qaytarmaq istədiyini özün yazırsan.</a:t>
+            </a:r>
+          </a:p>
+          <a:p>
+            <a:pPr marL="285750" indent="-285750">
+              <a:lnSpc>
+                <a:spcPct val="150000"/>
+              </a:lnSpc>
+              <a:buFont typeface="Arial" panose="020B0604020202020204" pitchFamily="34" charset="0"/>
+              <a:buChar char="•"/>
+            </a:pPr>
+            <a:r>
+              <a:rPr lang="en-US" sz="1300"/>
+              <a:t>Əgər istifadəçiyə fərqli məlumat lazım olsa, ya başqa bir endpoint yazırsan (</a:t>
+            </a:r>
+            <a:r>
+              <a:rPr lang="az-Latn-AZ" sz="1300"/>
+              <a:t> </a:t>
+            </a:r>
+            <a:r>
+              <a:rPr lang="en-US" sz="1300" b="1"/>
+              <a:t>/notesWithAuthors, /authors</a:t>
+            </a:r>
+            <a:r>
+              <a:rPr lang="az-Latn-AZ" sz="1300" b="1"/>
+              <a:t> </a:t>
+            </a:r>
+            <a:r>
+              <a:rPr lang="en-US" sz="1300"/>
+              <a:t>), ya da </a:t>
+            </a:r>
+            <a:r>
+              <a:rPr lang="en-US" sz="1300" b="1"/>
+              <a:t>controller</a:t>
+            </a:r>
+            <a:r>
+              <a:rPr lang="az-Latn-AZ" sz="1300"/>
+              <a:t> </a:t>
+            </a:r>
+            <a:r>
+              <a:rPr lang="en-US" sz="1300"/>
+              <a:t>-in içində dəyişiklik edirsən.</a:t>
+            </a:r>
+          </a:p>
+          <a:p>
+            <a:endParaRPr lang="en-US" sz="1300"/>
+          </a:p>
+          <a:p>
+            <a:r>
+              <a:rPr lang="en-US" sz="1300"/>
+              <a:t>Yəni </a:t>
+            </a:r>
+            <a:r>
+              <a:rPr lang="en-US" sz="1300" b="1"/>
+              <a:t>backend</a:t>
+            </a:r>
+            <a:r>
+              <a:rPr lang="en-US" sz="1300"/>
+              <a:t> kodunu sən idarə edirsən. Sadə layihələrdə bu çox rahatdır.</a:t>
+            </a:r>
+            <a:endParaRPr lang="az-Latn-AZ" sz="1300"/>
+          </a:p>
+          <a:p>
+            <a:endParaRPr lang="az-Latn-AZ" sz="1300"/>
+          </a:p>
+          <a:p>
+            <a:endParaRPr lang="az-Latn-AZ" sz="1300"/>
+          </a:p>
+          <a:p>
+            <a:endParaRPr lang="az-Latn-AZ" sz="1300"/>
+          </a:p>
+          <a:p>
+            <a:r>
+              <a:rPr lang="en-US" sz="1300" b="1">
+                <a:solidFill>
+                  <a:srgbClr val="00B050"/>
+                </a:solidFill>
+              </a:rPr>
+              <a:t>2. GraphQL necə işləyir?</a:t>
+            </a:r>
+          </a:p>
+          <a:p>
+            <a:pPr marL="171450" indent="-171450">
+              <a:lnSpc>
+                <a:spcPct val="150000"/>
+              </a:lnSpc>
+              <a:buFont typeface="Arial" panose="020B0604020202020204" pitchFamily="34" charset="0"/>
+              <a:buChar char="•"/>
+            </a:pPr>
+            <a:r>
+              <a:rPr lang="en-US" sz="1300"/>
+              <a:t>Yalnız </a:t>
+            </a:r>
+            <a:r>
+              <a:rPr lang="en-US" sz="1300" b="1"/>
+              <a:t>bir dənə endpoint</a:t>
+            </a:r>
+            <a:r>
+              <a:rPr lang="en-US" sz="1300"/>
+              <a:t> var: </a:t>
+            </a:r>
+            <a:r>
+              <a:rPr lang="en-US" sz="1300" b="1"/>
+              <a:t>/graphql</a:t>
+            </a:r>
+            <a:r>
+              <a:rPr lang="en-US" sz="1300"/>
+              <a:t>.</a:t>
+            </a:r>
+          </a:p>
+          <a:p>
+            <a:pPr marL="171450" indent="-171450">
+              <a:lnSpc>
+                <a:spcPct val="150000"/>
+              </a:lnSpc>
+              <a:buFont typeface="Arial" panose="020B0604020202020204" pitchFamily="34" charset="0"/>
+              <a:buChar char="•"/>
+            </a:pPr>
+            <a:r>
+              <a:rPr lang="en-US" sz="1300"/>
+              <a:t>İstifadəçi (frontend, mobil app və s.) özü sorğuda </a:t>
+            </a:r>
+            <a:r>
+              <a:rPr lang="en-US" sz="1300" b="1"/>
+              <a:t>hansı sahələri istəyirsə, </a:t>
+            </a:r>
+            <a:r>
+              <a:rPr lang="en-US" sz="1300"/>
+              <a:t>onları yazır.</a:t>
+            </a:r>
+          </a:p>
+          <a:p>
+            <a:pPr marL="171450" indent="-171450">
+              <a:lnSpc>
+                <a:spcPct val="150000"/>
+              </a:lnSpc>
+              <a:buFont typeface="Arial" panose="020B0604020202020204" pitchFamily="34" charset="0"/>
+              <a:buChar char="•"/>
+            </a:pPr>
+            <a:r>
+              <a:rPr lang="en-US" sz="1300"/>
+              <a:t>Backend (</a:t>
+            </a:r>
+            <a:r>
+              <a:rPr lang="en-US" sz="1300" b="1" i="1">
+                <a:solidFill>
+                  <a:srgbClr val="0070C0"/>
+                </a:solidFill>
+              </a:rPr>
+              <a:t>resolverlər</a:t>
+            </a:r>
+            <a:r>
+              <a:rPr lang="en-US" sz="1300"/>
+              <a:t> vasitəsilə) həmin sahələri qaytarır.</a:t>
+            </a:r>
+          </a:p>
+          <a:p>
+            <a:endParaRPr lang="az-Latn-AZ" sz="1300"/>
+          </a:p>
+          <a:p>
+            <a:r>
+              <a:rPr lang="en-US" sz="1300"/>
+              <a:t>Yəni </a:t>
+            </a:r>
+            <a:r>
+              <a:rPr lang="en-US" sz="1300" b="1"/>
+              <a:t>frontend özü seçir</a:t>
+            </a:r>
+            <a:r>
+              <a:rPr lang="en-US" sz="1300"/>
+              <a:t>: "Mən title istəyirəm, amma description lazım deyil". Backend kodunu dəyişməyə ehtiyac olmur</a:t>
+            </a:r>
+            <a:r>
+              <a:rPr lang="az-Latn-AZ" sz="1300"/>
+              <a:t> ( </a:t>
+            </a:r>
+            <a:r>
+              <a:rPr lang="fr-FR" sz="1300" b="1"/>
+              <a:t>notesapp\client\src\App.jsx</a:t>
+            </a:r>
+            <a:r>
+              <a:rPr lang="az-Latn-AZ" sz="1300" b="1"/>
+              <a:t> </a:t>
+            </a:r>
+            <a:r>
+              <a:rPr lang="az-Latn-AZ" sz="1300"/>
+              <a:t>)</a:t>
+            </a:r>
+            <a:r>
+              <a:rPr lang="en-US" sz="1300"/>
+              <a:t>.</a:t>
+            </a:r>
+          </a:p>
+          <a:p>
+            <a:endParaRPr lang="en-US" sz="1300"/>
+          </a:p>
+        </p:txBody>
+      </p:sp>
+      <p:pic>
+        <p:nvPicPr>
+          <p:cNvPr id="3" name="Picture 2">
+            <a:extLst>
+              <a:ext uri="{FF2B5EF4-FFF2-40B4-BE49-F238E27FC236}">
+                <a16:creationId xmlns:a16="http://schemas.microsoft.com/office/drawing/2014/main" id="{0A99E50F-FF24-EA14-9B6D-55A21FD7FA11}"/>
+              </a:ext>
+            </a:extLst>
+          </p:cNvPr>
+          <p:cNvPicPr>
+            <a:picLocks noChangeAspect="1"/>
+          </p:cNvPicPr>
+          <p:nvPr/>
+        </p:nvPicPr>
+        <p:blipFill>
+          <a:blip r:embed="rId2"/>
+          <a:stretch>
+            <a:fillRect/>
+          </a:stretch>
+        </p:blipFill>
+        <p:spPr>
+          <a:xfrm>
+            <a:off x="27710" y="4904508"/>
+            <a:ext cx="1218306" cy="1953491"/>
+          </a:xfrm>
+          <a:prstGeom prst="rect">
+            <a:avLst/>
+          </a:prstGeom>
+        </p:spPr>
+      </p:pic>
+    </p:spTree>
+    <p:extLst>
+      <p:ext uri="{BB962C8B-B14F-4D97-AF65-F5344CB8AC3E}">
+        <p14:creationId xmlns:p14="http://schemas.microsoft.com/office/powerpoint/2010/main" val="955325561"/>
       </p:ext>
     </p:extLst>
   </p:cSld>
@@ -25492,6 +26576,1053 @@
     <p:extLst>
       <p:ext uri="{BB962C8B-B14F-4D97-AF65-F5344CB8AC3E}">
         <p14:creationId xmlns:p14="http://schemas.microsoft.com/office/powerpoint/2010/main" val="3563477282"/>
+      </p:ext>
+    </p:extLst>
+  </p:cSld>
+  <p:clrMapOvr>
+    <a:masterClrMapping/>
+  </p:clrMapOvr>
+</p:sld>
+</file>
+
+<file path=ppt/slides/slide90.xml><?xml version="1.0" encoding="utf-8"?>
+<p:sld xmlns:a="http://schemas.openxmlformats.org/drawingml/2006/main" xmlns:r="http://schemas.openxmlformats.org/officeDocument/2006/relationships" xmlns:p="http://schemas.openxmlformats.org/presentationml/2006/main">
+  <p:cSld>
+    <p:spTree>
+      <p:nvGrpSpPr>
+        <p:cNvPr id="1" name="">
+          <a:extLst>
+            <a:ext uri="{FF2B5EF4-FFF2-40B4-BE49-F238E27FC236}">
+              <a16:creationId xmlns:a16="http://schemas.microsoft.com/office/drawing/2014/main" id="{5231B9D9-7DF9-D2FD-9A0E-079EDB64E630}"/>
+            </a:ext>
+          </a:extLst>
+        </p:cNvPr>
+        <p:cNvGrpSpPr/>
+        <p:nvPr/>
+      </p:nvGrpSpPr>
+      <p:grpSpPr>
+        <a:xfrm>
+          <a:off x="0" y="0"/>
+          <a:ext cx="0" cy="0"/>
+          <a:chOff x="0" y="0"/>
+          <a:chExt cx="0" cy="0"/>
+        </a:xfrm>
+      </p:grpSpPr>
+      <p:sp>
+        <p:nvSpPr>
+          <p:cNvPr id="7" name="TextBox 6">
+            <a:extLst>
+              <a:ext uri="{FF2B5EF4-FFF2-40B4-BE49-F238E27FC236}">
+                <a16:creationId xmlns:a16="http://schemas.microsoft.com/office/drawing/2014/main" id="{05368C01-878E-EB8E-AD0C-48D0B859559F}"/>
+              </a:ext>
+            </a:extLst>
+          </p:cNvPr>
+          <p:cNvSpPr txBox="1"/>
+          <p:nvPr/>
+        </p:nvSpPr>
+        <p:spPr>
+          <a:xfrm>
+            <a:off x="203200" y="244826"/>
+            <a:ext cx="11822545" cy="6370975"/>
+          </a:xfrm>
+          <a:prstGeom prst="rect">
+            <a:avLst/>
+          </a:prstGeom>
+          <a:noFill/>
+        </p:spPr>
+        <p:txBody>
+          <a:bodyPr wrap="square">
+            <a:spAutoFit/>
+          </a:bodyPr>
+          <a:lstStyle/>
+          <a:p>
+            <a:r>
+              <a:rPr lang="en-US" sz="1200" b="1">
+                <a:solidFill>
+                  <a:srgbClr val="0070C0"/>
+                </a:solidFill>
+                <a:latin typeface="-apple-system"/>
+              </a:rPr>
+              <a:t>Əsas fərq və üstünlüklər</a:t>
+            </a:r>
+          </a:p>
+          <a:p>
+            <a:pPr marL="742950" lvl="1" indent="-285750">
+              <a:lnSpc>
+                <a:spcPct val="150000"/>
+              </a:lnSpc>
+              <a:buFont typeface="Arial" panose="020B0604020202020204" pitchFamily="34" charset="0"/>
+              <a:buChar char="•"/>
+            </a:pPr>
+            <a:r>
+              <a:rPr lang="en-US" sz="1200">
+                <a:latin typeface="-apple-system"/>
+              </a:rPr>
+              <a:t>    REST və ya sadə PHP API → backend nəyi verirsə, onu almalısan.</a:t>
+            </a:r>
+          </a:p>
+          <a:p>
+            <a:pPr marL="742950" lvl="1" indent="-285750">
+              <a:lnSpc>
+                <a:spcPct val="150000"/>
+              </a:lnSpc>
+              <a:buFont typeface="Arial" panose="020B0604020202020204" pitchFamily="34" charset="0"/>
+              <a:buChar char="•"/>
+            </a:pPr>
+            <a:r>
+              <a:rPr lang="en-US" sz="1200">
+                <a:latin typeface="-apple-system"/>
+              </a:rPr>
+              <a:t>    GraphQL → istifadəçi dəqiq deyir: "Mənə bunları ver, başqa heç nə lazım deyil."</a:t>
+            </a:r>
+          </a:p>
+          <a:p>
+            <a:endParaRPr lang="en-US" sz="1200">
+              <a:latin typeface="-apple-system"/>
+            </a:endParaRPr>
+          </a:p>
+          <a:p>
+            <a:endParaRPr lang="en-US" sz="1200">
+              <a:latin typeface="-apple-system"/>
+            </a:endParaRPr>
+          </a:p>
+          <a:p>
+            <a:endParaRPr lang="en-US" sz="1200">
+              <a:latin typeface="-apple-system"/>
+            </a:endParaRPr>
+          </a:p>
+          <a:p>
+            <a:r>
+              <a:rPr lang="en-US" sz="1200" b="1">
+                <a:solidFill>
+                  <a:srgbClr val="0070C0"/>
+                </a:solidFill>
+                <a:latin typeface="-apple-system"/>
+              </a:rPr>
+              <a:t>Üstünlüklərini sadalayaq</a:t>
+            </a:r>
+            <a:r>
+              <a:rPr lang="en-US" sz="1200">
+                <a:latin typeface="-apple-system"/>
+              </a:rPr>
+              <a:t>:</a:t>
+            </a:r>
+          </a:p>
+          <a:p>
+            <a:endParaRPr lang="en-US" sz="1200">
+              <a:latin typeface="-apple-system"/>
+            </a:endParaRPr>
+          </a:p>
+          <a:p>
+            <a:r>
+              <a:rPr lang="en-US" sz="1200">
+                <a:latin typeface="-apple-system"/>
+              </a:rPr>
+              <a:t>1) </a:t>
+            </a:r>
+            <a:r>
+              <a:rPr lang="en-US" sz="1200" b="1">
+                <a:latin typeface="-apple-system"/>
+              </a:rPr>
+              <a:t>Bir endpoint, istədiyin sorğu</a:t>
+            </a:r>
+          </a:p>
+          <a:p>
+            <a:pPr marL="742950" lvl="1" indent="-285750">
+              <a:lnSpc>
+                <a:spcPct val="150000"/>
+              </a:lnSpc>
+              <a:buFont typeface="Arial" panose="020B0604020202020204" pitchFamily="34" charset="0"/>
+              <a:buChar char="•"/>
+            </a:pPr>
+            <a:r>
+              <a:rPr lang="en-US" sz="1200">
+                <a:latin typeface="-apple-system"/>
+              </a:rPr>
+              <a:t>    REST-də: /notes, /notesWithAuthors, /authors → çoxlu endpoint.</a:t>
+            </a:r>
+          </a:p>
+          <a:p>
+            <a:pPr marL="742950" lvl="1" indent="-285750">
+              <a:lnSpc>
+                <a:spcPct val="150000"/>
+              </a:lnSpc>
+              <a:buFont typeface="Arial" panose="020B0604020202020204" pitchFamily="34" charset="0"/>
+              <a:buChar char="•"/>
+            </a:pPr>
+            <a:r>
+              <a:rPr lang="en-US" sz="1200">
+                <a:latin typeface="-apple-system"/>
+              </a:rPr>
+              <a:t>    GraphQL-də: sadəcə /graphql → istədiyini soruş.</a:t>
+            </a:r>
+          </a:p>
+          <a:p>
+            <a:endParaRPr lang="en-US" sz="1200">
+              <a:latin typeface="-apple-system"/>
+            </a:endParaRPr>
+          </a:p>
+          <a:p>
+            <a:r>
+              <a:rPr lang="en-US" sz="1200">
+                <a:latin typeface="-apple-system"/>
+              </a:rPr>
+              <a:t>2) </a:t>
+            </a:r>
+            <a:r>
+              <a:rPr lang="en-US" sz="1200" b="1">
+                <a:latin typeface="-apple-system"/>
+              </a:rPr>
+              <a:t>Overfetching problemi həll olunur</a:t>
+            </a:r>
+          </a:p>
+          <a:p>
+            <a:pPr marL="742950" lvl="1" indent="-285750">
+              <a:lnSpc>
+                <a:spcPct val="150000"/>
+              </a:lnSpc>
+              <a:buFont typeface="Arial" panose="020B0604020202020204" pitchFamily="34" charset="0"/>
+              <a:buChar char="•"/>
+            </a:pPr>
+            <a:r>
+              <a:rPr lang="en-US" sz="1200">
+                <a:latin typeface="-apple-system"/>
+              </a:rPr>
+              <a:t>    REST-də: Bəzən çox data gəlir, amma sənə lazım deyil (məsələn, 10 sahə gəlir, sən sadəcə title istəyirsən).</a:t>
+            </a:r>
+          </a:p>
+          <a:p>
+            <a:pPr marL="742950" lvl="1" indent="-285750">
+              <a:lnSpc>
+                <a:spcPct val="150000"/>
+              </a:lnSpc>
+              <a:buFont typeface="Arial" panose="020B0604020202020204" pitchFamily="34" charset="0"/>
+              <a:buChar char="•"/>
+            </a:pPr>
+            <a:r>
+              <a:rPr lang="en-US" sz="1200">
+                <a:latin typeface="-apple-system"/>
+              </a:rPr>
+              <a:t>    GraphQL-də: yalnız soruşduğun sahələr gəlir.</a:t>
+            </a:r>
+          </a:p>
+          <a:p>
+            <a:endParaRPr lang="en-US" sz="1200">
+              <a:latin typeface="-apple-system"/>
+            </a:endParaRPr>
+          </a:p>
+          <a:p>
+            <a:r>
+              <a:rPr lang="en-US" sz="1200">
+                <a:latin typeface="-apple-system"/>
+              </a:rPr>
+              <a:t>3) </a:t>
+            </a:r>
+            <a:r>
+              <a:rPr lang="en-US" sz="1200" b="1">
+                <a:latin typeface="-apple-system"/>
+              </a:rPr>
+              <a:t>Underfetching problemi həll olunur</a:t>
+            </a:r>
+          </a:p>
+          <a:p>
+            <a:pPr marL="628650" lvl="1" indent="-171450">
+              <a:lnSpc>
+                <a:spcPct val="150000"/>
+              </a:lnSpc>
+              <a:buFont typeface="Arial" panose="020B0604020202020204" pitchFamily="34" charset="0"/>
+              <a:buChar char="•"/>
+            </a:pPr>
+            <a:r>
+              <a:rPr lang="en-US" sz="1200">
+                <a:latin typeface="-apple-system"/>
+              </a:rPr>
+              <a:t>    REST-də: Bəzən bir səhifəni düzəltmək üçün 3-4 API çağırmalısan (/notes, /authors, /comments).</a:t>
+            </a:r>
+          </a:p>
+          <a:p>
+            <a:pPr marL="628650" lvl="1" indent="-171450">
+              <a:lnSpc>
+                <a:spcPct val="150000"/>
+              </a:lnSpc>
+              <a:buFont typeface="Arial" panose="020B0604020202020204" pitchFamily="34" charset="0"/>
+              <a:buChar char="•"/>
+            </a:pPr>
+            <a:r>
+              <a:rPr lang="en-US" sz="1200">
+                <a:latin typeface="-apple-system"/>
+              </a:rPr>
+              <a:t>    GraphQL-də: hamısını bir query-də alırsan.</a:t>
+            </a:r>
+          </a:p>
+          <a:p>
+            <a:endParaRPr lang="en-US" sz="1200">
+              <a:latin typeface="-apple-system"/>
+            </a:endParaRPr>
+          </a:p>
+          <a:p>
+            <a:r>
+              <a:rPr lang="en-US" sz="1200">
+                <a:latin typeface="-apple-system"/>
+              </a:rPr>
+              <a:t>4) </a:t>
+            </a:r>
+            <a:r>
+              <a:rPr lang="en-US" sz="1200" b="1">
+                <a:latin typeface="-apple-system"/>
+              </a:rPr>
+              <a:t>Frontend inkişaf etdiricilərə azadlıq</a:t>
+            </a:r>
+          </a:p>
+          <a:p>
+            <a:pPr marL="628650" lvl="1" indent="-171450">
+              <a:lnSpc>
+                <a:spcPct val="150000"/>
+              </a:lnSpc>
+              <a:buFont typeface="Arial" panose="020B0604020202020204" pitchFamily="34" charset="0"/>
+              <a:buChar char="•"/>
+            </a:pPr>
+            <a:r>
+              <a:rPr lang="en-US" sz="1200">
+                <a:latin typeface="-apple-system"/>
+              </a:rPr>
+              <a:t>    Backend developer hər dəfə yeni sorğu üçün kod yazmır.</a:t>
+            </a:r>
+          </a:p>
+          <a:p>
+            <a:pPr marL="628650" lvl="1" indent="-171450">
+              <a:lnSpc>
+                <a:spcPct val="150000"/>
+              </a:lnSpc>
+              <a:buFont typeface="Arial" panose="020B0604020202020204" pitchFamily="34" charset="0"/>
+              <a:buChar char="•"/>
+            </a:pPr>
+            <a:r>
+              <a:rPr lang="en-US" sz="1200">
+                <a:latin typeface="-apple-system"/>
+              </a:rPr>
+              <a:t>    Frontend developer query dəyişməklə istədiyini alır.</a:t>
+            </a:r>
+          </a:p>
+          <a:p>
+            <a:endParaRPr lang="en-US" sz="1200">
+              <a:latin typeface="-apple-system"/>
+            </a:endParaRPr>
+          </a:p>
+          <a:p>
+            <a:r>
+              <a:rPr lang="en-US" sz="1200">
+                <a:latin typeface="-apple-system"/>
+              </a:rPr>
+              <a:t>5) </a:t>
+            </a:r>
+            <a:r>
+              <a:rPr lang="en-US" sz="1200" b="1">
+                <a:latin typeface="-apple-system"/>
+              </a:rPr>
+              <a:t>API-nin inkişafı asanlaşır</a:t>
+            </a:r>
+          </a:p>
+          <a:p>
+            <a:pPr marL="628650" lvl="1" indent="-171450">
+              <a:lnSpc>
+                <a:spcPct val="150000"/>
+              </a:lnSpc>
+              <a:buFont typeface="Arial" panose="020B0604020202020204" pitchFamily="34" charset="0"/>
+              <a:buChar char="•"/>
+            </a:pPr>
+            <a:r>
+              <a:rPr lang="en-US" sz="1200">
+                <a:latin typeface="-apple-system"/>
+              </a:rPr>
+              <a:t>    REST-də yeni məlumat lazımdırsa, endpoint dəyişməlidir → köhnə müştərilər də təsirlənir.</a:t>
+            </a:r>
+          </a:p>
+          <a:p>
+            <a:pPr marL="628650" lvl="1" indent="-171450">
+              <a:lnSpc>
+                <a:spcPct val="150000"/>
+              </a:lnSpc>
+              <a:buFont typeface="Arial" panose="020B0604020202020204" pitchFamily="34" charset="0"/>
+              <a:buChar char="•"/>
+            </a:pPr>
+            <a:r>
+              <a:rPr lang="en-US" sz="1200">
+                <a:latin typeface="-apple-system"/>
+              </a:rPr>
+              <a:t>    GraphQL-də sadəcə schema-ya yeni sahə əlavə edirsən, köhnə query-lər işləməyə davam edir.</a:t>
+            </a:r>
+            <a:endParaRPr lang="az-Latn-AZ" sz="1200">
+              <a:latin typeface="-apple-system"/>
+            </a:endParaRPr>
+          </a:p>
+          <a:p>
+            <a:endParaRPr lang="en-US" sz="1200">
+              <a:latin typeface="-apple-system"/>
+            </a:endParaRPr>
+          </a:p>
+        </p:txBody>
+      </p:sp>
+    </p:spTree>
+    <p:extLst>
+      <p:ext uri="{BB962C8B-B14F-4D97-AF65-F5344CB8AC3E}">
+        <p14:creationId xmlns:p14="http://schemas.microsoft.com/office/powerpoint/2010/main" val="3557224788"/>
+      </p:ext>
+    </p:extLst>
+  </p:cSld>
+  <p:clrMapOvr>
+    <a:masterClrMapping/>
+  </p:clrMapOvr>
+</p:sld>
+</file>
+
+<file path=ppt/slides/slide91.xml><?xml version="1.0" encoding="utf-8"?>
+<p:sld xmlns:a="http://schemas.openxmlformats.org/drawingml/2006/main" xmlns:r="http://schemas.openxmlformats.org/officeDocument/2006/relationships" xmlns:p="http://schemas.openxmlformats.org/presentationml/2006/main">
+  <p:cSld>
+    <p:spTree>
+      <p:nvGrpSpPr>
+        <p:cNvPr id="1" name="">
+          <a:extLst>
+            <a:ext uri="{FF2B5EF4-FFF2-40B4-BE49-F238E27FC236}">
+              <a16:creationId xmlns:a16="http://schemas.microsoft.com/office/drawing/2014/main" id="{EFC625AF-D04B-10B0-D640-21516B64838D}"/>
+            </a:ext>
+          </a:extLst>
+        </p:cNvPr>
+        <p:cNvGrpSpPr/>
+        <p:nvPr/>
+      </p:nvGrpSpPr>
+      <p:grpSpPr>
+        <a:xfrm>
+          <a:off x="0" y="0"/>
+          <a:ext cx="0" cy="0"/>
+          <a:chOff x="0" y="0"/>
+          <a:chExt cx="0" cy="0"/>
+        </a:xfrm>
+      </p:grpSpPr>
+      <p:sp>
+        <p:nvSpPr>
+          <p:cNvPr id="7" name="TextBox 6">
+            <a:extLst>
+              <a:ext uri="{FF2B5EF4-FFF2-40B4-BE49-F238E27FC236}">
+                <a16:creationId xmlns:a16="http://schemas.microsoft.com/office/drawing/2014/main" id="{D489DDE2-6827-4139-11B8-C83B6212386F}"/>
+              </a:ext>
+            </a:extLst>
+          </p:cNvPr>
+          <p:cNvSpPr txBox="1"/>
+          <p:nvPr/>
+        </p:nvSpPr>
+        <p:spPr>
+          <a:xfrm>
+            <a:off x="203200" y="244826"/>
+            <a:ext cx="11822545" cy="3139321"/>
+          </a:xfrm>
+          <a:prstGeom prst="rect">
+            <a:avLst/>
+          </a:prstGeom>
+          <a:noFill/>
+        </p:spPr>
+        <p:txBody>
+          <a:bodyPr wrap="square">
+            <a:spAutoFit/>
+          </a:bodyPr>
+          <a:lstStyle/>
+          <a:p>
+            <a:r>
+              <a:rPr lang="en-US" b="1">
+                <a:solidFill>
+                  <a:srgbClr val="0070C0"/>
+                </a:solidFill>
+                <a:latin typeface="-apple-system"/>
+              </a:rPr>
+              <a:t>Harada GraphQL doğrudan lazımdır?</a:t>
+            </a:r>
+          </a:p>
+          <a:p>
+            <a:endParaRPr lang="en-US">
+              <a:latin typeface="-apple-system"/>
+            </a:endParaRPr>
+          </a:p>
+          <a:p>
+            <a:pPr marL="742950" lvl="1" indent="-285750">
+              <a:buFont typeface="Wingdings" panose="05000000000000000000" pitchFamily="2" charset="2"/>
+              <a:buChar char="q"/>
+            </a:pPr>
+            <a:r>
+              <a:rPr lang="en-US">
+                <a:latin typeface="-apple-system"/>
+              </a:rPr>
+              <a:t>Böyük layihələrdə (Facebook, GitHub API, Shopify API)</a:t>
+            </a:r>
+          </a:p>
+          <a:p>
+            <a:pPr marL="742950" lvl="1" indent="-285750">
+              <a:buFont typeface="Wingdings" panose="05000000000000000000" pitchFamily="2" charset="2"/>
+              <a:buChar char="q"/>
+            </a:pPr>
+            <a:endParaRPr lang="en-US">
+              <a:latin typeface="-apple-system"/>
+            </a:endParaRPr>
+          </a:p>
+          <a:p>
+            <a:pPr marL="742950" lvl="1" indent="-285750">
+              <a:buFont typeface="Wingdings" panose="05000000000000000000" pitchFamily="2" charset="2"/>
+              <a:buChar char="q"/>
+            </a:pPr>
+            <a:r>
+              <a:rPr lang="en-US">
+                <a:latin typeface="-apple-system"/>
+              </a:rPr>
+              <a:t>Frontend və backend ayrı komandalar işləyirsə</a:t>
+            </a:r>
+          </a:p>
+          <a:p>
+            <a:pPr marL="742950" lvl="1" indent="-285750">
+              <a:buFont typeface="Wingdings" panose="05000000000000000000" pitchFamily="2" charset="2"/>
+              <a:buChar char="q"/>
+            </a:pPr>
+            <a:endParaRPr lang="en-US">
+              <a:latin typeface="-apple-system"/>
+            </a:endParaRPr>
+          </a:p>
+          <a:p>
+            <a:pPr marL="742950" lvl="1" indent="-285750">
+              <a:buFont typeface="Wingdings" panose="05000000000000000000" pitchFamily="2" charset="2"/>
+              <a:buChar char="q"/>
+            </a:pPr>
+            <a:r>
+              <a:rPr lang="en-US">
+                <a:latin typeface="-apple-system"/>
+              </a:rPr>
+              <a:t>Mobil app + veb app + başqa müştərilər eyni API-ni istifadə edirsə</a:t>
+            </a:r>
+          </a:p>
+          <a:p>
+            <a:pPr marL="742950" lvl="1" indent="-285750">
+              <a:buFont typeface="Wingdings" panose="05000000000000000000" pitchFamily="2" charset="2"/>
+              <a:buChar char="q"/>
+            </a:pPr>
+            <a:endParaRPr lang="en-US">
+              <a:latin typeface="-apple-system"/>
+            </a:endParaRPr>
+          </a:p>
+          <a:p>
+            <a:pPr marL="742950" lvl="1" indent="-285750">
+              <a:buFont typeface="Wingdings" panose="05000000000000000000" pitchFamily="2" charset="2"/>
+              <a:buChar char="q"/>
+            </a:pPr>
+            <a:r>
+              <a:rPr lang="en-US">
+                <a:latin typeface="-apple-system"/>
+              </a:rPr>
+              <a:t>Data çox mürəkkəb əlaqələrdədirsə (məsələn, user → posts → comments → likes)</a:t>
+            </a:r>
+            <a:endParaRPr lang="az-Latn-AZ">
+              <a:latin typeface="-apple-system"/>
+            </a:endParaRPr>
+          </a:p>
+          <a:p>
+            <a:endParaRPr lang="az-Latn-AZ">
+              <a:latin typeface="-apple-system"/>
+            </a:endParaRPr>
+          </a:p>
+          <a:p>
+            <a:endParaRPr lang="en-US"/>
+          </a:p>
+        </p:txBody>
+      </p:sp>
+    </p:spTree>
+    <p:extLst>
+      <p:ext uri="{BB962C8B-B14F-4D97-AF65-F5344CB8AC3E}">
+        <p14:creationId xmlns:p14="http://schemas.microsoft.com/office/powerpoint/2010/main" val="3488003374"/>
+      </p:ext>
+    </p:extLst>
+  </p:cSld>
+  <p:clrMapOvr>
+    <a:masterClrMapping/>
+  </p:clrMapOvr>
+</p:sld>
+</file>
+
+<file path=ppt/slides/slide92.xml><?xml version="1.0" encoding="utf-8"?>
+<p:sld xmlns:a="http://schemas.openxmlformats.org/drawingml/2006/main" xmlns:r="http://schemas.openxmlformats.org/officeDocument/2006/relationships" xmlns:p="http://schemas.openxmlformats.org/presentationml/2006/main">
+  <p:cSld>
+    <p:spTree>
+      <p:nvGrpSpPr>
+        <p:cNvPr id="1" name="">
+          <a:extLst>
+            <a:ext uri="{FF2B5EF4-FFF2-40B4-BE49-F238E27FC236}">
+              <a16:creationId xmlns:a16="http://schemas.microsoft.com/office/drawing/2014/main" id="{2BE5899B-876E-7564-7AD1-98D4A48A1689}"/>
+            </a:ext>
+          </a:extLst>
+        </p:cNvPr>
+        <p:cNvGrpSpPr/>
+        <p:nvPr/>
+      </p:nvGrpSpPr>
+      <p:grpSpPr>
+        <a:xfrm>
+          <a:off x="0" y="0"/>
+          <a:ext cx="0" cy="0"/>
+          <a:chOff x="0" y="0"/>
+          <a:chExt cx="0" cy="0"/>
+        </a:xfrm>
+      </p:grpSpPr>
+      <p:sp>
+        <p:nvSpPr>
+          <p:cNvPr id="7" name="TextBox 6">
+            <a:extLst>
+              <a:ext uri="{FF2B5EF4-FFF2-40B4-BE49-F238E27FC236}">
+                <a16:creationId xmlns:a16="http://schemas.microsoft.com/office/drawing/2014/main" id="{F42B80E2-0724-6BC5-7A5C-7273FA7DAD29}"/>
+              </a:ext>
+            </a:extLst>
+          </p:cNvPr>
+          <p:cNvSpPr txBox="1"/>
+          <p:nvPr/>
+        </p:nvSpPr>
+        <p:spPr>
+          <a:xfrm>
+            <a:off x="203200" y="244826"/>
+            <a:ext cx="11822545" cy="5724644"/>
+          </a:xfrm>
+          <a:prstGeom prst="rect">
+            <a:avLst/>
+          </a:prstGeom>
+          <a:noFill/>
+        </p:spPr>
+        <p:txBody>
+          <a:bodyPr wrap="square">
+            <a:spAutoFit/>
+          </a:bodyPr>
+          <a:lstStyle/>
+          <a:p>
+            <a:r>
+              <a:rPr lang="en-US" sz="1200" b="1">
+                <a:latin typeface="-apple-system"/>
+              </a:rPr>
+              <a:t>GraphQL</a:t>
+            </a:r>
+            <a:r>
+              <a:rPr lang="en-US" sz="1200">
+                <a:latin typeface="-apple-system"/>
+              </a:rPr>
+              <a:t> sadəcə data oxumaq (Query) üçün deyil, həm də </a:t>
+            </a:r>
+            <a:r>
+              <a:rPr lang="en-US" sz="1200" b="1">
+                <a:solidFill>
+                  <a:srgbClr val="FF0000"/>
+                </a:solidFill>
+                <a:latin typeface="-apple-system"/>
+              </a:rPr>
+              <a:t>CRUD</a:t>
+            </a:r>
+            <a:r>
+              <a:rPr lang="en-US" sz="1200">
+                <a:latin typeface="-apple-system"/>
+              </a:rPr>
+              <a:t> əməliyyatlarını (yəni Create, Read, Update, Delete) edə bilir.</a:t>
+            </a:r>
+            <a:endParaRPr lang="az-Latn-AZ" sz="1200">
+              <a:latin typeface="-apple-system"/>
+            </a:endParaRPr>
+          </a:p>
+          <a:p>
+            <a:endParaRPr lang="az-Latn-AZ" sz="1200">
+              <a:latin typeface="-apple-system"/>
+            </a:endParaRPr>
+          </a:p>
+          <a:p>
+            <a:r>
+              <a:rPr lang="en-US" sz="1200" b="1">
+                <a:solidFill>
+                  <a:srgbClr val="00B050"/>
+                </a:solidFill>
+              </a:rPr>
+              <a:t>GraphQL-də əməliyyat növləri</a:t>
+            </a:r>
+            <a:r>
+              <a:rPr lang="az-Latn-AZ" sz="1200" b="1"/>
+              <a:t>:</a:t>
+            </a:r>
+          </a:p>
+          <a:p>
+            <a:endParaRPr lang="en-US" sz="1200" b="1"/>
+          </a:p>
+          <a:p>
+            <a:r>
+              <a:rPr lang="en-US" sz="1200" b="1">
+                <a:solidFill>
+                  <a:srgbClr val="0070C0"/>
+                </a:solidFill>
+              </a:rPr>
+              <a:t>Query (Oxumaq – Read)</a:t>
+            </a:r>
+            <a:endParaRPr lang="en-US" sz="1200">
+              <a:solidFill>
+                <a:srgbClr val="0070C0"/>
+              </a:solidFill>
+            </a:endParaRPr>
+          </a:p>
+          <a:p>
+            <a:pPr marL="742950" lvl="1" indent="-285750">
+              <a:lnSpc>
+                <a:spcPct val="150000"/>
+              </a:lnSpc>
+              <a:buFont typeface="Arial" panose="020B0604020202020204" pitchFamily="34" charset="0"/>
+              <a:buChar char="•"/>
+            </a:pPr>
+            <a:r>
+              <a:rPr lang="en-US" sz="1200"/>
+              <a:t>Məlumatı əldə etmək üçündür.</a:t>
+            </a:r>
+          </a:p>
+          <a:p>
+            <a:pPr marL="742950" lvl="1" indent="-285750">
+              <a:lnSpc>
+                <a:spcPct val="150000"/>
+              </a:lnSpc>
+              <a:buFont typeface="Arial" panose="020B0604020202020204" pitchFamily="34" charset="0"/>
+              <a:buChar char="•"/>
+            </a:pPr>
+            <a:r>
+              <a:rPr lang="en-US" sz="1200"/>
+              <a:t>REST-də GET metoduna bənzəyir.</a:t>
+            </a:r>
+          </a:p>
+          <a:p>
+            <a:pPr marL="742950" lvl="1" indent="-285750">
+              <a:lnSpc>
+                <a:spcPct val="150000"/>
+              </a:lnSpc>
+              <a:buFont typeface="Arial" panose="020B0604020202020204" pitchFamily="34" charset="0"/>
+              <a:buChar char="•"/>
+            </a:pPr>
+            <a:r>
+              <a:rPr lang="en-US" sz="1200"/>
+              <a:t>Məs: bütün qeydləri və ya bir müəllifi almaq.</a:t>
+            </a:r>
+          </a:p>
+          <a:p>
+            <a:endParaRPr lang="az-Latn-AZ" sz="1200"/>
+          </a:p>
+          <a:p>
+            <a:r>
+              <a:rPr lang="en-US" sz="1200" b="1">
+                <a:solidFill>
+                  <a:srgbClr val="0070C0"/>
+                </a:solidFill>
+              </a:rPr>
+              <a:t>Mutation (Yazmaq/Dəyişdirmək – Create/Update/Delete)</a:t>
+            </a:r>
+          </a:p>
+          <a:p>
+            <a:pPr marL="742950" lvl="1" indent="-285750">
+              <a:lnSpc>
+                <a:spcPct val="150000"/>
+              </a:lnSpc>
+              <a:buFont typeface="Arial" panose="020B0604020202020204" pitchFamily="34" charset="0"/>
+              <a:buChar char="•"/>
+            </a:pPr>
+            <a:r>
+              <a:rPr lang="en-US" sz="1200"/>
+              <a:t>Məlumat əlavə etmək, dəyişmək və ya silmək üçündür.</a:t>
+            </a:r>
+          </a:p>
+          <a:p>
+            <a:pPr marL="742950" lvl="1" indent="-285750">
+              <a:lnSpc>
+                <a:spcPct val="150000"/>
+              </a:lnSpc>
+              <a:buFont typeface="Arial" panose="020B0604020202020204" pitchFamily="34" charset="0"/>
+              <a:buChar char="•"/>
+            </a:pPr>
+            <a:r>
+              <a:rPr lang="en-US" sz="1200"/>
+              <a:t>REST-də </a:t>
+            </a:r>
+            <a:r>
+              <a:rPr lang="en-US" sz="1200" b="1"/>
+              <a:t>POST, PUT/PATCH, DELETE </a:t>
+            </a:r>
+            <a:r>
+              <a:rPr lang="en-US" sz="1200"/>
+              <a:t>metodlarına bənzəyir.</a:t>
+            </a:r>
+          </a:p>
+          <a:p>
+            <a:pPr marL="742950" lvl="1" indent="-285750">
+              <a:lnSpc>
+                <a:spcPct val="150000"/>
+              </a:lnSpc>
+              <a:buFont typeface="Arial" panose="020B0604020202020204" pitchFamily="34" charset="0"/>
+              <a:buChar char="•"/>
+            </a:pPr>
+            <a:r>
+              <a:rPr lang="en-US" sz="1200"/>
+              <a:t>Məsələn, yeni qeyd əlavə etmək üçün:</a:t>
+            </a:r>
+            <a:r>
+              <a:rPr lang="az-Latn-AZ" sz="1200"/>
+              <a:t> Burda addNote bir resolver olacaq ki, DB-yə yeni sətir əlavə etsin.</a:t>
+            </a:r>
+            <a:endParaRPr lang="en-US" sz="1200"/>
+          </a:p>
+          <a:p>
+            <a:endParaRPr lang="az-Latn-AZ" sz="1200"/>
+          </a:p>
+          <a:p>
+            <a:endParaRPr lang="az-Latn-AZ" sz="1200"/>
+          </a:p>
+          <a:p>
+            <a:endParaRPr lang="az-Latn-AZ" sz="1200"/>
+          </a:p>
+          <a:p>
+            <a:endParaRPr lang="az-Latn-AZ" sz="1200"/>
+          </a:p>
+          <a:p>
+            <a:endParaRPr lang="az-Latn-AZ" sz="1200"/>
+          </a:p>
+          <a:p>
+            <a:endParaRPr lang="az-Latn-AZ" sz="1200"/>
+          </a:p>
+          <a:p>
+            <a:endParaRPr lang="az-Latn-AZ" sz="1200"/>
+          </a:p>
+          <a:p>
+            <a:endParaRPr lang="az-Latn-AZ" sz="1200"/>
+          </a:p>
+          <a:p>
+            <a:r>
+              <a:rPr lang="en-US" sz="1200" b="1">
+                <a:solidFill>
+                  <a:srgbClr val="0070C0"/>
+                </a:solidFill>
+              </a:rPr>
+              <a:t>Subscription (Canlı məlumat – Realtime)</a:t>
+            </a:r>
+            <a:endParaRPr lang="en-US" sz="1200">
+              <a:solidFill>
+                <a:srgbClr val="0070C0"/>
+              </a:solidFill>
+            </a:endParaRPr>
+          </a:p>
+          <a:p>
+            <a:pPr marL="628650" lvl="1" indent="-171450">
+              <a:lnSpc>
+                <a:spcPct val="150000"/>
+              </a:lnSpc>
+              <a:buFont typeface="Arial" panose="020B0604020202020204" pitchFamily="34" charset="0"/>
+              <a:buChar char="•"/>
+            </a:pPr>
+            <a:r>
+              <a:rPr lang="en-US" sz="1200"/>
+              <a:t>Bu artıq </a:t>
+            </a:r>
+            <a:r>
+              <a:rPr lang="en-US" sz="1200" b="1"/>
+              <a:t>REST</a:t>
+            </a:r>
+            <a:r>
+              <a:rPr lang="az-Latn-AZ" sz="1200" b="1"/>
+              <a:t> </a:t>
+            </a:r>
+            <a:r>
+              <a:rPr lang="en-US" sz="1200" b="1"/>
+              <a:t>-də yoxdur</a:t>
+            </a:r>
+            <a:r>
+              <a:rPr lang="en-US" sz="1200"/>
+              <a:t>.</a:t>
+            </a:r>
+          </a:p>
+          <a:p>
+            <a:pPr marL="628650" lvl="1" indent="-171450">
+              <a:lnSpc>
+                <a:spcPct val="150000"/>
+              </a:lnSpc>
+              <a:buFont typeface="Arial" panose="020B0604020202020204" pitchFamily="34" charset="0"/>
+              <a:buChar char="•"/>
+            </a:pPr>
+            <a:r>
+              <a:rPr lang="en-US" sz="1200"/>
+              <a:t>İstifadəçi deyə bilər: "Mənə hər dəfə yeni qeyd əlavə olunanda xəbər ver."</a:t>
+            </a:r>
+          </a:p>
+          <a:p>
+            <a:pPr marL="628650" lvl="1" indent="-171450">
+              <a:lnSpc>
+                <a:spcPct val="150000"/>
+              </a:lnSpc>
+              <a:buFont typeface="Arial" panose="020B0604020202020204" pitchFamily="34" charset="0"/>
+              <a:buChar char="•"/>
+            </a:pPr>
+            <a:r>
+              <a:rPr lang="en-US" sz="1200" b="1"/>
+              <a:t>Məs</a:t>
+            </a:r>
+            <a:r>
+              <a:rPr lang="en-US" sz="1200"/>
+              <a:t>: notes-a hər yeni </a:t>
+            </a:r>
+            <a:r>
+              <a:rPr lang="en-US" sz="1200" b="1"/>
+              <a:t>entry</a:t>
+            </a:r>
+            <a:r>
+              <a:rPr lang="en-US" sz="1200"/>
+              <a:t> düşəndə </a:t>
+            </a:r>
+            <a:r>
+              <a:rPr lang="en-US" sz="1200" b="1"/>
+              <a:t>client avtomatik </a:t>
+            </a:r>
+            <a:r>
+              <a:rPr lang="en-US" sz="1200"/>
+              <a:t>xəbərdar olur.</a:t>
+            </a:r>
+          </a:p>
+          <a:p>
+            <a:endParaRPr lang="en-US" sz="1200"/>
+          </a:p>
+        </p:txBody>
+      </p:sp>
+      <p:pic>
+        <p:nvPicPr>
+          <p:cNvPr id="3" name="Picture 2">
+            <a:extLst>
+              <a:ext uri="{FF2B5EF4-FFF2-40B4-BE49-F238E27FC236}">
+                <a16:creationId xmlns:a16="http://schemas.microsoft.com/office/drawing/2014/main" id="{5DE98DFA-DE13-D89C-0773-895AD6A26836}"/>
+              </a:ext>
+            </a:extLst>
+          </p:cNvPr>
+          <p:cNvPicPr>
+            <a:picLocks noChangeAspect="1"/>
+          </p:cNvPicPr>
+          <p:nvPr/>
+        </p:nvPicPr>
+        <p:blipFill>
+          <a:blip r:embed="rId2"/>
+          <a:stretch>
+            <a:fillRect/>
+          </a:stretch>
+        </p:blipFill>
+        <p:spPr>
+          <a:xfrm>
+            <a:off x="0" y="3243150"/>
+            <a:ext cx="3934691" cy="1136840"/>
+          </a:xfrm>
+          <a:prstGeom prst="rect">
+            <a:avLst/>
+          </a:prstGeom>
+        </p:spPr>
+      </p:pic>
+      <p:pic>
+        <p:nvPicPr>
+          <p:cNvPr id="5" name="Picture 4">
+            <a:extLst>
+              <a:ext uri="{FF2B5EF4-FFF2-40B4-BE49-F238E27FC236}">
+                <a16:creationId xmlns:a16="http://schemas.microsoft.com/office/drawing/2014/main" id="{C6686D9F-FE8D-B533-C12B-49257B707C6F}"/>
+              </a:ext>
+            </a:extLst>
+          </p:cNvPr>
+          <p:cNvPicPr>
+            <a:picLocks noChangeAspect="1"/>
+          </p:cNvPicPr>
+          <p:nvPr/>
+        </p:nvPicPr>
+        <p:blipFill>
+          <a:blip r:embed="rId3"/>
+          <a:stretch>
+            <a:fillRect/>
+          </a:stretch>
+        </p:blipFill>
+        <p:spPr>
+          <a:xfrm>
+            <a:off x="0" y="5721160"/>
+            <a:ext cx="1114103" cy="1136840"/>
+          </a:xfrm>
+          <a:prstGeom prst="rect">
+            <a:avLst/>
+          </a:prstGeom>
+        </p:spPr>
+      </p:pic>
+    </p:spTree>
+    <p:extLst>
+      <p:ext uri="{BB962C8B-B14F-4D97-AF65-F5344CB8AC3E}">
+        <p14:creationId xmlns:p14="http://schemas.microsoft.com/office/powerpoint/2010/main" val="1261315842"/>
+      </p:ext>
+    </p:extLst>
+  </p:cSld>
+  <p:clrMapOvr>
+    <a:masterClrMapping/>
+  </p:clrMapOvr>
+</p:sld>
+</file>
+
+<file path=ppt/slides/slide93.xml><?xml version="1.0" encoding="utf-8"?>
+<p:sld xmlns:a="http://schemas.openxmlformats.org/drawingml/2006/main" xmlns:r="http://schemas.openxmlformats.org/officeDocument/2006/relationships" xmlns:p="http://schemas.openxmlformats.org/presentationml/2006/main">
+  <p:cSld>
+    <p:spTree>
+      <p:nvGrpSpPr>
+        <p:cNvPr id="1" name="">
+          <a:extLst>
+            <a:ext uri="{FF2B5EF4-FFF2-40B4-BE49-F238E27FC236}">
+              <a16:creationId xmlns:a16="http://schemas.microsoft.com/office/drawing/2014/main" id="{E1A90F14-F8AA-3C68-6E5F-335D3232F283}"/>
+            </a:ext>
+          </a:extLst>
+        </p:cNvPr>
+        <p:cNvGrpSpPr/>
+        <p:nvPr/>
+      </p:nvGrpSpPr>
+      <p:grpSpPr>
+        <a:xfrm>
+          <a:off x="0" y="0"/>
+          <a:ext cx="0" cy="0"/>
+          <a:chOff x="0" y="0"/>
+          <a:chExt cx="0" cy="0"/>
+        </a:xfrm>
+      </p:grpSpPr>
+      <p:sp>
+        <p:nvSpPr>
+          <p:cNvPr id="7" name="TextBox 6">
+            <a:extLst>
+              <a:ext uri="{FF2B5EF4-FFF2-40B4-BE49-F238E27FC236}">
+                <a16:creationId xmlns:a16="http://schemas.microsoft.com/office/drawing/2014/main" id="{2A20B817-A1B7-84F2-2F91-E9667A9DEB81}"/>
+              </a:ext>
+            </a:extLst>
+          </p:cNvPr>
+          <p:cNvSpPr txBox="1"/>
+          <p:nvPr/>
+        </p:nvSpPr>
+        <p:spPr>
+          <a:xfrm>
+            <a:off x="203200" y="244826"/>
+            <a:ext cx="11822545" cy="369332"/>
+          </a:xfrm>
+          <a:prstGeom prst="rect">
+            <a:avLst/>
+          </a:prstGeom>
+          <a:noFill/>
+        </p:spPr>
+        <p:txBody>
+          <a:bodyPr wrap="square">
+            <a:spAutoFit/>
+          </a:bodyPr>
+          <a:lstStyle/>
+          <a:p>
+            <a:r>
+              <a:rPr lang="en-US">
+                <a:latin typeface="-apple-system"/>
+              </a:rPr>
+              <a:t>.</a:t>
+            </a:r>
+            <a:endParaRPr lang="en-US"/>
+          </a:p>
+        </p:txBody>
+      </p:sp>
+    </p:spTree>
+    <p:extLst>
+      <p:ext uri="{BB962C8B-B14F-4D97-AF65-F5344CB8AC3E}">
+        <p14:creationId xmlns:p14="http://schemas.microsoft.com/office/powerpoint/2010/main" val="2596956604"/>
       </p:ext>
     </p:extLst>
   </p:cSld>
